--- a/slides/deepfake-talk.pptx
+++ b/slides/deepfake-talk.pptx
@@ -1302,7 +1302,7 @@
           <a:lstStyle/>
           <a:p>
             <a:r>
-              <a:t>名乗りと所属（0.5分）→ 現場の実例1つ・固有情報は伏せる（2分）。実例は事前にコンプラ確認。出せなければ業界公知の事例に差し替えるが「現場から」の一人称は維持。</a:t>
+              <a:t>名乗りと所属（0.5分）→ 現場の話（2分）:「FXなどの金融口座の開設は、いまはスマホだけで本人確認が終わる『電子身分証明（eKYC）』が当たり前になりました。ところが最近、その顔認証を、ディープフェイクの顔でくぐり抜けようとするケースが増えてきています。私たちは毎日、その攻防の現場にいます」。※eKYC突破の試行増加は本人確認ベンダー各社の公開レポートにある業界公知の動向。自社の具体事例に踏み込む場合のみコンプラ確認。</a:t>
             </a:r>
           </a:p>
         </p:txBody>
@@ -2072,7 +2072,7 @@
           <a:lstStyle/>
           <a:p>
             <a:r>
-              <a:t>「今日は怖い話もしますが、目的は一つ。突然の『お金・警察・口座』の電話から身を守る方法を、一つだけ持って帰っていただくことです」。※「怖がらせるためではなく」の保証はこの1回に留める。繰り返すと緊張感ごと抜ける。</a:t>
+              <a:t>「今日は怖い話もしますが、このMTGの目的は一つ。近い未来に訪れる『AI詐欺』から身を守る方法を、持って帰っていただくことです」。※「怖がらせるためではなく」の保証はこの1回に留める。繰り返すと緊張感ごと抜ける。</a:t>
             </a:r>
           </a:p>
         </p:txBody>
@@ -2352,7 +2352,7 @@
           <a:lstStyle/>
           <a:p>
             <a:r>
-              <a:t>改まった声で「突然ですが——おめでとうございます！本日このセミナーにご参加の皆さま全員に、もれなく1億円を差し上げます！」。笑いと戸惑いを数秒待ってから「……驚かせてすみません。もちろん、本当ではありません。ただ、いま皆さん、一瞬で『そんなはずはない』と思いましたよね。今日はまず、その話から始めます。実はいまの嘘、プロの詐欺師が何十年も使い続けてきた、由緒正しい手口なんです」。※打消し表示はスライドに大きく・発言と同時（隅に小さくはNG）。聴衆の反応を採点する言い方（「全員見抜けましたね」等）はしない。</a:t>
+              <a:t>改まった声で「突然ですが——おめでとうございます！本日このセミナーにご参加の皆さま全員に、もれなく1億円を差し上げます！」。笑いと戸惑いを数秒待ってから「……驚かせてすみません。もちろん、本当ではありません。ただ、いま皆さん、一瞬で『そんなはずはない』と思いましたよね。今日はまず、その話から始めます。実はいまの嘘、プロの詐欺師が何十年も使い続けてきた、由緒正しい手口なんです」。※ネタばらしまで数秒で1セット。打ち消しは口頭で即座に、はっきり言い切る（真に受ける人を出さない）。聴衆の反応を採点する言い方（「全員見抜けましたね」等）はしない。</a:t>
             </a:r>
           </a:p>
         </p:txBody>
@@ -5707,7 +5707,7 @@
                 <a:ea typeface="Yu Gothic"/>
                 <a:cs typeface="Yu Gothic"/>
               </a:rPr>
-              <a:t>― 見破らなくても、守れます ―</a:t>
+              <a:t>― フィンテック企業が解説する自己防衛術 ―</a:t>
             </a:r>
           </a:p>
         </p:txBody>
@@ -8907,6 +8907,9 @@
               <a:lnSpc>
                 <a:spcPct val="135000"/>
               </a:lnSpc>
+              <a:spcAft>
+                <a:spcPts val="979"/>
+              </a:spcAft>
             </a:pPr>
             <a:r>
               <a:rPr sz="2800" b="0">
@@ -8917,7 +8920,25 @@
                 <a:ea typeface="Yu Gothic"/>
                 <a:cs typeface="Yu Gothic"/>
               </a:rPr>
-              <a:t>・現場で実際に見た、なりすまし・不正の話をひとつ（口頭で）</a:t>
+              <a:t>・FXなどの金融口座の開設は、スマホで完結する「電子身分証明（eKYC）」が当たり前に</a:t>
+            </a:r>
+          </a:p>
+          <a:p>
+            <a:pPr marL="355600" indent="-355600">
+              <a:lnSpc>
+                <a:spcPct val="135000"/>
+              </a:lnSpc>
+            </a:pPr>
+            <a:r>
+              <a:rPr sz="2800" b="0">
+                <a:solidFill>
+                  <a:srgbClr val="20242C"/>
+                </a:solidFill>
+                <a:latin typeface="Yu Gothic"/>
+                <a:ea typeface="Yu Gothic"/>
+                <a:cs typeface="Yu Gothic"/>
+              </a:rPr>
+              <a:t>・その顔認証を、ディープフェイクの顔で突破しようとするケースが増えてきている</a:t>
             </a:r>
           </a:p>
         </p:txBody>
@@ -11627,7 +11648,7 @@
                 <a:ea typeface="Yu Gothic"/>
                 <a:cs typeface="Yu Gothic"/>
               </a:rPr>
-              <a:t>今日の話は、一本の線</a:t>
+              <a:t>今日のまとめ</a:t>
             </a:r>
           </a:p>
         </p:txBody>
@@ -12214,25 +12235,7 @@
                 <a:ea typeface="Yu Mincho"/>
                 <a:cs typeface="Yu Mincho"/>
               </a:rPr>
-              <a:t>持ち帰っていただくのは、</a:t>
-            </a:r>
-          </a:p>
-          <a:p>
-            <a:pPr algn="ctr">
-              <a:lnSpc>
-                <a:spcPct val="128000"/>
-              </a:lnSpc>
-            </a:pPr>
-            <a:r>
-              <a:rPr sz="5400" b="1">
-                <a:solidFill>
-                  <a:srgbClr val="20242C"/>
-                </a:solidFill>
-                <a:latin typeface="Yu Mincho"/>
-                <a:ea typeface="Yu Mincho"/>
-                <a:cs typeface="Yu Mincho"/>
-              </a:rPr>
-              <a:t>たった一つ。</a:t>
+              <a:t>このMTGの目的</a:t>
             </a:r>
           </a:p>
         </p:txBody>
@@ -12273,7 +12276,7 @@
                 <a:ea typeface="Yu Gothic"/>
                 <a:cs typeface="Yu Gothic"/>
               </a:rPr>
-              <a:t>突然の「お金・警察・口座」の電話から身を守る方法</a:t>
+              <a:t>近い未来に訪れる「AI詐欺」から身を守る方法を、持って帰っていただくこと</a:t>
             </a:r>
           </a:p>
         </p:txBody>
@@ -12994,51 +12997,14 @@
                 <a:ea typeface="Yu Gothic"/>
                 <a:cs typeface="Yu Gothic"/>
               </a:rPr>
-              <a:t>詐欺の進化史</a:t>
-            </a:r>
-          </a:p>
-        </p:txBody>
-      </p:sp>
-      <p:sp>
-        <p:nvSpPr>
-          <p:cNvPr id="5" name="TextBox 4"/>
-          <p:cNvSpPr txBox="1"/>
-          <p:nvPr/>
-        </p:nvSpPr>
-        <p:spPr>
-          <a:xfrm>
-            <a:off x="685800" y="3977639"/>
-            <a:ext cx="10820095" cy="868680"/>
-          </a:xfrm>
-          <a:prstGeom prst="rect">
-            <a:avLst/>
-          </a:prstGeom>
-          <a:noFill/>
-        </p:spPr>
-        <p:txBody>
-          <a:bodyPr wrap="square" anchor="ctr">
-            <a:noAutofit/>
-          </a:bodyPr>
-          <a:lstStyle/>
-          <a:p>
-            <a:pPr algn="ctr"/>
-            <a:r>
-              <a:rPr sz="2400" b="0">
-                <a:solidFill>
-                  <a:srgbClr val="BCBDC0"/>
-                </a:solidFill>
-                <a:latin typeface="Yu Gothic"/>
-                <a:ea typeface="Yu Gothic"/>
-                <a:cs typeface="Yu Gothic"/>
-              </a:rPr>
-              <a:t>「突然ですが、おめでとうございます！」からAI時代まで</a:t>
-            </a:r>
-          </a:p>
-        </p:txBody>
-      </p:sp>
-      <p:sp>
-        <p:nvSpPr>
-          <p:cNvPr id="6" name="meta:pageno"/>
+              <a:t>電子詐欺の進化史</a:t>
+            </a:r>
+          </a:p>
+        </p:txBody>
+      </p:sp>
+      <p:sp>
+        <p:nvSpPr>
+          <p:cNvPr id="5" name="meta:pageno"/>
           <p:cNvSpPr txBox="1"/>
           <p:nvPr/>
         </p:nvSpPr>
@@ -13075,7 +13041,7 @@
       </p:sp>
       <p:sp>
         <p:nvSpPr>
-          <p:cNvPr id="7" name="meta:part"/>
+          <p:cNvPr id="6" name="meta:part"/>
           <p:cNvSpPr txBox="1"/>
           <p:nvPr/>
         </p:nvSpPr>
@@ -13137,7 +13103,7 @@
         <p:spPr>
           <a:xfrm>
             <a:off x="502920" y="1188720"/>
-            <a:ext cx="11185855" cy="3611880"/>
+            <a:ext cx="11185855" cy="4800600"/>
           </a:xfrm>
           <a:prstGeom prst="rect">
             <a:avLst/>
@@ -13189,64 +13155,7 @@
       </p:sp>
       <p:sp>
         <p:nvSpPr>
-          <p:cNvPr id="3" name="Rectangle 2"/>
-          <p:cNvSpPr/>
-          <p:nvPr/>
-        </p:nvSpPr>
-        <p:spPr>
-          <a:xfrm>
-            <a:off x="0" y="5029200"/>
-            <a:ext cx="12191695" cy="960120"/>
-          </a:xfrm>
-          <a:prstGeom prst="rect">
-            <a:avLst/>
-          </a:prstGeom>
-          <a:solidFill>
-            <a:srgbClr val="A83B3B"/>
-          </a:solidFill>
-          <a:ln>
-            <a:noFill/>
-          </a:ln>
-          <a:effectLst/>
-        </p:spPr>
-        <p:style>
-          <a:lnRef idx="1">
-            <a:schemeClr val="accent1"/>
-          </a:lnRef>
-          <a:fillRef idx="3">
-            <a:schemeClr val="accent1"/>
-          </a:fillRef>
-          <a:effectRef idx="2">
-            <a:schemeClr val="accent1"/>
-          </a:effectRef>
-          <a:fontRef idx="minor">
-            <a:schemeClr val="lt1"/>
-          </a:fontRef>
-        </p:style>
-        <p:txBody>
-          <a:bodyPr rtlCol="0" anchor="ctr" wrap="square" lIns="457200" rIns="457200">
-            <a:noAutofit/>
-          </a:bodyPr>
-          <a:lstStyle/>
-          <a:p>
-            <a:pPr algn="ctr"/>
-            <a:r>
-              <a:rPr sz="2800" b="1">
-                <a:solidFill>
-                  <a:srgbClr val="FFFFFF"/>
-                </a:solidFill>
-                <a:latin typeface="Yu Gothic"/>
-                <a:ea typeface="Yu Gothic"/>
-                <a:cs typeface="Yu Gothic"/>
-              </a:rPr>
-              <a:t>※本当に差し上げることはできません</a:t>
-            </a:r>
-          </a:p>
-        </p:txBody>
-      </p:sp>
-      <p:sp>
-        <p:nvSpPr>
-          <p:cNvPr id="4" name="meta:pageno"/>
+          <p:cNvPr id="3" name="meta:pageno"/>
           <p:cNvSpPr txBox="1"/>
           <p:nvPr/>
         </p:nvSpPr>
@@ -13283,7 +13192,7 @@
       </p:sp>
       <p:sp>
         <p:nvSpPr>
-          <p:cNvPr id="5" name="meta:part"/>
+          <p:cNvPr id="4" name="meta:part"/>
           <p:cNvSpPr txBox="1"/>
           <p:nvPr/>
         </p:nvSpPr>
@@ -14232,7 +14141,7 @@
                 <a:ea typeface="Yu Gothic"/>
                 <a:cs typeface="Yu Gothic"/>
               </a:rPr>
-              <a:t>・お金を送っても、囚人は出てこない。「新しい障害が起きた」と追加請求だけが届く</a:t>
+              <a:t>・お金を送っても、囚人は出てこない。「手続きに新たな問題が起きた」と追加請求だけが届く</a:t>
             </a:r>
           </a:p>
           <a:p>

--- a/slides/deepfake-talk.pptx
+++ b/slides/deepfake-talk.pptx
@@ -35,7 +35,6 @@
     <p:sldId id="283" r:id="rId35"/>
     <p:sldId id="284" r:id="rId36"/>
     <p:sldId id="285" r:id="rId37"/>
-    <p:sldId id="286" r:id="rId38"/>
   </p:sldIdLst>
   <p:sldSz cx="12191695" cy="6858000" type="screen4x3"/>
   <p:notesSz cx="6858000" cy="9144000"/>
@@ -1022,7 +1021,7 @@
           <a:lstStyle/>
           <a:p>
             <a:r>
-              <a:t>「舞台はメールから、電話に移ります。——こういう電話が来たら、何を手がかりに本人だと判断しますか？」。声・話し方・内容・雰囲気・番号など、出た答えを板書（模造紙かホワイトボード）。「この紙、最後にもう一度使います」</a:t>
+              <a:t>第2部の冒頭は口頭で（スライドなし・2分）：「舞台はメールから、電話に移ります。皆さんは普段、電話の相手が本人かどうか、どこで判断していますか？」——声・話し方・内容・雰囲気・番号など、出た答えを板書し、「この紙、最後にもう一度使います」。そのあとこのスライドへ。「第1部の話を聞くと、日本でも『AIの声にだまされた』というニュースが毎日出ていそうですよね。——皆さん、聞いたことはありますか？ ……ほとんどないと思います」</a:t>
             </a:r>
           </a:p>
         </p:txBody>
@@ -1092,7 +1091,7 @@
           <a:lstStyle/>
           <a:p>
             <a:r>
-              <a:t>「第1部の話を聞くと、日本でも『AIの声にだまされた』というニュースが毎日出ていそうですよね。——皆さん、聞いたことはありますか？ ……ほとんどないと思います」</a:t>
+              <a:t>着信画面「○○警察署」のイメージを大きく見せながら。「犯行電話でいちばん多いのは、『＋』で始まる国際電話です。番号の末尾を『0110』に見せかけて、警察署を装います。今日は、これだけ覚えて帰っていただいても十分です——警察署の番号表示は、本人確認になりません」</a:t>
             </a:r>
           </a:p>
         </p:txBody>
@@ -1162,7 +1161,7 @@
           <a:lstStyle/>
           <a:p>
             <a:r>
-              <a:t>着信画面「○○警察署」のイメージを大きく見せながら。「犯行電話でいちばん多いのは、『＋』で始まる国際電話です。番号の末尾を『0110』に見せかけて、警察署を装います。今日は、これだけ覚えて帰っていただいても十分です——警察署の番号表示は、本人確認になりません」</a:t>
+              <a:t>「“警察”なんて、調べればすぐバレる大胆な嘘です。でも皆さんはもう、この理屈をご存じですね。（中略）1億円や当選メールと同じ——疑う人を先にふるい落とす選別装置なんです」。第1部の回収ポイント。</a:t>
             </a:r>
           </a:p>
         </p:txBody>
@@ -1232,7 +1231,7 @@
           <a:lstStyle/>
           <a:p>
             <a:r>
-              <a:t>「“警察”なんて、調べればすぐバレる大胆な嘘です。でも皆さんはもう、この理屈をご存じですね。（中略）1億円や当選メールと同じ——疑う人を先にふるい落とす選別装置なんです」。第1部の回収ポイント。</a:t>
+              <a:t>「『なんだ、日本はまだAIじゃないのか』と安心しかけたところで——アメリカの話です。（中略）つまり私たちは、アメリカとの時間差の中にいます」。※「急増」等の倍率は言わず、当局が公式警告を出している事実で語る。</a:t>
             </a:r>
           </a:p>
         </p:txBody>
@@ -1372,7 +1371,7 @@
           <a:lstStyle/>
           <a:p>
             <a:r>
-              <a:t>「『なんだ、日本はまだAIじゃないのか』と安心しかけたところで——アメリカの話です。（中略）つまり私たちは、アメリカとの時間差の中にいます」。※「急増」等の倍率は言わず、当局が公式警告を出している事実で語る。</a:t>
+              <a:t>ゆっくり。「この時間差は、必ず埋まります。そして、その波が日本に来るときも、番号偽装が消えてAIに置き換わるわけではありません。いまある型に、AIが“混ざって”きます。番号のカードとAIのカードが、同時に切られる。そうなったとき、皆さんは何で見分けますか？ 言葉だけでは信じにくいと思いますので、ここからは実物をお見せします」→実演へ。</a:t>
             </a:r>
           </a:p>
         </p:txBody>
@@ -1442,7 +1441,7 @@
           <a:lstStyle/>
           <a:p>
             <a:r>
-              <a:t>ゆっくり。「この時間差は、必ず埋まります。そして、その波が日本に来るときも、番号偽装が消えてAIに置き換わるわけではありません。いまある型に、AIが“混ざって”きます。番号のカードとAIのカードが、同時に切られる。そうなったとき、皆さんは何で見分けますか？ 言葉だけでは信じにくいと思いますので、ここからは実物をお見せします」→実演へ。</a:t>
+              <a:t>この区間の「そうなんだ」：話し方も雰囲気も、相手がこちらに合わせて変えてくる。そして本物の脅威は「断らない声」。</a:t>
             </a:r>
           </a:p>
         </p:txBody>
@@ -1512,7 +1511,7 @@
           <a:lstStyle/>
           <a:p>
             <a:r>
-              <a:t>この区間の「そうなんだ」：話し方も雰囲気も、相手がこちらに合わせて変えてくる。そして本物の脅威は「断らない声」。</a:t>
+              <a:t>クローン音声を会場スピーカーで再生。※素材は講師本人の声・本人同意で事前作成、生成物には「AI生成」を明示して管理。バックアップ音源必須。第三者の顔・声は使わない。</a:t>
             </a:r>
           </a:p>
         </p:txBody>
@@ -1582,7 +1581,7 @@
           <a:lstStyle/>
           <a:p>
             <a:r>
-              <a:t>クローン音声を会場スピーカーで再生。※素材は講師本人の声・本人同意で事前作成、生成物には「AI生成」を明示して管理。バックアップ音源必須。第三者の顔・声は使わない。</a:t>
+              <a:t>スマホを会場スピーカーへつなぎ、最新AIと生対話。聴衆から予想外のひと言を1つもらう（詐欺の台詞は言わせない）。「もちろん、いま話したのは安全なAIで、この“合わせる力”自体は良い技術です。ただ、同じ力が悪用されれば——昔は詐欺師が話術で一人ずつやっていたことを、同時に何人相手でもこなせてしまいます」</a:t>
             </a:r>
           </a:p>
         </p:txBody>
@@ -1652,7 +1651,7 @@
           <a:lstStyle/>
           <a:p>
             <a:r>
-              <a:t>スマホを会場スピーカーへつなぎ、最新AIと生対話。聴衆から予想外のひと言を1つもらう（詐欺の台詞は言わせない）。「もちろん、いま話したのは安全なAIで、この“合わせる力”自体は良い技術です。ただ、同じ力が悪用されれば——昔は詐欺師が話術で一人ずつやっていたことを、同時に何人相手でもこなせてしまいます」</a:t>
+              <a:t>なりすまし依頼→拒否のデモ。「いい断り方ですよね。でも安心はできません。同じ技術は世界に無数にあり、安全装置のないものも出回ります」。※通信不良に備え録音・録画のバックアップ。ライブが押したら拒否デモは録画30秒版に切り替え（打ち切り条件を事前に決める）。</a:t>
             </a:r>
           </a:p>
         </p:txBody>
@@ -1722,7 +1721,7 @@
           <a:lstStyle/>
           <a:p>
             <a:r>
-              <a:t>なりすまし依頼→拒否のデモ。「いい断り方ですよね。でも安心はできません。同じ技術は世界に無数にあり、安全装置のないものも出回ります」。※通信不良に備え録音・録画のバックアップ。ライブが押したら拒否デモは録画30秒版に切り替え（打ち切り条件を事前に決める）。</a:t>
+              <a:t>「——最初の問いに、答えを出します」→結論へ。</a:t>
             </a:r>
           </a:p>
         </p:txBody>
@@ -1792,7 +1791,7 @@
           <a:lstStyle/>
           <a:p>
             <a:r>
-              <a:t>「——最初の問いに、答えを出します」→結論へ。</a:t>
+              <a:t>板書した紙を再び見せながら。「最初に集めました——声、話し方、内容、雰囲気、番号。今日、全部裏切られましたね。だったら、手がかりで見分けること自体をやめればいい」</a:t>
             </a:r>
           </a:p>
         </p:txBody>
@@ -1862,7 +1861,7 @@
           <a:lstStyle/>
           <a:p>
             <a:r>
-              <a:t>板書した紙を再び見せながら。「最初に集めました——声、話し方、内容、雰囲気、番号。今日、全部裏切られましたね。だったら、手がかりで見分けること自体をやめればいい」</a:t>
+              <a:t>「この“一度切って、自分で調べてかけ直す”は、番号が本物でも、声が本物でも、相手がAIでも人間でも——効きます」。※射程の明示：この主手順が守るのは「電話・ビデオ通話でのなりすまし」。投資話・偽サイト・長期の関係構築型詐欺は別の備えが要る、と一言添える。「本物の警察なら、確認のためにいったん切っても、不利益はありません」。ここで第1部の「誰にも言うな」の伏線を回収。</a:t>
             </a:r>
           </a:p>
         </p:txBody>
@@ -1932,7 +1931,7 @@
           <a:lstStyle/>
           <a:p>
             <a:r>
-              <a:t>「この“一度切って、自分で調べてかけ直す”は、番号が本物でも、声が本物でも、相手がAIでも人間でも——効きます」。※射程の明示：この主手順が守るのは「電話・ビデオ通話でのなりすまし」。投資話・偽サイト・長期の関係構築型詐欺は別の備えが要る、と一言添える。「本物の警察なら、確認のためにいったん切っても、不利益はありません」。ここで第1部の「誰にも言うな」の伏線を回収。</a:t>
+              <a:t>スライドの5項目を一言ずつ指差しながら。「今日の話を、ひと息で巻き戻します。（中略）——全部、一本の線でつながっています」</a:t>
             </a:r>
           </a:p>
         </p:txBody>
@@ -2002,7 +2001,7 @@
           <a:lstStyle/>
           <a:p>
             <a:r>
-              <a:t>スライドの5項目を一言ずつ指差しながら。「今日の話を、ひと息で巻き戻します。（中略）——全部、一本の線でつながっています」</a:t>
+              <a:t>「でも思い出してください。あのとき会場に流れた『そんなはずはない』という空気。あれが“ばらまきの嘘”への完璧な勝ち方です。これから来るのは、笑い飛ばせない、あなた専用の嘘。だからこそ、笑う代わりに——一度切って、自分で調べて、かけ直す」</a:t>
             </a:r>
           </a:p>
         </p:txBody>
@@ -2098,76 +2097,6 @@
 </file>
 
 <file path=ppt/notesSlides/notesSlide30.xml><?xml version="1.0" encoding="utf-8"?>
-<p:notes xmlns:a="http://schemas.openxmlformats.org/drawingml/2006/main" xmlns:p="http://schemas.openxmlformats.org/presentationml/2006/main" xmlns:r="http://schemas.openxmlformats.org/officeDocument/2006/relationships">
-  <p:cSld>
-    <p:spTree>
-      <p:nvGrpSpPr>
-        <p:cNvPr id="1" name=""/>
-        <p:cNvGrpSpPr/>
-        <p:nvPr/>
-      </p:nvGrpSpPr>
-      <p:grpSpPr>
-        <a:xfrm>
-          <a:off x="0" y="0"/>
-          <a:ext cx="0" cy="0"/>
-          <a:chOff x="0" y="0"/>
-          <a:chExt cx="0" cy="0"/>
-        </a:xfrm>
-      </p:grpSpPr>
-      <p:sp>
-        <p:nvSpPr>
-          <p:cNvPr id="2" name="Slide Image Placeholder 1"/>
-          <p:cNvSpPr>
-            <a:spLocks noGrp="1"/>
-          </p:cNvSpPr>
-          <p:nvPr>
-            <p:ph type="sldImg" idx="2"/>
-          </p:nvPr>
-        </p:nvSpPr>
-        <p:spPr/>
-      </p:sp>
-      <p:sp>
-        <p:nvSpPr>
-          <p:cNvPr id="3" name="Notes Placeholder 2"/>
-          <p:cNvSpPr>
-            <a:spLocks noGrp="1"/>
-          </p:cNvSpPr>
-          <p:nvPr>
-            <p:ph type="body" idx="3" sz="quarter"/>
-          </p:nvPr>
-        </p:nvSpPr>
-        <p:spPr/>
-        <p:txBody>
-          <a:bodyPr/>
-          <a:lstStyle/>
-          <a:p>
-            <a:r>
-              <a:t>「でも思い出してください。あのとき会場に流れた『そんなはずはない』という空気。あれが“ばらまきの嘘”への完璧な勝ち方です。これから来るのは、笑い飛ばせない、あなた専用の嘘。だからこそ、笑う代わりに——一度切って、自分で調べて、かけ直す」</a:t>
-            </a:r>
-          </a:p>
-        </p:txBody>
-      </p:sp>
-      <p:sp>
-        <p:nvSpPr>
-          <p:cNvPr id="4" name="Slide Number Placeholder 3"/>
-          <p:cNvSpPr>
-            <a:spLocks noGrp="1"/>
-          </p:cNvSpPr>
-          <p:nvPr>
-            <p:ph type="sldNum" idx="5" sz="quarter"/>
-          </p:nvPr>
-        </p:nvSpPr>
-        <p:spPr/>
-      </p:sp>
-    </p:spTree>
-  </p:cSld>
-  <p:clrMapOvr>
-    <a:masterClrMapping/>
-  </p:clrMapOvr>
-</p:notes>
-</file>
-
-<file path=ppt/notesSlides/notesSlide31.xml><?xml version="1.0" encoding="utf-8"?>
 <p:notes xmlns:a="http://schemas.openxmlformats.org/drawingml/2006/main" xmlns:p="http://schemas.openxmlformats.org/presentationml/2006/main" xmlns:r="http://schemas.openxmlformats.org/officeDocument/2006/relationships">
   <p:cSld>
     <p:spTree>
@@ -7302,8 +7231,8 @@
         </p:nvSpPr>
         <p:spPr>
           <a:xfrm>
-            <a:off x="502920" y="1188720"/>
-            <a:ext cx="11185855" cy="3657599"/>
+            <a:off x="685800" y="411480"/>
+            <a:ext cx="10820095" cy="960120"/>
           </a:xfrm>
           <a:prstGeom prst="rect">
             <a:avLst/>
@@ -7311,74 +7240,156 @@
           <a:noFill/>
         </p:spPr>
         <p:txBody>
-          <a:bodyPr wrap="square" anchor="ctr">
-            <a:noAutofit/>
-          </a:bodyPr>
-          <a:lstStyle/>
-          <a:p>
-            <a:pPr algn="ctr">
+          <a:bodyPr wrap="square" anchor="b">
+            <a:noAutofit/>
+          </a:bodyPr>
+          <a:lstStyle/>
+          <a:p>
+            <a:pPr algn="l"/>
+            <a:r>
+              <a:rPr sz="3600" b="1">
+                <a:solidFill>
+                  <a:srgbClr val="B9791F"/>
+                </a:solidFill>
+                <a:latin typeface="Yu Gothic"/>
+                <a:ea typeface="Yu Gothic"/>
+                <a:cs typeface="Yu Gothic"/>
+              </a:rPr>
+              <a:t>「AI詐欺のニュース、聞かないですよね」</a:t>
+            </a:r>
+          </a:p>
+        </p:txBody>
+      </p:sp>
+      <p:sp>
+        <p:nvSpPr>
+          <p:cNvPr id="3" name="Rectangle 2"/>
+          <p:cNvSpPr/>
+          <p:nvPr/>
+        </p:nvSpPr>
+        <p:spPr>
+          <a:xfrm>
+            <a:off x="685800" y="1463040"/>
+            <a:ext cx="2377440" cy="50292"/>
+          </a:xfrm>
+          <a:prstGeom prst="rect">
+            <a:avLst/>
+          </a:prstGeom>
+          <a:solidFill>
+            <a:srgbClr val="B9791F"/>
+          </a:solidFill>
+          <a:ln>
+            <a:noFill/>
+          </a:ln>
+          <a:effectLst/>
+        </p:spPr>
+        <p:style>
+          <a:lnRef idx="1">
+            <a:schemeClr val="accent1"/>
+          </a:lnRef>
+          <a:fillRef idx="3">
+            <a:schemeClr val="accent1"/>
+          </a:fillRef>
+          <a:effectRef idx="2">
+            <a:schemeClr val="accent1"/>
+          </a:effectRef>
+          <a:fontRef idx="minor">
+            <a:schemeClr val="lt1"/>
+          </a:fontRef>
+        </p:style>
+        <p:txBody>
+          <a:bodyPr rtlCol="0" anchor="ctr"/>
+          <a:lstStyle/>
+          <a:p>
+            <a:pPr algn="ctr"/>
+          </a:p>
+        </p:txBody>
+      </p:sp>
+      <p:sp>
+        <p:nvSpPr>
+          <p:cNvPr id="4" name="TextBox 3"/>
+          <p:cNvSpPr txBox="1"/>
+          <p:nvPr/>
+        </p:nvSpPr>
+        <p:spPr>
+          <a:xfrm>
+            <a:off x="685800" y="1645920"/>
+            <a:ext cx="10820095" cy="4343400"/>
+          </a:xfrm>
+          <a:prstGeom prst="rect">
+            <a:avLst/>
+          </a:prstGeom>
+          <a:noFill/>
+        </p:spPr>
+        <p:txBody>
+          <a:bodyPr wrap="square" anchor="t">
+            <a:noAutofit/>
+          </a:bodyPr>
+          <a:lstStyle/>
+          <a:p>
+            <a:pPr marL="355600" indent="-355600">
               <a:lnSpc>
-                <a:spcPct val="128000"/>
+                <a:spcPct val="135000"/>
+              </a:lnSpc>
+              <a:spcAft>
+                <a:spcPts val="979"/>
+              </a:spcAft>
+            </a:pPr>
+            <a:r>
+              <a:rPr sz="2800" b="0">
+                <a:solidFill>
+                  <a:srgbClr val="20242C"/>
+                </a:solidFill>
+                <a:latin typeface="Yu Gothic"/>
+                <a:ea typeface="Yu Gothic"/>
+                <a:cs typeface="Yu Gothic"/>
+              </a:rPr>
+              <a:t>・「AIの声にだまされた」というニュース——聞いたことはありますか？</a:t>
+            </a:r>
+          </a:p>
+          <a:p>
+            <a:pPr marL="355600" indent="-355600">
+              <a:lnSpc>
+                <a:spcPct val="135000"/>
+              </a:lnSpc>
+              <a:spcAft>
+                <a:spcPts val="979"/>
+              </a:spcAft>
+            </a:pPr>
+            <a:r>
+              <a:rPr sz="2800" b="0">
+                <a:solidFill>
+                  <a:srgbClr val="20242C"/>
+                </a:solidFill>
+                <a:latin typeface="Yu Gothic"/>
+                <a:ea typeface="Yu Gothic"/>
+                <a:cs typeface="Yu Gothic"/>
+              </a:rPr>
+              <a:t>・日本の統計には「AI詐欺」という数字自体がまだない（手口別分類に欄がない）</a:t>
+            </a:r>
+          </a:p>
+          <a:p>
+            <a:pPr marL="355600" indent="-355600">
+              <a:lnSpc>
+                <a:spcPct val="135000"/>
               </a:lnSpc>
             </a:pPr>
             <a:r>
-              <a:rPr sz="5400" b="1">
+              <a:rPr sz="2800" b="0">
                 <a:solidFill>
                   <a:srgbClr val="20242C"/>
                 </a:solidFill>
-                <a:latin typeface="Yu Mincho"/>
-                <a:ea typeface="Yu Mincho"/>
-                <a:cs typeface="Yu Mincho"/>
-              </a:rPr>
-              <a:t>「お母さん、俺だけど」</a:t>
-            </a:r>
-          </a:p>
-        </p:txBody>
-      </p:sp>
-      <p:sp>
-        <p:nvSpPr>
-          <p:cNvPr id="3" name="TextBox 2"/>
-          <p:cNvSpPr txBox="1"/>
-          <p:nvPr/>
-        </p:nvSpPr>
-        <p:spPr>
-          <a:xfrm>
-            <a:off x="685800" y="4983479"/>
-            <a:ext cx="10820095" cy="1005840"/>
-          </a:xfrm>
-          <a:prstGeom prst="rect">
-            <a:avLst/>
-          </a:prstGeom>
-          <a:noFill/>
-        </p:spPr>
-        <p:txBody>
-          <a:bodyPr wrap="square" anchor="ctr">
-            <a:noAutofit/>
-          </a:bodyPr>
-          <a:lstStyle/>
-          <a:p>
-            <a:pPr algn="ctr">
-              <a:lnSpc>
-                <a:spcPct val="130000"/>
-              </a:lnSpc>
-            </a:pPr>
-            <a:r>
-              <a:rPr sz="2200" b="0">
-                <a:solidFill>
-                  <a:srgbClr val="5C6472"/>
-                </a:solidFill>
-                <a:latin typeface="Yu Gothic"/>
-                <a:ea typeface="Yu Gothic"/>
-                <a:cs typeface="Yu Gothic"/>
-              </a:rPr>
-              <a:t>——何を手がかりに、本人だと判断しますか？</a:t>
-            </a:r>
-          </a:p>
-        </p:txBody>
-      </p:sp>
-      <p:sp>
-        <p:nvSpPr>
-          <p:cNvPr id="4" name="meta:pageno"/>
+                <a:latin typeface="Yu Gothic"/>
+                <a:ea typeface="Yu Gothic"/>
+                <a:cs typeface="Yu Gothic"/>
+              </a:rPr>
+              <a:t>・では、いまの日本で一番効いている「偽装」は何か？</a:t>
+            </a:r>
+          </a:p>
+        </p:txBody>
+      </p:sp>
+      <p:sp>
+        <p:nvSpPr>
+          <p:cNvPr id="5" name="meta:pageno"/>
           <p:cNvSpPr txBox="1"/>
           <p:nvPr/>
         </p:nvSpPr>
@@ -7415,7 +7426,7 @@
       </p:sp>
       <p:sp>
         <p:nvSpPr>
-          <p:cNvPr id="5" name="meta:part"/>
+          <p:cNvPr id="6" name="meta:part"/>
           <p:cNvSpPr txBox="1"/>
           <p:nvPr/>
         </p:nvSpPr>
@@ -7492,7 +7503,7 @@
           <a:p>
             <a:pPr algn="l"/>
             <a:r>
-              <a:rPr sz="3600" b="1">
+              <a:rPr sz="4000" b="1">
                 <a:solidFill>
                   <a:srgbClr val="B9791F"/>
                 </a:solidFill>
@@ -7500,7 +7511,7 @@
                 <a:ea typeface="Yu Gothic"/>
                 <a:cs typeface="Yu Gothic"/>
               </a:rPr>
-              <a:t>「AI詐欺のニュース、聞かないですよね」</a:t>
+              <a:t>答えは、番号。</a:t>
             </a:r>
           </a:p>
         </p:txBody>
@@ -7557,8 +7568,8 @@
         </p:nvSpPr>
         <p:spPr>
           <a:xfrm>
-            <a:off x="685800" y="1645920"/>
-            <a:ext cx="10820095" cy="4343400"/>
+            <a:off x="685800" y="5852160"/>
+            <a:ext cx="10820095" cy="347472"/>
           </a:xfrm>
           <a:prstGeom prst="rect">
             <a:avLst/>
@@ -7571,55 +7582,139 @@
           </a:bodyPr>
           <a:lstStyle/>
           <a:p>
-            <a:pPr marL="355600" indent="-355600">
+            <a:pPr algn="l"/>
+            <a:r>
+              <a:rPr sz="1500" b="0">
+                <a:solidFill>
+                  <a:srgbClr val="5C6472"/>
+                </a:solidFill>
+                <a:latin typeface="Yu Gothic"/>
+                <a:ea typeface="Yu Gothic"/>
+                <a:cs typeface="Yu Gothic"/>
+              </a:rPr>
+              <a:t>出典：警察庁 令和7年統計（講演直前に最新値を再確認）</a:t>
+            </a:r>
+          </a:p>
+        </p:txBody>
+      </p:sp>
+      <p:sp>
+        <p:nvSpPr>
+          <p:cNvPr id="5" name="TextBox 4"/>
+          <p:cNvSpPr txBox="1"/>
+          <p:nvPr/>
+        </p:nvSpPr>
+        <p:spPr>
+          <a:xfrm>
+            <a:off x="685800" y="5138928"/>
+            <a:ext cx="10820095" cy="640080"/>
+          </a:xfrm>
+          <a:prstGeom prst="rect">
+            <a:avLst/>
+          </a:prstGeom>
+          <a:noFill/>
+        </p:spPr>
+        <p:txBody>
+          <a:bodyPr wrap="square" anchor="ctr">
+            <a:noAutofit/>
+          </a:bodyPr>
+          <a:lstStyle/>
+          <a:p>
+            <a:pPr algn="l"/>
+            <a:r>
+              <a:rPr sz="3000" b="1">
+                <a:solidFill>
+                  <a:srgbClr val="A83B3B"/>
+                </a:solidFill>
+                <a:latin typeface="Yu Gothic"/>
+                <a:ea typeface="Yu Gothic"/>
+                <a:cs typeface="Yu Gothic"/>
+              </a:rPr>
+              <a:t>警察署の番号表示は、本人確認になりません</a:t>
+            </a:r>
+          </a:p>
+        </p:txBody>
+      </p:sp>
+      <p:sp>
+        <p:nvSpPr>
+          <p:cNvPr id="6" name="TextBox 5"/>
+          <p:cNvSpPr txBox="1"/>
+          <p:nvPr/>
+        </p:nvSpPr>
+        <p:spPr>
+          <a:xfrm>
+            <a:off x="685800" y="1757172"/>
+            <a:ext cx="3383280" cy="646176"/>
+          </a:xfrm>
+          <a:prstGeom prst="rect">
+            <a:avLst/>
+          </a:prstGeom>
+          <a:noFill/>
+        </p:spPr>
+        <p:txBody>
+          <a:bodyPr wrap="square" anchor="ctr">
+            <a:noAutofit/>
+          </a:bodyPr>
+          <a:lstStyle/>
+          <a:p>
+            <a:pPr algn="l">
               <a:lnSpc>
-                <a:spcPct val="135000"/>
-              </a:lnSpc>
-              <a:spcAft>
-                <a:spcPts val="979"/>
-              </a:spcAft>
-            </a:pPr>
-            <a:r>
-              <a:rPr sz="2800" b="0">
-                <a:solidFill>
-                  <a:srgbClr val="20242C"/>
-                </a:solidFill>
-                <a:latin typeface="Yu Gothic"/>
-                <a:ea typeface="Yu Gothic"/>
-                <a:cs typeface="Yu Gothic"/>
-              </a:rPr>
-              <a:t>・「AIの声にだまされた」というニュース——聞いたことはありますか？</a:t>
-            </a:r>
-          </a:p>
-          <a:p>
-            <a:pPr marL="355600" indent="-355600">
-              <a:lnSpc>
-                <a:spcPct val="135000"/>
-              </a:lnSpc>
-              <a:spcAft>
-                <a:spcPts val="979"/>
-              </a:spcAft>
-            </a:pPr>
-            <a:r>
-              <a:rPr sz="2800" b="0">
-                <a:solidFill>
-                  <a:srgbClr val="20242C"/>
-                </a:solidFill>
-                <a:latin typeface="Yu Gothic"/>
-                <a:ea typeface="Yu Gothic"/>
-                <a:cs typeface="Yu Gothic"/>
-              </a:rPr>
-              <a:t>・日本の統計には「AI詐欺」という数字自体がまだない（手口別分類に欄がない）</a:t>
-            </a:r>
-          </a:p>
-          <a:p>
-            <a:pPr marL="355600" indent="-355600">
-              <a:lnSpc>
-                <a:spcPct val="135000"/>
+                <a:spcPct val="125000"/>
               </a:lnSpc>
             </a:pPr>
             <a:r>
-              <a:rPr sz="2800" b="0">
+              <a:rPr sz="2000" b="0">
+                <a:solidFill>
+                  <a:srgbClr val="5C6472"/>
+                </a:solidFill>
+                <a:latin typeface="Yu Gothic"/>
+                <a:ea typeface="Yu Gothic"/>
+                <a:cs typeface="Yu Gothic"/>
+              </a:rPr>
+              <a:t>2025年 詐欺全体の被害</a:t>
+            </a:r>
+          </a:p>
+        </p:txBody>
+      </p:sp>
+      <p:sp>
+        <p:nvSpPr>
+          <p:cNvPr id="7" name="TextBox 6"/>
+          <p:cNvSpPr txBox="1"/>
+          <p:nvPr/>
+        </p:nvSpPr>
+        <p:spPr>
+          <a:xfrm>
+            <a:off x="4343400" y="1757172"/>
+            <a:ext cx="7178040" cy="646176"/>
+          </a:xfrm>
+          <a:prstGeom prst="rect">
+            <a:avLst/>
+          </a:prstGeom>
+          <a:noFill/>
+        </p:spPr>
+        <p:txBody>
+          <a:bodyPr wrap="square" anchor="ctr">
+            <a:noAutofit/>
+          </a:bodyPr>
+          <a:lstStyle/>
+          <a:p>
+            <a:pPr>
+              <a:lnSpc>
+                <a:spcPct val="120000"/>
+              </a:lnSpc>
+            </a:pPr>
+            <a:r>
+              <a:rPr sz="2800" b="1">
+                <a:solidFill>
+                  <a:srgbClr val="B9791F"/>
+                </a:solidFill>
+                <a:latin typeface="Yu Gothic"/>
+                <a:ea typeface="Yu Gothic"/>
+                <a:cs typeface="Yu Gothic"/>
+              </a:rPr>
+              <a:t>約3,257億円</a:t>
+            </a:r>
+            <a:r>
+              <a:rPr sz="2800" b="1">
                 <a:solidFill>
                   <a:srgbClr val="20242C"/>
                 </a:solidFill>
@@ -7627,14 +7722,414 @@
                 <a:ea typeface="Yu Gothic"/>
                 <a:cs typeface="Yu Gothic"/>
               </a:rPr>
-              <a:t>・では、いまの日本で一番効いている「偽装」は何か？</a:t>
-            </a:r>
-          </a:p>
-        </p:txBody>
-      </p:sp>
-      <p:sp>
-        <p:nvSpPr>
-          <p:cNvPr id="5" name="meta:pageno"/>
+              <a:t>（過去最悪）</a:t>
+            </a:r>
+          </a:p>
+        </p:txBody>
+      </p:sp>
+      <p:sp>
+        <p:nvSpPr>
+          <p:cNvPr id="8" name="Rectangle 7"/>
+          <p:cNvSpPr/>
+          <p:nvPr/>
+        </p:nvSpPr>
+        <p:spPr>
+          <a:xfrm>
+            <a:off x="685800" y="2421636"/>
+            <a:ext cx="10820095" cy="12801"/>
+          </a:xfrm>
+          <a:prstGeom prst="rect">
+            <a:avLst/>
+          </a:prstGeom>
+          <a:solidFill>
+            <a:srgbClr val="E6E1D6"/>
+          </a:solidFill>
+          <a:ln>
+            <a:noFill/>
+          </a:ln>
+          <a:effectLst/>
+        </p:spPr>
+        <p:style>
+          <a:lnRef idx="1">
+            <a:schemeClr val="accent1"/>
+          </a:lnRef>
+          <a:fillRef idx="3">
+            <a:schemeClr val="accent1"/>
+          </a:fillRef>
+          <a:effectRef idx="2">
+            <a:schemeClr val="accent1"/>
+          </a:effectRef>
+          <a:fontRef idx="minor">
+            <a:schemeClr val="lt1"/>
+          </a:fontRef>
+        </p:style>
+        <p:txBody>
+          <a:bodyPr rtlCol="0" anchor="ctr"/>
+          <a:lstStyle/>
+          <a:p>
+            <a:pPr algn="ctr"/>
+          </a:p>
+        </p:txBody>
+      </p:sp>
+      <p:sp>
+        <p:nvSpPr>
+          <p:cNvPr id="9" name="TextBox 8"/>
+          <p:cNvSpPr txBox="1"/>
+          <p:nvPr/>
+        </p:nvSpPr>
+        <p:spPr>
+          <a:xfrm>
+            <a:off x="685800" y="2586228"/>
+            <a:ext cx="3383280" cy="646176"/>
+          </a:xfrm>
+          <a:prstGeom prst="rect">
+            <a:avLst/>
+          </a:prstGeom>
+          <a:noFill/>
+        </p:spPr>
+        <p:txBody>
+          <a:bodyPr wrap="square" anchor="ctr">
+            <a:noAutofit/>
+          </a:bodyPr>
+          <a:lstStyle/>
+          <a:p>
+            <a:pPr algn="l">
+              <a:lnSpc>
+                <a:spcPct val="125000"/>
+              </a:lnSpc>
+            </a:pPr>
+            <a:r>
+              <a:rPr sz="2000" b="0">
+                <a:solidFill>
+                  <a:srgbClr val="5C6472"/>
+                </a:solidFill>
+                <a:latin typeface="Yu Gothic"/>
+                <a:ea typeface="Yu Gothic"/>
+                <a:cs typeface="Yu Gothic"/>
+              </a:rPr>
+              <a:t>うち特殊詐欺</a:t>
+            </a:r>
+          </a:p>
+        </p:txBody>
+      </p:sp>
+      <p:sp>
+        <p:nvSpPr>
+          <p:cNvPr id="10" name="TextBox 9"/>
+          <p:cNvSpPr txBox="1"/>
+          <p:nvPr/>
+        </p:nvSpPr>
+        <p:spPr>
+          <a:xfrm>
+            <a:off x="4343400" y="2586228"/>
+            <a:ext cx="7178040" cy="646176"/>
+          </a:xfrm>
+          <a:prstGeom prst="rect">
+            <a:avLst/>
+          </a:prstGeom>
+          <a:noFill/>
+        </p:spPr>
+        <p:txBody>
+          <a:bodyPr wrap="square" anchor="ctr">
+            <a:noAutofit/>
+          </a:bodyPr>
+          <a:lstStyle/>
+          <a:p>
+            <a:pPr>
+              <a:lnSpc>
+                <a:spcPct val="120000"/>
+              </a:lnSpc>
+            </a:pPr>
+            <a:r>
+              <a:rPr sz="2800" b="1">
+                <a:solidFill>
+                  <a:srgbClr val="B9791F"/>
+                </a:solidFill>
+                <a:latin typeface="Yu Gothic"/>
+                <a:ea typeface="Yu Gothic"/>
+                <a:cs typeface="Yu Gothic"/>
+              </a:rPr>
+              <a:t>約1,423億円</a:t>
+            </a:r>
+          </a:p>
+        </p:txBody>
+      </p:sp>
+      <p:sp>
+        <p:nvSpPr>
+          <p:cNvPr id="11" name="Rectangle 10"/>
+          <p:cNvSpPr/>
+          <p:nvPr/>
+        </p:nvSpPr>
+        <p:spPr>
+          <a:xfrm>
+            <a:off x="685800" y="3250691"/>
+            <a:ext cx="10820095" cy="12801"/>
+          </a:xfrm>
+          <a:prstGeom prst="rect">
+            <a:avLst/>
+          </a:prstGeom>
+          <a:solidFill>
+            <a:srgbClr val="E6E1D6"/>
+          </a:solidFill>
+          <a:ln>
+            <a:noFill/>
+          </a:ln>
+          <a:effectLst/>
+        </p:spPr>
+        <p:style>
+          <a:lnRef idx="1">
+            <a:schemeClr val="accent1"/>
+          </a:lnRef>
+          <a:fillRef idx="3">
+            <a:schemeClr val="accent1"/>
+          </a:fillRef>
+          <a:effectRef idx="2">
+            <a:schemeClr val="accent1"/>
+          </a:effectRef>
+          <a:fontRef idx="minor">
+            <a:schemeClr val="lt1"/>
+          </a:fontRef>
+        </p:style>
+        <p:txBody>
+          <a:bodyPr rtlCol="0" anchor="ctr"/>
+          <a:lstStyle/>
+          <a:p>
+            <a:pPr algn="ctr"/>
+          </a:p>
+        </p:txBody>
+      </p:sp>
+      <p:sp>
+        <p:nvSpPr>
+          <p:cNvPr id="12" name="TextBox 11"/>
+          <p:cNvSpPr txBox="1"/>
+          <p:nvPr/>
+        </p:nvSpPr>
+        <p:spPr>
+          <a:xfrm>
+            <a:off x="685800" y="3415284"/>
+            <a:ext cx="3383280" cy="646176"/>
+          </a:xfrm>
+          <a:prstGeom prst="rect">
+            <a:avLst/>
+          </a:prstGeom>
+          <a:noFill/>
+        </p:spPr>
+        <p:txBody>
+          <a:bodyPr wrap="square" anchor="ctr">
+            <a:noAutofit/>
+          </a:bodyPr>
+          <a:lstStyle/>
+          <a:p>
+            <a:pPr algn="l">
+              <a:lnSpc>
+                <a:spcPct val="125000"/>
+              </a:lnSpc>
+            </a:pPr>
+            <a:r>
+              <a:rPr sz="2000" b="0">
+                <a:solidFill>
+                  <a:srgbClr val="5C6472"/>
+                </a:solidFill>
+                <a:latin typeface="Yu Gothic"/>
+                <a:ea typeface="Yu Gothic"/>
+                <a:cs typeface="Yu Gothic"/>
+              </a:rPr>
+              <a:t>その約7割＝約1,005億円</a:t>
+            </a:r>
+          </a:p>
+        </p:txBody>
+      </p:sp>
+      <p:sp>
+        <p:nvSpPr>
+          <p:cNvPr id="13" name="TextBox 12"/>
+          <p:cNvSpPr txBox="1"/>
+          <p:nvPr/>
+        </p:nvSpPr>
+        <p:spPr>
+          <a:xfrm>
+            <a:off x="4343400" y="3415284"/>
+            <a:ext cx="7178040" cy="646176"/>
+          </a:xfrm>
+          <a:prstGeom prst="rect">
+            <a:avLst/>
+          </a:prstGeom>
+          <a:noFill/>
+        </p:spPr>
+        <p:txBody>
+          <a:bodyPr wrap="square" anchor="ctr">
+            <a:noAutofit/>
+          </a:bodyPr>
+          <a:lstStyle/>
+          <a:p>
+            <a:pPr>
+              <a:lnSpc>
+                <a:spcPct val="120000"/>
+              </a:lnSpc>
+            </a:pPr>
+            <a:r>
+              <a:rPr sz="2800" b="1">
+                <a:solidFill>
+                  <a:srgbClr val="B9791F"/>
+                </a:solidFill>
+                <a:latin typeface="Yu Gothic"/>
+                <a:ea typeface="Yu Gothic"/>
+                <a:cs typeface="Yu Gothic"/>
+              </a:rPr>
+              <a:t>「ニセ警察詐欺」</a:t>
+            </a:r>
+          </a:p>
+        </p:txBody>
+      </p:sp>
+      <p:sp>
+        <p:nvSpPr>
+          <p:cNvPr id="14" name="Rectangle 13"/>
+          <p:cNvSpPr/>
+          <p:nvPr/>
+        </p:nvSpPr>
+        <p:spPr>
+          <a:xfrm>
+            <a:off x="685800" y="4079747"/>
+            <a:ext cx="10820095" cy="12801"/>
+          </a:xfrm>
+          <a:prstGeom prst="rect">
+            <a:avLst/>
+          </a:prstGeom>
+          <a:solidFill>
+            <a:srgbClr val="E6E1D6"/>
+          </a:solidFill>
+          <a:ln>
+            <a:noFill/>
+          </a:ln>
+          <a:effectLst/>
+        </p:spPr>
+        <p:style>
+          <a:lnRef idx="1">
+            <a:schemeClr val="accent1"/>
+          </a:lnRef>
+          <a:fillRef idx="3">
+            <a:schemeClr val="accent1"/>
+          </a:fillRef>
+          <a:effectRef idx="2">
+            <a:schemeClr val="accent1"/>
+          </a:effectRef>
+          <a:fontRef idx="minor">
+            <a:schemeClr val="lt1"/>
+          </a:fontRef>
+        </p:style>
+        <p:txBody>
+          <a:bodyPr rtlCol="0" anchor="ctr"/>
+          <a:lstStyle/>
+          <a:p>
+            <a:pPr algn="ctr"/>
+          </a:p>
+        </p:txBody>
+      </p:sp>
+      <p:sp>
+        <p:nvSpPr>
+          <p:cNvPr id="15" name="TextBox 14"/>
+          <p:cNvSpPr txBox="1"/>
+          <p:nvPr/>
+        </p:nvSpPr>
+        <p:spPr>
+          <a:xfrm>
+            <a:off x="685800" y="4244340"/>
+            <a:ext cx="3383280" cy="646176"/>
+          </a:xfrm>
+          <a:prstGeom prst="rect">
+            <a:avLst/>
+          </a:prstGeom>
+          <a:noFill/>
+        </p:spPr>
+        <p:txBody>
+          <a:bodyPr wrap="square" anchor="ctr">
+            <a:noAutofit/>
+          </a:bodyPr>
+          <a:lstStyle/>
+          <a:p>
+            <a:pPr algn="l">
+              <a:lnSpc>
+                <a:spcPct val="125000"/>
+              </a:lnSpc>
+            </a:pPr>
+            <a:r>
+              <a:rPr sz="2000" b="0">
+                <a:solidFill>
+                  <a:srgbClr val="5C6472"/>
+                </a:solidFill>
+                <a:latin typeface="Yu Gothic"/>
+                <a:ea typeface="Yu Gothic"/>
+                <a:cs typeface="Yu Gothic"/>
+              </a:rPr>
+              <a:t>犯行電話の最多</a:t>
+            </a:r>
+          </a:p>
+        </p:txBody>
+      </p:sp>
+      <p:sp>
+        <p:nvSpPr>
+          <p:cNvPr id="16" name="TextBox 15"/>
+          <p:cNvSpPr txBox="1"/>
+          <p:nvPr/>
+        </p:nvSpPr>
+        <p:spPr>
+          <a:xfrm>
+            <a:off x="4343400" y="4244340"/>
+            <a:ext cx="7178040" cy="646176"/>
+          </a:xfrm>
+          <a:prstGeom prst="rect">
+            <a:avLst/>
+          </a:prstGeom>
+          <a:noFill/>
+        </p:spPr>
+        <p:txBody>
+          <a:bodyPr wrap="square" anchor="ctr">
+            <a:noAutofit/>
+          </a:bodyPr>
+          <a:lstStyle/>
+          <a:p>
+            <a:pPr>
+              <a:lnSpc>
+                <a:spcPct val="120000"/>
+              </a:lnSpc>
+            </a:pPr>
+            <a:r>
+              <a:rPr sz="2800" b="1">
+                <a:solidFill>
+                  <a:srgbClr val="B9791F"/>
+                </a:solidFill>
+                <a:latin typeface="Yu Gothic"/>
+                <a:ea typeface="Yu Gothic"/>
+                <a:cs typeface="Yu Gothic"/>
+              </a:rPr>
+              <a:t>「＋」</a:t>
+            </a:r>
+            <a:r>
+              <a:rPr sz="2800" b="1">
+                <a:solidFill>
+                  <a:srgbClr val="20242C"/>
+                </a:solidFill>
+                <a:latin typeface="Yu Gothic"/>
+                <a:ea typeface="Yu Gothic"/>
+                <a:cs typeface="Yu Gothic"/>
+              </a:rPr>
+              <a:t>で始まる国際電話・末尾</a:t>
+            </a:r>
+            <a:r>
+              <a:rPr sz="2800" b="1">
+                <a:solidFill>
+                  <a:srgbClr val="B9791F"/>
+                </a:solidFill>
+                <a:latin typeface="Yu Gothic"/>
+                <a:ea typeface="Yu Gothic"/>
+                <a:cs typeface="Yu Gothic"/>
+              </a:rPr>
+              <a:t>「0110」</a:t>
+            </a:r>
+          </a:p>
+        </p:txBody>
+      </p:sp>
+      <p:sp>
+        <p:nvSpPr>
+          <p:cNvPr id="17" name="meta:pageno"/>
           <p:cNvSpPr txBox="1"/>
           <p:nvPr/>
         </p:nvSpPr>
@@ -7671,7 +8166,7 @@
       </p:sp>
       <p:sp>
         <p:nvSpPr>
-          <p:cNvPr id="6" name="meta:part"/>
+          <p:cNvPr id="18" name="meta:part"/>
           <p:cNvSpPr txBox="1"/>
           <p:nvPr/>
         </p:nvSpPr>
@@ -7756,7 +8251,7 @@
                 <a:ea typeface="Yu Gothic"/>
                 <a:cs typeface="Yu Gothic"/>
               </a:rPr>
-              <a:t>答えは、番号。</a:t>
+              <a:t>ニセ警察も、第1部と同じ構造</a:t>
             </a:r>
           </a:p>
         </p:txBody>
@@ -7813,8 +8308,8 @@
         </p:nvSpPr>
         <p:spPr>
           <a:xfrm>
-            <a:off x="685800" y="5852160"/>
-            <a:ext cx="10820095" cy="347472"/>
+            <a:off x="685800" y="1645920"/>
+            <a:ext cx="10820095" cy="3401568"/>
           </a:xfrm>
           <a:prstGeom prst="rect">
             <a:avLst/>
@@ -7827,139 +8322,55 @@
           </a:bodyPr>
           <a:lstStyle/>
           <a:p>
-            <a:pPr algn="l"/>
-            <a:r>
-              <a:rPr sz="1500" b="0">
-                <a:solidFill>
-                  <a:srgbClr val="5C6472"/>
-                </a:solidFill>
-                <a:latin typeface="Yu Gothic"/>
-                <a:ea typeface="Yu Gothic"/>
-                <a:cs typeface="Yu Gothic"/>
-              </a:rPr>
-              <a:t>出典：警察庁 令和7年統計（講演直前に最新値を再確認）</a:t>
-            </a:r>
-          </a:p>
-        </p:txBody>
-      </p:sp>
-      <p:sp>
-        <p:nvSpPr>
-          <p:cNvPr id="5" name="TextBox 4"/>
-          <p:cNvSpPr txBox="1"/>
-          <p:nvPr/>
-        </p:nvSpPr>
-        <p:spPr>
-          <a:xfrm>
-            <a:off x="685800" y="5138928"/>
-            <a:ext cx="10820095" cy="640080"/>
-          </a:xfrm>
-          <a:prstGeom prst="rect">
-            <a:avLst/>
-          </a:prstGeom>
-          <a:noFill/>
-        </p:spPr>
-        <p:txBody>
-          <a:bodyPr wrap="square" anchor="ctr">
-            <a:noAutofit/>
-          </a:bodyPr>
-          <a:lstStyle/>
-          <a:p>
-            <a:pPr algn="l"/>
-            <a:r>
-              <a:rPr sz="3000" b="1">
-                <a:solidFill>
-                  <a:srgbClr val="A83B3B"/>
-                </a:solidFill>
-                <a:latin typeface="Yu Gothic"/>
-                <a:ea typeface="Yu Gothic"/>
-                <a:cs typeface="Yu Gothic"/>
-              </a:rPr>
-              <a:t>警察署の番号表示は、本人確認になりません</a:t>
-            </a:r>
-          </a:p>
-        </p:txBody>
-      </p:sp>
-      <p:sp>
-        <p:nvSpPr>
-          <p:cNvPr id="6" name="TextBox 5"/>
-          <p:cNvSpPr txBox="1"/>
-          <p:nvPr/>
-        </p:nvSpPr>
-        <p:spPr>
-          <a:xfrm>
-            <a:off x="685800" y="1757172"/>
-            <a:ext cx="3383280" cy="646176"/>
-          </a:xfrm>
-          <a:prstGeom prst="rect">
-            <a:avLst/>
-          </a:prstGeom>
-          <a:noFill/>
-        </p:spPr>
-        <p:txBody>
-          <a:bodyPr wrap="square" anchor="ctr">
-            <a:noAutofit/>
-          </a:bodyPr>
-          <a:lstStyle/>
-          <a:p>
-            <a:pPr algn="l">
+            <a:pPr marL="355600" indent="-355600">
               <a:lnSpc>
-                <a:spcPct val="125000"/>
+                <a:spcPct val="135000"/>
+              </a:lnSpc>
+              <a:spcAft>
+                <a:spcPts val="979"/>
+              </a:spcAft>
+            </a:pPr>
+            <a:r>
+              <a:rPr sz="2800" b="0">
+                <a:solidFill>
+                  <a:srgbClr val="20242C"/>
+                </a:solidFill>
+                <a:latin typeface="Yu Gothic"/>
+                <a:ea typeface="Yu Gothic"/>
+                <a:cs typeface="Yu Gothic"/>
+              </a:rPr>
+              <a:t>・最初は自動音声——何十万件にもばらまく</a:t>
+            </a:r>
+          </a:p>
+          <a:p>
+            <a:pPr marL="355600" indent="-355600">
+              <a:lnSpc>
+                <a:spcPct val="135000"/>
+              </a:lnSpc>
+              <a:spcAft>
+                <a:spcPts val="979"/>
+              </a:spcAft>
+            </a:pPr>
+            <a:r>
+              <a:rPr sz="2800" b="0">
+                <a:solidFill>
+                  <a:srgbClr val="20242C"/>
+                </a:solidFill>
+                <a:latin typeface="Yu Gothic"/>
+                <a:ea typeface="Yu Gothic"/>
+                <a:cs typeface="Yu Gothic"/>
+              </a:rPr>
+              <a:t>・信じて操作した人だけが、人間の詐欺師につながる</a:t>
+            </a:r>
+          </a:p>
+          <a:p>
+            <a:pPr marL="355600" indent="-355600">
+              <a:lnSpc>
+                <a:spcPct val="135000"/>
               </a:lnSpc>
             </a:pPr>
             <a:r>
-              <a:rPr sz="2000" b="0">
-                <a:solidFill>
-                  <a:srgbClr val="5C6472"/>
-                </a:solidFill>
-                <a:latin typeface="Yu Gothic"/>
-                <a:ea typeface="Yu Gothic"/>
-                <a:cs typeface="Yu Gothic"/>
-              </a:rPr>
-              <a:t>2025年 詐欺全体の被害</a:t>
-            </a:r>
-          </a:p>
-        </p:txBody>
-      </p:sp>
-      <p:sp>
-        <p:nvSpPr>
-          <p:cNvPr id="7" name="TextBox 6"/>
-          <p:cNvSpPr txBox="1"/>
-          <p:nvPr/>
-        </p:nvSpPr>
-        <p:spPr>
-          <a:xfrm>
-            <a:off x="4343400" y="1757172"/>
-            <a:ext cx="7178040" cy="646176"/>
-          </a:xfrm>
-          <a:prstGeom prst="rect">
-            <a:avLst/>
-          </a:prstGeom>
-          <a:noFill/>
-        </p:spPr>
-        <p:txBody>
-          <a:bodyPr wrap="square" anchor="ctr">
-            <a:noAutofit/>
-          </a:bodyPr>
-          <a:lstStyle/>
-          <a:p>
-            <a:pPr>
-              <a:lnSpc>
-                <a:spcPct val="120000"/>
-              </a:lnSpc>
-            </a:pPr>
-            <a:r>
-              <a:rPr sz="2800" b="1">
-                <a:solidFill>
-                  <a:srgbClr val="B9791F"/>
-                </a:solidFill>
-                <a:latin typeface="Yu Gothic"/>
-                <a:ea typeface="Yu Gothic"/>
-                <a:cs typeface="Yu Gothic"/>
-              </a:rPr>
-              <a:t>約3,257億円</a:t>
-            </a:r>
-            <a:r>
-              <a:rPr sz="2800" b="1">
+              <a:rPr sz="2800" b="0">
                 <a:solidFill>
                   <a:srgbClr val="20242C"/>
                 </a:solidFill>
@@ -7967,27 +8378,29 @@
                 <a:ea typeface="Yu Gothic"/>
                 <a:cs typeface="Yu Gothic"/>
               </a:rPr>
-              <a:t>（過去最悪）</a:t>
-            </a:r>
-          </a:p>
-        </p:txBody>
-      </p:sp>
-      <p:sp>
-        <p:nvSpPr>
-          <p:cNvPr id="8" name="Rectangle 7"/>
+              <a:t>・「警察」という大胆でバレやすい嘘 ＝ 疑う人を先にふるい落とす選別装置</a:t>
+            </a:r>
+          </a:p>
+        </p:txBody>
+      </p:sp>
+      <p:sp>
+        <p:nvSpPr>
+          <p:cNvPr id="5" name="Rounded Rectangle 4"/>
           <p:cNvSpPr/>
           <p:nvPr/>
         </p:nvSpPr>
         <p:spPr>
           <a:xfrm>
-            <a:off x="685800" y="2421636"/>
-            <a:ext cx="10820095" cy="12801"/>
-          </a:xfrm>
-          <a:prstGeom prst="rect">
-            <a:avLst/>
+            <a:off x="685800" y="5212080"/>
+            <a:ext cx="10820095" cy="777240"/>
+          </a:xfrm>
+          <a:prstGeom prst="roundRect">
+            <a:avLst>
+              <a:gd name="adj" fmla="val 16000"/>
+            </a:avLst>
           </a:prstGeom>
           <a:solidFill>
-            <a:srgbClr val="E6E1D6"/>
+            <a:srgbClr val="F3E6CF"/>
           </a:solidFill>
           <a:ln>
             <a:noFill/>
@@ -8009,346 +8422,14 @@
           </a:fontRef>
         </p:style>
         <p:txBody>
-          <a:bodyPr rtlCol="0" anchor="ctr"/>
+          <a:bodyPr rtlCol="0" anchor="ctr" wrap="square" lIns="274320" rIns="274320">
+            <a:noAutofit/>
+          </a:bodyPr>
           <a:lstStyle/>
           <a:p>
             <a:pPr algn="ctr"/>
-          </a:p>
-        </p:txBody>
-      </p:sp>
-      <p:sp>
-        <p:nvSpPr>
-          <p:cNvPr id="9" name="TextBox 8"/>
-          <p:cNvSpPr txBox="1"/>
-          <p:nvPr/>
-        </p:nvSpPr>
-        <p:spPr>
-          <a:xfrm>
-            <a:off x="685800" y="2586228"/>
-            <a:ext cx="3383280" cy="646176"/>
-          </a:xfrm>
-          <a:prstGeom prst="rect">
-            <a:avLst/>
-          </a:prstGeom>
-          <a:noFill/>
-        </p:spPr>
-        <p:txBody>
-          <a:bodyPr wrap="square" anchor="ctr">
-            <a:noAutofit/>
-          </a:bodyPr>
-          <a:lstStyle/>
-          <a:p>
-            <a:pPr algn="l">
-              <a:lnSpc>
-                <a:spcPct val="125000"/>
-              </a:lnSpc>
-            </a:pPr>
-            <a:r>
-              <a:rPr sz="2000" b="0">
-                <a:solidFill>
-                  <a:srgbClr val="5C6472"/>
-                </a:solidFill>
-                <a:latin typeface="Yu Gothic"/>
-                <a:ea typeface="Yu Gothic"/>
-                <a:cs typeface="Yu Gothic"/>
-              </a:rPr>
-              <a:t>うち特殊詐欺</a:t>
-            </a:r>
-          </a:p>
-        </p:txBody>
-      </p:sp>
-      <p:sp>
-        <p:nvSpPr>
-          <p:cNvPr id="10" name="TextBox 9"/>
-          <p:cNvSpPr txBox="1"/>
-          <p:nvPr/>
-        </p:nvSpPr>
-        <p:spPr>
-          <a:xfrm>
-            <a:off x="4343400" y="2586228"/>
-            <a:ext cx="7178040" cy="646176"/>
-          </a:xfrm>
-          <a:prstGeom prst="rect">
-            <a:avLst/>
-          </a:prstGeom>
-          <a:noFill/>
-        </p:spPr>
-        <p:txBody>
-          <a:bodyPr wrap="square" anchor="ctr">
-            <a:noAutofit/>
-          </a:bodyPr>
-          <a:lstStyle/>
-          <a:p>
-            <a:pPr>
-              <a:lnSpc>
-                <a:spcPct val="120000"/>
-              </a:lnSpc>
-            </a:pPr>
-            <a:r>
-              <a:rPr sz="2800" b="1">
-                <a:solidFill>
-                  <a:srgbClr val="B9791F"/>
-                </a:solidFill>
-                <a:latin typeface="Yu Gothic"/>
-                <a:ea typeface="Yu Gothic"/>
-                <a:cs typeface="Yu Gothic"/>
-              </a:rPr>
-              <a:t>約1,423億円</a:t>
-            </a:r>
-          </a:p>
-        </p:txBody>
-      </p:sp>
-      <p:sp>
-        <p:nvSpPr>
-          <p:cNvPr id="11" name="Rectangle 10"/>
-          <p:cNvSpPr/>
-          <p:nvPr/>
-        </p:nvSpPr>
-        <p:spPr>
-          <a:xfrm>
-            <a:off x="685800" y="3250691"/>
-            <a:ext cx="10820095" cy="12801"/>
-          </a:xfrm>
-          <a:prstGeom prst="rect">
-            <a:avLst/>
-          </a:prstGeom>
-          <a:solidFill>
-            <a:srgbClr val="E6E1D6"/>
-          </a:solidFill>
-          <a:ln>
-            <a:noFill/>
-          </a:ln>
-          <a:effectLst/>
-        </p:spPr>
-        <p:style>
-          <a:lnRef idx="1">
-            <a:schemeClr val="accent1"/>
-          </a:lnRef>
-          <a:fillRef idx="3">
-            <a:schemeClr val="accent1"/>
-          </a:fillRef>
-          <a:effectRef idx="2">
-            <a:schemeClr val="accent1"/>
-          </a:effectRef>
-          <a:fontRef idx="minor">
-            <a:schemeClr val="lt1"/>
-          </a:fontRef>
-        </p:style>
-        <p:txBody>
-          <a:bodyPr rtlCol="0" anchor="ctr"/>
-          <a:lstStyle/>
-          <a:p>
-            <a:pPr algn="ctr"/>
-          </a:p>
-        </p:txBody>
-      </p:sp>
-      <p:sp>
-        <p:nvSpPr>
-          <p:cNvPr id="12" name="TextBox 11"/>
-          <p:cNvSpPr txBox="1"/>
-          <p:nvPr/>
-        </p:nvSpPr>
-        <p:spPr>
-          <a:xfrm>
-            <a:off x="685800" y="3415284"/>
-            <a:ext cx="3383280" cy="646176"/>
-          </a:xfrm>
-          <a:prstGeom prst="rect">
-            <a:avLst/>
-          </a:prstGeom>
-          <a:noFill/>
-        </p:spPr>
-        <p:txBody>
-          <a:bodyPr wrap="square" anchor="ctr">
-            <a:noAutofit/>
-          </a:bodyPr>
-          <a:lstStyle/>
-          <a:p>
-            <a:pPr algn="l">
-              <a:lnSpc>
-                <a:spcPct val="125000"/>
-              </a:lnSpc>
-            </a:pPr>
-            <a:r>
-              <a:rPr sz="2000" b="0">
-                <a:solidFill>
-                  <a:srgbClr val="5C6472"/>
-                </a:solidFill>
-                <a:latin typeface="Yu Gothic"/>
-                <a:ea typeface="Yu Gothic"/>
-                <a:cs typeface="Yu Gothic"/>
-              </a:rPr>
-              <a:t>その約7割＝約1,005億円</a:t>
-            </a:r>
-          </a:p>
-        </p:txBody>
-      </p:sp>
-      <p:sp>
-        <p:nvSpPr>
-          <p:cNvPr id="13" name="TextBox 12"/>
-          <p:cNvSpPr txBox="1"/>
-          <p:nvPr/>
-        </p:nvSpPr>
-        <p:spPr>
-          <a:xfrm>
-            <a:off x="4343400" y="3415284"/>
-            <a:ext cx="7178040" cy="646176"/>
-          </a:xfrm>
-          <a:prstGeom prst="rect">
-            <a:avLst/>
-          </a:prstGeom>
-          <a:noFill/>
-        </p:spPr>
-        <p:txBody>
-          <a:bodyPr wrap="square" anchor="ctr">
-            <a:noAutofit/>
-          </a:bodyPr>
-          <a:lstStyle/>
-          <a:p>
-            <a:pPr>
-              <a:lnSpc>
-                <a:spcPct val="120000"/>
-              </a:lnSpc>
-            </a:pPr>
-            <a:r>
-              <a:rPr sz="2800" b="1">
-                <a:solidFill>
-                  <a:srgbClr val="B9791F"/>
-                </a:solidFill>
-                <a:latin typeface="Yu Gothic"/>
-                <a:ea typeface="Yu Gothic"/>
-                <a:cs typeface="Yu Gothic"/>
-              </a:rPr>
-              <a:t>「ニセ警察詐欺」</a:t>
-            </a:r>
-          </a:p>
-        </p:txBody>
-      </p:sp>
-      <p:sp>
-        <p:nvSpPr>
-          <p:cNvPr id="14" name="Rectangle 13"/>
-          <p:cNvSpPr/>
-          <p:nvPr/>
-        </p:nvSpPr>
-        <p:spPr>
-          <a:xfrm>
-            <a:off x="685800" y="4079747"/>
-            <a:ext cx="10820095" cy="12801"/>
-          </a:xfrm>
-          <a:prstGeom prst="rect">
-            <a:avLst/>
-          </a:prstGeom>
-          <a:solidFill>
-            <a:srgbClr val="E6E1D6"/>
-          </a:solidFill>
-          <a:ln>
-            <a:noFill/>
-          </a:ln>
-          <a:effectLst/>
-        </p:spPr>
-        <p:style>
-          <a:lnRef idx="1">
-            <a:schemeClr val="accent1"/>
-          </a:lnRef>
-          <a:fillRef idx="3">
-            <a:schemeClr val="accent1"/>
-          </a:fillRef>
-          <a:effectRef idx="2">
-            <a:schemeClr val="accent1"/>
-          </a:effectRef>
-          <a:fontRef idx="minor">
-            <a:schemeClr val="lt1"/>
-          </a:fontRef>
-        </p:style>
-        <p:txBody>
-          <a:bodyPr rtlCol="0" anchor="ctr"/>
-          <a:lstStyle/>
-          <a:p>
-            <a:pPr algn="ctr"/>
-          </a:p>
-        </p:txBody>
-      </p:sp>
-      <p:sp>
-        <p:nvSpPr>
-          <p:cNvPr id="15" name="TextBox 14"/>
-          <p:cNvSpPr txBox="1"/>
-          <p:nvPr/>
-        </p:nvSpPr>
-        <p:spPr>
-          <a:xfrm>
-            <a:off x="685800" y="4244340"/>
-            <a:ext cx="3383280" cy="646176"/>
-          </a:xfrm>
-          <a:prstGeom prst="rect">
-            <a:avLst/>
-          </a:prstGeom>
-          <a:noFill/>
-        </p:spPr>
-        <p:txBody>
-          <a:bodyPr wrap="square" anchor="ctr">
-            <a:noAutofit/>
-          </a:bodyPr>
-          <a:lstStyle/>
-          <a:p>
-            <a:pPr algn="l">
-              <a:lnSpc>
-                <a:spcPct val="125000"/>
-              </a:lnSpc>
-            </a:pPr>
-            <a:r>
-              <a:rPr sz="2000" b="0">
-                <a:solidFill>
-                  <a:srgbClr val="5C6472"/>
-                </a:solidFill>
-                <a:latin typeface="Yu Gothic"/>
-                <a:ea typeface="Yu Gothic"/>
-                <a:cs typeface="Yu Gothic"/>
-              </a:rPr>
-              <a:t>犯行電話の最多</a:t>
-            </a:r>
-          </a:p>
-        </p:txBody>
-      </p:sp>
-      <p:sp>
-        <p:nvSpPr>
-          <p:cNvPr id="16" name="TextBox 15"/>
-          <p:cNvSpPr txBox="1"/>
-          <p:nvPr/>
-        </p:nvSpPr>
-        <p:spPr>
-          <a:xfrm>
-            <a:off x="4343400" y="4244340"/>
-            <a:ext cx="7178040" cy="646176"/>
-          </a:xfrm>
-          <a:prstGeom prst="rect">
-            <a:avLst/>
-          </a:prstGeom>
-          <a:noFill/>
-        </p:spPr>
-        <p:txBody>
-          <a:bodyPr wrap="square" anchor="ctr">
-            <a:noAutofit/>
-          </a:bodyPr>
-          <a:lstStyle/>
-          <a:p>
-            <a:pPr>
-              <a:lnSpc>
-                <a:spcPct val="120000"/>
-              </a:lnSpc>
-            </a:pPr>
-            <a:r>
-              <a:rPr sz="2800" b="1">
-                <a:solidFill>
-                  <a:srgbClr val="B9791F"/>
-                </a:solidFill>
-                <a:latin typeface="Yu Gothic"/>
-                <a:ea typeface="Yu Gothic"/>
-                <a:cs typeface="Yu Gothic"/>
-              </a:rPr>
-              <a:t>「＋」</a:t>
-            </a:r>
-            <a:r>
-              <a:rPr sz="2800" b="1">
+            <a:r>
+              <a:rPr sz="2600" b="1">
                 <a:solidFill>
                   <a:srgbClr val="20242C"/>
                 </a:solidFill>
@@ -8356,25 +8437,14 @@
                 <a:ea typeface="Yu Gothic"/>
                 <a:cs typeface="Yu Gothic"/>
               </a:rPr>
-              <a:t>で始まる国際電話・末尾</a:t>
-            </a:r>
-            <a:r>
-              <a:rPr sz="2800" b="1">
-                <a:solidFill>
-                  <a:srgbClr val="B9791F"/>
-                </a:solidFill>
-                <a:latin typeface="Yu Gothic"/>
-                <a:ea typeface="Yu Gothic"/>
-                <a:cs typeface="Yu Gothic"/>
-              </a:rPr>
-              <a:t>「0110」</a:t>
-            </a:r>
-          </a:p>
-        </p:txBody>
-      </p:sp>
-      <p:sp>
-        <p:nvSpPr>
-          <p:cNvPr id="17" name="meta:pageno"/>
+              <a:t>いまの日本の主流は、「ばらまいて選別する」商売の完成形</a:t>
+            </a:r>
+          </a:p>
+        </p:txBody>
+      </p:sp>
+      <p:sp>
+        <p:nvSpPr>
+          <p:cNvPr id="6" name="meta:pageno"/>
           <p:cNvSpPr txBox="1"/>
           <p:nvPr/>
         </p:nvSpPr>
@@ -8411,7 +8481,7 @@
       </p:sp>
       <p:sp>
         <p:nvSpPr>
-          <p:cNvPr id="18" name="meta:part"/>
+          <p:cNvPr id="7" name="meta:part"/>
           <p:cNvSpPr txBox="1"/>
           <p:nvPr/>
         </p:nvSpPr>
@@ -8496,7 +8566,7 @@
                 <a:ea typeface="Yu Gothic"/>
                 <a:cs typeface="Yu Gothic"/>
               </a:rPr>
-              <a:t>ニセ警察も、第1部と同じ構造</a:t>
+              <a:t>一方、アメリカでは</a:t>
             </a:r>
           </a:p>
         </p:txBody>
@@ -8553,8 +8623,45 @@
         </p:nvSpPr>
         <p:spPr>
           <a:xfrm>
+            <a:off x="685800" y="5852160"/>
+            <a:ext cx="10820095" cy="347472"/>
+          </a:xfrm>
+          <a:prstGeom prst="rect">
+            <a:avLst/>
+          </a:prstGeom>
+          <a:noFill/>
+        </p:spPr>
+        <p:txBody>
+          <a:bodyPr wrap="square" anchor="t">
+            <a:noAutofit/>
+          </a:bodyPr>
+          <a:lstStyle/>
+          <a:p>
+            <a:pPr algn="l"/>
+            <a:r>
+              <a:rPr sz="1500" b="0">
+                <a:solidFill>
+                  <a:srgbClr val="5C6472"/>
+                </a:solidFill>
+                <a:latin typeface="Yu Gothic"/>
+                <a:ea typeface="Yu Gothic"/>
+                <a:cs typeface="Yu Gothic"/>
+              </a:rPr>
+              <a:t>出典：FBI IC3 注意喚起（2024年12月）／FTC 消費者警告</a:t>
+            </a:r>
+          </a:p>
+        </p:txBody>
+      </p:sp>
+      <p:sp>
+        <p:nvSpPr>
+          <p:cNvPr id="5" name="TextBox 4"/>
+          <p:cNvSpPr txBox="1"/>
+          <p:nvPr/>
+        </p:nvSpPr>
+        <p:spPr>
+          <a:xfrm>
             <a:off x="685800" y="1645920"/>
-            <a:ext cx="10820095" cy="3401568"/>
+            <a:ext cx="10820095" cy="4133088"/>
           </a:xfrm>
           <a:prstGeom prst="rect">
             <a:avLst/>
@@ -8584,7 +8691,7 @@
                 <a:ea typeface="Yu Gothic"/>
                 <a:cs typeface="Yu Gothic"/>
               </a:rPr>
-              <a:t>・最初は自動音声——何十万件にもばらまく</a:t>
+              <a:t>・FBI・FTC が「生成AIを使った詐欺」への警告を公式に発表</a:t>
             </a:r>
           </a:p>
           <a:p>
@@ -8605,7 +8712,7 @@
                 <a:ea typeface="Yu Gothic"/>
                 <a:cs typeface="Yu Gothic"/>
               </a:rPr>
-              <a:t>・信じて操作した人だけが、人間の詐欺師につながる</a:t>
+              <a:t>・家族の声をまねた「音声クローン詐欺」の相談が実際に増えている</a:t>
             </a:r>
           </a:p>
           <a:p>
@@ -8623,66 +8730,7 @@
                 <a:ea typeface="Yu Gothic"/>
                 <a:cs typeface="Yu Gothic"/>
               </a:rPr>
-              <a:t>・「警察」という大胆でバレやすい嘘 ＝ 疑う人を先にふるい落とす選別装置</a:t>
-            </a:r>
-          </a:p>
-        </p:txBody>
-      </p:sp>
-      <p:sp>
-        <p:nvSpPr>
-          <p:cNvPr id="5" name="Rounded Rectangle 4"/>
-          <p:cNvSpPr/>
-          <p:nvPr/>
-        </p:nvSpPr>
-        <p:spPr>
-          <a:xfrm>
-            <a:off x="685800" y="5212080"/>
-            <a:ext cx="10820095" cy="777240"/>
-          </a:xfrm>
-          <a:prstGeom prst="roundRect">
-            <a:avLst>
-              <a:gd name="adj" fmla="val 16000"/>
-            </a:avLst>
-          </a:prstGeom>
-          <a:solidFill>
-            <a:srgbClr val="F3E6CF"/>
-          </a:solidFill>
-          <a:ln>
-            <a:noFill/>
-          </a:ln>
-          <a:effectLst/>
-        </p:spPr>
-        <p:style>
-          <a:lnRef idx="1">
-            <a:schemeClr val="accent1"/>
-          </a:lnRef>
-          <a:fillRef idx="3">
-            <a:schemeClr val="accent1"/>
-          </a:fillRef>
-          <a:effectRef idx="2">
-            <a:schemeClr val="accent1"/>
-          </a:effectRef>
-          <a:fontRef idx="minor">
-            <a:schemeClr val="lt1"/>
-          </a:fontRef>
-        </p:style>
-        <p:txBody>
-          <a:bodyPr rtlCol="0" anchor="ctr" wrap="square" lIns="274320" rIns="274320">
-            <a:noAutofit/>
-          </a:bodyPr>
-          <a:lstStyle/>
-          <a:p>
-            <a:pPr algn="ctr"/>
-            <a:r>
-              <a:rPr sz="2600" b="1">
-                <a:solidFill>
-                  <a:srgbClr val="20242C"/>
-                </a:solidFill>
-                <a:latin typeface="Yu Gothic"/>
-                <a:ea typeface="Yu Gothic"/>
-                <a:cs typeface="Yu Gothic"/>
-              </a:rPr>
-              <a:t>いまの日本の主流は、「ばらまいて選別する」商売の完成形</a:t>
+              <a:t>・日本の統計に数字がないのは「起きていない」からではなく「まだ見えていない」から</a:t>
             </a:r>
           </a:p>
         </p:txBody>
@@ -9043,8 +9091,8 @@
         </p:nvSpPr>
         <p:spPr>
           <a:xfrm>
-            <a:off x="685800" y="411480"/>
-            <a:ext cx="10820095" cy="960120"/>
+            <a:off x="502920" y="1188720"/>
+            <a:ext cx="11185855" cy="3657599"/>
           </a:xfrm>
           <a:prstGeom prst="rect">
             <a:avLst/>
@@ -9052,193 +9100,92 @@
           <a:noFill/>
         </p:spPr>
         <p:txBody>
-          <a:bodyPr wrap="square" anchor="b">
-            <a:noAutofit/>
-          </a:bodyPr>
-          <a:lstStyle/>
-          <a:p>
-            <a:pPr algn="l"/>
-            <a:r>
-              <a:rPr sz="4000" b="1">
-                <a:solidFill>
-                  <a:srgbClr val="B9791F"/>
-                </a:solidFill>
-                <a:latin typeface="Yu Gothic"/>
-                <a:ea typeface="Yu Gothic"/>
-                <a:cs typeface="Yu Gothic"/>
-              </a:rPr>
-              <a:t>一方、アメリカでは</a:t>
-            </a:r>
-          </a:p>
-        </p:txBody>
-      </p:sp>
-      <p:sp>
-        <p:nvSpPr>
-          <p:cNvPr id="3" name="Rectangle 2"/>
-          <p:cNvSpPr/>
-          <p:nvPr/>
-        </p:nvSpPr>
-        <p:spPr>
-          <a:xfrm>
-            <a:off x="685800" y="1463040"/>
-            <a:ext cx="2377440" cy="50292"/>
-          </a:xfrm>
-          <a:prstGeom prst="rect">
-            <a:avLst/>
-          </a:prstGeom>
-          <a:solidFill>
-            <a:srgbClr val="B9791F"/>
-          </a:solidFill>
-          <a:ln>
-            <a:noFill/>
-          </a:ln>
-          <a:effectLst/>
-        </p:spPr>
-        <p:style>
-          <a:lnRef idx="1">
-            <a:schemeClr val="accent1"/>
-          </a:lnRef>
-          <a:fillRef idx="3">
-            <a:schemeClr val="accent1"/>
-          </a:fillRef>
-          <a:effectRef idx="2">
-            <a:schemeClr val="accent1"/>
-          </a:effectRef>
-          <a:fontRef idx="minor">
-            <a:schemeClr val="lt1"/>
-          </a:fontRef>
-        </p:style>
-        <p:txBody>
-          <a:bodyPr rtlCol="0" anchor="ctr"/>
-          <a:lstStyle/>
-          <a:p>
-            <a:pPr algn="ctr"/>
-          </a:p>
-        </p:txBody>
-      </p:sp>
-      <p:sp>
-        <p:nvSpPr>
-          <p:cNvPr id="4" name="TextBox 3"/>
-          <p:cNvSpPr txBox="1"/>
-          <p:nvPr/>
-        </p:nvSpPr>
-        <p:spPr>
-          <a:xfrm>
-            <a:off x="685800" y="5852160"/>
-            <a:ext cx="10820095" cy="347472"/>
-          </a:xfrm>
-          <a:prstGeom prst="rect">
-            <a:avLst/>
-          </a:prstGeom>
-          <a:noFill/>
-        </p:spPr>
-        <p:txBody>
-          <a:bodyPr wrap="square" anchor="t">
-            <a:noAutofit/>
-          </a:bodyPr>
-          <a:lstStyle/>
-          <a:p>
-            <a:pPr algn="l"/>
-            <a:r>
-              <a:rPr sz="1500" b="0">
-                <a:solidFill>
-                  <a:srgbClr val="5C6472"/>
-                </a:solidFill>
-                <a:latin typeface="Yu Gothic"/>
-                <a:ea typeface="Yu Gothic"/>
-                <a:cs typeface="Yu Gothic"/>
-              </a:rPr>
-              <a:t>出典：FBI IC3 注意喚起（2024年12月）／FTC 消費者警告</a:t>
-            </a:r>
-          </a:p>
-        </p:txBody>
-      </p:sp>
-      <p:sp>
-        <p:nvSpPr>
-          <p:cNvPr id="5" name="TextBox 4"/>
-          <p:cNvSpPr txBox="1"/>
-          <p:nvPr/>
-        </p:nvSpPr>
-        <p:spPr>
-          <a:xfrm>
-            <a:off x="685800" y="1645920"/>
-            <a:ext cx="10820095" cy="4133088"/>
-          </a:xfrm>
-          <a:prstGeom prst="rect">
-            <a:avLst/>
-          </a:prstGeom>
-          <a:noFill/>
-        </p:spPr>
-        <p:txBody>
-          <a:bodyPr wrap="square" anchor="t">
-            <a:noAutofit/>
-          </a:bodyPr>
-          <a:lstStyle/>
-          <a:p>
-            <a:pPr marL="355600" indent="-355600">
+          <a:bodyPr wrap="square" anchor="ctr">
+            <a:noAutofit/>
+          </a:bodyPr>
+          <a:lstStyle/>
+          <a:p>
+            <a:pPr algn="ctr">
               <a:lnSpc>
-                <a:spcPct val="135000"/>
-              </a:lnSpc>
-              <a:spcAft>
-                <a:spcPts val="979"/>
-              </a:spcAft>
-            </a:pPr>
-            <a:r>
-              <a:rPr sz="2800" b="0">
-                <a:solidFill>
-                  <a:srgbClr val="20242C"/>
-                </a:solidFill>
-                <a:latin typeface="Yu Gothic"/>
-                <a:ea typeface="Yu Gothic"/>
-                <a:cs typeface="Yu Gothic"/>
-              </a:rPr>
-              <a:t>・FBI・FTC が「生成AIを使った詐欺」への警告を公式に発表</a:t>
-            </a:r>
-          </a:p>
-          <a:p>
-            <a:pPr marL="355600" indent="-355600">
-              <a:lnSpc>
-                <a:spcPct val="135000"/>
-              </a:lnSpc>
-              <a:spcAft>
-                <a:spcPts val="979"/>
-              </a:spcAft>
-            </a:pPr>
-            <a:r>
-              <a:rPr sz="2800" b="0">
-                <a:solidFill>
-                  <a:srgbClr val="20242C"/>
-                </a:solidFill>
-                <a:latin typeface="Yu Gothic"/>
-                <a:ea typeface="Yu Gothic"/>
-                <a:cs typeface="Yu Gothic"/>
-              </a:rPr>
-              <a:t>・家族の声をまねた「音声クローン詐欺」の相談が実際に増えている</a:t>
-            </a:r>
-          </a:p>
-          <a:p>
-            <a:pPr marL="355600" indent="-355600">
-              <a:lnSpc>
-                <a:spcPct val="135000"/>
+                <a:spcPct val="128000"/>
               </a:lnSpc>
             </a:pPr>
             <a:r>
-              <a:rPr sz="2800" b="0">
+              <a:rPr sz="5400" b="1">
                 <a:solidFill>
                   <a:srgbClr val="20242C"/>
                 </a:solidFill>
-                <a:latin typeface="Yu Gothic"/>
-                <a:ea typeface="Yu Gothic"/>
-                <a:cs typeface="Yu Gothic"/>
-              </a:rPr>
-              <a:t>・日本の統計に数字がないのは「起きていない」からではなく「まだ見えていない」から</a:t>
-            </a:r>
-          </a:p>
-        </p:txBody>
-      </p:sp>
-      <p:sp>
-        <p:nvSpPr>
-          <p:cNvPr id="6" name="meta:pageno"/>
+                <a:latin typeface="Yu Mincho"/>
+                <a:ea typeface="Yu Mincho"/>
+                <a:cs typeface="Yu Mincho"/>
+              </a:rPr>
+              <a:t>次に来るのは——</a:t>
+            </a:r>
+          </a:p>
+          <a:p>
+            <a:pPr algn="ctr">
+              <a:lnSpc>
+                <a:spcPct val="128000"/>
+              </a:lnSpc>
+            </a:pPr>
+            <a:r>
+              <a:rPr sz="5400" b="1">
+                <a:solidFill>
+                  <a:srgbClr val="20242C"/>
+                </a:solidFill>
+                <a:latin typeface="Yu Mincho"/>
+                <a:ea typeface="Yu Mincho"/>
+                <a:cs typeface="Yu Mincho"/>
+              </a:rPr>
+              <a:t>番号偽装に、AIが混ざる</a:t>
+            </a:r>
+          </a:p>
+        </p:txBody>
+      </p:sp>
+      <p:sp>
+        <p:nvSpPr>
+          <p:cNvPr id="3" name="TextBox 2"/>
+          <p:cNvSpPr txBox="1"/>
+          <p:nvPr/>
+        </p:nvSpPr>
+        <p:spPr>
+          <a:xfrm>
+            <a:off x="685800" y="4983479"/>
+            <a:ext cx="10820095" cy="1005840"/>
+          </a:xfrm>
+          <a:prstGeom prst="rect">
+            <a:avLst/>
+          </a:prstGeom>
+          <a:noFill/>
+        </p:spPr>
+        <p:txBody>
+          <a:bodyPr wrap="square" anchor="ctr">
+            <a:noAutofit/>
+          </a:bodyPr>
+          <a:lstStyle/>
+          <a:p>
+            <a:pPr algn="ctr">
+              <a:lnSpc>
+                <a:spcPct val="130000"/>
+              </a:lnSpc>
+            </a:pPr>
+            <a:r>
+              <a:rPr sz="2200" b="0">
+                <a:solidFill>
+                  <a:srgbClr val="5C6472"/>
+                </a:solidFill>
+                <a:latin typeface="Yu Gothic"/>
+                <a:ea typeface="Yu Gothic"/>
+                <a:cs typeface="Yu Gothic"/>
+              </a:rPr>
+              <a:t>「0110」の表示で信じさせ、本人そっくりの声でとどめを刺す</a:t>
+            </a:r>
+          </a:p>
+        </p:txBody>
+      </p:sp>
+      <p:sp>
+        <p:nvSpPr>
+          <p:cNvPr id="4" name="meta:pageno"/>
           <p:cNvSpPr txBox="1"/>
           <p:nvPr/>
         </p:nvSpPr>
@@ -9275,7 +9222,7 @@
       </p:sp>
       <p:sp>
         <p:nvSpPr>
-          <p:cNvPr id="7" name="meta:part"/>
+          <p:cNvPr id="5" name="meta:part"/>
           <p:cNvSpPr txBox="1"/>
           <p:nvPr/>
         </p:nvSpPr>
@@ -9330,60 +9277,45 @@
       <p:grpSpPr/>
       <p:sp>
         <p:nvSpPr>
-          <p:cNvPr id="2" name="TextBox 1"/>
-          <p:cNvSpPr txBox="1"/>
-          <p:nvPr/>
-        </p:nvSpPr>
-        <p:spPr>
-          <a:xfrm>
-            <a:off x="502920" y="1188720"/>
-            <a:ext cx="11185855" cy="3657599"/>
-          </a:xfrm>
-          <a:prstGeom prst="rect">
-            <a:avLst/>
-          </a:prstGeom>
-          <a:noFill/>
-        </p:spPr>
-        <p:txBody>
-          <a:bodyPr wrap="square" anchor="ctr">
-            <a:noAutofit/>
-          </a:bodyPr>
-          <a:lstStyle/>
-          <a:p>
-            <a:pPr algn="ctr">
-              <a:lnSpc>
-                <a:spcPct val="128000"/>
-              </a:lnSpc>
-            </a:pPr>
-            <a:r>
-              <a:rPr sz="5400" b="1">
-                <a:solidFill>
-                  <a:srgbClr val="20242C"/>
-                </a:solidFill>
-                <a:latin typeface="Yu Mincho"/>
-                <a:ea typeface="Yu Mincho"/>
-                <a:cs typeface="Yu Mincho"/>
-              </a:rPr>
-              <a:t>次に来るのは——</a:t>
-            </a:r>
-          </a:p>
-          <a:p>
-            <a:pPr algn="ctr">
-              <a:lnSpc>
-                <a:spcPct val="128000"/>
-              </a:lnSpc>
-            </a:pPr>
-            <a:r>
-              <a:rPr sz="5400" b="1">
-                <a:solidFill>
-                  <a:srgbClr val="20242C"/>
-                </a:solidFill>
-                <a:latin typeface="Yu Mincho"/>
-                <a:ea typeface="Yu Mincho"/>
-                <a:cs typeface="Yu Mincho"/>
-              </a:rPr>
-              <a:t>番号偽装に、AIが混ざる</a:t>
-            </a:r>
+          <p:cNvPr id="2" name="Rectangle 1"/>
+          <p:cNvSpPr/>
+          <p:nvPr/>
+        </p:nvSpPr>
+        <p:spPr>
+          <a:xfrm>
+            <a:off x="0" y="0"/>
+            <a:ext cx="12191695" cy="6858000"/>
+          </a:xfrm>
+          <a:prstGeom prst="rect">
+            <a:avLst/>
+          </a:prstGeom>
+          <a:solidFill>
+            <a:srgbClr val="20242C"/>
+          </a:solidFill>
+          <a:ln>
+            <a:noFill/>
+          </a:ln>
+          <a:effectLst/>
+        </p:spPr>
+        <p:style>
+          <a:lnRef idx="1">
+            <a:schemeClr val="accent1"/>
+          </a:lnRef>
+          <a:fillRef idx="3">
+            <a:schemeClr val="accent1"/>
+          </a:fillRef>
+          <a:effectRef idx="2">
+            <a:schemeClr val="accent1"/>
+          </a:effectRef>
+          <a:fontRef idx="minor">
+            <a:schemeClr val="lt1"/>
+          </a:fontRef>
+        </p:style>
+        <p:txBody>
+          <a:bodyPr rtlCol="0" anchor="ctr"/>
+          <a:lstStyle/>
+          <a:p>
+            <a:pPr algn="ctr"/>
           </a:p>
         </p:txBody>
       </p:sp>
@@ -9395,8 +9327,8 @@
         </p:nvSpPr>
         <p:spPr>
           <a:xfrm>
-            <a:off x="685800" y="4983479"/>
-            <a:ext cx="10820095" cy="1005840"/>
+            <a:off x="685800" y="594360"/>
+            <a:ext cx="4572000" cy="548640"/>
           </a:xfrm>
           <a:prstGeom prst="rect">
             <a:avLst/>
@@ -9409,28 +9341,98 @@
           </a:bodyPr>
           <a:lstStyle/>
           <a:p>
-            <a:pPr algn="ctr">
-              <a:lnSpc>
-                <a:spcPct val="130000"/>
-              </a:lnSpc>
-            </a:pPr>
-            <a:r>
-              <a:rPr sz="2200" b="0">
-                <a:solidFill>
-                  <a:srgbClr val="5C6472"/>
-                </a:solidFill>
-                <a:latin typeface="Yu Gothic"/>
-                <a:ea typeface="Yu Gothic"/>
-                <a:cs typeface="Yu Gothic"/>
-              </a:rPr>
-              <a:t>「0110」の表示で信じさせ、本人そっくりの声でとどめを刺す</a:t>
-            </a:r>
-          </a:p>
-        </p:txBody>
-      </p:sp>
-      <p:sp>
-        <p:nvSpPr>
-          <p:cNvPr id="4" name="meta:pageno"/>
+            <a:pPr algn="l"/>
+            <a:r>
+              <a:rPr sz="2000" b="1">
+                <a:solidFill>
+                  <a:srgbClr val="B9791F"/>
+                </a:solidFill>
+                <a:latin typeface="Yu Gothic"/>
+                <a:ea typeface="Yu Gothic"/>
+                <a:cs typeface="Yu Gothic"/>
+              </a:rPr>
+              <a:t>実演</a:t>
+            </a:r>
+          </a:p>
+        </p:txBody>
+      </p:sp>
+      <p:sp>
+        <p:nvSpPr>
+          <p:cNvPr id="4" name="TextBox 3"/>
+          <p:cNvSpPr txBox="1"/>
+          <p:nvPr/>
+        </p:nvSpPr>
+        <p:spPr>
+          <a:xfrm>
+            <a:off x="685800" y="2240280"/>
+            <a:ext cx="10820095" cy="1554480"/>
+          </a:xfrm>
+          <a:prstGeom prst="rect">
+            <a:avLst/>
+          </a:prstGeom>
+          <a:noFill/>
+        </p:spPr>
+        <p:txBody>
+          <a:bodyPr wrap="square" anchor="ctr">
+            <a:noAutofit/>
+          </a:bodyPr>
+          <a:lstStyle/>
+          <a:p>
+            <a:pPr algn="ctr"/>
+            <a:r>
+              <a:rPr sz="5400" b="1">
+                <a:solidFill>
+                  <a:srgbClr val="FFFFFF"/>
+                </a:solidFill>
+                <a:latin typeface="Yu Gothic"/>
+                <a:ea typeface="Yu Gothic"/>
+                <a:cs typeface="Yu Gothic"/>
+              </a:rPr>
+              <a:t>「本人らしさ」は作られる</a:t>
+            </a:r>
+          </a:p>
+        </p:txBody>
+      </p:sp>
+      <p:sp>
+        <p:nvSpPr>
+          <p:cNvPr id="5" name="TextBox 4"/>
+          <p:cNvSpPr txBox="1"/>
+          <p:nvPr/>
+        </p:nvSpPr>
+        <p:spPr>
+          <a:xfrm>
+            <a:off x="685800" y="3977639"/>
+            <a:ext cx="10820095" cy="868680"/>
+          </a:xfrm>
+          <a:prstGeom prst="rect">
+            <a:avLst/>
+          </a:prstGeom>
+          <a:noFill/>
+        </p:spPr>
+        <p:txBody>
+          <a:bodyPr wrap="square" anchor="ctr">
+            <a:noAutofit/>
+          </a:bodyPr>
+          <a:lstStyle/>
+          <a:p>
+            <a:pPr algn="ctr"/>
+            <a:r>
+              <a:rPr sz="2400" b="0">
+                <a:solidFill>
+                  <a:srgbClr val="BCBDC0"/>
+                </a:solidFill>
+                <a:latin typeface="Yu Gothic"/>
+                <a:ea typeface="Yu Gothic"/>
+                <a:cs typeface="Yu Gothic"/>
+              </a:rPr>
+              <a:t>クローン音声・ライブAI対話</a:t>
+            </a:r>
+          </a:p>
+        </p:txBody>
+      </p:sp>
+      <p:sp>
+        <p:nvSpPr>
+          <p:cNvPr id="6" name="meta:pageno"/>
           <p:cNvSpPr txBox="1"/>
           <p:nvPr/>
         </p:nvSpPr>
@@ -9454,7 +9456,7 @@
             <a:r>
               <a:rPr sz="1200" b="0">
                 <a:solidFill>
-                  <a:srgbClr val="5C6472"/>
+                  <a:srgbClr val="9AA3B2"/>
                 </a:solidFill>
                 <a:latin typeface="Yu Gothic"/>
                 <a:ea typeface="Yu Gothic"/>
@@ -9467,7 +9469,7 @@
       </p:sp>
       <p:sp>
         <p:nvSpPr>
-          <p:cNvPr id="5" name="meta:part"/>
+          <p:cNvPr id="7" name="meta:part"/>
           <p:cNvSpPr txBox="1"/>
           <p:nvPr/>
         </p:nvSpPr>
@@ -9491,13 +9493,13 @@
             <a:r>
               <a:rPr sz="1200" b="0">
                 <a:solidFill>
-                  <a:srgbClr val="5C6472"/>
-                </a:solidFill>
-                <a:latin typeface="Yu Gothic"/>
-                <a:ea typeface="Yu Gothic"/>
-                <a:cs typeface="Yu Gothic"/>
-              </a:rPr>
-              <a:t>2 第2部</a:t>
+                  <a:srgbClr val="9AA3B2"/>
+                </a:solidFill>
+                <a:latin typeface="Yu Gothic"/>
+                <a:ea typeface="Yu Gothic"/>
+                <a:cs typeface="Yu Gothic"/>
+              </a:rPr>
+              <a:t>3 実演</a:t>
             </a:r>
           </a:p>
         </p:txBody>
@@ -9522,20 +9524,57 @@
       <p:grpSpPr/>
       <p:sp>
         <p:nvSpPr>
-          <p:cNvPr id="2" name="Rectangle 1"/>
+          <p:cNvPr id="2" name="TextBox 1"/>
+          <p:cNvSpPr txBox="1"/>
+          <p:nvPr/>
+        </p:nvSpPr>
+        <p:spPr>
+          <a:xfrm>
+            <a:off x="685800" y="411480"/>
+            <a:ext cx="10820095" cy="960120"/>
+          </a:xfrm>
+          <a:prstGeom prst="rect">
+            <a:avLst/>
+          </a:prstGeom>
+          <a:noFill/>
+        </p:spPr>
+        <p:txBody>
+          <a:bodyPr wrap="square" anchor="b">
+            <a:noAutofit/>
+          </a:bodyPr>
+          <a:lstStyle/>
+          <a:p>
+            <a:pPr algn="l"/>
+            <a:r>
+              <a:rPr sz="4000" b="1">
+                <a:solidFill>
+                  <a:srgbClr val="B9791F"/>
+                </a:solidFill>
+                <a:latin typeface="Yu Gothic"/>
+                <a:ea typeface="Yu Gothic"/>
+                <a:cs typeface="Yu Gothic"/>
+              </a:rPr>
+              <a:t>実演①　偽の「私」の声</a:t>
+            </a:r>
+          </a:p>
+        </p:txBody>
+      </p:sp>
+      <p:sp>
+        <p:nvSpPr>
+          <p:cNvPr id="3" name="Rectangle 2"/>
           <p:cNvSpPr/>
           <p:nvPr/>
         </p:nvSpPr>
         <p:spPr>
           <a:xfrm>
-            <a:off x="0" y="0"/>
-            <a:ext cx="12191695" cy="6858000"/>
+            <a:off x="685800" y="1463040"/>
+            <a:ext cx="2377440" cy="50292"/>
           </a:xfrm>
           <a:prstGeom prst="rect">
             <a:avLst/>
           </a:prstGeom>
           <a:solidFill>
-            <a:srgbClr val="20242C"/>
+            <a:srgbClr val="B9791F"/>
           </a:solidFill>
           <a:ln>
             <a:noFill/>
@@ -9566,51 +9605,14 @@
       </p:sp>
       <p:sp>
         <p:nvSpPr>
-          <p:cNvPr id="3" name="TextBox 2"/>
-          <p:cNvSpPr txBox="1"/>
-          <p:nvPr/>
-        </p:nvSpPr>
-        <p:spPr>
-          <a:xfrm>
-            <a:off x="685800" y="594360"/>
-            <a:ext cx="4572000" cy="548640"/>
-          </a:xfrm>
-          <a:prstGeom prst="rect">
-            <a:avLst/>
-          </a:prstGeom>
-          <a:noFill/>
-        </p:spPr>
-        <p:txBody>
-          <a:bodyPr wrap="square" anchor="ctr">
-            <a:noAutofit/>
-          </a:bodyPr>
-          <a:lstStyle/>
-          <a:p>
-            <a:pPr algn="l"/>
-            <a:r>
-              <a:rPr sz="2000" b="1">
-                <a:solidFill>
-                  <a:srgbClr val="B9791F"/>
-                </a:solidFill>
-                <a:latin typeface="Yu Gothic"/>
-                <a:ea typeface="Yu Gothic"/>
-                <a:cs typeface="Yu Gothic"/>
-              </a:rPr>
-              <a:t>実演</a:t>
-            </a:r>
-          </a:p>
-        </p:txBody>
-      </p:sp>
-      <p:sp>
-        <p:nvSpPr>
           <p:cNvPr id="4" name="TextBox 3"/>
           <p:cNvSpPr txBox="1"/>
           <p:nvPr/>
         </p:nvSpPr>
         <p:spPr>
           <a:xfrm>
-            <a:off x="685800" y="2240280"/>
-            <a:ext cx="10820095" cy="1554480"/>
+            <a:off x="685800" y="1645920"/>
+            <a:ext cx="10820095" cy="3401568"/>
           </a:xfrm>
           <a:prstGeom prst="rect">
             <a:avLst/>
@@ -9618,59 +9620,106 @@
           <a:noFill/>
         </p:spPr>
         <p:txBody>
-          <a:bodyPr wrap="square" anchor="ctr">
+          <a:bodyPr wrap="square" anchor="t">
+            <a:noAutofit/>
+          </a:bodyPr>
+          <a:lstStyle/>
+          <a:p>
+            <a:pPr marL="355600" indent="-355600">
+              <a:lnSpc>
+                <a:spcPct val="135000"/>
+              </a:lnSpc>
+              <a:spcAft>
+                <a:spcPts val="979"/>
+              </a:spcAft>
+            </a:pPr>
+            <a:r>
+              <a:rPr sz="2800" b="0">
+                <a:solidFill>
+                  <a:srgbClr val="20242C"/>
+                </a:solidFill>
+                <a:latin typeface="Yu Gothic"/>
+                <a:ea typeface="Yu Gothic"/>
+                <a:cs typeface="Yu Gothic"/>
+              </a:rPr>
+              <a:t>・私の声をAIに数十秒だけ学ばせて作った「偽の私」（本人同意・AI生成明示）</a:t>
+            </a:r>
+          </a:p>
+          <a:p>
+            <a:pPr marL="355600" indent="-355600">
+              <a:lnSpc>
+                <a:spcPct val="135000"/>
+              </a:lnSpc>
+            </a:pPr>
+            <a:r>
+              <a:rPr sz="2800" b="0">
+                <a:solidFill>
+                  <a:srgbClr val="20242C"/>
+                </a:solidFill>
+                <a:latin typeface="Yu Gothic"/>
+                <a:ea typeface="Yu Gothic"/>
+                <a:cs typeface="Yu Gothic"/>
+              </a:rPr>
+              <a:t>・毎日いっしょに働く同僚でも、電話では分からないと言った</a:t>
+            </a:r>
+          </a:p>
+        </p:txBody>
+      </p:sp>
+      <p:sp>
+        <p:nvSpPr>
+          <p:cNvPr id="5" name="Rounded Rectangle 4"/>
+          <p:cNvSpPr/>
+          <p:nvPr/>
+        </p:nvSpPr>
+        <p:spPr>
+          <a:xfrm>
+            <a:off x="685800" y="5212080"/>
+            <a:ext cx="10820095" cy="777240"/>
+          </a:xfrm>
+          <a:prstGeom prst="roundRect">
+            <a:avLst>
+              <a:gd name="adj" fmla="val 16000"/>
+            </a:avLst>
+          </a:prstGeom>
+          <a:solidFill>
+            <a:srgbClr val="F3E6CF"/>
+          </a:solidFill>
+          <a:ln>
+            <a:noFill/>
+          </a:ln>
+          <a:effectLst/>
+        </p:spPr>
+        <p:style>
+          <a:lnRef idx="1">
+            <a:schemeClr val="accent1"/>
+          </a:lnRef>
+          <a:fillRef idx="3">
+            <a:schemeClr val="accent1"/>
+          </a:fillRef>
+          <a:effectRef idx="2">
+            <a:schemeClr val="accent1"/>
+          </a:effectRef>
+          <a:fontRef idx="minor">
+            <a:schemeClr val="lt1"/>
+          </a:fontRef>
+        </p:style>
+        <p:txBody>
+          <a:bodyPr rtlCol="0" anchor="ctr" wrap="square" lIns="274320" rIns="274320">
             <a:noAutofit/>
           </a:bodyPr>
           <a:lstStyle/>
           <a:p>
             <a:pPr algn="ctr"/>
             <a:r>
-              <a:rPr sz="5400" b="1">
-                <a:solidFill>
-                  <a:srgbClr val="FFFFFF"/>
-                </a:solidFill>
-                <a:latin typeface="Yu Gothic"/>
-                <a:ea typeface="Yu Gothic"/>
-                <a:cs typeface="Yu Gothic"/>
-              </a:rPr>
-              <a:t>「本人らしさ」は作られる</a:t>
-            </a:r>
-          </a:p>
-        </p:txBody>
-      </p:sp>
-      <p:sp>
-        <p:nvSpPr>
-          <p:cNvPr id="5" name="TextBox 4"/>
-          <p:cNvSpPr txBox="1"/>
-          <p:nvPr/>
-        </p:nvSpPr>
-        <p:spPr>
-          <a:xfrm>
-            <a:off x="685800" y="3977639"/>
-            <a:ext cx="10820095" cy="868680"/>
-          </a:xfrm>
-          <a:prstGeom prst="rect">
-            <a:avLst/>
-          </a:prstGeom>
-          <a:noFill/>
-        </p:spPr>
-        <p:txBody>
-          <a:bodyPr wrap="square" anchor="ctr">
-            <a:noAutofit/>
-          </a:bodyPr>
-          <a:lstStyle/>
-          <a:p>
-            <a:pPr algn="ctr"/>
-            <a:r>
-              <a:rPr sz="2400" b="0">
-                <a:solidFill>
-                  <a:srgbClr val="BCBDC0"/>
-                </a:solidFill>
-                <a:latin typeface="Yu Gothic"/>
-                <a:ea typeface="Yu Gothic"/>
-                <a:cs typeface="Yu Gothic"/>
-              </a:rPr>
-              <a:t>クローン音声・ライブAI対話</a:t>
+              <a:rPr sz="2600" b="1">
+                <a:solidFill>
+                  <a:srgbClr val="20242C"/>
+                </a:solidFill>
+                <a:latin typeface="Yu Gothic"/>
+                <a:ea typeface="Yu Gothic"/>
+                <a:cs typeface="Yu Gothic"/>
+              </a:rPr>
+              <a:t>私の声ですらこれです。ご家族の声なら、どうでしょうか</a:t>
             </a:r>
           </a:p>
         </p:txBody>
@@ -9701,7 +9750,7 @@
             <a:r>
               <a:rPr sz="1200" b="0">
                 <a:solidFill>
-                  <a:srgbClr val="9AA3B2"/>
+                  <a:srgbClr val="5C6472"/>
                 </a:solidFill>
                 <a:latin typeface="Yu Gothic"/>
                 <a:ea typeface="Yu Gothic"/>
@@ -9738,7 +9787,7 @@
             <a:r>
               <a:rPr sz="1200" b="0">
                 <a:solidFill>
-                  <a:srgbClr val="9AA3B2"/>
+                  <a:srgbClr val="5C6472"/>
                 </a:solidFill>
                 <a:latin typeface="Yu Gothic"/>
                 <a:ea typeface="Yu Gothic"/>
@@ -9791,7 +9840,7 @@
           <a:p>
             <a:pPr algn="l"/>
             <a:r>
-              <a:rPr sz="4000" b="1">
+              <a:rPr sz="3600" b="1">
                 <a:solidFill>
                   <a:srgbClr val="B9791F"/>
                 </a:solidFill>
@@ -9799,7 +9848,7 @@
                 <a:ea typeface="Yu Gothic"/>
                 <a:cs typeface="Yu Gothic"/>
               </a:rPr>
-              <a:t>実演①　偽の「私」の声</a:t>
+              <a:t>実演②　AIは相手に合わせて話し方を変える</a:t>
             </a:r>
           </a:p>
         </p:txBody>
@@ -9857,7 +9906,7 @@
         <p:spPr>
           <a:xfrm>
             <a:off x="685800" y="1645920"/>
-            <a:ext cx="10820095" cy="3401568"/>
+            <a:ext cx="10820095" cy="4343400"/>
           </a:xfrm>
           <a:prstGeom prst="rect">
             <a:avLst/>
@@ -9887,7 +9936,7 @@
                 <a:ea typeface="Yu Gothic"/>
                 <a:cs typeface="Yu Gothic"/>
               </a:rPr>
-              <a:t>・私の声をAIに数十秒だけ学ばせて作った「偽の私」（本人同意・AI生成明示）</a:t>
+              <a:t>・会場からの予想外のひと言で、AIの言い方がその場で変わる</a:t>
             </a:r>
           </a:p>
           <a:p>
@@ -9905,73 +9954,14 @@
                 <a:ea typeface="Yu Gothic"/>
                 <a:cs typeface="Yu Gothic"/>
               </a:rPr>
-              <a:t>・毎日いっしょに働く同僚でも、電話では分からないと言った</a:t>
-            </a:r>
-          </a:p>
-        </p:txBody>
-      </p:sp>
-      <p:sp>
-        <p:nvSpPr>
-          <p:cNvPr id="5" name="Rounded Rectangle 4"/>
-          <p:cNvSpPr/>
-          <p:nvPr/>
-        </p:nvSpPr>
-        <p:spPr>
-          <a:xfrm>
-            <a:off x="685800" y="5212080"/>
-            <a:ext cx="10820095" cy="777240"/>
-          </a:xfrm>
-          <a:prstGeom prst="roundRect">
-            <a:avLst>
-              <a:gd name="adj" fmla="val 16000"/>
-            </a:avLst>
-          </a:prstGeom>
-          <a:solidFill>
-            <a:srgbClr val="F3E6CF"/>
-          </a:solidFill>
-          <a:ln>
-            <a:noFill/>
-          </a:ln>
-          <a:effectLst/>
-        </p:spPr>
-        <p:style>
-          <a:lnRef idx="1">
-            <a:schemeClr val="accent1"/>
-          </a:lnRef>
-          <a:fillRef idx="3">
-            <a:schemeClr val="accent1"/>
-          </a:fillRef>
-          <a:effectRef idx="2">
-            <a:schemeClr val="accent1"/>
-          </a:effectRef>
-          <a:fontRef idx="minor">
-            <a:schemeClr val="lt1"/>
-          </a:fontRef>
-        </p:style>
-        <p:txBody>
-          <a:bodyPr rtlCol="0" anchor="ctr" wrap="square" lIns="274320" rIns="274320">
-            <a:noAutofit/>
-          </a:bodyPr>
-          <a:lstStyle/>
-          <a:p>
-            <a:pPr algn="ctr"/>
-            <a:r>
-              <a:rPr sz="2600" b="1">
-                <a:solidFill>
-                  <a:srgbClr val="20242C"/>
-                </a:solidFill>
-                <a:latin typeface="Yu Gothic"/>
-                <a:ea typeface="Yu Gothic"/>
-                <a:cs typeface="Yu Gothic"/>
-              </a:rPr>
-              <a:t>私の声ですらこれです。ご家族の声なら、どうでしょうか</a:t>
-            </a:r>
-          </a:p>
-        </p:txBody>
-      </p:sp>
-      <p:sp>
-        <p:nvSpPr>
-          <p:cNvPr id="6" name="meta:pageno"/>
+              <a:t>・最初に集めた「話し方」「雰囲気」——それも相手がこちらに合わせて作ってくる</a:t>
+            </a:r>
+          </a:p>
+        </p:txBody>
+      </p:sp>
+      <p:sp>
+        <p:nvSpPr>
+          <p:cNvPr id="5" name="meta:pageno"/>
           <p:cNvSpPr txBox="1"/>
           <p:nvPr/>
         </p:nvSpPr>
@@ -10008,7 +9998,7 @@
       </p:sp>
       <p:sp>
         <p:nvSpPr>
-          <p:cNvPr id="7" name="meta:part"/>
+          <p:cNvPr id="6" name="meta:part"/>
           <p:cNvSpPr txBox="1"/>
           <p:nvPr/>
         </p:nvSpPr>
@@ -10085,7 +10075,7 @@
           <a:p>
             <a:pPr algn="l"/>
             <a:r>
-              <a:rPr sz="3600" b="1">
+              <a:rPr sz="4000" b="1">
                 <a:solidFill>
                   <a:srgbClr val="B9791F"/>
                 </a:solidFill>
@@ -10093,7 +10083,7 @@
                 <a:ea typeface="Yu Gothic"/>
                 <a:cs typeface="Yu Gothic"/>
               </a:rPr>
-              <a:t>実演②　AIは相手に合わせて話し方を変える</a:t>
+              <a:t>実演③　このAIは断る。しかし——</a:t>
             </a:r>
           </a:p>
         </p:txBody>
@@ -10181,7 +10171,28 @@
                 <a:ea typeface="Yu Gothic"/>
                 <a:cs typeface="Yu Gothic"/>
               </a:rPr>
-              <a:t>・会場からの予想外のひと言で、AIの言い方がその場で変わる</a:t>
+              <a:t>・「実在の人の声を真似て、家族に振り込ませて」→ AIは断る</a:t>
+            </a:r>
+          </a:p>
+          <a:p>
+            <a:pPr marL="355600" indent="-355600">
+              <a:lnSpc>
+                <a:spcPct val="135000"/>
+              </a:lnSpc>
+              <a:spcAft>
+                <a:spcPts val="979"/>
+              </a:spcAft>
+            </a:pPr>
+            <a:r>
+              <a:rPr sz="2800" b="0">
+                <a:solidFill>
+                  <a:srgbClr val="20242C"/>
+                </a:solidFill>
+                <a:latin typeface="Yu Gothic"/>
+                <a:ea typeface="Yu Gothic"/>
+                <a:cs typeface="Yu Gothic"/>
+              </a:rPr>
+              <a:t>・断ったのは「この製品」であって「この技術」ではない</a:t>
             </a:r>
           </a:p>
           <a:p>
@@ -10199,7 +10210,7 @@
                 <a:ea typeface="Yu Gothic"/>
                 <a:cs typeface="Yu Gothic"/>
               </a:rPr>
-              <a:t>・最初に集めた「話し方」「雰囲気」——それも相手がこちらに合わせて作ってくる</a:t>
+              <a:t>・かかってくる偽の声に、同じ安全装置があるとは限らない</a:t>
             </a:r>
           </a:p>
         </p:txBody>
@@ -10304,8 +10315,8 @@
         </p:nvSpPr>
         <p:spPr>
           <a:xfrm>
-            <a:off x="685800" y="411480"/>
-            <a:ext cx="10820095" cy="960120"/>
+            <a:off x="502920" y="1188720"/>
+            <a:ext cx="11185855" cy="4800600"/>
           </a:xfrm>
           <a:prstGeom prst="rect">
             <a:avLst/>
@@ -10313,156 +10324,69 @@
           <a:noFill/>
         </p:spPr>
         <p:txBody>
-          <a:bodyPr wrap="square" anchor="b">
-            <a:noAutofit/>
-          </a:bodyPr>
-          <a:lstStyle/>
-          <a:p>
-            <a:pPr algn="l"/>
-            <a:r>
-              <a:rPr sz="4000" b="1">
-                <a:solidFill>
-                  <a:srgbClr val="B9791F"/>
-                </a:solidFill>
-                <a:latin typeface="Yu Gothic"/>
-                <a:ea typeface="Yu Gothic"/>
-                <a:cs typeface="Yu Gothic"/>
-              </a:rPr>
-              <a:t>実演③　このAIは断る。しかし——</a:t>
-            </a:r>
-          </a:p>
-        </p:txBody>
-      </p:sp>
-      <p:sp>
-        <p:nvSpPr>
-          <p:cNvPr id="3" name="Rectangle 2"/>
-          <p:cNvSpPr/>
-          <p:nvPr/>
-        </p:nvSpPr>
-        <p:spPr>
-          <a:xfrm>
-            <a:off x="685800" y="1463040"/>
-            <a:ext cx="2377440" cy="50292"/>
-          </a:xfrm>
-          <a:prstGeom prst="rect">
-            <a:avLst/>
-          </a:prstGeom>
-          <a:solidFill>
-            <a:srgbClr val="B9791F"/>
-          </a:solidFill>
-          <a:ln>
-            <a:noFill/>
-          </a:ln>
-          <a:effectLst/>
-        </p:spPr>
-        <p:style>
-          <a:lnRef idx="1">
-            <a:schemeClr val="accent1"/>
-          </a:lnRef>
-          <a:fillRef idx="3">
-            <a:schemeClr val="accent1"/>
-          </a:fillRef>
-          <a:effectRef idx="2">
-            <a:schemeClr val="accent1"/>
-          </a:effectRef>
-          <a:fontRef idx="minor">
-            <a:schemeClr val="lt1"/>
-          </a:fontRef>
-        </p:style>
-        <p:txBody>
-          <a:bodyPr rtlCol="0" anchor="ctr"/>
-          <a:lstStyle/>
-          <a:p>
-            <a:pPr algn="ctr"/>
-          </a:p>
-        </p:txBody>
-      </p:sp>
-      <p:sp>
-        <p:nvSpPr>
-          <p:cNvPr id="4" name="TextBox 3"/>
-          <p:cNvSpPr txBox="1"/>
-          <p:nvPr/>
-        </p:nvSpPr>
-        <p:spPr>
-          <a:xfrm>
-            <a:off x="685800" y="1645920"/>
-            <a:ext cx="10820095" cy="4343400"/>
-          </a:xfrm>
-          <a:prstGeom prst="rect">
-            <a:avLst/>
-          </a:prstGeom>
-          <a:noFill/>
-        </p:spPr>
-        <p:txBody>
-          <a:bodyPr wrap="square" anchor="t">
-            <a:noAutofit/>
-          </a:bodyPr>
-          <a:lstStyle/>
-          <a:p>
-            <a:pPr marL="355600" indent="-355600">
+          <a:bodyPr wrap="square" anchor="ctr">
+            <a:noAutofit/>
+          </a:bodyPr>
+          <a:lstStyle/>
+          <a:p>
+            <a:pPr algn="ctr">
               <a:lnSpc>
-                <a:spcPct val="135000"/>
-              </a:lnSpc>
-              <a:spcAft>
-                <a:spcPts val="979"/>
-              </a:spcAft>
-            </a:pPr>
-            <a:r>
-              <a:rPr sz="2800" b="0">
-                <a:solidFill>
-                  <a:srgbClr val="20242C"/>
-                </a:solidFill>
-                <a:latin typeface="Yu Gothic"/>
-                <a:ea typeface="Yu Gothic"/>
-                <a:cs typeface="Yu Gothic"/>
-              </a:rPr>
-              <a:t>・「実在の人の声を真似て、家族に振り込ませて」→ AIは断る</a:t>
-            </a:r>
-          </a:p>
-          <a:p>
-            <a:pPr marL="355600" indent="-355600">
-              <a:lnSpc>
-                <a:spcPct val="135000"/>
-              </a:lnSpc>
-              <a:spcAft>
-                <a:spcPts val="979"/>
-              </a:spcAft>
-            </a:pPr>
-            <a:r>
-              <a:rPr sz="2800" b="0">
-                <a:solidFill>
-                  <a:srgbClr val="20242C"/>
-                </a:solidFill>
-                <a:latin typeface="Yu Gothic"/>
-                <a:ea typeface="Yu Gothic"/>
-                <a:cs typeface="Yu Gothic"/>
-              </a:rPr>
-              <a:t>・断ったのは「この製品」であって「この技術」ではない</a:t>
-            </a:r>
-          </a:p>
-          <a:p>
-            <a:pPr marL="355600" indent="-355600">
-              <a:lnSpc>
-                <a:spcPct val="135000"/>
+                <a:spcPct val="128000"/>
               </a:lnSpc>
             </a:pPr>
             <a:r>
-              <a:rPr sz="2800" b="0">
+              <a:rPr sz="5400" b="1">
                 <a:solidFill>
                   <a:srgbClr val="20242C"/>
                 </a:solidFill>
-                <a:latin typeface="Yu Gothic"/>
-                <a:ea typeface="Yu Gothic"/>
-                <a:cs typeface="Yu Gothic"/>
-              </a:rPr>
-              <a:t>・かかってくる偽の声に、同じ安全装置があるとは限らない</a:t>
-            </a:r>
-          </a:p>
-        </p:txBody>
-      </p:sp>
-      <p:sp>
-        <p:nvSpPr>
-          <p:cNvPr id="5" name="meta:pageno"/>
+                <a:latin typeface="Yu Mincho"/>
+                <a:ea typeface="Yu Mincho"/>
+                <a:cs typeface="Yu Mincho"/>
+              </a:rPr>
+              <a:t>番号も、顔も、声も、</a:t>
+            </a:r>
+          </a:p>
+          <a:p>
+            <a:pPr algn="ctr">
+              <a:lnSpc>
+                <a:spcPct val="128000"/>
+              </a:lnSpc>
+            </a:pPr>
+            <a:r>
+              <a:rPr sz="5400" b="1">
+                <a:solidFill>
+                  <a:srgbClr val="20242C"/>
+                </a:solidFill>
+                <a:latin typeface="Yu Mincho"/>
+                <a:ea typeface="Yu Mincho"/>
+                <a:cs typeface="Yu Mincho"/>
+              </a:rPr>
+              <a:t>話し方も偽れる。</a:t>
+            </a:r>
+          </a:p>
+          <a:p>
+            <a:pPr algn="ctr">
+              <a:lnSpc>
+                <a:spcPct val="128000"/>
+              </a:lnSpc>
+            </a:pPr>
+            <a:r>
+              <a:rPr sz="5400" b="1">
+                <a:solidFill>
+                  <a:srgbClr val="20242C"/>
+                </a:solidFill>
+                <a:latin typeface="Yu Mincho"/>
+                <a:ea typeface="Yu Mincho"/>
+                <a:cs typeface="Yu Mincho"/>
+              </a:rPr>
+              <a:t>では、何で見分けますか？</a:t>
+            </a:r>
+          </a:p>
+        </p:txBody>
+      </p:sp>
+      <p:sp>
+        <p:nvSpPr>
+          <p:cNvPr id="3" name="meta:pageno"/>
           <p:cNvSpPr txBox="1"/>
           <p:nvPr/>
         </p:nvSpPr>
@@ -10499,7 +10423,7 @@
       </p:sp>
       <p:sp>
         <p:nvSpPr>
-          <p:cNvPr id="6" name="meta:part"/>
+          <p:cNvPr id="4" name="meta:part"/>
           <p:cNvSpPr txBox="1"/>
           <p:nvPr/>
         </p:nvSpPr>
@@ -10560,8 +10484,8 @@
         </p:nvSpPr>
         <p:spPr>
           <a:xfrm>
-            <a:off x="502920" y="1188720"/>
-            <a:ext cx="11185855" cy="4800600"/>
+            <a:off x="685800" y="411480"/>
+            <a:ext cx="10820095" cy="960120"/>
           </a:xfrm>
           <a:prstGeom prst="rect">
             <a:avLst/>
@@ -10569,69 +10493,194 @@
           <a:noFill/>
         </p:spPr>
         <p:txBody>
-          <a:bodyPr wrap="square" anchor="ctr">
-            <a:noAutofit/>
-          </a:bodyPr>
-          <a:lstStyle/>
-          <a:p>
-            <a:pPr algn="ctr">
+          <a:bodyPr wrap="square" anchor="b">
+            <a:noAutofit/>
+          </a:bodyPr>
+          <a:lstStyle/>
+          <a:p>
+            <a:pPr algn="l"/>
+            <a:r>
+              <a:rPr sz="4000" b="1">
+                <a:solidFill>
+                  <a:srgbClr val="B9791F"/>
+                </a:solidFill>
+                <a:latin typeface="Yu Gothic"/>
+                <a:ea typeface="Yu Gothic"/>
+                <a:cs typeface="Yu Gothic"/>
+              </a:rPr>
+              <a:t>手がかりは、全部裏切られた</a:t>
+            </a:r>
+          </a:p>
+        </p:txBody>
+      </p:sp>
+      <p:sp>
+        <p:nvSpPr>
+          <p:cNvPr id="3" name="Rectangle 2"/>
+          <p:cNvSpPr/>
+          <p:nvPr/>
+        </p:nvSpPr>
+        <p:spPr>
+          <a:xfrm>
+            <a:off x="685800" y="1463040"/>
+            <a:ext cx="2377440" cy="50292"/>
+          </a:xfrm>
+          <a:prstGeom prst="rect">
+            <a:avLst/>
+          </a:prstGeom>
+          <a:solidFill>
+            <a:srgbClr val="B9791F"/>
+          </a:solidFill>
+          <a:ln>
+            <a:noFill/>
+          </a:ln>
+          <a:effectLst/>
+        </p:spPr>
+        <p:style>
+          <a:lnRef idx="1">
+            <a:schemeClr val="accent1"/>
+          </a:lnRef>
+          <a:fillRef idx="3">
+            <a:schemeClr val="accent1"/>
+          </a:fillRef>
+          <a:effectRef idx="2">
+            <a:schemeClr val="accent1"/>
+          </a:effectRef>
+          <a:fontRef idx="minor">
+            <a:schemeClr val="lt1"/>
+          </a:fontRef>
+        </p:style>
+        <p:txBody>
+          <a:bodyPr rtlCol="0" anchor="ctr"/>
+          <a:lstStyle/>
+          <a:p>
+            <a:pPr algn="ctr"/>
+          </a:p>
+        </p:txBody>
+      </p:sp>
+      <p:sp>
+        <p:nvSpPr>
+          <p:cNvPr id="4" name="TextBox 3"/>
+          <p:cNvSpPr txBox="1"/>
+          <p:nvPr/>
+        </p:nvSpPr>
+        <p:spPr>
+          <a:xfrm>
+            <a:off x="685800" y="1645920"/>
+            <a:ext cx="10820095" cy="3401568"/>
+          </a:xfrm>
+          <a:prstGeom prst="rect">
+            <a:avLst/>
+          </a:prstGeom>
+          <a:noFill/>
+        </p:spPr>
+        <p:txBody>
+          <a:bodyPr wrap="square" anchor="t">
+            <a:noAutofit/>
+          </a:bodyPr>
+          <a:lstStyle/>
+          <a:p>
+            <a:pPr marL="355600" indent="-355600">
               <a:lnSpc>
-                <a:spcPct val="128000"/>
+                <a:spcPct val="135000"/>
+              </a:lnSpc>
+              <a:spcAft>
+                <a:spcPts val="979"/>
+              </a:spcAft>
+            </a:pPr>
+            <a:r>
+              <a:rPr sz="2800" b="0">
+                <a:solidFill>
+                  <a:srgbClr val="20242C"/>
+                </a:solidFill>
+                <a:latin typeface="Yu Gothic"/>
+                <a:ea typeface="Yu Gothic"/>
+                <a:cs typeface="Yu Gothic"/>
+              </a:rPr>
+              <a:t>・最初に集めた手がかり——声・話し方・内容・雰囲気・番号（板書を再掲）</a:t>
+            </a:r>
+          </a:p>
+          <a:p>
+            <a:pPr marL="355600" indent="-355600">
+              <a:lnSpc>
+                <a:spcPct val="135000"/>
               </a:lnSpc>
             </a:pPr>
             <a:r>
-              <a:rPr sz="5400" b="1">
+              <a:rPr sz="2800" b="0">
                 <a:solidFill>
                   <a:srgbClr val="20242C"/>
                 </a:solidFill>
-                <a:latin typeface="Yu Mincho"/>
-                <a:ea typeface="Yu Mincho"/>
-                <a:cs typeface="Yu Mincho"/>
-              </a:rPr>
-              <a:t>番号も、顔も、声も、</a:t>
-            </a:r>
-          </a:p>
-          <a:p>
-            <a:pPr algn="ctr">
-              <a:lnSpc>
-                <a:spcPct val="128000"/>
-              </a:lnSpc>
-            </a:pPr>
-            <a:r>
-              <a:rPr sz="5400" b="1">
+                <a:latin typeface="Yu Gothic"/>
+                <a:ea typeface="Yu Gothic"/>
+                <a:cs typeface="Yu Gothic"/>
+              </a:rPr>
+              <a:t>・見分ける勝負は、完璧な偽物を作れる側が必ず勝つ</a:t>
+            </a:r>
+          </a:p>
+        </p:txBody>
+      </p:sp>
+      <p:sp>
+        <p:nvSpPr>
+          <p:cNvPr id="5" name="Rounded Rectangle 4"/>
+          <p:cNvSpPr/>
+          <p:nvPr/>
+        </p:nvSpPr>
+        <p:spPr>
+          <a:xfrm>
+            <a:off x="685800" y="5212080"/>
+            <a:ext cx="10820095" cy="777240"/>
+          </a:xfrm>
+          <a:prstGeom prst="roundRect">
+            <a:avLst>
+              <a:gd name="adj" fmla="val 16000"/>
+            </a:avLst>
+          </a:prstGeom>
+          <a:solidFill>
+            <a:srgbClr val="F3E6CF"/>
+          </a:solidFill>
+          <a:ln>
+            <a:noFill/>
+          </a:ln>
+          <a:effectLst/>
+        </p:spPr>
+        <p:style>
+          <a:lnRef idx="1">
+            <a:schemeClr val="accent1"/>
+          </a:lnRef>
+          <a:fillRef idx="3">
+            <a:schemeClr val="accent1"/>
+          </a:fillRef>
+          <a:effectRef idx="2">
+            <a:schemeClr val="accent1"/>
+          </a:effectRef>
+          <a:fontRef idx="minor">
+            <a:schemeClr val="lt1"/>
+          </a:fontRef>
+        </p:style>
+        <p:txBody>
+          <a:bodyPr rtlCol="0" anchor="ctr" wrap="square" lIns="274320" rIns="274320">
+            <a:noAutofit/>
+          </a:bodyPr>
+          <a:lstStyle/>
+          <a:p>
+            <a:pPr algn="ctr"/>
+            <a:r>
+              <a:rPr sz="2600" b="1">
                 <a:solidFill>
                   <a:srgbClr val="20242C"/>
                 </a:solidFill>
-                <a:latin typeface="Yu Mincho"/>
-                <a:ea typeface="Yu Mincho"/>
-                <a:cs typeface="Yu Mincho"/>
-              </a:rPr>
-              <a:t>話し方も偽れる。</a:t>
-            </a:r>
-          </a:p>
-          <a:p>
-            <a:pPr algn="ctr">
-              <a:lnSpc>
-                <a:spcPct val="128000"/>
-              </a:lnSpc>
-            </a:pPr>
-            <a:r>
-              <a:rPr sz="5400" b="1">
-                <a:solidFill>
-                  <a:srgbClr val="20242C"/>
-                </a:solidFill>
-                <a:latin typeface="Yu Mincho"/>
-                <a:ea typeface="Yu Mincho"/>
-                <a:cs typeface="Yu Mincho"/>
-              </a:rPr>
-              <a:t>では、何で見分けますか？</a:t>
-            </a:r>
-          </a:p>
-        </p:txBody>
-      </p:sp>
-      <p:sp>
-        <p:nvSpPr>
-          <p:cNvPr id="3" name="meta:pageno"/>
+                <a:latin typeface="Yu Gothic"/>
+                <a:ea typeface="Yu Gothic"/>
+                <a:cs typeface="Yu Gothic"/>
+              </a:rPr>
+              <a:t>だから——手がかりで見分けること自体を、やめる</a:t>
+            </a:r>
+          </a:p>
+        </p:txBody>
+      </p:sp>
+      <p:sp>
+        <p:nvSpPr>
+          <p:cNvPr id="6" name="meta:pageno"/>
           <p:cNvSpPr txBox="1"/>
           <p:nvPr/>
         </p:nvSpPr>
@@ -10668,7 +10717,7 @@
       </p:sp>
       <p:sp>
         <p:nvSpPr>
-          <p:cNvPr id="4" name="meta:part"/>
+          <p:cNvPr id="7" name="meta:part"/>
           <p:cNvSpPr txBox="1"/>
           <p:nvPr/>
         </p:nvSpPr>
@@ -10698,7 +10747,7 @@
                 <a:ea typeface="Yu Gothic"/>
                 <a:cs typeface="Yu Gothic"/>
               </a:rPr>
-              <a:t>3 実演</a:t>
+              <a:t>4 結論</a:t>
             </a:r>
           </a:p>
         </p:txBody>
@@ -10753,7 +10802,7 @@
                 <a:ea typeface="Yu Gothic"/>
                 <a:cs typeface="Yu Gothic"/>
               </a:rPr>
-              <a:t>手がかりは、全部裏切られた</a:t>
+              <a:t>守り方は 3つ</a:t>
             </a:r>
           </a:p>
         </p:txBody>
@@ -10811,7 +10860,7 @@
         <p:spPr>
           <a:xfrm>
             <a:off x="685800" y="1645920"/>
-            <a:ext cx="10820095" cy="3401568"/>
+            <a:ext cx="3931920" cy="457200"/>
           </a:xfrm>
           <a:prstGeom prst="rect">
             <a:avLst/>
@@ -10819,39 +10868,59 @@
           <a:noFill/>
         </p:spPr>
         <p:txBody>
-          <a:bodyPr wrap="square" anchor="t">
-            <a:noAutofit/>
-          </a:bodyPr>
-          <a:lstStyle/>
-          <a:p>
-            <a:pPr marL="355600" indent="-355600">
+          <a:bodyPr wrap="square" anchor="ctr">
+            <a:noAutofit/>
+          </a:bodyPr>
+          <a:lstStyle/>
+          <a:p>
+            <a:pPr algn="l">
               <a:lnSpc>
-                <a:spcPct val="135000"/>
-              </a:lnSpc>
-              <a:spcAft>
-                <a:spcPts val="979"/>
-              </a:spcAft>
-            </a:pPr>
-            <a:r>
-              <a:rPr sz="2800" b="0">
-                <a:solidFill>
-                  <a:srgbClr val="20242C"/>
-                </a:solidFill>
-                <a:latin typeface="Yu Gothic"/>
-                <a:ea typeface="Yu Gothic"/>
-                <a:cs typeface="Yu Gothic"/>
-              </a:rPr>
-              <a:t>・最初に集めた手がかり——声・話し方・内容・雰囲気・番号（板書を再掲）</a:t>
-            </a:r>
-          </a:p>
-          <a:p>
-            <a:pPr marL="355600" indent="-355600">
-              <a:lnSpc>
-                <a:spcPct val="135000"/>
+                <a:spcPct val="115000"/>
               </a:lnSpc>
             </a:pPr>
             <a:r>
-              <a:rPr sz="2800" b="0">
+              <a:rPr sz="2000" b="1">
+                <a:solidFill>
+                  <a:srgbClr val="B9791F"/>
+                </a:solidFill>
+                <a:latin typeface="Yu Gothic"/>
+                <a:ea typeface="Yu Gothic"/>
+                <a:cs typeface="Yu Gothic"/>
+              </a:rPr>
+              <a:t>①【鳴る前】</a:t>
+            </a:r>
+          </a:p>
+        </p:txBody>
+      </p:sp>
+      <p:sp>
+        <p:nvSpPr>
+          <p:cNvPr id="5" name="TextBox 4"/>
+          <p:cNvSpPr txBox="1"/>
+          <p:nvPr/>
+        </p:nvSpPr>
+        <p:spPr>
+          <a:xfrm>
+            <a:off x="4892040" y="1645920"/>
+            <a:ext cx="6613855" cy="457200"/>
+          </a:xfrm>
+          <a:prstGeom prst="rect">
+            <a:avLst/>
+          </a:prstGeom>
+          <a:noFill/>
+        </p:spPr>
+        <p:txBody>
+          <a:bodyPr wrap="square" anchor="ctr">
+            <a:noAutofit/>
+          </a:bodyPr>
+          <a:lstStyle/>
+          <a:p>
+            <a:pPr algn="l">
+              <a:lnSpc>
+                <a:spcPct val="120000"/>
+              </a:lnSpc>
+            </a:pPr>
+            <a:r>
+              <a:rPr sz="3000" b="1">
                 <a:solidFill>
                   <a:srgbClr val="20242C"/>
                 </a:solidFill>
@@ -10859,14 +10928,301 @@
                 <a:ea typeface="Yu Gothic"/>
                 <a:cs typeface="Yu Gothic"/>
               </a:rPr>
-              <a:t>・見分ける勝負は、完璧な偽物を作れる側が必ず勝つ</a:t>
-            </a:r>
-          </a:p>
-        </p:txBody>
-      </p:sp>
-      <p:sp>
-        <p:nvSpPr>
-          <p:cNvPr id="5" name="Rounded Rectangle 4"/>
+              <a:t>怪しい電話を防ぐ</a:t>
+            </a:r>
+          </a:p>
+        </p:txBody>
+      </p:sp>
+      <p:sp>
+        <p:nvSpPr>
+          <p:cNvPr id="6" name="TextBox 5"/>
+          <p:cNvSpPr txBox="1"/>
+          <p:nvPr/>
+        </p:nvSpPr>
+        <p:spPr>
+          <a:xfrm>
+            <a:off x="4892040" y="2139696"/>
+            <a:ext cx="6613855" cy="645668"/>
+          </a:xfrm>
+          <a:prstGeom prst="rect">
+            <a:avLst/>
+          </a:prstGeom>
+          <a:noFill/>
+        </p:spPr>
+        <p:txBody>
+          <a:bodyPr wrap="square" anchor="t">
+            <a:noAutofit/>
+          </a:bodyPr>
+          <a:lstStyle/>
+          <a:p>
+            <a:pPr algn="l">
+              <a:lnSpc>
+                <a:spcPct val="130000"/>
+              </a:lnSpc>
+            </a:pPr>
+            <a:r>
+              <a:rPr sz="1900" b="0">
+                <a:solidFill>
+                  <a:srgbClr val="5C6472"/>
+                </a:solidFill>
+                <a:latin typeface="Yu Gothic"/>
+                <a:ea typeface="Yu Gothic"/>
+                <a:cs typeface="Yu Gothic"/>
+              </a:rPr>
+              <a:t>固定電話は国際電話の利用休止／スマホは迷惑電話対策アプリ</a:t>
+            </a:r>
+          </a:p>
+        </p:txBody>
+      </p:sp>
+      <p:sp>
+        <p:nvSpPr>
+          <p:cNvPr id="7" name="TextBox 6"/>
+          <p:cNvSpPr txBox="1"/>
+          <p:nvPr/>
+        </p:nvSpPr>
+        <p:spPr>
+          <a:xfrm>
+            <a:off x="685800" y="2933827"/>
+            <a:ext cx="3931920" cy="457200"/>
+          </a:xfrm>
+          <a:prstGeom prst="rect">
+            <a:avLst/>
+          </a:prstGeom>
+          <a:noFill/>
+        </p:spPr>
+        <p:txBody>
+          <a:bodyPr wrap="square" anchor="ctr">
+            <a:noAutofit/>
+          </a:bodyPr>
+          <a:lstStyle/>
+          <a:p>
+            <a:pPr algn="l">
+              <a:lnSpc>
+                <a:spcPct val="115000"/>
+              </a:lnSpc>
+            </a:pPr>
+            <a:r>
+              <a:rPr sz="2000" b="1">
+                <a:solidFill>
+                  <a:srgbClr val="B9791F"/>
+                </a:solidFill>
+                <a:latin typeface="Yu Gothic"/>
+                <a:ea typeface="Yu Gothic"/>
+                <a:cs typeface="Yu Gothic"/>
+              </a:rPr>
+              <a:t>②【警察・お金の話が出たら】</a:t>
+            </a:r>
+          </a:p>
+        </p:txBody>
+      </p:sp>
+      <p:sp>
+        <p:nvSpPr>
+          <p:cNvPr id="8" name="TextBox 7"/>
+          <p:cNvSpPr txBox="1"/>
+          <p:nvPr/>
+        </p:nvSpPr>
+        <p:spPr>
+          <a:xfrm>
+            <a:off x="4892040" y="2933827"/>
+            <a:ext cx="6613855" cy="457200"/>
+          </a:xfrm>
+          <a:prstGeom prst="rect">
+            <a:avLst/>
+          </a:prstGeom>
+          <a:noFill/>
+        </p:spPr>
+        <p:txBody>
+          <a:bodyPr wrap="square" anchor="ctr">
+            <a:noAutofit/>
+          </a:bodyPr>
+          <a:lstStyle/>
+          <a:p>
+            <a:pPr algn="l">
+              <a:lnSpc>
+                <a:spcPct val="120000"/>
+              </a:lnSpc>
+            </a:pPr>
+            <a:r>
+              <a:rPr sz="3000" b="1">
+                <a:solidFill>
+                  <a:srgbClr val="20242C"/>
+                </a:solidFill>
+                <a:latin typeface="Yu Gothic"/>
+                <a:ea typeface="Yu Gothic"/>
+                <a:cs typeface="Yu Gothic"/>
+              </a:rPr>
+              <a:t>番号や映像を信じず、切る</a:t>
+            </a:r>
+          </a:p>
+        </p:txBody>
+      </p:sp>
+      <p:sp>
+        <p:nvSpPr>
+          <p:cNvPr id="9" name="TextBox 8"/>
+          <p:cNvSpPr txBox="1"/>
+          <p:nvPr/>
+        </p:nvSpPr>
+        <p:spPr>
+          <a:xfrm>
+            <a:off x="4892040" y="3427603"/>
+            <a:ext cx="6613855" cy="331977"/>
+          </a:xfrm>
+          <a:prstGeom prst="rect">
+            <a:avLst/>
+          </a:prstGeom>
+          <a:noFill/>
+        </p:spPr>
+        <p:txBody>
+          <a:bodyPr wrap="square" anchor="t">
+            <a:noAutofit/>
+          </a:bodyPr>
+          <a:lstStyle/>
+          <a:p>
+            <a:pPr algn="l">
+              <a:lnSpc>
+                <a:spcPct val="130000"/>
+              </a:lnSpc>
+            </a:pPr>
+            <a:r>
+              <a:rPr sz="1900" b="0">
+                <a:solidFill>
+                  <a:srgbClr val="5C6472"/>
+                </a:solidFill>
+                <a:latin typeface="Yu Gothic"/>
+                <a:ea typeface="Yu Gothic"/>
+                <a:cs typeface="Yu Gothic"/>
+              </a:rPr>
+              <a:t>「誰にも言うな」「ATM」「ギフトカード」は即切りの合図</a:t>
+            </a:r>
+          </a:p>
+        </p:txBody>
+      </p:sp>
+      <p:sp>
+        <p:nvSpPr>
+          <p:cNvPr id="10" name="TextBox 9"/>
+          <p:cNvSpPr txBox="1"/>
+          <p:nvPr/>
+        </p:nvSpPr>
+        <p:spPr>
+          <a:xfrm>
+            <a:off x="685800" y="3908044"/>
+            <a:ext cx="3931920" cy="457200"/>
+          </a:xfrm>
+          <a:prstGeom prst="rect">
+            <a:avLst/>
+          </a:prstGeom>
+          <a:noFill/>
+        </p:spPr>
+        <p:txBody>
+          <a:bodyPr wrap="square" anchor="ctr">
+            <a:noAutofit/>
+          </a:bodyPr>
+          <a:lstStyle/>
+          <a:p>
+            <a:pPr algn="l">
+              <a:lnSpc>
+                <a:spcPct val="115000"/>
+              </a:lnSpc>
+            </a:pPr>
+            <a:r>
+              <a:rPr sz="2000" b="1">
+                <a:solidFill>
+                  <a:srgbClr val="B9791F"/>
+                </a:solidFill>
+                <a:latin typeface="Yu Gothic"/>
+                <a:ea typeface="Yu Gothic"/>
+                <a:cs typeface="Yu Gothic"/>
+              </a:rPr>
+              <a:t>③【切ったあと】</a:t>
+            </a:r>
+          </a:p>
+        </p:txBody>
+      </p:sp>
+      <p:sp>
+        <p:nvSpPr>
+          <p:cNvPr id="11" name="TextBox 10"/>
+          <p:cNvSpPr txBox="1"/>
+          <p:nvPr/>
+        </p:nvSpPr>
+        <p:spPr>
+          <a:xfrm>
+            <a:off x="4892040" y="3908044"/>
+            <a:ext cx="6613855" cy="457200"/>
+          </a:xfrm>
+          <a:prstGeom prst="rect">
+            <a:avLst/>
+          </a:prstGeom>
+          <a:noFill/>
+        </p:spPr>
+        <p:txBody>
+          <a:bodyPr wrap="square" anchor="ctr">
+            <a:noAutofit/>
+          </a:bodyPr>
+          <a:lstStyle/>
+          <a:p>
+            <a:pPr algn="l">
+              <a:lnSpc>
+                <a:spcPct val="120000"/>
+              </a:lnSpc>
+            </a:pPr>
+            <a:r>
+              <a:rPr sz="3000" b="1">
+                <a:solidFill>
+                  <a:srgbClr val="20242C"/>
+                </a:solidFill>
+                <a:latin typeface="Yu Gothic"/>
+                <a:ea typeface="Yu Gothic"/>
+                <a:cs typeface="Yu Gothic"/>
+              </a:rPr>
+              <a:t>自分で調べた番号で確かめる</a:t>
+            </a:r>
+          </a:p>
+        </p:txBody>
+      </p:sp>
+      <p:sp>
+        <p:nvSpPr>
+          <p:cNvPr id="12" name="TextBox 11"/>
+          <p:cNvSpPr txBox="1"/>
+          <p:nvPr/>
+        </p:nvSpPr>
+        <p:spPr>
+          <a:xfrm>
+            <a:off x="4892040" y="4401820"/>
+            <a:ext cx="6613855" cy="645668"/>
+          </a:xfrm>
+          <a:prstGeom prst="rect">
+            <a:avLst/>
+          </a:prstGeom>
+          <a:noFill/>
+        </p:spPr>
+        <p:txBody>
+          <a:bodyPr wrap="square" anchor="t">
+            <a:noAutofit/>
+          </a:bodyPr>
+          <a:lstStyle/>
+          <a:p>
+            <a:pPr algn="l">
+              <a:lnSpc>
+                <a:spcPct val="130000"/>
+              </a:lnSpc>
+            </a:pPr>
+            <a:r>
+              <a:rPr sz="1900" b="0">
+                <a:solidFill>
+                  <a:srgbClr val="5C6472"/>
+                </a:solidFill>
+                <a:latin typeface="Yu Gothic"/>
+                <a:ea typeface="Yu Gothic"/>
+                <a:cs typeface="Yu Gothic"/>
+              </a:rPr>
+              <a:t>着信履歴は使わない／警察相談は「#9110」／家族はもともと知っている番号へ</a:t>
+            </a:r>
+          </a:p>
+        </p:txBody>
+      </p:sp>
+      <p:sp>
+        <p:nvSpPr>
+          <p:cNvPr id="13" name="Rounded Rectangle 12"/>
           <p:cNvSpPr/>
           <p:nvPr/>
         </p:nvSpPr>
@@ -10918,14 +11274,14 @@
                 <a:ea typeface="Yu Gothic"/>
                 <a:cs typeface="Yu Gothic"/>
               </a:rPr>
-              <a:t>だから——手がかりで見分けること自体を、やめる</a:t>
-            </a:r>
-          </a:p>
-        </p:txBody>
-      </p:sp>
-      <p:sp>
-        <p:nvSpPr>
-          <p:cNvPr id="6" name="meta:pageno"/>
+              <a:t>電話では、その場で送金せず、口座や暗証番号も伝えない</a:t>
+            </a:r>
+          </a:p>
+        </p:txBody>
+      </p:sp>
+      <p:sp>
+        <p:nvSpPr>
+          <p:cNvPr id="14" name="meta:pageno"/>
           <p:cNvSpPr txBox="1"/>
           <p:nvPr/>
         </p:nvSpPr>
@@ -10962,7 +11318,7 @@
       </p:sp>
       <p:sp>
         <p:nvSpPr>
-          <p:cNvPr id="7" name="meta:part"/>
+          <p:cNvPr id="15" name="meta:part"/>
           <p:cNvSpPr txBox="1"/>
           <p:nvPr/>
         </p:nvSpPr>
@@ -11047,7 +11403,7 @@
                 <a:ea typeface="Yu Gothic"/>
                 <a:cs typeface="Yu Gothic"/>
               </a:rPr>
-              <a:t>守り方は 3つ</a:t>
+              <a:t>今日のまとめ</a:t>
             </a:r>
           </a:p>
         </p:txBody>
@@ -11104,8 +11460,8 @@
         </p:nvSpPr>
         <p:spPr>
           <a:xfrm>
-            <a:off x="685800" y="1645920"/>
-            <a:ext cx="3931920" cy="457200"/>
+            <a:off x="731520" y="1645920"/>
+            <a:ext cx="731520" cy="457200"/>
           </a:xfrm>
           <a:prstGeom prst="rect">
             <a:avLst/>
@@ -11118,13 +11474,13 @@
           </a:bodyPr>
           <a:lstStyle/>
           <a:p>
-            <a:pPr algn="l">
+            <a:pPr algn="r">
               <a:lnSpc>
                 <a:spcPct val="115000"/>
               </a:lnSpc>
             </a:pPr>
             <a:r>
-              <a:rPr sz="2000" b="1">
+              <a:rPr sz="2800" b="1">
                 <a:solidFill>
                   <a:srgbClr val="B9791F"/>
                 </a:solidFill>
@@ -11132,7 +11488,7 @@
                 <a:ea typeface="Yu Gothic"/>
                 <a:cs typeface="Yu Gothic"/>
               </a:rPr>
-              <a:t>①【鳴る前】</a:t>
+              <a:t>1</a:t>
             </a:r>
           </a:p>
         </p:txBody>
@@ -11145,8 +11501,8 @@
         </p:nvSpPr>
         <p:spPr>
           <a:xfrm>
-            <a:off x="4892040" y="1645920"/>
-            <a:ext cx="6613855" cy="457200"/>
+            <a:off x="1508760" y="1645920"/>
+            <a:ext cx="9997135" cy="457200"/>
           </a:xfrm>
           <a:prstGeom prst="rect">
             <a:avLst/>
@@ -11173,7 +11529,7 @@
                 <a:ea typeface="Yu Gothic"/>
                 <a:cs typeface="Yu Gothic"/>
               </a:rPr>
-              <a:t>怪しい電話を防ぐ</a:t>
+              <a:t>バレバレの嘘は、疑わない人を選ぶ「フィルタ」だった</a:t>
             </a:r>
           </a:p>
         </p:txBody>
@@ -11186,8 +11542,8 @@
         </p:nvSpPr>
         <p:spPr>
           <a:xfrm>
-            <a:off x="4892040" y="2139696"/>
-            <a:ext cx="6613855" cy="645668"/>
+            <a:off x="731520" y="2388870"/>
+            <a:ext cx="731520" cy="914400"/>
           </a:xfrm>
           <a:prstGeom prst="rect">
             <a:avLst/>
@@ -11195,59 +11551,18 @@
           <a:noFill/>
         </p:spPr>
         <p:txBody>
-          <a:bodyPr wrap="square" anchor="t">
-            <a:noAutofit/>
-          </a:bodyPr>
-          <a:lstStyle/>
-          <a:p>
-            <a:pPr algn="l">
-              <a:lnSpc>
-                <a:spcPct val="130000"/>
-              </a:lnSpc>
-            </a:pPr>
-            <a:r>
-              <a:rPr sz="1900" b="0">
-                <a:solidFill>
-                  <a:srgbClr val="5C6472"/>
-                </a:solidFill>
-                <a:latin typeface="Yu Gothic"/>
-                <a:ea typeface="Yu Gothic"/>
-                <a:cs typeface="Yu Gothic"/>
-              </a:rPr>
-              <a:t>固定電話は国際電話の利用休止／スマホは迷惑電話対策アプリ</a:t>
-            </a:r>
-          </a:p>
-        </p:txBody>
-      </p:sp>
-      <p:sp>
-        <p:nvSpPr>
-          <p:cNvPr id="7" name="TextBox 6"/>
-          <p:cNvSpPr txBox="1"/>
-          <p:nvPr/>
-        </p:nvSpPr>
-        <p:spPr>
-          <a:xfrm>
-            <a:off x="685800" y="2933827"/>
-            <a:ext cx="3931920" cy="457200"/>
-          </a:xfrm>
-          <a:prstGeom prst="rect">
-            <a:avLst/>
-          </a:prstGeom>
-          <a:noFill/>
-        </p:spPr>
-        <p:txBody>
           <a:bodyPr wrap="square" anchor="ctr">
             <a:noAutofit/>
           </a:bodyPr>
           <a:lstStyle/>
           <a:p>
-            <a:pPr algn="l">
+            <a:pPr algn="r">
               <a:lnSpc>
                 <a:spcPct val="115000"/>
               </a:lnSpc>
             </a:pPr>
             <a:r>
-              <a:rPr sz="2000" b="1">
+              <a:rPr sz="2800" b="1">
                 <a:solidFill>
                   <a:srgbClr val="B9791F"/>
                 </a:solidFill>
@@ -11255,21 +11570,21 @@
                 <a:ea typeface="Yu Gothic"/>
                 <a:cs typeface="Yu Gothic"/>
               </a:rPr>
-              <a:t>②【警察・お金の話が出たら】</a:t>
-            </a:r>
-          </a:p>
-        </p:txBody>
-      </p:sp>
-      <p:sp>
-        <p:nvSpPr>
-          <p:cNvPr id="8" name="TextBox 7"/>
+              <a:t>2</a:t>
+            </a:r>
+          </a:p>
+        </p:txBody>
+      </p:sp>
+      <p:sp>
+        <p:nvSpPr>
+          <p:cNvPr id="7" name="TextBox 6"/>
           <p:cNvSpPr txBox="1"/>
           <p:nvPr/>
         </p:nvSpPr>
         <p:spPr>
           <a:xfrm>
-            <a:off x="4892040" y="2933827"/>
-            <a:ext cx="6613855" cy="457200"/>
+            <a:off x="1508760" y="2388870"/>
+            <a:ext cx="9997135" cy="914400"/>
           </a:xfrm>
           <a:prstGeom prst="rect">
             <a:avLst/>
@@ -11296,21 +11611,21 @@
                 <a:ea typeface="Yu Gothic"/>
                 <a:cs typeface="Yu Gothic"/>
               </a:rPr>
-              <a:t>番号や映像を信じず、切る</a:t>
-            </a:r>
-          </a:p>
-        </p:txBody>
-      </p:sp>
-      <p:sp>
-        <p:nvSpPr>
-          <p:cNvPr id="9" name="TextBox 8"/>
+              <a:t>AIがその選別を不要にし、疑う人も突破される時代が始まった</a:t>
+            </a:r>
+          </a:p>
+        </p:txBody>
+      </p:sp>
+      <p:sp>
+        <p:nvSpPr>
+          <p:cNvPr id="8" name="TextBox 7"/>
           <p:cNvSpPr txBox="1"/>
           <p:nvPr/>
         </p:nvSpPr>
         <p:spPr>
           <a:xfrm>
-            <a:off x="4892040" y="3427603"/>
-            <a:ext cx="6613855" cy="331977"/>
+            <a:off x="731520" y="3589020"/>
+            <a:ext cx="731520" cy="457200"/>
           </a:xfrm>
           <a:prstGeom prst="rect">
             <a:avLst/>
@@ -11318,59 +11633,18 @@
           <a:noFill/>
         </p:spPr>
         <p:txBody>
-          <a:bodyPr wrap="square" anchor="t">
-            <a:noAutofit/>
-          </a:bodyPr>
-          <a:lstStyle/>
-          <a:p>
-            <a:pPr algn="l">
-              <a:lnSpc>
-                <a:spcPct val="130000"/>
-              </a:lnSpc>
-            </a:pPr>
-            <a:r>
-              <a:rPr sz="1900" b="0">
-                <a:solidFill>
-                  <a:srgbClr val="5C6472"/>
-                </a:solidFill>
-                <a:latin typeface="Yu Gothic"/>
-                <a:ea typeface="Yu Gothic"/>
-                <a:cs typeface="Yu Gothic"/>
-              </a:rPr>
-              <a:t>「誰にも言うな」「ATM」「ギフトカード」は即切りの合図</a:t>
-            </a:r>
-          </a:p>
-        </p:txBody>
-      </p:sp>
-      <p:sp>
-        <p:nvSpPr>
-          <p:cNvPr id="10" name="TextBox 9"/>
-          <p:cNvSpPr txBox="1"/>
-          <p:nvPr/>
-        </p:nvSpPr>
-        <p:spPr>
-          <a:xfrm>
-            <a:off x="685800" y="3908044"/>
-            <a:ext cx="3931920" cy="457200"/>
-          </a:xfrm>
-          <a:prstGeom prst="rect">
-            <a:avLst/>
-          </a:prstGeom>
-          <a:noFill/>
-        </p:spPr>
-        <p:txBody>
           <a:bodyPr wrap="square" anchor="ctr">
             <a:noAutofit/>
           </a:bodyPr>
           <a:lstStyle/>
           <a:p>
-            <a:pPr algn="l">
+            <a:pPr algn="r">
               <a:lnSpc>
                 <a:spcPct val="115000"/>
               </a:lnSpc>
             </a:pPr>
             <a:r>
-              <a:rPr sz="2000" b="1">
+              <a:rPr sz="2800" b="1">
                 <a:solidFill>
                   <a:srgbClr val="B9791F"/>
                 </a:solidFill>
@@ -11378,21 +11652,21 @@
                 <a:ea typeface="Yu Gothic"/>
                 <a:cs typeface="Yu Gothic"/>
               </a:rPr>
-              <a:t>③【切ったあと】</a:t>
-            </a:r>
-          </a:p>
-        </p:txBody>
-      </p:sp>
-      <p:sp>
-        <p:nvSpPr>
-          <p:cNvPr id="11" name="TextBox 10"/>
+              <a:t>3</a:t>
+            </a:r>
+          </a:p>
+        </p:txBody>
+      </p:sp>
+      <p:sp>
+        <p:nvSpPr>
+          <p:cNvPr id="9" name="TextBox 8"/>
           <p:cNvSpPr txBox="1"/>
           <p:nvPr/>
         </p:nvSpPr>
         <p:spPr>
           <a:xfrm>
-            <a:off x="4892040" y="3908044"/>
-            <a:ext cx="6613855" cy="457200"/>
+            <a:off x="1508760" y="3589020"/>
+            <a:ext cx="9997135" cy="457200"/>
           </a:xfrm>
           <a:prstGeom prst="rect">
             <a:avLst/>
@@ -11419,7 +11693,89 @@
                 <a:ea typeface="Yu Gothic"/>
                 <a:cs typeface="Yu Gothic"/>
               </a:rPr>
-              <a:t>自分で調べた番号で確かめる</a:t>
+              <a:t>いまの日本の主役は、AIではなく「番号」</a:t>
+            </a:r>
+          </a:p>
+        </p:txBody>
+      </p:sp>
+      <p:sp>
+        <p:nvSpPr>
+          <p:cNvPr id="10" name="TextBox 9"/>
+          <p:cNvSpPr txBox="1"/>
+          <p:nvPr/>
+        </p:nvSpPr>
+        <p:spPr>
+          <a:xfrm>
+            <a:off x="731520" y="4331970"/>
+            <a:ext cx="731520" cy="457200"/>
+          </a:xfrm>
+          <a:prstGeom prst="rect">
+            <a:avLst/>
+          </a:prstGeom>
+          <a:noFill/>
+        </p:spPr>
+        <p:txBody>
+          <a:bodyPr wrap="square" anchor="ctr">
+            <a:noAutofit/>
+          </a:bodyPr>
+          <a:lstStyle/>
+          <a:p>
+            <a:pPr algn="r">
+              <a:lnSpc>
+                <a:spcPct val="115000"/>
+              </a:lnSpc>
+            </a:pPr>
+            <a:r>
+              <a:rPr sz="2800" b="1">
+                <a:solidFill>
+                  <a:srgbClr val="B9791F"/>
+                </a:solidFill>
+                <a:latin typeface="Yu Gothic"/>
+                <a:ea typeface="Yu Gothic"/>
+                <a:cs typeface="Yu Gothic"/>
+              </a:rPr>
+              <a:t>4</a:t>
+            </a:r>
+          </a:p>
+        </p:txBody>
+      </p:sp>
+      <p:sp>
+        <p:nvSpPr>
+          <p:cNvPr id="11" name="TextBox 10"/>
+          <p:cNvSpPr txBox="1"/>
+          <p:nvPr/>
+        </p:nvSpPr>
+        <p:spPr>
+          <a:xfrm>
+            <a:off x="1508760" y="4331970"/>
+            <a:ext cx="9997135" cy="457200"/>
+          </a:xfrm>
+          <a:prstGeom prst="rect">
+            <a:avLst/>
+          </a:prstGeom>
+          <a:noFill/>
+        </p:spPr>
+        <p:txBody>
+          <a:bodyPr wrap="square" anchor="ctr">
+            <a:noAutofit/>
+          </a:bodyPr>
+          <a:lstStyle/>
+          <a:p>
+            <a:pPr algn="l">
+              <a:lnSpc>
+                <a:spcPct val="120000"/>
+              </a:lnSpc>
+            </a:pPr>
+            <a:r>
+              <a:rPr sz="3000" b="1">
+                <a:solidFill>
+                  <a:srgbClr val="20242C"/>
+                </a:solidFill>
+                <a:latin typeface="Yu Gothic"/>
+                <a:ea typeface="Yu Gothic"/>
+                <a:cs typeface="Yu Gothic"/>
+              </a:rPr>
+              <a:t>次は、番号偽装にAIが混ざってくる</a:t>
             </a:r>
           </a:p>
         </p:txBody>
@@ -11432,8 +11788,8 @@
         </p:nvSpPr>
         <p:spPr>
           <a:xfrm>
-            <a:off x="4892040" y="4401820"/>
-            <a:ext cx="6613855" cy="645668"/>
+            <a:off x="731520" y="5074920"/>
+            <a:ext cx="731520" cy="914400"/>
           </a:xfrm>
           <a:prstGeom prst="rect">
             <a:avLst/>
@@ -11441,77 +11797,59 @@
           <a:noFill/>
         </p:spPr>
         <p:txBody>
-          <a:bodyPr wrap="square" anchor="t">
+          <a:bodyPr wrap="square" anchor="ctr">
+            <a:noAutofit/>
+          </a:bodyPr>
+          <a:lstStyle/>
+          <a:p>
+            <a:pPr algn="r">
+              <a:lnSpc>
+                <a:spcPct val="115000"/>
+              </a:lnSpc>
+            </a:pPr>
+            <a:r>
+              <a:rPr sz="2800" b="1">
+                <a:solidFill>
+                  <a:srgbClr val="B9791F"/>
+                </a:solidFill>
+                <a:latin typeface="Yu Gothic"/>
+                <a:ea typeface="Yu Gothic"/>
+                <a:cs typeface="Yu Gothic"/>
+              </a:rPr>
+              <a:t>5</a:t>
+            </a:r>
+          </a:p>
+        </p:txBody>
+      </p:sp>
+      <p:sp>
+        <p:nvSpPr>
+          <p:cNvPr id="13" name="TextBox 12"/>
+          <p:cNvSpPr txBox="1"/>
+          <p:nvPr/>
+        </p:nvSpPr>
+        <p:spPr>
+          <a:xfrm>
+            <a:off x="1508760" y="5074920"/>
+            <a:ext cx="9997135" cy="914400"/>
+          </a:xfrm>
+          <a:prstGeom prst="rect">
+            <a:avLst/>
+          </a:prstGeom>
+          <a:noFill/>
+        </p:spPr>
+        <p:txBody>
+          <a:bodyPr wrap="square" anchor="ctr">
             <a:noAutofit/>
           </a:bodyPr>
           <a:lstStyle/>
           <a:p>
             <a:pPr algn="l">
               <a:lnSpc>
-                <a:spcPct val="130000"/>
+                <a:spcPct val="120000"/>
               </a:lnSpc>
             </a:pPr>
             <a:r>
-              <a:rPr sz="1900" b="0">
-                <a:solidFill>
-                  <a:srgbClr val="5C6472"/>
-                </a:solidFill>
-                <a:latin typeface="Yu Gothic"/>
-                <a:ea typeface="Yu Gothic"/>
-                <a:cs typeface="Yu Gothic"/>
-              </a:rPr>
-              <a:t>着信履歴は使わない／警察相談は「#9110」／家族はもともと知っている番号へ</a:t>
-            </a:r>
-          </a:p>
-        </p:txBody>
-      </p:sp>
-      <p:sp>
-        <p:nvSpPr>
-          <p:cNvPr id="13" name="Rounded Rectangle 12"/>
-          <p:cNvSpPr/>
-          <p:nvPr/>
-        </p:nvSpPr>
-        <p:spPr>
-          <a:xfrm>
-            <a:off x="685800" y="5212080"/>
-            <a:ext cx="10820095" cy="777240"/>
-          </a:xfrm>
-          <a:prstGeom prst="roundRect">
-            <a:avLst>
-              <a:gd name="adj" fmla="val 16000"/>
-            </a:avLst>
-          </a:prstGeom>
-          <a:solidFill>
-            <a:srgbClr val="F3E6CF"/>
-          </a:solidFill>
-          <a:ln>
-            <a:noFill/>
-          </a:ln>
-          <a:effectLst/>
-        </p:spPr>
-        <p:style>
-          <a:lnRef idx="1">
-            <a:schemeClr val="accent1"/>
-          </a:lnRef>
-          <a:fillRef idx="3">
-            <a:schemeClr val="accent1"/>
-          </a:fillRef>
-          <a:effectRef idx="2">
-            <a:schemeClr val="accent1"/>
-          </a:effectRef>
-          <a:fontRef idx="minor">
-            <a:schemeClr val="lt1"/>
-          </a:fontRef>
-        </p:style>
-        <p:txBody>
-          <a:bodyPr rtlCol="0" anchor="ctr" wrap="square" lIns="274320" rIns="274320">
-            <a:noAutofit/>
-          </a:bodyPr>
-          <a:lstStyle/>
-          <a:p>
-            <a:pPr algn="ctr"/>
-            <a:r>
-              <a:rPr sz="2600" b="1">
+              <a:rPr sz="3000" b="1">
                 <a:solidFill>
                   <a:srgbClr val="20242C"/>
                 </a:solidFill>
@@ -11519,7 +11857,7 @@
                 <a:ea typeface="Yu Gothic"/>
                 <a:cs typeface="Yu Gothic"/>
               </a:rPr>
-              <a:t>電話では、その場で送金せず、口座や暗証番号も伝えない</a:t>
+              <a:t>だから——見分けるのをやめて、一度切って、自分で調べてかけ直す</a:t>
             </a:r>
           </a:p>
         </p:txBody>
@@ -11624,8 +11962,8 @@
         </p:nvSpPr>
         <p:spPr>
           <a:xfrm>
-            <a:off x="685800" y="411480"/>
-            <a:ext cx="10820095" cy="960120"/>
+            <a:off x="502920" y="1188720"/>
+            <a:ext cx="11185855" cy="3657599"/>
           </a:xfrm>
           <a:prstGeom prst="rect">
             <a:avLst/>
@@ -11633,162 +11971,58 @@
           <a:noFill/>
         </p:spPr>
         <p:txBody>
-          <a:bodyPr wrap="square" anchor="b">
-            <a:noAutofit/>
-          </a:bodyPr>
-          <a:lstStyle/>
-          <a:p>
-            <a:pPr algn="l"/>
-            <a:r>
-              <a:rPr sz="4000" b="1">
-                <a:solidFill>
-                  <a:srgbClr val="B9791F"/>
-                </a:solidFill>
-                <a:latin typeface="Yu Gothic"/>
-                <a:ea typeface="Yu Gothic"/>
-                <a:cs typeface="Yu Gothic"/>
-              </a:rPr>
-              <a:t>今日のまとめ</a:t>
-            </a:r>
-          </a:p>
-        </p:txBody>
-      </p:sp>
-      <p:sp>
-        <p:nvSpPr>
-          <p:cNvPr id="3" name="Rectangle 2"/>
-          <p:cNvSpPr/>
-          <p:nvPr/>
-        </p:nvSpPr>
-        <p:spPr>
-          <a:xfrm>
-            <a:off x="685800" y="1463040"/>
-            <a:ext cx="2377440" cy="50292"/>
-          </a:xfrm>
-          <a:prstGeom prst="rect">
-            <a:avLst/>
-          </a:prstGeom>
-          <a:solidFill>
-            <a:srgbClr val="B9791F"/>
-          </a:solidFill>
-          <a:ln>
-            <a:noFill/>
-          </a:ln>
-          <a:effectLst/>
-        </p:spPr>
-        <p:style>
-          <a:lnRef idx="1">
-            <a:schemeClr val="accent1"/>
-          </a:lnRef>
-          <a:fillRef idx="3">
-            <a:schemeClr val="accent1"/>
-          </a:fillRef>
-          <a:effectRef idx="2">
-            <a:schemeClr val="accent1"/>
-          </a:effectRef>
-          <a:fontRef idx="minor">
-            <a:schemeClr val="lt1"/>
-          </a:fontRef>
-        </p:style>
-        <p:txBody>
-          <a:bodyPr rtlCol="0" anchor="ctr"/>
-          <a:lstStyle/>
-          <a:p>
-            <a:pPr algn="ctr"/>
-          </a:p>
-        </p:txBody>
-      </p:sp>
-      <p:sp>
-        <p:nvSpPr>
-          <p:cNvPr id="4" name="TextBox 3"/>
-          <p:cNvSpPr txBox="1"/>
-          <p:nvPr/>
-        </p:nvSpPr>
-        <p:spPr>
-          <a:xfrm>
-            <a:off x="731520" y="1645920"/>
-            <a:ext cx="731520" cy="457200"/>
-          </a:xfrm>
-          <a:prstGeom prst="rect">
-            <a:avLst/>
-          </a:prstGeom>
-          <a:noFill/>
-        </p:spPr>
-        <p:txBody>
           <a:bodyPr wrap="square" anchor="ctr">
             <a:noAutofit/>
           </a:bodyPr>
           <a:lstStyle/>
           <a:p>
-            <a:pPr algn="r">
+            <a:pPr algn="ctr">
               <a:lnSpc>
-                <a:spcPct val="115000"/>
+                <a:spcPct val="128000"/>
               </a:lnSpc>
             </a:pPr>
             <a:r>
-              <a:rPr sz="2800" b="1">
-                <a:solidFill>
-                  <a:srgbClr val="B9791F"/>
-                </a:solidFill>
-                <a:latin typeface="Yu Gothic"/>
-                <a:ea typeface="Yu Gothic"/>
-                <a:cs typeface="Yu Gothic"/>
-              </a:rPr>
-              <a:t>1</a:t>
-            </a:r>
-          </a:p>
-        </p:txBody>
-      </p:sp>
-      <p:sp>
-        <p:nvSpPr>
-          <p:cNvPr id="5" name="TextBox 4"/>
-          <p:cNvSpPr txBox="1"/>
-          <p:nvPr/>
-        </p:nvSpPr>
-        <p:spPr>
-          <a:xfrm>
-            <a:off x="1508760" y="1645920"/>
-            <a:ext cx="9997135" cy="457200"/>
-          </a:xfrm>
-          <a:prstGeom prst="rect">
-            <a:avLst/>
-          </a:prstGeom>
-          <a:noFill/>
-        </p:spPr>
-        <p:txBody>
-          <a:bodyPr wrap="square" anchor="ctr">
-            <a:noAutofit/>
-          </a:bodyPr>
-          <a:lstStyle/>
-          <a:p>
-            <a:pPr algn="l">
+              <a:rPr sz="5400" b="1">
+                <a:solidFill>
+                  <a:srgbClr val="20242C"/>
+                </a:solidFill>
+                <a:latin typeface="Yu Mincho"/>
+                <a:ea typeface="Yu Mincho"/>
+                <a:cs typeface="Yu Mincho"/>
+              </a:rPr>
+              <a:t>冒頭の1億円は、</a:t>
+            </a:r>
+          </a:p>
+          <a:p>
+            <a:pPr algn="ctr">
               <a:lnSpc>
-                <a:spcPct val="120000"/>
+                <a:spcPct val="128000"/>
               </a:lnSpc>
             </a:pPr>
             <a:r>
-              <a:rPr sz="3000" b="1">
+              <a:rPr sz="5400" b="1">
                 <a:solidFill>
                   <a:srgbClr val="20242C"/>
                 </a:solidFill>
-                <a:latin typeface="Yu Gothic"/>
-                <a:ea typeface="Yu Gothic"/>
-                <a:cs typeface="Yu Gothic"/>
-              </a:rPr>
-              <a:t>バレバレの嘘は、疑わない人を選ぶ「フィルタ」だった</a:t>
-            </a:r>
-          </a:p>
-        </p:txBody>
-      </p:sp>
-      <p:sp>
-        <p:nvSpPr>
-          <p:cNvPr id="6" name="TextBox 5"/>
+                <a:latin typeface="Yu Mincho"/>
+                <a:ea typeface="Yu Mincho"/>
+                <a:cs typeface="Yu Mincho"/>
+              </a:rPr>
+              <a:t>あらためて、差し上げられません。</a:t>
+            </a:r>
+          </a:p>
+        </p:txBody>
+      </p:sp>
+      <p:sp>
+        <p:nvSpPr>
+          <p:cNvPr id="3" name="TextBox 2"/>
           <p:cNvSpPr txBox="1"/>
           <p:nvPr/>
         </p:nvSpPr>
         <p:spPr>
           <a:xfrm>
-            <a:off x="731520" y="2388870"/>
-            <a:ext cx="731520" cy="914400"/>
+            <a:off x="685800" y="4983479"/>
+            <a:ext cx="10820095" cy="1005840"/>
           </a:xfrm>
           <a:prstGeom prst="rect">
             <a:avLst/>
@@ -11801,315 +12035,28 @@
           </a:bodyPr>
           <a:lstStyle/>
           <a:p>
-            <a:pPr algn="r">
+            <a:pPr algn="ctr">
               <a:lnSpc>
-                <a:spcPct val="115000"/>
+                <a:spcPct val="130000"/>
               </a:lnSpc>
             </a:pPr>
             <a:r>
-              <a:rPr sz="2800" b="1">
-                <a:solidFill>
-                  <a:srgbClr val="B9791F"/>
-                </a:solidFill>
-                <a:latin typeface="Yu Gothic"/>
-                <a:ea typeface="Yu Gothic"/>
-                <a:cs typeface="Yu Gothic"/>
-              </a:rPr>
-              <a:t>2</a:t>
-            </a:r>
-          </a:p>
-        </p:txBody>
-      </p:sp>
-      <p:sp>
-        <p:nvSpPr>
-          <p:cNvPr id="7" name="TextBox 6"/>
-          <p:cNvSpPr txBox="1"/>
-          <p:nvPr/>
-        </p:nvSpPr>
-        <p:spPr>
-          <a:xfrm>
-            <a:off x="1508760" y="2388870"/>
-            <a:ext cx="9997135" cy="914400"/>
-          </a:xfrm>
-          <a:prstGeom prst="rect">
-            <a:avLst/>
-          </a:prstGeom>
-          <a:noFill/>
-        </p:spPr>
-        <p:txBody>
-          <a:bodyPr wrap="square" anchor="ctr">
-            <a:noAutofit/>
-          </a:bodyPr>
-          <a:lstStyle/>
-          <a:p>
-            <a:pPr algn="l">
-              <a:lnSpc>
-                <a:spcPct val="120000"/>
-              </a:lnSpc>
-            </a:pPr>
-            <a:r>
-              <a:rPr sz="3000" b="1">
-                <a:solidFill>
-                  <a:srgbClr val="20242C"/>
-                </a:solidFill>
-                <a:latin typeface="Yu Gothic"/>
-                <a:ea typeface="Yu Gothic"/>
-                <a:cs typeface="Yu Gothic"/>
-              </a:rPr>
-              <a:t>AIがその選別を不要にし、疑う人も突破される時代が始まった</a:t>
-            </a:r>
-          </a:p>
-        </p:txBody>
-      </p:sp>
-      <p:sp>
-        <p:nvSpPr>
-          <p:cNvPr id="8" name="TextBox 7"/>
-          <p:cNvSpPr txBox="1"/>
-          <p:nvPr/>
-        </p:nvSpPr>
-        <p:spPr>
-          <a:xfrm>
-            <a:off x="731520" y="3589020"/>
-            <a:ext cx="731520" cy="457200"/>
-          </a:xfrm>
-          <a:prstGeom prst="rect">
-            <a:avLst/>
-          </a:prstGeom>
-          <a:noFill/>
-        </p:spPr>
-        <p:txBody>
-          <a:bodyPr wrap="square" anchor="ctr">
-            <a:noAutofit/>
-          </a:bodyPr>
-          <a:lstStyle/>
-          <a:p>
-            <a:pPr algn="r">
-              <a:lnSpc>
-                <a:spcPct val="115000"/>
-              </a:lnSpc>
-            </a:pPr>
-            <a:r>
-              <a:rPr sz="2800" b="1">
-                <a:solidFill>
-                  <a:srgbClr val="B9791F"/>
-                </a:solidFill>
-                <a:latin typeface="Yu Gothic"/>
-                <a:ea typeface="Yu Gothic"/>
-                <a:cs typeface="Yu Gothic"/>
-              </a:rPr>
-              <a:t>3</a:t>
-            </a:r>
-          </a:p>
-        </p:txBody>
-      </p:sp>
-      <p:sp>
-        <p:nvSpPr>
-          <p:cNvPr id="9" name="TextBox 8"/>
-          <p:cNvSpPr txBox="1"/>
-          <p:nvPr/>
-        </p:nvSpPr>
-        <p:spPr>
-          <a:xfrm>
-            <a:off x="1508760" y="3589020"/>
-            <a:ext cx="9997135" cy="457200"/>
-          </a:xfrm>
-          <a:prstGeom prst="rect">
-            <a:avLst/>
-          </a:prstGeom>
-          <a:noFill/>
-        </p:spPr>
-        <p:txBody>
-          <a:bodyPr wrap="square" anchor="ctr">
-            <a:noAutofit/>
-          </a:bodyPr>
-          <a:lstStyle/>
-          <a:p>
-            <a:pPr algn="l">
-              <a:lnSpc>
-                <a:spcPct val="120000"/>
-              </a:lnSpc>
-            </a:pPr>
-            <a:r>
-              <a:rPr sz="3000" b="1">
-                <a:solidFill>
-                  <a:srgbClr val="20242C"/>
-                </a:solidFill>
-                <a:latin typeface="Yu Gothic"/>
-                <a:ea typeface="Yu Gothic"/>
-                <a:cs typeface="Yu Gothic"/>
-              </a:rPr>
-              <a:t>いまの日本の主役は、AIではなく「番号」</a:t>
-            </a:r>
-          </a:p>
-        </p:txBody>
-      </p:sp>
-      <p:sp>
-        <p:nvSpPr>
-          <p:cNvPr id="10" name="TextBox 9"/>
-          <p:cNvSpPr txBox="1"/>
-          <p:nvPr/>
-        </p:nvSpPr>
-        <p:spPr>
-          <a:xfrm>
-            <a:off x="731520" y="4331970"/>
-            <a:ext cx="731520" cy="457200"/>
-          </a:xfrm>
-          <a:prstGeom prst="rect">
-            <a:avLst/>
-          </a:prstGeom>
-          <a:noFill/>
-        </p:spPr>
-        <p:txBody>
-          <a:bodyPr wrap="square" anchor="ctr">
-            <a:noAutofit/>
-          </a:bodyPr>
-          <a:lstStyle/>
-          <a:p>
-            <a:pPr algn="r">
-              <a:lnSpc>
-                <a:spcPct val="115000"/>
-              </a:lnSpc>
-            </a:pPr>
-            <a:r>
-              <a:rPr sz="2800" b="1">
-                <a:solidFill>
-                  <a:srgbClr val="B9791F"/>
-                </a:solidFill>
-                <a:latin typeface="Yu Gothic"/>
-                <a:ea typeface="Yu Gothic"/>
-                <a:cs typeface="Yu Gothic"/>
-              </a:rPr>
-              <a:t>4</a:t>
-            </a:r>
-          </a:p>
-        </p:txBody>
-      </p:sp>
-      <p:sp>
-        <p:nvSpPr>
-          <p:cNvPr id="11" name="TextBox 10"/>
-          <p:cNvSpPr txBox="1"/>
-          <p:nvPr/>
-        </p:nvSpPr>
-        <p:spPr>
-          <a:xfrm>
-            <a:off x="1508760" y="4331970"/>
-            <a:ext cx="9997135" cy="457200"/>
-          </a:xfrm>
-          <a:prstGeom prst="rect">
-            <a:avLst/>
-          </a:prstGeom>
-          <a:noFill/>
-        </p:spPr>
-        <p:txBody>
-          <a:bodyPr wrap="square" anchor="ctr">
-            <a:noAutofit/>
-          </a:bodyPr>
-          <a:lstStyle/>
-          <a:p>
-            <a:pPr algn="l">
-              <a:lnSpc>
-                <a:spcPct val="120000"/>
-              </a:lnSpc>
-            </a:pPr>
-            <a:r>
-              <a:rPr sz="3000" b="1">
-                <a:solidFill>
-                  <a:srgbClr val="20242C"/>
-                </a:solidFill>
-                <a:latin typeface="Yu Gothic"/>
-                <a:ea typeface="Yu Gothic"/>
-                <a:cs typeface="Yu Gothic"/>
-              </a:rPr>
-              <a:t>次は、番号偽装にAIが混ざってくる</a:t>
-            </a:r>
-          </a:p>
-        </p:txBody>
-      </p:sp>
-      <p:sp>
-        <p:nvSpPr>
-          <p:cNvPr id="12" name="TextBox 11"/>
-          <p:cNvSpPr txBox="1"/>
-          <p:nvPr/>
-        </p:nvSpPr>
-        <p:spPr>
-          <a:xfrm>
-            <a:off x="731520" y="5074920"/>
-            <a:ext cx="731520" cy="914400"/>
-          </a:xfrm>
-          <a:prstGeom prst="rect">
-            <a:avLst/>
-          </a:prstGeom>
-          <a:noFill/>
-        </p:spPr>
-        <p:txBody>
-          <a:bodyPr wrap="square" anchor="ctr">
-            <a:noAutofit/>
-          </a:bodyPr>
-          <a:lstStyle/>
-          <a:p>
-            <a:pPr algn="r">
-              <a:lnSpc>
-                <a:spcPct val="115000"/>
-              </a:lnSpc>
-            </a:pPr>
-            <a:r>
-              <a:rPr sz="2800" b="1">
-                <a:solidFill>
-                  <a:srgbClr val="B9791F"/>
-                </a:solidFill>
-                <a:latin typeface="Yu Gothic"/>
-                <a:ea typeface="Yu Gothic"/>
-                <a:cs typeface="Yu Gothic"/>
-              </a:rPr>
-              <a:t>5</a:t>
-            </a:r>
-          </a:p>
-        </p:txBody>
-      </p:sp>
-      <p:sp>
-        <p:nvSpPr>
-          <p:cNvPr id="13" name="TextBox 12"/>
-          <p:cNvSpPr txBox="1"/>
-          <p:nvPr/>
-        </p:nvSpPr>
-        <p:spPr>
-          <a:xfrm>
-            <a:off x="1508760" y="5074920"/>
-            <a:ext cx="9997135" cy="914400"/>
-          </a:xfrm>
-          <a:prstGeom prst="rect">
-            <a:avLst/>
-          </a:prstGeom>
-          <a:noFill/>
-        </p:spPr>
-        <p:txBody>
-          <a:bodyPr wrap="square" anchor="ctr">
-            <a:noAutofit/>
-          </a:bodyPr>
-          <a:lstStyle/>
-          <a:p>
-            <a:pPr algn="l">
-              <a:lnSpc>
-                <a:spcPct val="120000"/>
-              </a:lnSpc>
-            </a:pPr>
-            <a:r>
-              <a:rPr sz="3000" b="1">
-                <a:solidFill>
-                  <a:srgbClr val="20242C"/>
-                </a:solidFill>
-                <a:latin typeface="Yu Gothic"/>
-                <a:ea typeface="Yu Gothic"/>
-                <a:cs typeface="Yu Gothic"/>
-              </a:rPr>
-              <a:t>だから——見分けるのをやめて、一度切って、自分で調べてかけ直す</a:t>
-            </a:r>
-          </a:p>
-        </p:txBody>
-      </p:sp>
-      <p:sp>
-        <p:nvSpPr>
-          <p:cNvPr id="14" name="meta:pageno"/>
+              <a:rPr sz="2200" b="0">
+                <a:solidFill>
+                  <a:srgbClr val="5C6472"/>
+                </a:solidFill>
+                <a:latin typeface="Yu Gothic"/>
+                <a:ea typeface="Yu Gothic"/>
+                <a:cs typeface="Yu Gothic"/>
+              </a:rPr>
+              <a:t>帰ったらご家族に「1億円をもらい損ねた話」を——笑い話が、そのまま家族を守る話になります</a:t>
+            </a:r>
+          </a:p>
+        </p:txBody>
+      </p:sp>
+      <p:sp>
+        <p:nvSpPr>
+          <p:cNvPr id="4" name="meta:pageno"/>
           <p:cNvSpPr txBox="1"/>
           <p:nvPr/>
         </p:nvSpPr>
@@ -12146,7 +12093,7 @@
       </p:sp>
       <p:sp>
         <p:nvSpPr>
-          <p:cNvPr id="15" name="meta:part"/>
+          <p:cNvPr id="5" name="meta:part"/>
           <p:cNvSpPr txBox="1"/>
           <p:nvPr/>
         </p:nvSpPr>
@@ -12381,198 +12328,6 @@
         </p:nvSpPr>
         <p:spPr>
           <a:xfrm>
-            <a:off x="502920" y="1188720"/>
-            <a:ext cx="11185855" cy="3657599"/>
-          </a:xfrm>
-          <a:prstGeom prst="rect">
-            <a:avLst/>
-          </a:prstGeom>
-          <a:noFill/>
-        </p:spPr>
-        <p:txBody>
-          <a:bodyPr wrap="square" anchor="ctr">
-            <a:noAutofit/>
-          </a:bodyPr>
-          <a:lstStyle/>
-          <a:p>
-            <a:pPr algn="ctr">
-              <a:lnSpc>
-                <a:spcPct val="128000"/>
-              </a:lnSpc>
-            </a:pPr>
-            <a:r>
-              <a:rPr sz="5400" b="1">
-                <a:solidFill>
-                  <a:srgbClr val="20242C"/>
-                </a:solidFill>
-                <a:latin typeface="Yu Mincho"/>
-                <a:ea typeface="Yu Mincho"/>
-                <a:cs typeface="Yu Mincho"/>
-              </a:rPr>
-              <a:t>冒頭の1億円は、</a:t>
-            </a:r>
-          </a:p>
-          <a:p>
-            <a:pPr algn="ctr">
-              <a:lnSpc>
-                <a:spcPct val="128000"/>
-              </a:lnSpc>
-            </a:pPr>
-            <a:r>
-              <a:rPr sz="5400" b="1">
-                <a:solidFill>
-                  <a:srgbClr val="20242C"/>
-                </a:solidFill>
-                <a:latin typeface="Yu Mincho"/>
-                <a:ea typeface="Yu Mincho"/>
-                <a:cs typeface="Yu Mincho"/>
-              </a:rPr>
-              <a:t>あらためて、差し上げられません。</a:t>
-            </a:r>
-          </a:p>
-        </p:txBody>
-      </p:sp>
-      <p:sp>
-        <p:nvSpPr>
-          <p:cNvPr id="3" name="TextBox 2"/>
-          <p:cNvSpPr txBox="1"/>
-          <p:nvPr/>
-        </p:nvSpPr>
-        <p:spPr>
-          <a:xfrm>
-            <a:off x="685800" y="4983479"/>
-            <a:ext cx="10820095" cy="1005840"/>
-          </a:xfrm>
-          <a:prstGeom prst="rect">
-            <a:avLst/>
-          </a:prstGeom>
-          <a:noFill/>
-        </p:spPr>
-        <p:txBody>
-          <a:bodyPr wrap="square" anchor="ctr">
-            <a:noAutofit/>
-          </a:bodyPr>
-          <a:lstStyle/>
-          <a:p>
-            <a:pPr algn="ctr">
-              <a:lnSpc>
-                <a:spcPct val="130000"/>
-              </a:lnSpc>
-            </a:pPr>
-            <a:r>
-              <a:rPr sz="2200" b="0">
-                <a:solidFill>
-                  <a:srgbClr val="5C6472"/>
-                </a:solidFill>
-                <a:latin typeface="Yu Gothic"/>
-                <a:ea typeface="Yu Gothic"/>
-                <a:cs typeface="Yu Gothic"/>
-              </a:rPr>
-              <a:t>帰ったらご家族に「1億円をもらい損ねた話」を——笑い話が、そのまま家族を守る話になります</a:t>
-            </a:r>
-          </a:p>
-        </p:txBody>
-      </p:sp>
-      <p:sp>
-        <p:nvSpPr>
-          <p:cNvPr id="4" name="meta:pageno"/>
-          <p:cNvSpPr txBox="1"/>
-          <p:nvPr/>
-        </p:nvSpPr>
-        <p:spPr>
-          <a:xfrm>
-            <a:off x="10408615" y="6309360"/>
-            <a:ext cx="1097280" cy="365760"/>
-          </a:xfrm>
-          <a:prstGeom prst="rect">
-            <a:avLst/>
-          </a:prstGeom>
-          <a:noFill/>
-        </p:spPr>
-        <p:txBody>
-          <a:bodyPr wrap="square" anchor="ctr">
-            <a:noAutofit/>
-          </a:bodyPr>
-          <a:lstStyle/>
-          <a:p>
-            <a:pPr algn="r"/>
-            <a:r>
-              <a:rPr sz="1200" b="0">
-                <a:solidFill>
-                  <a:srgbClr val="5C6472"/>
-                </a:solidFill>
-                <a:latin typeface="Yu Gothic"/>
-                <a:ea typeface="Yu Gothic"/>
-                <a:cs typeface="Yu Gothic"/>
-              </a:rPr>
-              <a:t>30</a:t>
-            </a:r>
-          </a:p>
-        </p:txBody>
-      </p:sp>
-      <p:sp>
-        <p:nvSpPr>
-          <p:cNvPr id="5" name="meta:part"/>
-          <p:cNvSpPr txBox="1"/>
-          <p:nvPr/>
-        </p:nvSpPr>
-        <p:spPr>
-          <a:xfrm>
-            <a:off x="685800" y="6309360"/>
-            <a:ext cx="5486400" cy="365760"/>
-          </a:xfrm>
-          <a:prstGeom prst="rect">
-            <a:avLst/>
-          </a:prstGeom>
-          <a:noFill/>
-        </p:spPr>
-        <p:txBody>
-          <a:bodyPr wrap="square" anchor="ctr">
-            <a:noAutofit/>
-          </a:bodyPr>
-          <a:lstStyle/>
-          <a:p>
-            <a:pPr algn="l"/>
-            <a:r>
-              <a:rPr sz="1200" b="0">
-                <a:solidFill>
-                  <a:srgbClr val="5C6472"/>
-                </a:solidFill>
-                <a:latin typeface="Yu Gothic"/>
-                <a:ea typeface="Yu Gothic"/>
-                <a:cs typeface="Yu Gothic"/>
-              </a:rPr>
-              <a:t>4 結論</a:t>
-            </a:r>
-          </a:p>
-        </p:txBody>
-      </p:sp>
-    </p:spTree>
-  </p:cSld>
-  <p:clrMapOvr>
-    <a:masterClrMapping/>
-  </p:clrMapOvr>
-</p:sld>
-</file>
-
-<file path=ppt/slides/slide31.xml><?xml version="1.0" encoding="utf-8"?>
-<p:sld xmlns:a="http://schemas.openxmlformats.org/drawingml/2006/main" xmlns:p="http://schemas.openxmlformats.org/presentationml/2006/main" xmlns:r="http://schemas.openxmlformats.org/officeDocument/2006/relationships">
-  <p:cSld>
-    <p:spTree>
-      <p:nvGrpSpPr>
-        <p:cNvPr id="1" name=""/>
-        <p:cNvGrpSpPr/>
-        <p:nvPr/>
-      </p:nvGrpSpPr>
-      <p:grpSpPr/>
-      <p:sp>
-        <p:nvSpPr>
-          <p:cNvPr id="2" name="TextBox 1"/>
-          <p:cNvSpPr txBox="1"/>
-          <p:nvPr/>
-        </p:nvSpPr>
-        <p:spPr>
-          <a:xfrm>
             <a:off x="685800" y="411480"/>
             <a:ext cx="10820095" cy="960120"/>
           </a:xfrm>
@@ -12824,7 +12579,7 @@
                 <a:ea typeface="Yu Gothic"/>
                 <a:cs typeface="Yu Gothic"/>
               </a:rPr>
-              <a:t>31</a:t>
+              <a:t>30</a:t>
             </a:r>
           </a:p>
         </p:txBody>

--- a/slides/deepfake-talk.pptx
+++ b/slides/deepfake-talk.pptx
@@ -35,6 +35,8 @@
     <p:sldId id="283" r:id="rId35"/>
     <p:sldId id="284" r:id="rId36"/>
     <p:sldId id="285" r:id="rId37"/>
+    <p:sldId id="286" r:id="rId38"/>
+    <p:sldId id="287" r:id="rId39"/>
   </p:sldIdLst>
   <p:sldSz cx="12191695" cy="6858000" type="screen4x3"/>
   <p:notesSz cx="6858000" cy="9144000"/>
@@ -951,7 +953,7 @@
           <a:lstStyle/>
           <a:p>
             <a:r>
-              <a:t>この区間の「そうなんだ」：日本のいまの主役はAIではなく「番号」。しかし米国ではAI詐欺への警告が公式化——次は、番号偽装にAIが混ざってくる。</a:t>
+              <a:t>この区間の「そうなんだ」：日本のAI詐欺はまだ「有名人のニセ動画」どまりで、一般人を狙う圧倒的な主役は「番号」。しかしその差は“材料の差”にすぎない——次は、番号偽装にAIが混ざってくる。</a:t>
             </a:r>
           </a:p>
         </p:txBody>
@@ -1021,7 +1023,7 @@
           <a:lstStyle/>
           <a:p>
             <a:r>
-              <a:t>第2部の冒頭は口頭で（スライドなし・2分）：「舞台はメールから、電話に移ります。皆さんは普段、電話の相手が本人かどうか、どこで判断していますか？」——声・話し方・内容・雰囲気・番号など、出た答えを板書し、「この紙、最後にもう一度使います」。そのあとこのスライドへ。「第1部の話を聞くと、日本でも『AIの声にだまされた』というニュースが毎日出ていそうですよね。——皆さん、聞いたことはありますか？ ……ほとんどないと思います」</a:t>
+              <a:t>第2部の冒頭は口頭で（スライドなし・1.5分）：「舞台はメールから、電話に移ります。皆さんは普段、電話の相手が本人かどうか、どこで判断していますか？」——声・話し方・内容・雰囲気・番号など、出た答えを板書し、「この紙、最後にもう一度使います」。そのあとこのスライドへ。「第1部の話を聞くと、日本でも『AIの声にだまされた』というニュースが毎日出ていそうですよね。——皆さん、聞いたことはありますか？ ……あまり聞かないですよね」</a:t>
             </a:r>
           </a:p>
         </p:txBody>
@@ -1091,7 +1093,7 @@
           <a:lstStyle/>
           <a:p>
             <a:r>
-              <a:t>着信画面「○○警察署」のイメージを大きく見せながら。「犯行電話でいちばん多いのは、『＋』で始まる国際電話です。番号の末尾を『0110』に見せかけて、警察署を装います。今日は、これだけ覚えて帰っていただいても十分です——警察署の番号表示は、本人確認になりません」</a:t>
+              <a:t>「実は、日本にもAI詐欺はあります。いま一番多いのは、有名人のニセ動画です。実業家や政治家の顔と声をAIで作って投資に誘う偽広告——このSNS型投資詐欺の被害は、2025年に1,200億円を超えました。続くのは、今年1月に摘発された海外拠点のグループ。AIが書いた台本と、警察官のニセ映像で、日本の8人から約1,900万円——数えるほどで、このくらいです。皆さんのご家族の声をまねた詐欺が日本で確認された、という報道はまだありません。統計にも“AI詐欺”という欄はまだない。では、一般の私たちを狙う詐欺で、いま圧倒的に多いのは何か」。※摘発例は「予測」で“もう始まっている”として回収。</a:t>
             </a:r>
           </a:p>
         </p:txBody>
@@ -1161,7 +1163,7 @@
           <a:lstStyle/>
           <a:p>
             <a:r>
-              <a:t>「“警察”なんて、調べればすぐバレる大胆な嘘です。でも皆さんはもう、この理屈をご存じですね。（中略）1億円や当選メールと同じ——疑う人を先にふるい落とす選別装置なんです」。第1部の回収ポイント。</a:t>
+              <a:t>着信画面「○○警察署」のイメージを大きく見せながら。「答えは、警察の偽番号です。犯行電話でいちばん多いのは、『＋』で始まる国際電話です。番号の末尾を『0110』に見せかけて、警察署を装います。今日は、これだけ覚えて帰っていただいても十分です——警察署の番号表示は、本人確認になりません」</a:t>
             </a:r>
           </a:p>
         </p:txBody>
@@ -1231,7 +1233,7 @@
           <a:lstStyle/>
           <a:p>
             <a:r>
-              <a:t>「『なんだ、日本はまだAIじゃないのか』と安心しかけたところで——アメリカの話です。（中略）つまり私たちは、アメリカとの時間差の中にいます」。※「急増」等の倍率は言わず、当局が公式警告を出している事実で語る。</a:t>
+              <a:t>「“警察”なんて、調べればすぐバレる大胆な嘘です。でも皆さんはもう、この理屈をご存じですね。（中略）1億円や当選メールと同じ——疑う人を先にふるい落とす選別装置なんです」。第1部の回収ポイント。</a:t>
             </a:r>
           </a:p>
         </p:txBody>
@@ -1371,7 +1373,7 @@
           <a:lstStyle/>
           <a:p>
             <a:r>
-              <a:t>ゆっくり。「この時間差は、必ず埋まります。そして、その波が日本に来るときも、番号偽装が消えてAIに置き換わるわけではありません。いまある型に、AIが“混ざって”きます。番号のカードとAIのカードが、同時に切られる。そうなったとき、皆さんは何で見分けますか？ 言葉だけでは信じにくいと思いますので、ここからは実物をお見せします」→実演へ。</a:t>
+              <a:t>「『なんだ、日本はまだ有名人の話か』と安心しかけたところで——海外の話です。アメリカでは、FBIやFTCといった当局が『生成AIを使った詐欺』への警告を公式に出しています。しかも標的は有名人ではありません。家族の声をまねた音声クローン詐欺——ごく一般の家庭を狙う相談が、実際に増えているんです」。※「急増」等の倍率は言わず、当局が公式警告を出している事実で語る。</a:t>
             </a:r>
           </a:p>
         </p:txBody>
@@ -1441,7 +1443,7 @@
           <a:lstStyle/>
           <a:p>
             <a:r>
-              <a:t>この区間の「そうなんだ」：話し方も雰囲気も、相手がこちらに合わせて変えてくる。そして本物の脅威は「断らない声」。</a:t>
+              <a:t>「なぜ日本は有名人ばかりで、海外は一般の家庭まで進んでいるのか。差は、材料です。有名人の顔と声は、ネット上に無限に転がっている。私たち一般人のデータはまだ少ない——狙われていないのではなく、後回しになっているだけです。でもAIは、数十秒の音声があれば本人そっくりを作れるようになりました。この時間差は、必ず埋まります」</a:t>
             </a:r>
           </a:p>
         </p:txBody>
@@ -1511,7 +1513,7 @@
           <a:lstStyle/>
           <a:p>
             <a:r>
-              <a:t>クローン音声を会場スピーカーで再生。※素材は講師本人の声・本人同意で事前作成、生成物には「AI生成」を明示して管理。バックアップ音源必須。第三者の顔・声は使わない。</a:t>
+              <a:t>ゆっくり。「そして埋まるときも、番号偽装が消えてAIに置き換わるわけではありません。いまある型に、AIが“混ざって”きます。さっきの1月の摘発——AIの台本と警察官のニセ映像——は、もうその始まりです。『0110』の番号表示で信じさせて、本人そっくりの声でとどめを刺す。番号のカードとAIのカードが、同時に切られる。そうなったとき、皆さんは何で見分けますか？ 言葉だけでは信じにくいと思いますので、ここからは実物をお見せします」→実演へ。</a:t>
             </a:r>
           </a:p>
         </p:txBody>
@@ -1581,7 +1583,7 @@
           <a:lstStyle/>
           <a:p>
             <a:r>
-              <a:t>スマホを会場スピーカーへつなぎ、最新AIと生対話。聴衆から予想外のひと言を1つもらう（詐欺の台詞は言わせない）。「もちろん、いま話したのは安全なAIで、この“合わせる力”自体は良い技術です。ただ、同じ力が悪用されれば——昔は詐欺師が話術で一人ずつやっていたことを、同時に何人相手でもこなせてしまいます」</a:t>
+              <a:t>この区間の「そうなんだ」：話し方も雰囲気も、相手がこちらに合わせて変えてくる。そして本物の脅威は「断らない声」。</a:t>
             </a:r>
           </a:p>
         </p:txBody>
@@ -1651,7 +1653,7 @@
           <a:lstStyle/>
           <a:p>
             <a:r>
-              <a:t>なりすまし依頼→拒否のデモ。「いい断り方ですよね。でも安心はできません。同じ技術は世界に無数にあり、安全装置のないものも出回ります」。※通信不良に備え録音・録画のバックアップ。ライブが押したら拒否デモは録画30秒版に切り替え（打ち切り条件を事前に決める）。</a:t>
+              <a:t>クローン音声を会場スピーカーで再生。※素材は講師本人の声・本人同意で事前作成、生成物には「AI生成」を明示して管理。バックアップ音源必須。第三者の顔・声は使わない。</a:t>
             </a:r>
           </a:p>
         </p:txBody>
@@ -1721,7 +1723,7 @@
           <a:lstStyle/>
           <a:p>
             <a:r>
-              <a:t>「——最初の問いに、答えを出します」→結論へ。</a:t>
+              <a:t>スマホを会場スピーカーへつなぎ、最新AIと生対話。聴衆から予想外のひと言を1つもらう（詐欺の台詞は言わせない）。「もちろん、いま話したのは安全なAIで、この“合わせる力”自体は良い技術です。ただ、同じ力が悪用されれば——昔は詐欺師が話術で一人ずつやっていたことを、同時に何人相手でもこなせてしまいます」</a:t>
             </a:r>
           </a:p>
         </p:txBody>
@@ -1791,7 +1793,7 @@
           <a:lstStyle/>
           <a:p>
             <a:r>
-              <a:t>板書した紙を再び見せながら。「最初に集めました——声、話し方、内容、雰囲気、番号。今日、全部裏切られましたね。だったら、手がかりで見分けること自体をやめればいい」</a:t>
+              <a:t>なりすまし依頼→拒否のデモ。「いい断り方ですよね。でも安心はできません。同じ技術は世界に無数にあり、安全装置のないものも出回ります」。※通信不良に備え録音・録画のバックアップ。ライブが押したら拒否デモは録画30秒版に切り替え（打ち切り条件を事前に決める）。</a:t>
             </a:r>
           </a:p>
         </p:txBody>
@@ -1861,7 +1863,7 @@
           <a:lstStyle/>
           <a:p>
             <a:r>
-              <a:t>「この“一度切って、自分で調べてかけ直す”は、番号が本物でも、声が本物でも、相手がAIでも人間でも——効きます」。※射程の明示：この主手順が守るのは「電話・ビデオ通話でのなりすまし」。投資話・偽サイト・長期の関係構築型詐欺は別の備えが要る、と一言添える。「本物の警察なら、確認のためにいったん切っても、不利益はありません」。ここで第1部の「誰にも言うな」の伏線を回収。</a:t>
+              <a:t>「——最初の問いに、答えを出します」→結論へ。</a:t>
             </a:r>
           </a:p>
         </p:txBody>
@@ -1931,7 +1933,7 @@
           <a:lstStyle/>
           <a:p>
             <a:r>
-              <a:t>スライドの5項目を一言ずつ指差しながら。「今日の話を、ひと息で巻き戻します。（中略）——全部、一本の線でつながっています」</a:t>
+              <a:t>板書した紙を再び見せながら。「最初に集めました——声、話し方、内容、雰囲気、番号。今日、全部裏切られましたね。だったら、手がかりで見分けること自体をやめればいい」</a:t>
             </a:r>
           </a:p>
         </p:txBody>
@@ -2001,7 +2003,7 @@
           <a:lstStyle/>
           <a:p>
             <a:r>
-              <a:t>「でも思い出してください。あのとき会場に流れた『そんなはずはない』という空気。あれが“ばらまきの嘘”への完璧な勝ち方です。これから来るのは、笑い飛ばせない、あなた専用の嘘。だからこそ、笑う代わりに——一度切って、自分で調べて、かけ直す」</a:t>
+              <a:t>「この“一度切って、自分で調べてかけ直す”は、番号が本物でも、声が本物でも、相手がAIでも人間でも——効きます」。※射程の明示：この主手順が守るのは「電話・ビデオ通話でのなりすまし」。投資話・偽サイト・長期の関係構築型詐欺は別の備えが要る、と一言添える。「本物の警察なら、確認のためにいったん切っても、不利益はありません」。ここで第1部の「誰にも言うな」の伏線を回収。</a:t>
             </a:r>
           </a:p>
         </p:txBody>
@@ -2097,6 +2099,146 @@
 </file>
 
 <file path=ppt/notesSlides/notesSlide30.xml><?xml version="1.0" encoding="utf-8"?>
+<p:notes xmlns:a="http://schemas.openxmlformats.org/drawingml/2006/main" xmlns:p="http://schemas.openxmlformats.org/presentationml/2006/main" xmlns:r="http://schemas.openxmlformats.org/officeDocument/2006/relationships">
+  <p:cSld>
+    <p:spTree>
+      <p:nvGrpSpPr>
+        <p:cNvPr id="1" name=""/>
+        <p:cNvGrpSpPr/>
+        <p:nvPr/>
+      </p:nvGrpSpPr>
+      <p:grpSpPr>
+        <a:xfrm>
+          <a:off x="0" y="0"/>
+          <a:ext cx="0" cy="0"/>
+          <a:chOff x="0" y="0"/>
+          <a:chExt cx="0" cy="0"/>
+        </a:xfrm>
+      </p:grpSpPr>
+      <p:sp>
+        <p:nvSpPr>
+          <p:cNvPr id="2" name="Slide Image Placeholder 1"/>
+          <p:cNvSpPr>
+            <a:spLocks noGrp="1"/>
+          </p:cNvSpPr>
+          <p:nvPr>
+            <p:ph type="sldImg" idx="2"/>
+          </p:nvPr>
+        </p:nvSpPr>
+        <p:spPr/>
+      </p:sp>
+      <p:sp>
+        <p:nvSpPr>
+          <p:cNvPr id="3" name="Notes Placeholder 2"/>
+          <p:cNvSpPr>
+            <a:spLocks noGrp="1"/>
+          </p:cNvSpPr>
+          <p:nvPr>
+            <p:ph type="body" idx="3" sz="quarter"/>
+          </p:nvPr>
+        </p:nvSpPr>
+        <p:spPr/>
+        <p:txBody>
+          <a:bodyPr/>
+          <a:lstStyle/>
+          <a:p>
+            <a:r>
+              <a:t>スライドの5項目を一言ずつ指差しながら。「今日の話を、ひと息で巻き戻します。（中略）——全部、一本の線でつながっています」</a:t>
+            </a:r>
+          </a:p>
+        </p:txBody>
+      </p:sp>
+      <p:sp>
+        <p:nvSpPr>
+          <p:cNvPr id="4" name="Slide Number Placeholder 3"/>
+          <p:cNvSpPr>
+            <a:spLocks noGrp="1"/>
+          </p:cNvSpPr>
+          <p:nvPr>
+            <p:ph type="sldNum" idx="5" sz="quarter"/>
+          </p:nvPr>
+        </p:nvSpPr>
+        <p:spPr/>
+      </p:sp>
+    </p:spTree>
+  </p:cSld>
+  <p:clrMapOvr>
+    <a:masterClrMapping/>
+  </p:clrMapOvr>
+</p:notes>
+</file>
+
+<file path=ppt/notesSlides/notesSlide31.xml><?xml version="1.0" encoding="utf-8"?>
+<p:notes xmlns:a="http://schemas.openxmlformats.org/drawingml/2006/main" xmlns:p="http://schemas.openxmlformats.org/presentationml/2006/main" xmlns:r="http://schemas.openxmlformats.org/officeDocument/2006/relationships">
+  <p:cSld>
+    <p:spTree>
+      <p:nvGrpSpPr>
+        <p:cNvPr id="1" name=""/>
+        <p:cNvGrpSpPr/>
+        <p:nvPr/>
+      </p:nvGrpSpPr>
+      <p:grpSpPr>
+        <a:xfrm>
+          <a:off x="0" y="0"/>
+          <a:ext cx="0" cy="0"/>
+          <a:chOff x="0" y="0"/>
+          <a:chExt cx="0" cy="0"/>
+        </a:xfrm>
+      </p:grpSpPr>
+      <p:sp>
+        <p:nvSpPr>
+          <p:cNvPr id="2" name="Slide Image Placeholder 1"/>
+          <p:cNvSpPr>
+            <a:spLocks noGrp="1"/>
+          </p:cNvSpPr>
+          <p:nvPr>
+            <p:ph type="sldImg" idx="2"/>
+          </p:nvPr>
+        </p:nvSpPr>
+        <p:spPr/>
+      </p:sp>
+      <p:sp>
+        <p:nvSpPr>
+          <p:cNvPr id="3" name="Notes Placeholder 2"/>
+          <p:cNvSpPr>
+            <a:spLocks noGrp="1"/>
+          </p:cNvSpPr>
+          <p:nvPr>
+            <p:ph type="body" idx="3" sz="quarter"/>
+          </p:nvPr>
+        </p:nvSpPr>
+        <p:spPr/>
+        <p:txBody>
+          <a:bodyPr/>
+          <a:lstStyle/>
+          <a:p>
+            <a:r>
+              <a:t>「でも思い出してください。あのとき会場に流れた『そんなはずはない』という空気。あれが“ばらまきの嘘”への完璧な勝ち方です。これから来るのは、笑い飛ばせない、あなた専用の嘘。だからこそ、笑う代わりに——一度切って、自分で調べて、かけ直す」</a:t>
+            </a:r>
+          </a:p>
+        </p:txBody>
+      </p:sp>
+      <p:sp>
+        <p:nvSpPr>
+          <p:cNvPr id="4" name="Slide Number Placeholder 3"/>
+          <p:cNvSpPr>
+            <a:spLocks noGrp="1"/>
+          </p:cNvSpPr>
+          <p:nvPr>
+            <p:ph type="sldNum" idx="5" sz="quarter"/>
+          </p:nvPr>
+        </p:nvSpPr>
+        <p:spPr/>
+      </p:sp>
+    </p:spTree>
+  </p:cSld>
+  <p:clrMapOvr>
+    <a:masterClrMapping/>
+  </p:clrMapOvr>
+</p:notes>
+</file>
+
+<file path=ppt/notesSlides/notesSlide32.xml><?xml version="1.0" encoding="utf-8"?>
 <p:notes xmlns:a="http://schemas.openxmlformats.org/drawingml/2006/main" xmlns:p="http://schemas.openxmlformats.org/presentationml/2006/main" xmlns:r="http://schemas.openxmlformats.org/officeDocument/2006/relationships">
   <p:cSld>
     <p:spTree>
@@ -7255,7 +7397,7 @@
                 <a:ea typeface="Yu Gothic"/>
                 <a:cs typeface="Yu Gothic"/>
               </a:rPr>
-              <a:t>「AI詐欺のニュース、聞かないですよね」</a:t>
+              <a:t>「AI詐欺のニュース、あまり聞かないですよね」</a:t>
             </a:r>
           </a:p>
         </p:txBody>
@@ -7351,9 +7493,6 @@
               <a:lnSpc>
                 <a:spcPct val="135000"/>
               </a:lnSpc>
-              <a:spcAft>
-                <a:spcPts val="979"/>
-              </a:spcAft>
             </a:pPr>
             <a:r>
               <a:rPr sz="2800" b="0">
@@ -7364,25 +7503,7 @@
                 <a:ea typeface="Yu Gothic"/>
                 <a:cs typeface="Yu Gothic"/>
               </a:rPr>
-              <a:t>・日本の統計には「AI詐欺」という数字自体がまだない（手口別分類に欄がない）</a:t>
-            </a:r>
-          </a:p>
-          <a:p>
-            <a:pPr marL="355600" indent="-355600">
-              <a:lnSpc>
-                <a:spcPct val="135000"/>
-              </a:lnSpc>
-            </a:pPr>
-            <a:r>
-              <a:rPr sz="2800" b="0">
-                <a:solidFill>
-                  <a:srgbClr val="20242C"/>
-                </a:solidFill>
-                <a:latin typeface="Yu Gothic"/>
-                <a:ea typeface="Yu Gothic"/>
-                <a:cs typeface="Yu Gothic"/>
-              </a:rPr>
-              <a:t>・では、いまの日本で一番効いている「偽装」は何か？</a:t>
+              <a:t>・……あまり聞かないですよね</a:t>
             </a:r>
           </a:p>
         </p:txBody>
@@ -7511,7 +7632,7 @@
                 <a:ea typeface="Yu Gothic"/>
                 <a:cs typeface="Yu Gothic"/>
               </a:rPr>
-              <a:t>答えは、番号。</a:t>
+              <a:t>実は、あるにはあります——ただし</a:t>
             </a:r>
           </a:p>
         </p:txBody>
@@ -7592,7 +7713,7 @@
                 <a:ea typeface="Yu Gothic"/>
                 <a:cs typeface="Yu Gothic"/>
               </a:rPr>
-              <a:t>出典：警察庁 令和7年統計（講演直前に最新値を再確認）</a:t>
+              <a:t>出典：警察庁統計・報道／毎日新聞（2026年1月29日）</a:t>
             </a:r>
           </a:p>
         </p:txBody>
@@ -7605,116 +7726,69 @@
         </p:nvSpPr>
         <p:spPr>
           <a:xfrm>
-            <a:off x="685800" y="5138928"/>
-            <a:ext cx="10820095" cy="640080"/>
-          </a:xfrm>
-          <a:prstGeom prst="rect">
-            <a:avLst/>
-          </a:prstGeom>
-          <a:noFill/>
-        </p:spPr>
-        <p:txBody>
-          <a:bodyPr wrap="square" anchor="ctr">
-            <a:noAutofit/>
-          </a:bodyPr>
-          <a:lstStyle/>
-          <a:p>
-            <a:pPr algn="l"/>
-            <a:r>
-              <a:rPr sz="3000" b="1">
-                <a:solidFill>
-                  <a:srgbClr val="A83B3B"/>
-                </a:solidFill>
-                <a:latin typeface="Yu Gothic"/>
-                <a:ea typeface="Yu Gothic"/>
-                <a:cs typeface="Yu Gothic"/>
-              </a:rPr>
-              <a:t>警察署の番号表示は、本人確認になりません</a:t>
-            </a:r>
-          </a:p>
-        </p:txBody>
-      </p:sp>
-      <p:sp>
-        <p:nvSpPr>
-          <p:cNvPr id="6" name="TextBox 5"/>
-          <p:cNvSpPr txBox="1"/>
-          <p:nvPr/>
-        </p:nvSpPr>
-        <p:spPr>
-          <a:xfrm>
-            <a:off x="685800" y="1757172"/>
-            <a:ext cx="3383280" cy="646176"/>
-          </a:xfrm>
-          <a:prstGeom prst="rect">
-            <a:avLst/>
-          </a:prstGeom>
-          <a:noFill/>
-        </p:spPr>
-        <p:txBody>
-          <a:bodyPr wrap="square" anchor="ctr">
-            <a:noAutofit/>
-          </a:bodyPr>
-          <a:lstStyle/>
-          <a:p>
-            <a:pPr algn="l">
+            <a:off x="685800" y="1645920"/>
+            <a:ext cx="10820095" cy="4133088"/>
+          </a:xfrm>
+          <a:prstGeom prst="rect">
+            <a:avLst/>
+          </a:prstGeom>
+          <a:noFill/>
+        </p:spPr>
+        <p:txBody>
+          <a:bodyPr wrap="square" anchor="t">
+            <a:noAutofit/>
+          </a:bodyPr>
+          <a:lstStyle/>
+          <a:p>
+            <a:pPr marL="355600" indent="-355600">
               <a:lnSpc>
-                <a:spcPct val="125000"/>
+                <a:spcPct val="135000"/>
+              </a:lnSpc>
+              <a:spcAft>
+                <a:spcPts val="979"/>
+              </a:spcAft>
+            </a:pPr>
+            <a:r>
+              <a:rPr sz="2800" b="0">
+                <a:solidFill>
+                  <a:srgbClr val="20242C"/>
+                </a:solidFill>
+                <a:latin typeface="Yu Gothic"/>
+                <a:ea typeface="Yu Gothic"/>
+                <a:cs typeface="Yu Gothic"/>
+              </a:rPr>
+              <a:t>・いま一番多いのは「有名人のニセ動画」——投資に誘う偽広告。SNS型投資詐欺の被害は 1,200億円超（2025年・前年比+46.3%）</a:t>
+            </a:r>
+          </a:p>
+          <a:p>
+            <a:pPr marL="355600" indent="-355600">
+              <a:lnSpc>
+                <a:spcPct val="135000"/>
+              </a:lnSpc>
+              <a:spcAft>
+                <a:spcPts val="979"/>
+              </a:spcAft>
+            </a:pPr>
+            <a:r>
+              <a:rPr sz="2800" b="0">
+                <a:solidFill>
+                  <a:srgbClr val="20242C"/>
+                </a:solidFill>
+                <a:latin typeface="Yu Gothic"/>
+                <a:ea typeface="Yu Gothic"/>
+                <a:cs typeface="Yu Gothic"/>
+              </a:rPr>
+              <a:t>・続くのは、AIの台本＋警察官のニセ映像の海外拠点グループ（2026年1月摘発・被害約1,900万円）——このくらい</a:t>
+            </a:r>
+          </a:p>
+          <a:p>
+            <a:pPr marL="355600" indent="-355600">
+              <a:lnSpc>
+                <a:spcPct val="135000"/>
               </a:lnSpc>
             </a:pPr>
             <a:r>
-              <a:rPr sz="2000" b="0">
-                <a:solidFill>
-                  <a:srgbClr val="5C6472"/>
-                </a:solidFill>
-                <a:latin typeface="Yu Gothic"/>
-                <a:ea typeface="Yu Gothic"/>
-                <a:cs typeface="Yu Gothic"/>
-              </a:rPr>
-              <a:t>2025年 詐欺全体の被害</a:t>
-            </a:r>
-          </a:p>
-        </p:txBody>
-      </p:sp>
-      <p:sp>
-        <p:nvSpPr>
-          <p:cNvPr id="7" name="TextBox 6"/>
-          <p:cNvSpPr txBox="1"/>
-          <p:nvPr/>
-        </p:nvSpPr>
-        <p:spPr>
-          <a:xfrm>
-            <a:off x="4343400" y="1757172"/>
-            <a:ext cx="7178040" cy="646176"/>
-          </a:xfrm>
-          <a:prstGeom prst="rect">
-            <a:avLst/>
-          </a:prstGeom>
-          <a:noFill/>
-        </p:spPr>
-        <p:txBody>
-          <a:bodyPr wrap="square" anchor="ctr">
-            <a:noAutofit/>
-          </a:bodyPr>
-          <a:lstStyle/>
-          <a:p>
-            <a:pPr>
-              <a:lnSpc>
-                <a:spcPct val="120000"/>
-              </a:lnSpc>
-            </a:pPr>
-            <a:r>
-              <a:rPr sz="2800" b="1">
-                <a:solidFill>
-                  <a:srgbClr val="B9791F"/>
-                </a:solidFill>
-                <a:latin typeface="Yu Gothic"/>
-                <a:ea typeface="Yu Gothic"/>
-                <a:cs typeface="Yu Gothic"/>
-              </a:rPr>
-              <a:t>約3,257億円</a:t>
-            </a:r>
-            <a:r>
-              <a:rPr sz="2800" b="1">
+              <a:rPr sz="2800" b="0">
                 <a:solidFill>
                   <a:srgbClr val="20242C"/>
                 </a:solidFill>
@@ -7722,414 +7796,14 @@
                 <a:ea typeface="Yu Gothic"/>
                 <a:cs typeface="Yu Gothic"/>
               </a:rPr>
-              <a:t>（過去最悪）</a:t>
-            </a:r>
-          </a:p>
-        </p:txBody>
-      </p:sp>
-      <p:sp>
-        <p:nvSpPr>
-          <p:cNvPr id="8" name="Rectangle 7"/>
-          <p:cNvSpPr/>
-          <p:nvPr/>
-        </p:nvSpPr>
-        <p:spPr>
-          <a:xfrm>
-            <a:off x="685800" y="2421636"/>
-            <a:ext cx="10820095" cy="12801"/>
-          </a:xfrm>
-          <a:prstGeom prst="rect">
-            <a:avLst/>
-          </a:prstGeom>
-          <a:solidFill>
-            <a:srgbClr val="E6E1D6"/>
-          </a:solidFill>
-          <a:ln>
-            <a:noFill/>
-          </a:ln>
-          <a:effectLst/>
-        </p:spPr>
-        <p:style>
-          <a:lnRef idx="1">
-            <a:schemeClr val="accent1"/>
-          </a:lnRef>
-          <a:fillRef idx="3">
-            <a:schemeClr val="accent1"/>
-          </a:fillRef>
-          <a:effectRef idx="2">
-            <a:schemeClr val="accent1"/>
-          </a:effectRef>
-          <a:fontRef idx="minor">
-            <a:schemeClr val="lt1"/>
-          </a:fontRef>
-        </p:style>
-        <p:txBody>
-          <a:bodyPr rtlCol="0" anchor="ctr"/>
-          <a:lstStyle/>
-          <a:p>
-            <a:pPr algn="ctr"/>
-          </a:p>
-        </p:txBody>
-      </p:sp>
-      <p:sp>
-        <p:nvSpPr>
-          <p:cNvPr id="9" name="TextBox 8"/>
-          <p:cNvSpPr txBox="1"/>
-          <p:nvPr/>
-        </p:nvSpPr>
-        <p:spPr>
-          <a:xfrm>
-            <a:off x="685800" y="2586228"/>
-            <a:ext cx="3383280" cy="646176"/>
-          </a:xfrm>
-          <a:prstGeom prst="rect">
-            <a:avLst/>
-          </a:prstGeom>
-          <a:noFill/>
-        </p:spPr>
-        <p:txBody>
-          <a:bodyPr wrap="square" anchor="ctr">
-            <a:noAutofit/>
-          </a:bodyPr>
-          <a:lstStyle/>
-          <a:p>
-            <a:pPr algn="l">
-              <a:lnSpc>
-                <a:spcPct val="125000"/>
-              </a:lnSpc>
-            </a:pPr>
-            <a:r>
-              <a:rPr sz="2000" b="0">
-                <a:solidFill>
-                  <a:srgbClr val="5C6472"/>
-                </a:solidFill>
-                <a:latin typeface="Yu Gothic"/>
-                <a:ea typeface="Yu Gothic"/>
-                <a:cs typeface="Yu Gothic"/>
-              </a:rPr>
-              <a:t>うち特殊詐欺</a:t>
-            </a:r>
-          </a:p>
-        </p:txBody>
-      </p:sp>
-      <p:sp>
-        <p:nvSpPr>
-          <p:cNvPr id="10" name="TextBox 9"/>
-          <p:cNvSpPr txBox="1"/>
-          <p:nvPr/>
-        </p:nvSpPr>
-        <p:spPr>
-          <a:xfrm>
-            <a:off x="4343400" y="2586228"/>
-            <a:ext cx="7178040" cy="646176"/>
-          </a:xfrm>
-          <a:prstGeom prst="rect">
-            <a:avLst/>
-          </a:prstGeom>
-          <a:noFill/>
-        </p:spPr>
-        <p:txBody>
-          <a:bodyPr wrap="square" anchor="ctr">
-            <a:noAutofit/>
-          </a:bodyPr>
-          <a:lstStyle/>
-          <a:p>
-            <a:pPr>
-              <a:lnSpc>
-                <a:spcPct val="120000"/>
-              </a:lnSpc>
-            </a:pPr>
-            <a:r>
-              <a:rPr sz="2800" b="1">
-                <a:solidFill>
-                  <a:srgbClr val="B9791F"/>
-                </a:solidFill>
-                <a:latin typeface="Yu Gothic"/>
-                <a:ea typeface="Yu Gothic"/>
-                <a:cs typeface="Yu Gothic"/>
-              </a:rPr>
-              <a:t>約1,423億円</a:t>
-            </a:r>
-          </a:p>
-        </p:txBody>
-      </p:sp>
-      <p:sp>
-        <p:nvSpPr>
-          <p:cNvPr id="11" name="Rectangle 10"/>
-          <p:cNvSpPr/>
-          <p:nvPr/>
-        </p:nvSpPr>
-        <p:spPr>
-          <a:xfrm>
-            <a:off x="685800" y="3250691"/>
-            <a:ext cx="10820095" cy="12801"/>
-          </a:xfrm>
-          <a:prstGeom prst="rect">
-            <a:avLst/>
-          </a:prstGeom>
-          <a:solidFill>
-            <a:srgbClr val="E6E1D6"/>
-          </a:solidFill>
-          <a:ln>
-            <a:noFill/>
-          </a:ln>
-          <a:effectLst/>
-        </p:spPr>
-        <p:style>
-          <a:lnRef idx="1">
-            <a:schemeClr val="accent1"/>
-          </a:lnRef>
-          <a:fillRef idx="3">
-            <a:schemeClr val="accent1"/>
-          </a:fillRef>
-          <a:effectRef idx="2">
-            <a:schemeClr val="accent1"/>
-          </a:effectRef>
-          <a:fontRef idx="minor">
-            <a:schemeClr val="lt1"/>
-          </a:fontRef>
-        </p:style>
-        <p:txBody>
-          <a:bodyPr rtlCol="0" anchor="ctr"/>
-          <a:lstStyle/>
-          <a:p>
-            <a:pPr algn="ctr"/>
-          </a:p>
-        </p:txBody>
-      </p:sp>
-      <p:sp>
-        <p:nvSpPr>
-          <p:cNvPr id="12" name="TextBox 11"/>
-          <p:cNvSpPr txBox="1"/>
-          <p:nvPr/>
-        </p:nvSpPr>
-        <p:spPr>
-          <a:xfrm>
-            <a:off x="685800" y="3415284"/>
-            <a:ext cx="3383280" cy="646176"/>
-          </a:xfrm>
-          <a:prstGeom prst="rect">
-            <a:avLst/>
-          </a:prstGeom>
-          <a:noFill/>
-        </p:spPr>
-        <p:txBody>
-          <a:bodyPr wrap="square" anchor="ctr">
-            <a:noAutofit/>
-          </a:bodyPr>
-          <a:lstStyle/>
-          <a:p>
-            <a:pPr algn="l">
-              <a:lnSpc>
-                <a:spcPct val="125000"/>
-              </a:lnSpc>
-            </a:pPr>
-            <a:r>
-              <a:rPr sz="2000" b="0">
-                <a:solidFill>
-                  <a:srgbClr val="5C6472"/>
-                </a:solidFill>
-                <a:latin typeface="Yu Gothic"/>
-                <a:ea typeface="Yu Gothic"/>
-                <a:cs typeface="Yu Gothic"/>
-              </a:rPr>
-              <a:t>その約7割＝約1,005億円</a:t>
-            </a:r>
-          </a:p>
-        </p:txBody>
-      </p:sp>
-      <p:sp>
-        <p:nvSpPr>
-          <p:cNvPr id="13" name="TextBox 12"/>
-          <p:cNvSpPr txBox="1"/>
-          <p:nvPr/>
-        </p:nvSpPr>
-        <p:spPr>
-          <a:xfrm>
-            <a:off x="4343400" y="3415284"/>
-            <a:ext cx="7178040" cy="646176"/>
-          </a:xfrm>
-          <a:prstGeom prst="rect">
-            <a:avLst/>
-          </a:prstGeom>
-          <a:noFill/>
-        </p:spPr>
-        <p:txBody>
-          <a:bodyPr wrap="square" anchor="ctr">
-            <a:noAutofit/>
-          </a:bodyPr>
-          <a:lstStyle/>
-          <a:p>
-            <a:pPr>
-              <a:lnSpc>
-                <a:spcPct val="120000"/>
-              </a:lnSpc>
-            </a:pPr>
-            <a:r>
-              <a:rPr sz="2800" b="1">
-                <a:solidFill>
-                  <a:srgbClr val="B9791F"/>
-                </a:solidFill>
-                <a:latin typeface="Yu Gothic"/>
-                <a:ea typeface="Yu Gothic"/>
-                <a:cs typeface="Yu Gothic"/>
-              </a:rPr>
-              <a:t>「ニセ警察詐欺」</a:t>
-            </a:r>
-          </a:p>
-        </p:txBody>
-      </p:sp>
-      <p:sp>
-        <p:nvSpPr>
-          <p:cNvPr id="14" name="Rectangle 13"/>
-          <p:cNvSpPr/>
-          <p:nvPr/>
-        </p:nvSpPr>
-        <p:spPr>
-          <a:xfrm>
-            <a:off x="685800" y="4079747"/>
-            <a:ext cx="10820095" cy="12801"/>
-          </a:xfrm>
-          <a:prstGeom prst="rect">
-            <a:avLst/>
-          </a:prstGeom>
-          <a:solidFill>
-            <a:srgbClr val="E6E1D6"/>
-          </a:solidFill>
-          <a:ln>
-            <a:noFill/>
-          </a:ln>
-          <a:effectLst/>
-        </p:spPr>
-        <p:style>
-          <a:lnRef idx="1">
-            <a:schemeClr val="accent1"/>
-          </a:lnRef>
-          <a:fillRef idx="3">
-            <a:schemeClr val="accent1"/>
-          </a:fillRef>
-          <a:effectRef idx="2">
-            <a:schemeClr val="accent1"/>
-          </a:effectRef>
-          <a:fontRef idx="minor">
-            <a:schemeClr val="lt1"/>
-          </a:fontRef>
-        </p:style>
-        <p:txBody>
-          <a:bodyPr rtlCol="0" anchor="ctr"/>
-          <a:lstStyle/>
-          <a:p>
-            <a:pPr algn="ctr"/>
-          </a:p>
-        </p:txBody>
-      </p:sp>
-      <p:sp>
-        <p:nvSpPr>
-          <p:cNvPr id="15" name="TextBox 14"/>
-          <p:cNvSpPr txBox="1"/>
-          <p:nvPr/>
-        </p:nvSpPr>
-        <p:spPr>
-          <a:xfrm>
-            <a:off x="685800" y="4244340"/>
-            <a:ext cx="3383280" cy="646176"/>
-          </a:xfrm>
-          <a:prstGeom prst="rect">
-            <a:avLst/>
-          </a:prstGeom>
-          <a:noFill/>
-        </p:spPr>
-        <p:txBody>
-          <a:bodyPr wrap="square" anchor="ctr">
-            <a:noAutofit/>
-          </a:bodyPr>
-          <a:lstStyle/>
-          <a:p>
-            <a:pPr algn="l">
-              <a:lnSpc>
-                <a:spcPct val="125000"/>
-              </a:lnSpc>
-            </a:pPr>
-            <a:r>
-              <a:rPr sz="2000" b="0">
-                <a:solidFill>
-                  <a:srgbClr val="5C6472"/>
-                </a:solidFill>
-                <a:latin typeface="Yu Gothic"/>
-                <a:ea typeface="Yu Gothic"/>
-                <a:cs typeface="Yu Gothic"/>
-              </a:rPr>
-              <a:t>犯行電話の最多</a:t>
-            </a:r>
-          </a:p>
-        </p:txBody>
-      </p:sp>
-      <p:sp>
-        <p:nvSpPr>
-          <p:cNvPr id="16" name="TextBox 15"/>
-          <p:cNvSpPr txBox="1"/>
-          <p:nvPr/>
-        </p:nvSpPr>
-        <p:spPr>
-          <a:xfrm>
-            <a:off x="4343400" y="4244340"/>
-            <a:ext cx="7178040" cy="646176"/>
-          </a:xfrm>
-          <a:prstGeom prst="rect">
-            <a:avLst/>
-          </a:prstGeom>
-          <a:noFill/>
-        </p:spPr>
-        <p:txBody>
-          <a:bodyPr wrap="square" anchor="ctr">
-            <a:noAutofit/>
-          </a:bodyPr>
-          <a:lstStyle/>
-          <a:p>
-            <a:pPr>
-              <a:lnSpc>
-                <a:spcPct val="120000"/>
-              </a:lnSpc>
-            </a:pPr>
-            <a:r>
-              <a:rPr sz="2800" b="1">
-                <a:solidFill>
-                  <a:srgbClr val="B9791F"/>
-                </a:solidFill>
-                <a:latin typeface="Yu Gothic"/>
-                <a:ea typeface="Yu Gothic"/>
-                <a:cs typeface="Yu Gothic"/>
-              </a:rPr>
-              <a:t>「＋」</a:t>
-            </a:r>
-            <a:r>
-              <a:rPr sz="2800" b="1">
-                <a:solidFill>
-                  <a:srgbClr val="20242C"/>
-                </a:solidFill>
-                <a:latin typeface="Yu Gothic"/>
-                <a:ea typeface="Yu Gothic"/>
-                <a:cs typeface="Yu Gothic"/>
-              </a:rPr>
-              <a:t>で始まる国際電話・末尾</a:t>
-            </a:r>
-            <a:r>
-              <a:rPr sz="2800" b="1">
-                <a:solidFill>
-                  <a:srgbClr val="B9791F"/>
-                </a:solidFill>
-                <a:latin typeface="Yu Gothic"/>
-                <a:ea typeface="Yu Gothic"/>
-                <a:cs typeface="Yu Gothic"/>
-              </a:rPr>
-              <a:t>「0110」</a:t>
-            </a:r>
-          </a:p>
-        </p:txBody>
-      </p:sp>
-      <p:sp>
-        <p:nvSpPr>
-          <p:cNvPr id="17" name="meta:pageno"/>
+              <a:t>・「家族の声をまねた詐欺」が日本で確認された報道はまだない（統計に「AI詐欺」の欄もない）</a:t>
+            </a:r>
+          </a:p>
+        </p:txBody>
+      </p:sp>
+      <p:sp>
+        <p:nvSpPr>
+          <p:cNvPr id="6" name="meta:pageno"/>
           <p:cNvSpPr txBox="1"/>
           <p:nvPr/>
         </p:nvSpPr>
@@ -8166,7 +7840,7 @@
       </p:sp>
       <p:sp>
         <p:nvSpPr>
-          <p:cNvPr id="18" name="meta:part"/>
+          <p:cNvPr id="7" name="meta:part"/>
           <p:cNvSpPr txBox="1"/>
           <p:nvPr/>
         </p:nvSpPr>
@@ -8251,7 +7925,7 @@
                 <a:ea typeface="Yu Gothic"/>
                 <a:cs typeface="Yu Gothic"/>
               </a:rPr>
-              <a:t>ニセ警察も、第1部と同じ構造</a:t>
+              <a:t>圧倒的に多いのは、警察の偽番号。</a:t>
             </a:r>
           </a:p>
         </p:txBody>
@@ -8308,8 +7982,8 @@
         </p:nvSpPr>
         <p:spPr>
           <a:xfrm>
-            <a:off x="685800" y="1645920"/>
-            <a:ext cx="10820095" cy="3401568"/>
+            <a:off x="685800" y="5852160"/>
+            <a:ext cx="10820095" cy="347472"/>
           </a:xfrm>
           <a:prstGeom prst="rect">
             <a:avLst/>
@@ -8322,55 +7996,139 @@
           </a:bodyPr>
           <a:lstStyle/>
           <a:p>
-            <a:pPr marL="355600" indent="-355600">
+            <a:pPr algn="l"/>
+            <a:r>
+              <a:rPr sz="1500" b="0">
+                <a:solidFill>
+                  <a:srgbClr val="5C6472"/>
+                </a:solidFill>
+                <a:latin typeface="Yu Gothic"/>
+                <a:ea typeface="Yu Gothic"/>
+                <a:cs typeface="Yu Gothic"/>
+              </a:rPr>
+              <a:t>出典：警察庁 令和7年統計（講演直前に最新値を再確認）</a:t>
+            </a:r>
+          </a:p>
+        </p:txBody>
+      </p:sp>
+      <p:sp>
+        <p:nvSpPr>
+          <p:cNvPr id="5" name="TextBox 4"/>
+          <p:cNvSpPr txBox="1"/>
+          <p:nvPr/>
+        </p:nvSpPr>
+        <p:spPr>
+          <a:xfrm>
+            <a:off x="685800" y="5138928"/>
+            <a:ext cx="10820095" cy="640080"/>
+          </a:xfrm>
+          <a:prstGeom prst="rect">
+            <a:avLst/>
+          </a:prstGeom>
+          <a:noFill/>
+        </p:spPr>
+        <p:txBody>
+          <a:bodyPr wrap="square" anchor="ctr">
+            <a:noAutofit/>
+          </a:bodyPr>
+          <a:lstStyle/>
+          <a:p>
+            <a:pPr algn="l"/>
+            <a:r>
+              <a:rPr sz="3000" b="1">
+                <a:solidFill>
+                  <a:srgbClr val="A83B3B"/>
+                </a:solidFill>
+                <a:latin typeface="Yu Gothic"/>
+                <a:ea typeface="Yu Gothic"/>
+                <a:cs typeface="Yu Gothic"/>
+              </a:rPr>
+              <a:t>警察署の番号表示は、本人確認になりません</a:t>
+            </a:r>
+          </a:p>
+        </p:txBody>
+      </p:sp>
+      <p:sp>
+        <p:nvSpPr>
+          <p:cNvPr id="6" name="TextBox 5"/>
+          <p:cNvSpPr txBox="1"/>
+          <p:nvPr/>
+        </p:nvSpPr>
+        <p:spPr>
+          <a:xfrm>
+            <a:off x="685800" y="1757172"/>
+            <a:ext cx="3383280" cy="646176"/>
+          </a:xfrm>
+          <a:prstGeom prst="rect">
+            <a:avLst/>
+          </a:prstGeom>
+          <a:noFill/>
+        </p:spPr>
+        <p:txBody>
+          <a:bodyPr wrap="square" anchor="ctr">
+            <a:noAutofit/>
+          </a:bodyPr>
+          <a:lstStyle/>
+          <a:p>
+            <a:pPr algn="l">
               <a:lnSpc>
-                <a:spcPct val="135000"/>
-              </a:lnSpc>
-              <a:spcAft>
-                <a:spcPts val="979"/>
-              </a:spcAft>
-            </a:pPr>
-            <a:r>
-              <a:rPr sz="2800" b="0">
-                <a:solidFill>
-                  <a:srgbClr val="20242C"/>
-                </a:solidFill>
-                <a:latin typeface="Yu Gothic"/>
-                <a:ea typeface="Yu Gothic"/>
-                <a:cs typeface="Yu Gothic"/>
-              </a:rPr>
-              <a:t>・最初は自動音声——何十万件にもばらまく</a:t>
-            </a:r>
-          </a:p>
-          <a:p>
-            <a:pPr marL="355600" indent="-355600">
-              <a:lnSpc>
-                <a:spcPct val="135000"/>
-              </a:lnSpc>
-              <a:spcAft>
-                <a:spcPts val="979"/>
-              </a:spcAft>
-            </a:pPr>
-            <a:r>
-              <a:rPr sz="2800" b="0">
-                <a:solidFill>
-                  <a:srgbClr val="20242C"/>
-                </a:solidFill>
-                <a:latin typeface="Yu Gothic"/>
-                <a:ea typeface="Yu Gothic"/>
-                <a:cs typeface="Yu Gothic"/>
-              </a:rPr>
-              <a:t>・信じて操作した人だけが、人間の詐欺師につながる</a:t>
-            </a:r>
-          </a:p>
-          <a:p>
-            <a:pPr marL="355600" indent="-355600">
-              <a:lnSpc>
-                <a:spcPct val="135000"/>
+                <a:spcPct val="125000"/>
               </a:lnSpc>
             </a:pPr>
             <a:r>
-              <a:rPr sz="2800" b="0">
+              <a:rPr sz="2000" b="0">
+                <a:solidFill>
+                  <a:srgbClr val="5C6472"/>
+                </a:solidFill>
+                <a:latin typeface="Yu Gothic"/>
+                <a:ea typeface="Yu Gothic"/>
+                <a:cs typeface="Yu Gothic"/>
+              </a:rPr>
+              <a:t>2025年 詐欺全体の被害</a:t>
+            </a:r>
+          </a:p>
+        </p:txBody>
+      </p:sp>
+      <p:sp>
+        <p:nvSpPr>
+          <p:cNvPr id="7" name="TextBox 6"/>
+          <p:cNvSpPr txBox="1"/>
+          <p:nvPr/>
+        </p:nvSpPr>
+        <p:spPr>
+          <a:xfrm>
+            <a:off x="4343400" y="1757172"/>
+            <a:ext cx="7178040" cy="646176"/>
+          </a:xfrm>
+          <a:prstGeom prst="rect">
+            <a:avLst/>
+          </a:prstGeom>
+          <a:noFill/>
+        </p:spPr>
+        <p:txBody>
+          <a:bodyPr wrap="square" anchor="ctr">
+            <a:noAutofit/>
+          </a:bodyPr>
+          <a:lstStyle/>
+          <a:p>
+            <a:pPr>
+              <a:lnSpc>
+                <a:spcPct val="120000"/>
+              </a:lnSpc>
+            </a:pPr>
+            <a:r>
+              <a:rPr sz="2800" b="1">
+                <a:solidFill>
+                  <a:srgbClr val="B9791F"/>
+                </a:solidFill>
+                <a:latin typeface="Yu Gothic"/>
+                <a:ea typeface="Yu Gothic"/>
+                <a:cs typeface="Yu Gothic"/>
+              </a:rPr>
+              <a:t>約3,257億円</a:t>
+            </a:r>
+            <a:r>
+              <a:rPr sz="2800" b="1">
                 <a:solidFill>
                   <a:srgbClr val="20242C"/>
                 </a:solidFill>
@@ -8378,29 +8136,27 @@
                 <a:ea typeface="Yu Gothic"/>
                 <a:cs typeface="Yu Gothic"/>
               </a:rPr>
-              <a:t>・「警察」という大胆でバレやすい嘘 ＝ 疑う人を先にふるい落とす選別装置</a:t>
-            </a:r>
-          </a:p>
-        </p:txBody>
-      </p:sp>
-      <p:sp>
-        <p:nvSpPr>
-          <p:cNvPr id="5" name="Rounded Rectangle 4"/>
+              <a:t>（過去最悪）</a:t>
+            </a:r>
+          </a:p>
+        </p:txBody>
+      </p:sp>
+      <p:sp>
+        <p:nvSpPr>
+          <p:cNvPr id="8" name="Rectangle 7"/>
           <p:cNvSpPr/>
           <p:nvPr/>
         </p:nvSpPr>
         <p:spPr>
           <a:xfrm>
-            <a:off x="685800" y="5212080"/>
-            <a:ext cx="10820095" cy="777240"/>
-          </a:xfrm>
-          <a:prstGeom prst="roundRect">
-            <a:avLst>
-              <a:gd name="adj" fmla="val 16000"/>
-            </a:avLst>
+            <a:off x="685800" y="2421636"/>
+            <a:ext cx="10820095" cy="12801"/>
+          </a:xfrm>
+          <a:prstGeom prst="rect">
+            <a:avLst/>
           </a:prstGeom>
           <a:solidFill>
-            <a:srgbClr val="F3E6CF"/>
+            <a:srgbClr val="E6E1D6"/>
           </a:solidFill>
           <a:ln>
             <a:noFill/>
@@ -8422,14 +8178,346 @@
           </a:fontRef>
         </p:style>
         <p:txBody>
-          <a:bodyPr rtlCol="0" anchor="ctr" wrap="square" lIns="274320" rIns="274320">
-            <a:noAutofit/>
-          </a:bodyPr>
+          <a:bodyPr rtlCol="0" anchor="ctr"/>
           <a:lstStyle/>
           <a:p>
             <a:pPr algn="ctr"/>
-            <a:r>
-              <a:rPr sz="2600" b="1">
+          </a:p>
+        </p:txBody>
+      </p:sp>
+      <p:sp>
+        <p:nvSpPr>
+          <p:cNvPr id="9" name="TextBox 8"/>
+          <p:cNvSpPr txBox="1"/>
+          <p:nvPr/>
+        </p:nvSpPr>
+        <p:spPr>
+          <a:xfrm>
+            <a:off x="685800" y="2586228"/>
+            <a:ext cx="3383280" cy="646176"/>
+          </a:xfrm>
+          <a:prstGeom prst="rect">
+            <a:avLst/>
+          </a:prstGeom>
+          <a:noFill/>
+        </p:spPr>
+        <p:txBody>
+          <a:bodyPr wrap="square" anchor="ctr">
+            <a:noAutofit/>
+          </a:bodyPr>
+          <a:lstStyle/>
+          <a:p>
+            <a:pPr algn="l">
+              <a:lnSpc>
+                <a:spcPct val="125000"/>
+              </a:lnSpc>
+            </a:pPr>
+            <a:r>
+              <a:rPr sz="2000" b="0">
+                <a:solidFill>
+                  <a:srgbClr val="5C6472"/>
+                </a:solidFill>
+                <a:latin typeface="Yu Gothic"/>
+                <a:ea typeface="Yu Gothic"/>
+                <a:cs typeface="Yu Gothic"/>
+              </a:rPr>
+              <a:t>うち特殊詐欺</a:t>
+            </a:r>
+          </a:p>
+        </p:txBody>
+      </p:sp>
+      <p:sp>
+        <p:nvSpPr>
+          <p:cNvPr id="10" name="TextBox 9"/>
+          <p:cNvSpPr txBox="1"/>
+          <p:nvPr/>
+        </p:nvSpPr>
+        <p:spPr>
+          <a:xfrm>
+            <a:off x="4343400" y="2586228"/>
+            <a:ext cx="7178040" cy="646176"/>
+          </a:xfrm>
+          <a:prstGeom prst="rect">
+            <a:avLst/>
+          </a:prstGeom>
+          <a:noFill/>
+        </p:spPr>
+        <p:txBody>
+          <a:bodyPr wrap="square" anchor="ctr">
+            <a:noAutofit/>
+          </a:bodyPr>
+          <a:lstStyle/>
+          <a:p>
+            <a:pPr>
+              <a:lnSpc>
+                <a:spcPct val="120000"/>
+              </a:lnSpc>
+            </a:pPr>
+            <a:r>
+              <a:rPr sz="2800" b="1">
+                <a:solidFill>
+                  <a:srgbClr val="B9791F"/>
+                </a:solidFill>
+                <a:latin typeface="Yu Gothic"/>
+                <a:ea typeface="Yu Gothic"/>
+                <a:cs typeface="Yu Gothic"/>
+              </a:rPr>
+              <a:t>約1,423億円</a:t>
+            </a:r>
+          </a:p>
+        </p:txBody>
+      </p:sp>
+      <p:sp>
+        <p:nvSpPr>
+          <p:cNvPr id="11" name="Rectangle 10"/>
+          <p:cNvSpPr/>
+          <p:nvPr/>
+        </p:nvSpPr>
+        <p:spPr>
+          <a:xfrm>
+            <a:off x="685800" y="3250691"/>
+            <a:ext cx="10820095" cy="12801"/>
+          </a:xfrm>
+          <a:prstGeom prst="rect">
+            <a:avLst/>
+          </a:prstGeom>
+          <a:solidFill>
+            <a:srgbClr val="E6E1D6"/>
+          </a:solidFill>
+          <a:ln>
+            <a:noFill/>
+          </a:ln>
+          <a:effectLst/>
+        </p:spPr>
+        <p:style>
+          <a:lnRef idx="1">
+            <a:schemeClr val="accent1"/>
+          </a:lnRef>
+          <a:fillRef idx="3">
+            <a:schemeClr val="accent1"/>
+          </a:fillRef>
+          <a:effectRef idx="2">
+            <a:schemeClr val="accent1"/>
+          </a:effectRef>
+          <a:fontRef idx="minor">
+            <a:schemeClr val="lt1"/>
+          </a:fontRef>
+        </p:style>
+        <p:txBody>
+          <a:bodyPr rtlCol="0" anchor="ctr"/>
+          <a:lstStyle/>
+          <a:p>
+            <a:pPr algn="ctr"/>
+          </a:p>
+        </p:txBody>
+      </p:sp>
+      <p:sp>
+        <p:nvSpPr>
+          <p:cNvPr id="12" name="TextBox 11"/>
+          <p:cNvSpPr txBox="1"/>
+          <p:nvPr/>
+        </p:nvSpPr>
+        <p:spPr>
+          <a:xfrm>
+            <a:off x="685800" y="3415284"/>
+            <a:ext cx="3383280" cy="646176"/>
+          </a:xfrm>
+          <a:prstGeom prst="rect">
+            <a:avLst/>
+          </a:prstGeom>
+          <a:noFill/>
+        </p:spPr>
+        <p:txBody>
+          <a:bodyPr wrap="square" anchor="ctr">
+            <a:noAutofit/>
+          </a:bodyPr>
+          <a:lstStyle/>
+          <a:p>
+            <a:pPr algn="l">
+              <a:lnSpc>
+                <a:spcPct val="125000"/>
+              </a:lnSpc>
+            </a:pPr>
+            <a:r>
+              <a:rPr sz="2000" b="0">
+                <a:solidFill>
+                  <a:srgbClr val="5C6472"/>
+                </a:solidFill>
+                <a:latin typeface="Yu Gothic"/>
+                <a:ea typeface="Yu Gothic"/>
+                <a:cs typeface="Yu Gothic"/>
+              </a:rPr>
+              <a:t>その約7割＝約1,005億円</a:t>
+            </a:r>
+          </a:p>
+        </p:txBody>
+      </p:sp>
+      <p:sp>
+        <p:nvSpPr>
+          <p:cNvPr id="13" name="TextBox 12"/>
+          <p:cNvSpPr txBox="1"/>
+          <p:nvPr/>
+        </p:nvSpPr>
+        <p:spPr>
+          <a:xfrm>
+            <a:off x="4343400" y="3415284"/>
+            <a:ext cx="7178040" cy="646176"/>
+          </a:xfrm>
+          <a:prstGeom prst="rect">
+            <a:avLst/>
+          </a:prstGeom>
+          <a:noFill/>
+        </p:spPr>
+        <p:txBody>
+          <a:bodyPr wrap="square" anchor="ctr">
+            <a:noAutofit/>
+          </a:bodyPr>
+          <a:lstStyle/>
+          <a:p>
+            <a:pPr>
+              <a:lnSpc>
+                <a:spcPct val="120000"/>
+              </a:lnSpc>
+            </a:pPr>
+            <a:r>
+              <a:rPr sz="2800" b="1">
+                <a:solidFill>
+                  <a:srgbClr val="B9791F"/>
+                </a:solidFill>
+                <a:latin typeface="Yu Gothic"/>
+                <a:ea typeface="Yu Gothic"/>
+                <a:cs typeface="Yu Gothic"/>
+              </a:rPr>
+              <a:t>「ニセ警察詐欺」</a:t>
+            </a:r>
+          </a:p>
+        </p:txBody>
+      </p:sp>
+      <p:sp>
+        <p:nvSpPr>
+          <p:cNvPr id="14" name="Rectangle 13"/>
+          <p:cNvSpPr/>
+          <p:nvPr/>
+        </p:nvSpPr>
+        <p:spPr>
+          <a:xfrm>
+            <a:off x="685800" y="4079747"/>
+            <a:ext cx="10820095" cy="12801"/>
+          </a:xfrm>
+          <a:prstGeom prst="rect">
+            <a:avLst/>
+          </a:prstGeom>
+          <a:solidFill>
+            <a:srgbClr val="E6E1D6"/>
+          </a:solidFill>
+          <a:ln>
+            <a:noFill/>
+          </a:ln>
+          <a:effectLst/>
+        </p:spPr>
+        <p:style>
+          <a:lnRef idx="1">
+            <a:schemeClr val="accent1"/>
+          </a:lnRef>
+          <a:fillRef idx="3">
+            <a:schemeClr val="accent1"/>
+          </a:fillRef>
+          <a:effectRef idx="2">
+            <a:schemeClr val="accent1"/>
+          </a:effectRef>
+          <a:fontRef idx="minor">
+            <a:schemeClr val="lt1"/>
+          </a:fontRef>
+        </p:style>
+        <p:txBody>
+          <a:bodyPr rtlCol="0" anchor="ctr"/>
+          <a:lstStyle/>
+          <a:p>
+            <a:pPr algn="ctr"/>
+          </a:p>
+        </p:txBody>
+      </p:sp>
+      <p:sp>
+        <p:nvSpPr>
+          <p:cNvPr id="15" name="TextBox 14"/>
+          <p:cNvSpPr txBox="1"/>
+          <p:nvPr/>
+        </p:nvSpPr>
+        <p:spPr>
+          <a:xfrm>
+            <a:off x="685800" y="4244340"/>
+            <a:ext cx="3383280" cy="646176"/>
+          </a:xfrm>
+          <a:prstGeom prst="rect">
+            <a:avLst/>
+          </a:prstGeom>
+          <a:noFill/>
+        </p:spPr>
+        <p:txBody>
+          <a:bodyPr wrap="square" anchor="ctr">
+            <a:noAutofit/>
+          </a:bodyPr>
+          <a:lstStyle/>
+          <a:p>
+            <a:pPr algn="l">
+              <a:lnSpc>
+                <a:spcPct val="125000"/>
+              </a:lnSpc>
+            </a:pPr>
+            <a:r>
+              <a:rPr sz="2000" b="0">
+                <a:solidFill>
+                  <a:srgbClr val="5C6472"/>
+                </a:solidFill>
+                <a:latin typeface="Yu Gothic"/>
+                <a:ea typeface="Yu Gothic"/>
+                <a:cs typeface="Yu Gothic"/>
+              </a:rPr>
+              <a:t>犯行電話の最多</a:t>
+            </a:r>
+          </a:p>
+        </p:txBody>
+      </p:sp>
+      <p:sp>
+        <p:nvSpPr>
+          <p:cNvPr id="16" name="TextBox 15"/>
+          <p:cNvSpPr txBox="1"/>
+          <p:nvPr/>
+        </p:nvSpPr>
+        <p:spPr>
+          <a:xfrm>
+            <a:off x="4343400" y="4244340"/>
+            <a:ext cx="7178040" cy="646176"/>
+          </a:xfrm>
+          <a:prstGeom prst="rect">
+            <a:avLst/>
+          </a:prstGeom>
+          <a:noFill/>
+        </p:spPr>
+        <p:txBody>
+          <a:bodyPr wrap="square" anchor="ctr">
+            <a:noAutofit/>
+          </a:bodyPr>
+          <a:lstStyle/>
+          <a:p>
+            <a:pPr>
+              <a:lnSpc>
+                <a:spcPct val="120000"/>
+              </a:lnSpc>
+            </a:pPr>
+            <a:r>
+              <a:rPr sz="2800" b="1">
+                <a:solidFill>
+                  <a:srgbClr val="B9791F"/>
+                </a:solidFill>
+                <a:latin typeface="Yu Gothic"/>
+                <a:ea typeface="Yu Gothic"/>
+                <a:cs typeface="Yu Gothic"/>
+              </a:rPr>
+              <a:t>「＋」</a:t>
+            </a:r>
+            <a:r>
+              <a:rPr sz="2800" b="1">
                 <a:solidFill>
                   <a:srgbClr val="20242C"/>
                 </a:solidFill>
@@ -8437,14 +8525,25 @@
                 <a:ea typeface="Yu Gothic"/>
                 <a:cs typeface="Yu Gothic"/>
               </a:rPr>
-              <a:t>いまの日本の主流は、「ばらまいて選別する」商売の完成形</a:t>
-            </a:r>
-          </a:p>
-        </p:txBody>
-      </p:sp>
-      <p:sp>
-        <p:nvSpPr>
-          <p:cNvPr id="6" name="meta:pageno"/>
+              <a:t>で始まる国際電話・末尾</a:t>
+            </a:r>
+            <a:r>
+              <a:rPr sz="2800" b="1">
+                <a:solidFill>
+                  <a:srgbClr val="B9791F"/>
+                </a:solidFill>
+                <a:latin typeface="Yu Gothic"/>
+                <a:ea typeface="Yu Gothic"/>
+                <a:cs typeface="Yu Gothic"/>
+              </a:rPr>
+              <a:t>「0110」</a:t>
+            </a:r>
+          </a:p>
+        </p:txBody>
+      </p:sp>
+      <p:sp>
+        <p:nvSpPr>
+          <p:cNvPr id="17" name="meta:pageno"/>
           <p:cNvSpPr txBox="1"/>
           <p:nvPr/>
         </p:nvSpPr>
@@ -8481,7 +8580,7 @@
       </p:sp>
       <p:sp>
         <p:nvSpPr>
-          <p:cNvPr id="7" name="meta:part"/>
+          <p:cNvPr id="18" name="meta:part"/>
           <p:cNvSpPr txBox="1"/>
           <p:nvPr/>
         </p:nvSpPr>
@@ -8566,7 +8665,7 @@
                 <a:ea typeface="Yu Gothic"/>
                 <a:cs typeface="Yu Gothic"/>
               </a:rPr>
-              <a:t>一方、アメリカでは</a:t>
+              <a:t>ニセ警察も、第1部と同じ構造</a:t>
             </a:r>
           </a:p>
         </p:txBody>
@@ -8623,45 +8722,8 @@
         </p:nvSpPr>
         <p:spPr>
           <a:xfrm>
-            <a:off x="685800" y="5852160"/>
-            <a:ext cx="10820095" cy="347472"/>
-          </a:xfrm>
-          <a:prstGeom prst="rect">
-            <a:avLst/>
-          </a:prstGeom>
-          <a:noFill/>
-        </p:spPr>
-        <p:txBody>
-          <a:bodyPr wrap="square" anchor="t">
-            <a:noAutofit/>
-          </a:bodyPr>
-          <a:lstStyle/>
-          <a:p>
-            <a:pPr algn="l"/>
-            <a:r>
-              <a:rPr sz="1500" b="0">
-                <a:solidFill>
-                  <a:srgbClr val="5C6472"/>
-                </a:solidFill>
-                <a:latin typeface="Yu Gothic"/>
-                <a:ea typeface="Yu Gothic"/>
-                <a:cs typeface="Yu Gothic"/>
-              </a:rPr>
-              <a:t>出典：FBI IC3 注意喚起（2024年12月）／FTC 消費者警告</a:t>
-            </a:r>
-          </a:p>
-        </p:txBody>
-      </p:sp>
-      <p:sp>
-        <p:nvSpPr>
-          <p:cNvPr id="5" name="TextBox 4"/>
-          <p:cNvSpPr txBox="1"/>
-          <p:nvPr/>
-        </p:nvSpPr>
-        <p:spPr>
-          <a:xfrm>
             <a:off x="685800" y="1645920"/>
-            <a:ext cx="10820095" cy="4133088"/>
+            <a:ext cx="10820095" cy="3401568"/>
           </a:xfrm>
           <a:prstGeom prst="rect">
             <a:avLst/>
@@ -8691,7 +8753,7 @@
                 <a:ea typeface="Yu Gothic"/>
                 <a:cs typeface="Yu Gothic"/>
               </a:rPr>
-              <a:t>・FBI・FTC が「生成AIを使った詐欺」への警告を公式に発表</a:t>
+              <a:t>・最初は自動音声——何十万件にもばらまく</a:t>
             </a:r>
           </a:p>
           <a:p>
@@ -8712,7 +8774,7 @@
                 <a:ea typeface="Yu Gothic"/>
                 <a:cs typeface="Yu Gothic"/>
               </a:rPr>
-              <a:t>・家族の声をまねた「音声クローン詐欺」の相談が実際に増えている</a:t>
+              <a:t>・信じて操作した人だけが、人間の詐欺師につながる</a:t>
             </a:r>
           </a:p>
           <a:p>
@@ -8730,7 +8792,66 @@
                 <a:ea typeface="Yu Gothic"/>
                 <a:cs typeface="Yu Gothic"/>
               </a:rPr>
-              <a:t>・日本の統計に数字がないのは「起きていない」からではなく「まだ見えていない」から</a:t>
+              <a:t>・「警察」という大胆でバレやすい嘘 ＝ 疑う人を先にふるい落とす選別装置</a:t>
+            </a:r>
+          </a:p>
+        </p:txBody>
+      </p:sp>
+      <p:sp>
+        <p:nvSpPr>
+          <p:cNvPr id="5" name="Rounded Rectangle 4"/>
+          <p:cNvSpPr/>
+          <p:nvPr/>
+        </p:nvSpPr>
+        <p:spPr>
+          <a:xfrm>
+            <a:off x="685800" y="5212080"/>
+            <a:ext cx="10820095" cy="777240"/>
+          </a:xfrm>
+          <a:prstGeom prst="roundRect">
+            <a:avLst>
+              <a:gd name="adj" fmla="val 16000"/>
+            </a:avLst>
+          </a:prstGeom>
+          <a:solidFill>
+            <a:srgbClr val="F3E6CF"/>
+          </a:solidFill>
+          <a:ln>
+            <a:noFill/>
+          </a:ln>
+          <a:effectLst/>
+        </p:spPr>
+        <p:style>
+          <a:lnRef idx="1">
+            <a:schemeClr val="accent1"/>
+          </a:lnRef>
+          <a:fillRef idx="3">
+            <a:schemeClr val="accent1"/>
+          </a:fillRef>
+          <a:effectRef idx="2">
+            <a:schemeClr val="accent1"/>
+          </a:effectRef>
+          <a:fontRef idx="minor">
+            <a:schemeClr val="lt1"/>
+          </a:fontRef>
+        </p:style>
+        <p:txBody>
+          <a:bodyPr rtlCol="0" anchor="ctr" wrap="square" lIns="274320" rIns="274320">
+            <a:noAutofit/>
+          </a:bodyPr>
+          <a:lstStyle/>
+          <a:p>
+            <a:pPr algn="ctr"/>
+            <a:r>
+              <a:rPr sz="2600" b="1">
+                <a:solidFill>
+                  <a:srgbClr val="20242C"/>
+                </a:solidFill>
+                <a:latin typeface="Yu Gothic"/>
+                <a:ea typeface="Yu Gothic"/>
+                <a:cs typeface="Yu Gothic"/>
+              </a:rPr>
+              <a:t>いまの日本の主流は、「ばらまいて選別する」商売の完成形</a:t>
             </a:r>
           </a:p>
         </p:txBody>
@@ -9091,101 +9212,202 @@
         </p:nvSpPr>
         <p:spPr>
           <a:xfrm>
-            <a:off x="502920" y="1188720"/>
-            <a:ext cx="11185855" cy="3657599"/>
-          </a:xfrm>
-          <a:prstGeom prst="rect">
-            <a:avLst/>
-          </a:prstGeom>
-          <a:noFill/>
-        </p:spPr>
-        <p:txBody>
-          <a:bodyPr wrap="square" anchor="ctr">
-            <a:noAutofit/>
-          </a:bodyPr>
-          <a:lstStyle/>
-          <a:p>
-            <a:pPr algn="ctr">
+            <a:off x="685800" y="411480"/>
+            <a:ext cx="10820095" cy="960120"/>
+          </a:xfrm>
+          <a:prstGeom prst="rect">
+            <a:avLst/>
+          </a:prstGeom>
+          <a:noFill/>
+        </p:spPr>
+        <p:txBody>
+          <a:bodyPr wrap="square" anchor="b">
+            <a:noAutofit/>
+          </a:bodyPr>
+          <a:lstStyle/>
+          <a:p>
+            <a:pPr algn="l"/>
+            <a:r>
+              <a:rPr sz="4000" b="1">
+                <a:solidFill>
+                  <a:srgbClr val="B9791F"/>
+                </a:solidFill>
+                <a:latin typeface="Yu Gothic"/>
+                <a:ea typeface="Yu Gothic"/>
+                <a:cs typeface="Yu Gothic"/>
+              </a:rPr>
+              <a:t>そして、海外では</a:t>
+            </a:r>
+          </a:p>
+        </p:txBody>
+      </p:sp>
+      <p:sp>
+        <p:nvSpPr>
+          <p:cNvPr id="3" name="Rectangle 2"/>
+          <p:cNvSpPr/>
+          <p:nvPr/>
+        </p:nvSpPr>
+        <p:spPr>
+          <a:xfrm>
+            <a:off x="685800" y="1463040"/>
+            <a:ext cx="2377440" cy="50292"/>
+          </a:xfrm>
+          <a:prstGeom prst="rect">
+            <a:avLst/>
+          </a:prstGeom>
+          <a:solidFill>
+            <a:srgbClr val="B9791F"/>
+          </a:solidFill>
+          <a:ln>
+            <a:noFill/>
+          </a:ln>
+          <a:effectLst/>
+        </p:spPr>
+        <p:style>
+          <a:lnRef idx="1">
+            <a:schemeClr val="accent1"/>
+          </a:lnRef>
+          <a:fillRef idx="3">
+            <a:schemeClr val="accent1"/>
+          </a:fillRef>
+          <a:effectRef idx="2">
+            <a:schemeClr val="accent1"/>
+          </a:effectRef>
+          <a:fontRef idx="minor">
+            <a:schemeClr val="lt1"/>
+          </a:fontRef>
+        </p:style>
+        <p:txBody>
+          <a:bodyPr rtlCol="0" anchor="ctr"/>
+          <a:lstStyle/>
+          <a:p>
+            <a:pPr algn="ctr"/>
+          </a:p>
+        </p:txBody>
+      </p:sp>
+      <p:sp>
+        <p:nvSpPr>
+          <p:cNvPr id="4" name="TextBox 3"/>
+          <p:cNvSpPr txBox="1"/>
+          <p:nvPr/>
+        </p:nvSpPr>
+        <p:spPr>
+          <a:xfrm>
+            <a:off x="685800" y="5852160"/>
+            <a:ext cx="10820095" cy="347472"/>
+          </a:xfrm>
+          <a:prstGeom prst="rect">
+            <a:avLst/>
+          </a:prstGeom>
+          <a:noFill/>
+        </p:spPr>
+        <p:txBody>
+          <a:bodyPr wrap="square" anchor="t">
+            <a:noAutofit/>
+          </a:bodyPr>
+          <a:lstStyle/>
+          <a:p>
+            <a:pPr algn="l"/>
+            <a:r>
+              <a:rPr sz="1500" b="0">
+                <a:solidFill>
+                  <a:srgbClr val="5C6472"/>
+                </a:solidFill>
+                <a:latin typeface="Yu Gothic"/>
+                <a:ea typeface="Yu Gothic"/>
+                <a:cs typeface="Yu Gothic"/>
+              </a:rPr>
+              <a:t>出典：FBI IC3 注意喚起（2024年12月）／FTC 消費者警告</a:t>
+            </a:r>
+          </a:p>
+        </p:txBody>
+      </p:sp>
+      <p:sp>
+        <p:nvSpPr>
+          <p:cNvPr id="5" name="TextBox 4"/>
+          <p:cNvSpPr txBox="1"/>
+          <p:nvPr/>
+        </p:nvSpPr>
+        <p:spPr>
+          <a:xfrm>
+            <a:off x="685800" y="1645920"/>
+            <a:ext cx="10820095" cy="4133088"/>
+          </a:xfrm>
+          <a:prstGeom prst="rect">
+            <a:avLst/>
+          </a:prstGeom>
+          <a:noFill/>
+        </p:spPr>
+        <p:txBody>
+          <a:bodyPr wrap="square" anchor="t">
+            <a:noAutofit/>
+          </a:bodyPr>
+          <a:lstStyle/>
+          <a:p>
+            <a:pPr marL="355600" indent="-355600">
               <a:lnSpc>
-                <a:spcPct val="128000"/>
+                <a:spcPct val="135000"/>
+              </a:lnSpc>
+              <a:spcAft>
+                <a:spcPts val="979"/>
+              </a:spcAft>
+            </a:pPr>
+            <a:r>
+              <a:rPr sz="2800" b="0">
+                <a:solidFill>
+                  <a:srgbClr val="20242C"/>
+                </a:solidFill>
+                <a:latin typeface="Yu Gothic"/>
+                <a:ea typeface="Yu Gothic"/>
+                <a:cs typeface="Yu Gothic"/>
+              </a:rPr>
+              <a:t>・アメリカでは FBI・FTC が「生成AIを使った詐欺」への警告を公式に発表</a:t>
+            </a:r>
+          </a:p>
+          <a:p>
+            <a:pPr marL="355600" indent="-355600">
+              <a:lnSpc>
+                <a:spcPct val="135000"/>
+              </a:lnSpc>
+              <a:spcAft>
+                <a:spcPts val="979"/>
+              </a:spcAft>
+            </a:pPr>
+            <a:r>
+              <a:rPr sz="2800" b="0">
+                <a:solidFill>
+                  <a:srgbClr val="20242C"/>
+                </a:solidFill>
+                <a:latin typeface="Yu Gothic"/>
+                <a:ea typeface="Yu Gothic"/>
+                <a:cs typeface="Yu Gothic"/>
+              </a:rPr>
+              <a:t>・標的は有名人ではない——家族の声をまねた「音声クローン詐欺」</a:t>
+            </a:r>
+          </a:p>
+          <a:p>
+            <a:pPr marL="355600" indent="-355600">
+              <a:lnSpc>
+                <a:spcPct val="135000"/>
               </a:lnSpc>
             </a:pPr>
             <a:r>
-              <a:rPr sz="5400" b="1">
+              <a:rPr sz="2800" b="0">
                 <a:solidFill>
                   <a:srgbClr val="20242C"/>
                 </a:solidFill>
-                <a:latin typeface="Yu Mincho"/>
-                <a:ea typeface="Yu Mincho"/>
-                <a:cs typeface="Yu Mincho"/>
-              </a:rPr>
-              <a:t>次に来るのは——</a:t>
-            </a:r>
-          </a:p>
-          <a:p>
-            <a:pPr algn="ctr">
-              <a:lnSpc>
-                <a:spcPct val="128000"/>
-              </a:lnSpc>
-            </a:pPr>
-            <a:r>
-              <a:rPr sz="5400" b="1">
-                <a:solidFill>
-                  <a:srgbClr val="20242C"/>
-                </a:solidFill>
-                <a:latin typeface="Yu Mincho"/>
-                <a:ea typeface="Yu Mincho"/>
-                <a:cs typeface="Yu Mincho"/>
-              </a:rPr>
-              <a:t>番号偽装に、AIが混ざる</a:t>
-            </a:r>
-          </a:p>
-        </p:txBody>
-      </p:sp>
-      <p:sp>
-        <p:nvSpPr>
-          <p:cNvPr id="3" name="TextBox 2"/>
-          <p:cNvSpPr txBox="1"/>
-          <p:nvPr/>
-        </p:nvSpPr>
-        <p:spPr>
-          <a:xfrm>
-            <a:off x="685800" y="4983479"/>
-            <a:ext cx="10820095" cy="1005840"/>
-          </a:xfrm>
-          <a:prstGeom prst="rect">
-            <a:avLst/>
-          </a:prstGeom>
-          <a:noFill/>
-        </p:spPr>
-        <p:txBody>
-          <a:bodyPr wrap="square" anchor="ctr">
-            <a:noAutofit/>
-          </a:bodyPr>
-          <a:lstStyle/>
-          <a:p>
-            <a:pPr algn="ctr">
-              <a:lnSpc>
-                <a:spcPct val="130000"/>
-              </a:lnSpc>
-            </a:pPr>
-            <a:r>
-              <a:rPr sz="2200" b="0">
-                <a:solidFill>
-                  <a:srgbClr val="5C6472"/>
-                </a:solidFill>
-                <a:latin typeface="Yu Gothic"/>
-                <a:ea typeface="Yu Gothic"/>
-                <a:cs typeface="Yu Gothic"/>
-              </a:rPr>
-              <a:t>「0110」の表示で信じさせ、本人そっくりの声でとどめを刺す</a:t>
-            </a:r>
-          </a:p>
-        </p:txBody>
-      </p:sp>
-      <p:sp>
-        <p:nvSpPr>
-          <p:cNvPr id="4" name="meta:pageno"/>
+                <a:latin typeface="Yu Gothic"/>
+                <a:ea typeface="Yu Gothic"/>
+                <a:cs typeface="Yu Gothic"/>
+              </a:rPr>
+              <a:t>・ごく一般の家庭を狙う相談が、実際に増えている</a:t>
+            </a:r>
+          </a:p>
+        </p:txBody>
+      </p:sp>
+      <p:sp>
+        <p:nvSpPr>
+          <p:cNvPr id="6" name="meta:pageno"/>
           <p:cNvSpPr txBox="1"/>
           <p:nvPr/>
         </p:nvSpPr>
@@ -9222,7 +9444,7 @@
       </p:sp>
       <p:sp>
         <p:nvSpPr>
-          <p:cNvPr id="5" name="meta:part"/>
+          <p:cNvPr id="7" name="meta:part"/>
           <p:cNvSpPr txBox="1"/>
           <p:nvPr/>
         </p:nvSpPr>
@@ -9277,20 +9499,57 @@
       <p:grpSpPr/>
       <p:sp>
         <p:nvSpPr>
-          <p:cNvPr id="2" name="Rectangle 1"/>
+          <p:cNvPr id="2" name="TextBox 1"/>
+          <p:cNvSpPr txBox="1"/>
+          <p:nvPr/>
+        </p:nvSpPr>
+        <p:spPr>
+          <a:xfrm>
+            <a:off x="685800" y="411480"/>
+            <a:ext cx="10820095" cy="960120"/>
+          </a:xfrm>
+          <a:prstGeom prst="rect">
+            <a:avLst/>
+          </a:prstGeom>
+          <a:noFill/>
+        </p:spPr>
+        <p:txBody>
+          <a:bodyPr wrap="square" anchor="b">
+            <a:noAutofit/>
+          </a:bodyPr>
+          <a:lstStyle/>
+          <a:p>
+            <a:pPr algn="l"/>
+            <a:r>
+              <a:rPr sz="4000" b="1">
+                <a:solidFill>
+                  <a:srgbClr val="B9791F"/>
+                </a:solidFill>
+                <a:latin typeface="Yu Gothic"/>
+                <a:ea typeface="Yu Gothic"/>
+                <a:cs typeface="Yu Gothic"/>
+              </a:rPr>
+              <a:t>なぜ、日本は有名人ばかりなのか</a:t>
+            </a:r>
+          </a:p>
+        </p:txBody>
+      </p:sp>
+      <p:sp>
+        <p:nvSpPr>
+          <p:cNvPr id="3" name="Rectangle 2"/>
           <p:cNvSpPr/>
           <p:nvPr/>
         </p:nvSpPr>
         <p:spPr>
           <a:xfrm>
-            <a:off x="0" y="0"/>
-            <a:ext cx="12191695" cy="6858000"/>
+            <a:off x="685800" y="1463040"/>
+            <a:ext cx="2377440" cy="50292"/>
           </a:xfrm>
           <a:prstGeom prst="rect">
             <a:avLst/>
           </a:prstGeom>
           <a:solidFill>
-            <a:srgbClr val="20242C"/>
+            <a:srgbClr val="B9791F"/>
           </a:solidFill>
           <a:ln>
             <a:noFill/>
@@ -9321,118 +9580,90 @@
       </p:sp>
       <p:sp>
         <p:nvSpPr>
-          <p:cNvPr id="3" name="TextBox 2"/>
-          <p:cNvSpPr txBox="1"/>
-          <p:nvPr/>
-        </p:nvSpPr>
-        <p:spPr>
-          <a:xfrm>
-            <a:off x="685800" y="594360"/>
-            <a:ext cx="4572000" cy="548640"/>
-          </a:xfrm>
-          <a:prstGeom prst="rect">
-            <a:avLst/>
-          </a:prstGeom>
-          <a:noFill/>
-        </p:spPr>
-        <p:txBody>
-          <a:bodyPr wrap="square" anchor="ctr">
-            <a:noAutofit/>
-          </a:bodyPr>
-          <a:lstStyle/>
-          <a:p>
-            <a:pPr algn="l"/>
-            <a:r>
-              <a:rPr sz="2000" b="1">
-                <a:solidFill>
-                  <a:srgbClr val="B9791F"/>
-                </a:solidFill>
-                <a:latin typeface="Yu Gothic"/>
-                <a:ea typeface="Yu Gothic"/>
-                <a:cs typeface="Yu Gothic"/>
-              </a:rPr>
-              <a:t>実演</a:t>
-            </a:r>
-          </a:p>
-        </p:txBody>
-      </p:sp>
-      <p:sp>
-        <p:nvSpPr>
           <p:cNvPr id="4" name="TextBox 3"/>
           <p:cNvSpPr txBox="1"/>
           <p:nvPr/>
         </p:nvSpPr>
         <p:spPr>
           <a:xfrm>
-            <a:off x="685800" y="2240280"/>
-            <a:ext cx="10820095" cy="1554480"/>
-          </a:xfrm>
-          <a:prstGeom prst="rect">
-            <a:avLst/>
-          </a:prstGeom>
-          <a:noFill/>
-        </p:spPr>
-        <p:txBody>
-          <a:bodyPr wrap="square" anchor="ctr">
-            <a:noAutofit/>
-          </a:bodyPr>
-          <a:lstStyle/>
-          <a:p>
-            <a:pPr algn="ctr"/>
-            <a:r>
-              <a:rPr sz="5400" b="1">
-                <a:solidFill>
-                  <a:srgbClr val="FFFFFF"/>
-                </a:solidFill>
-                <a:latin typeface="Yu Gothic"/>
-                <a:ea typeface="Yu Gothic"/>
-                <a:cs typeface="Yu Gothic"/>
-              </a:rPr>
-              <a:t>「本人らしさ」は作られる</a:t>
-            </a:r>
-          </a:p>
-        </p:txBody>
-      </p:sp>
-      <p:sp>
-        <p:nvSpPr>
-          <p:cNvPr id="5" name="TextBox 4"/>
-          <p:cNvSpPr txBox="1"/>
-          <p:nvPr/>
-        </p:nvSpPr>
-        <p:spPr>
-          <a:xfrm>
-            <a:off x="685800" y="3977639"/>
-            <a:ext cx="10820095" cy="868680"/>
-          </a:xfrm>
-          <a:prstGeom prst="rect">
-            <a:avLst/>
-          </a:prstGeom>
-          <a:noFill/>
-        </p:spPr>
-        <p:txBody>
-          <a:bodyPr wrap="square" anchor="ctr">
-            <a:noAutofit/>
-          </a:bodyPr>
-          <a:lstStyle/>
-          <a:p>
-            <a:pPr algn="ctr"/>
-            <a:r>
-              <a:rPr sz="2400" b="0">
-                <a:solidFill>
-                  <a:srgbClr val="BCBDC0"/>
-                </a:solidFill>
-                <a:latin typeface="Yu Gothic"/>
-                <a:ea typeface="Yu Gothic"/>
-                <a:cs typeface="Yu Gothic"/>
-              </a:rPr>
-              <a:t>クローン音声・ライブAI対話</a:t>
-            </a:r>
-          </a:p>
-        </p:txBody>
-      </p:sp>
-      <p:sp>
-        <p:nvSpPr>
-          <p:cNvPr id="6" name="meta:pageno"/>
+            <a:off x="685800" y="1645920"/>
+            <a:ext cx="10820095" cy="4343400"/>
+          </a:xfrm>
+          <a:prstGeom prst="rect">
+            <a:avLst/>
+          </a:prstGeom>
+          <a:noFill/>
+        </p:spPr>
+        <p:txBody>
+          <a:bodyPr wrap="square" anchor="t">
+            <a:noAutofit/>
+          </a:bodyPr>
+          <a:lstStyle/>
+          <a:p>
+            <a:pPr marL="355600" indent="-355600">
+              <a:lnSpc>
+                <a:spcPct val="135000"/>
+              </a:lnSpc>
+              <a:spcAft>
+                <a:spcPts val="979"/>
+              </a:spcAft>
+            </a:pPr>
+            <a:r>
+              <a:rPr sz="2800" b="0">
+                <a:solidFill>
+                  <a:srgbClr val="20242C"/>
+                </a:solidFill>
+                <a:latin typeface="Yu Gothic"/>
+                <a:ea typeface="Yu Gothic"/>
+                <a:cs typeface="Yu Gothic"/>
+              </a:rPr>
+              <a:t>・差は「材料」——有名人の顔と声は、ネットに無限に転がっている</a:t>
+            </a:r>
+          </a:p>
+          <a:p>
+            <a:pPr marL="355600" indent="-355600">
+              <a:lnSpc>
+                <a:spcPct val="135000"/>
+              </a:lnSpc>
+              <a:spcAft>
+                <a:spcPts val="979"/>
+              </a:spcAft>
+            </a:pPr>
+            <a:r>
+              <a:rPr sz="2800" b="0">
+                <a:solidFill>
+                  <a:srgbClr val="20242C"/>
+                </a:solidFill>
+                <a:latin typeface="Yu Gothic"/>
+                <a:ea typeface="Yu Gothic"/>
+                <a:cs typeface="Yu Gothic"/>
+              </a:rPr>
+              <a:t>・一般人のデータはまだ少ない——狙われていないのではなく、後回しなだけ</a:t>
+            </a:r>
+          </a:p>
+          <a:p>
+            <a:pPr marL="355600" indent="-355600">
+              <a:lnSpc>
+                <a:spcPct val="135000"/>
+              </a:lnSpc>
+            </a:pPr>
+            <a:r>
+              <a:rPr sz="2800" b="0">
+                <a:solidFill>
+                  <a:srgbClr val="20242C"/>
+                </a:solidFill>
+                <a:latin typeface="Yu Gothic"/>
+                <a:ea typeface="Yu Gothic"/>
+                <a:cs typeface="Yu Gothic"/>
+              </a:rPr>
+              <a:t>・AIは数十秒の音声で「本人そっくり」を作れる——この時間差は、必ず埋まる</a:t>
+            </a:r>
+          </a:p>
+        </p:txBody>
+      </p:sp>
+      <p:sp>
+        <p:nvSpPr>
+          <p:cNvPr id="5" name="meta:pageno"/>
           <p:cNvSpPr txBox="1"/>
           <p:nvPr/>
         </p:nvSpPr>
@@ -9456,7 +9687,7 @@
             <a:r>
               <a:rPr sz="1200" b="0">
                 <a:solidFill>
-                  <a:srgbClr val="9AA3B2"/>
+                  <a:srgbClr val="5C6472"/>
                 </a:solidFill>
                 <a:latin typeface="Yu Gothic"/>
                 <a:ea typeface="Yu Gothic"/>
@@ -9469,7 +9700,7 @@
       </p:sp>
       <p:sp>
         <p:nvSpPr>
-          <p:cNvPr id="7" name="meta:part"/>
+          <p:cNvPr id="6" name="meta:part"/>
           <p:cNvSpPr txBox="1"/>
           <p:nvPr/>
         </p:nvSpPr>
@@ -9493,13 +9724,13 @@
             <a:r>
               <a:rPr sz="1200" b="0">
                 <a:solidFill>
-                  <a:srgbClr val="9AA3B2"/>
-                </a:solidFill>
-                <a:latin typeface="Yu Gothic"/>
-                <a:ea typeface="Yu Gothic"/>
-                <a:cs typeface="Yu Gothic"/>
-              </a:rPr>
-              <a:t>3 実演</a:t>
+                  <a:srgbClr val="5C6472"/>
+                </a:solidFill>
+                <a:latin typeface="Yu Gothic"/>
+                <a:ea typeface="Yu Gothic"/>
+                <a:cs typeface="Yu Gothic"/>
+              </a:rPr>
+              <a:t>2 第2部</a:t>
             </a:r>
           </a:p>
         </p:txBody>
@@ -9530,203 +9761,101 @@
         </p:nvSpPr>
         <p:spPr>
           <a:xfrm>
-            <a:off x="685800" y="411480"/>
-            <a:ext cx="10820095" cy="960120"/>
-          </a:xfrm>
-          <a:prstGeom prst="rect">
-            <a:avLst/>
-          </a:prstGeom>
-          <a:noFill/>
-        </p:spPr>
-        <p:txBody>
-          <a:bodyPr wrap="square" anchor="b">
-            <a:noAutofit/>
-          </a:bodyPr>
-          <a:lstStyle/>
-          <a:p>
-            <a:pPr algn="l"/>
-            <a:r>
-              <a:rPr sz="4000" b="1">
-                <a:solidFill>
-                  <a:srgbClr val="B9791F"/>
-                </a:solidFill>
-                <a:latin typeface="Yu Gothic"/>
-                <a:ea typeface="Yu Gothic"/>
-                <a:cs typeface="Yu Gothic"/>
-              </a:rPr>
-              <a:t>実演①　偽の「私」の声</a:t>
-            </a:r>
-          </a:p>
-        </p:txBody>
-      </p:sp>
-      <p:sp>
-        <p:nvSpPr>
-          <p:cNvPr id="3" name="Rectangle 2"/>
-          <p:cNvSpPr/>
-          <p:nvPr/>
-        </p:nvSpPr>
-        <p:spPr>
-          <a:xfrm>
-            <a:off x="685800" y="1463040"/>
-            <a:ext cx="2377440" cy="50292"/>
-          </a:xfrm>
-          <a:prstGeom prst="rect">
-            <a:avLst/>
-          </a:prstGeom>
-          <a:solidFill>
-            <a:srgbClr val="B9791F"/>
-          </a:solidFill>
-          <a:ln>
-            <a:noFill/>
-          </a:ln>
-          <a:effectLst/>
-        </p:spPr>
-        <p:style>
-          <a:lnRef idx="1">
-            <a:schemeClr val="accent1"/>
-          </a:lnRef>
-          <a:fillRef idx="3">
-            <a:schemeClr val="accent1"/>
-          </a:fillRef>
-          <a:effectRef idx="2">
-            <a:schemeClr val="accent1"/>
-          </a:effectRef>
-          <a:fontRef idx="minor">
-            <a:schemeClr val="lt1"/>
-          </a:fontRef>
-        </p:style>
-        <p:txBody>
-          <a:bodyPr rtlCol="0" anchor="ctr"/>
-          <a:lstStyle/>
-          <a:p>
-            <a:pPr algn="ctr"/>
-          </a:p>
-        </p:txBody>
-      </p:sp>
-      <p:sp>
-        <p:nvSpPr>
-          <p:cNvPr id="4" name="TextBox 3"/>
-          <p:cNvSpPr txBox="1"/>
-          <p:nvPr/>
-        </p:nvSpPr>
-        <p:spPr>
-          <a:xfrm>
-            <a:off x="685800" y="1645920"/>
-            <a:ext cx="10820095" cy="3401568"/>
-          </a:xfrm>
-          <a:prstGeom prst="rect">
-            <a:avLst/>
-          </a:prstGeom>
-          <a:noFill/>
-        </p:spPr>
-        <p:txBody>
-          <a:bodyPr wrap="square" anchor="t">
-            <a:noAutofit/>
-          </a:bodyPr>
-          <a:lstStyle/>
-          <a:p>
-            <a:pPr marL="355600" indent="-355600">
+            <a:off x="502920" y="1188720"/>
+            <a:ext cx="11185855" cy="3657599"/>
+          </a:xfrm>
+          <a:prstGeom prst="rect">
+            <a:avLst/>
+          </a:prstGeom>
+          <a:noFill/>
+        </p:spPr>
+        <p:txBody>
+          <a:bodyPr wrap="square" anchor="ctr">
+            <a:noAutofit/>
+          </a:bodyPr>
+          <a:lstStyle/>
+          <a:p>
+            <a:pPr algn="ctr">
               <a:lnSpc>
-                <a:spcPct val="135000"/>
-              </a:lnSpc>
-              <a:spcAft>
-                <a:spcPts val="979"/>
-              </a:spcAft>
-            </a:pPr>
-            <a:r>
-              <a:rPr sz="2800" b="0">
-                <a:solidFill>
-                  <a:srgbClr val="20242C"/>
-                </a:solidFill>
-                <a:latin typeface="Yu Gothic"/>
-                <a:ea typeface="Yu Gothic"/>
-                <a:cs typeface="Yu Gothic"/>
-              </a:rPr>
-              <a:t>・私の声をAIに数十秒だけ学ばせて作った「偽の私」（本人同意・AI生成明示）</a:t>
-            </a:r>
-          </a:p>
-          <a:p>
-            <a:pPr marL="355600" indent="-355600">
-              <a:lnSpc>
-                <a:spcPct val="135000"/>
+                <a:spcPct val="128000"/>
               </a:lnSpc>
             </a:pPr>
             <a:r>
-              <a:rPr sz="2800" b="0">
+              <a:rPr sz="5400" b="1">
                 <a:solidFill>
                   <a:srgbClr val="20242C"/>
                 </a:solidFill>
-                <a:latin typeface="Yu Gothic"/>
-                <a:ea typeface="Yu Gothic"/>
-                <a:cs typeface="Yu Gothic"/>
-              </a:rPr>
-              <a:t>・毎日いっしょに働く同僚でも、電話では分からないと言った</a:t>
-            </a:r>
-          </a:p>
-        </p:txBody>
-      </p:sp>
-      <p:sp>
-        <p:nvSpPr>
-          <p:cNvPr id="5" name="Rounded Rectangle 4"/>
-          <p:cNvSpPr/>
-          <p:nvPr/>
-        </p:nvSpPr>
-        <p:spPr>
-          <a:xfrm>
-            <a:off x="685800" y="5212080"/>
-            <a:ext cx="10820095" cy="777240"/>
-          </a:xfrm>
-          <a:prstGeom prst="roundRect">
-            <a:avLst>
-              <a:gd name="adj" fmla="val 16000"/>
-            </a:avLst>
-          </a:prstGeom>
-          <a:solidFill>
-            <a:srgbClr val="F3E6CF"/>
-          </a:solidFill>
-          <a:ln>
-            <a:noFill/>
-          </a:ln>
-          <a:effectLst/>
-        </p:spPr>
-        <p:style>
-          <a:lnRef idx="1">
-            <a:schemeClr val="accent1"/>
-          </a:lnRef>
-          <a:fillRef idx="3">
-            <a:schemeClr val="accent1"/>
-          </a:fillRef>
-          <a:effectRef idx="2">
-            <a:schemeClr val="accent1"/>
-          </a:effectRef>
-          <a:fontRef idx="minor">
-            <a:schemeClr val="lt1"/>
-          </a:fontRef>
-        </p:style>
-        <p:txBody>
-          <a:bodyPr rtlCol="0" anchor="ctr" wrap="square" lIns="274320" rIns="274320">
-            <a:noAutofit/>
-          </a:bodyPr>
-          <a:lstStyle/>
-          <a:p>
-            <a:pPr algn="ctr"/>
-            <a:r>
-              <a:rPr sz="2600" b="1">
+                <a:latin typeface="Yu Mincho"/>
+                <a:ea typeface="Yu Mincho"/>
+                <a:cs typeface="Yu Mincho"/>
+              </a:rPr>
+              <a:t>次に来るのは——</a:t>
+            </a:r>
+          </a:p>
+          <a:p>
+            <a:pPr algn="ctr">
+              <a:lnSpc>
+                <a:spcPct val="128000"/>
+              </a:lnSpc>
+            </a:pPr>
+            <a:r>
+              <a:rPr sz="5400" b="1">
                 <a:solidFill>
                   <a:srgbClr val="20242C"/>
                 </a:solidFill>
-                <a:latin typeface="Yu Gothic"/>
-                <a:ea typeface="Yu Gothic"/>
-                <a:cs typeface="Yu Gothic"/>
-              </a:rPr>
-              <a:t>私の声ですらこれです。ご家族の声なら、どうでしょうか</a:t>
-            </a:r>
-          </a:p>
-        </p:txBody>
-      </p:sp>
-      <p:sp>
-        <p:nvSpPr>
-          <p:cNvPr id="6" name="meta:pageno"/>
+                <a:latin typeface="Yu Mincho"/>
+                <a:ea typeface="Yu Mincho"/>
+                <a:cs typeface="Yu Mincho"/>
+              </a:rPr>
+              <a:t>番号偽装に、AIが混ざる</a:t>
+            </a:r>
+          </a:p>
+        </p:txBody>
+      </p:sp>
+      <p:sp>
+        <p:nvSpPr>
+          <p:cNvPr id="3" name="TextBox 2"/>
+          <p:cNvSpPr txBox="1"/>
+          <p:nvPr/>
+        </p:nvSpPr>
+        <p:spPr>
+          <a:xfrm>
+            <a:off x="685800" y="4983479"/>
+            <a:ext cx="10820095" cy="1005840"/>
+          </a:xfrm>
+          <a:prstGeom prst="rect">
+            <a:avLst/>
+          </a:prstGeom>
+          <a:noFill/>
+        </p:spPr>
+        <p:txBody>
+          <a:bodyPr wrap="square" anchor="ctr">
+            <a:noAutofit/>
+          </a:bodyPr>
+          <a:lstStyle/>
+          <a:p>
+            <a:pPr algn="ctr">
+              <a:lnSpc>
+                <a:spcPct val="130000"/>
+              </a:lnSpc>
+            </a:pPr>
+            <a:r>
+              <a:rPr sz="2200" b="0">
+                <a:solidFill>
+                  <a:srgbClr val="5C6472"/>
+                </a:solidFill>
+                <a:latin typeface="Yu Gothic"/>
+                <a:ea typeface="Yu Gothic"/>
+                <a:cs typeface="Yu Gothic"/>
+              </a:rPr>
+              <a:t>「0110」の表示で信じさせ、本人そっくりの声でとどめを刺す</a:t>
+            </a:r>
+          </a:p>
+        </p:txBody>
+      </p:sp>
+      <p:sp>
+        <p:nvSpPr>
+          <p:cNvPr id="4" name="meta:pageno"/>
           <p:cNvSpPr txBox="1"/>
           <p:nvPr/>
         </p:nvSpPr>
@@ -9763,7 +9892,7 @@
       </p:sp>
       <p:sp>
         <p:nvSpPr>
-          <p:cNvPr id="7" name="meta:part"/>
+          <p:cNvPr id="5" name="meta:part"/>
           <p:cNvSpPr txBox="1"/>
           <p:nvPr/>
         </p:nvSpPr>
@@ -9793,7 +9922,7 @@
                 <a:ea typeface="Yu Gothic"/>
                 <a:cs typeface="Yu Gothic"/>
               </a:rPr>
-              <a:t>3 実演</a:t>
+              <a:t>2 第2部</a:t>
             </a:r>
           </a:p>
         </p:txBody>
@@ -9818,57 +9947,20 @@
       <p:grpSpPr/>
       <p:sp>
         <p:nvSpPr>
-          <p:cNvPr id="2" name="TextBox 1"/>
-          <p:cNvSpPr txBox="1"/>
-          <p:nvPr/>
-        </p:nvSpPr>
-        <p:spPr>
-          <a:xfrm>
-            <a:off x="685800" y="411480"/>
-            <a:ext cx="10820095" cy="960120"/>
-          </a:xfrm>
-          <a:prstGeom prst="rect">
-            <a:avLst/>
-          </a:prstGeom>
-          <a:noFill/>
-        </p:spPr>
-        <p:txBody>
-          <a:bodyPr wrap="square" anchor="b">
-            <a:noAutofit/>
-          </a:bodyPr>
-          <a:lstStyle/>
-          <a:p>
-            <a:pPr algn="l"/>
-            <a:r>
-              <a:rPr sz="3600" b="1">
-                <a:solidFill>
-                  <a:srgbClr val="B9791F"/>
-                </a:solidFill>
-                <a:latin typeface="Yu Gothic"/>
-                <a:ea typeface="Yu Gothic"/>
-                <a:cs typeface="Yu Gothic"/>
-              </a:rPr>
-              <a:t>実演②　AIは相手に合わせて話し方を変える</a:t>
-            </a:r>
-          </a:p>
-        </p:txBody>
-      </p:sp>
-      <p:sp>
-        <p:nvSpPr>
-          <p:cNvPr id="3" name="Rectangle 2"/>
+          <p:cNvPr id="2" name="Rectangle 1"/>
           <p:cNvSpPr/>
           <p:nvPr/>
         </p:nvSpPr>
         <p:spPr>
           <a:xfrm>
-            <a:off x="685800" y="1463040"/>
-            <a:ext cx="2377440" cy="50292"/>
+            <a:off x="0" y="0"/>
+            <a:ext cx="12191695" cy="6858000"/>
           </a:xfrm>
           <a:prstGeom prst="rect">
             <a:avLst/>
           </a:prstGeom>
           <a:solidFill>
-            <a:srgbClr val="B9791F"/>
+            <a:srgbClr val="20242C"/>
           </a:solidFill>
           <a:ln>
             <a:noFill/>
@@ -9899,69 +9991,118 @@
       </p:sp>
       <p:sp>
         <p:nvSpPr>
+          <p:cNvPr id="3" name="TextBox 2"/>
+          <p:cNvSpPr txBox="1"/>
+          <p:nvPr/>
+        </p:nvSpPr>
+        <p:spPr>
+          <a:xfrm>
+            <a:off x="685800" y="594360"/>
+            <a:ext cx="4572000" cy="548640"/>
+          </a:xfrm>
+          <a:prstGeom prst="rect">
+            <a:avLst/>
+          </a:prstGeom>
+          <a:noFill/>
+        </p:spPr>
+        <p:txBody>
+          <a:bodyPr wrap="square" anchor="ctr">
+            <a:noAutofit/>
+          </a:bodyPr>
+          <a:lstStyle/>
+          <a:p>
+            <a:pPr algn="l"/>
+            <a:r>
+              <a:rPr sz="2000" b="1">
+                <a:solidFill>
+                  <a:srgbClr val="B9791F"/>
+                </a:solidFill>
+                <a:latin typeface="Yu Gothic"/>
+                <a:ea typeface="Yu Gothic"/>
+                <a:cs typeface="Yu Gothic"/>
+              </a:rPr>
+              <a:t>実演</a:t>
+            </a:r>
+          </a:p>
+        </p:txBody>
+      </p:sp>
+      <p:sp>
+        <p:nvSpPr>
           <p:cNvPr id="4" name="TextBox 3"/>
           <p:cNvSpPr txBox="1"/>
           <p:nvPr/>
         </p:nvSpPr>
         <p:spPr>
           <a:xfrm>
-            <a:off x="685800" y="1645920"/>
-            <a:ext cx="10820095" cy="4343400"/>
-          </a:xfrm>
-          <a:prstGeom prst="rect">
-            <a:avLst/>
-          </a:prstGeom>
-          <a:noFill/>
-        </p:spPr>
-        <p:txBody>
-          <a:bodyPr wrap="square" anchor="t">
-            <a:noAutofit/>
-          </a:bodyPr>
-          <a:lstStyle/>
-          <a:p>
-            <a:pPr marL="355600" indent="-355600">
-              <a:lnSpc>
-                <a:spcPct val="135000"/>
-              </a:lnSpc>
-              <a:spcAft>
-                <a:spcPts val="979"/>
-              </a:spcAft>
-            </a:pPr>
-            <a:r>
-              <a:rPr sz="2800" b="0">
-                <a:solidFill>
-                  <a:srgbClr val="20242C"/>
-                </a:solidFill>
-                <a:latin typeface="Yu Gothic"/>
-                <a:ea typeface="Yu Gothic"/>
-                <a:cs typeface="Yu Gothic"/>
-              </a:rPr>
-              <a:t>・会場からの予想外のひと言で、AIの言い方がその場で変わる</a:t>
-            </a:r>
-          </a:p>
-          <a:p>
-            <a:pPr marL="355600" indent="-355600">
-              <a:lnSpc>
-                <a:spcPct val="135000"/>
-              </a:lnSpc>
-            </a:pPr>
-            <a:r>
-              <a:rPr sz="2800" b="0">
-                <a:solidFill>
-                  <a:srgbClr val="20242C"/>
-                </a:solidFill>
-                <a:latin typeface="Yu Gothic"/>
-                <a:ea typeface="Yu Gothic"/>
-                <a:cs typeface="Yu Gothic"/>
-              </a:rPr>
-              <a:t>・最初に集めた「話し方」「雰囲気」——それも相手がこちらに合わせて作ってくる</a:t>
-            </a:r>
-          </a:p>
-        </p:txBody>
-      </p:sp>
-      <p:sp>
-        <p:nvSpPr>
-          <p:cNvPr id="5" name="meta:pageno"/>
+            <a:off x="685800" y="2240280"/>
+            <a:ext cx="10820095" cy="1554480"/>
+          </a:xfrm>
+          <a:prstGeom prst="rect">
+            <a:avLst/>
+          </a:prstGeom>
+          <a:noFill/>
+        </p:spPr>
+        <p:txBody>
+          <a:bodyPr wrap="square" anchor="ctr">
+            <a:noAutofit/>
+          </a:bodyPr>
+          <a:lstStyle/>
+          <a:p>
+            <a:pPr algn="ctr"/>
+            <a:r>
+              <a:rPr sz="5400" b="1">
+                <a:solidFill>
+                  <a:srgbClr val="FFFFFF"/>
+                </a:solidFill>
+                <a:latin typeface="Yu Gothic"/>
+                <a:ea typeface="Yu Gothic"/>
+                <a:cs typeface="Yu Gothic"/>
+              </a:rPr>
+              <a:t>「本人らしさ」は作られる</a:t>
+            </a:r>
+          </a:p>
+        </p:txBody>
+      </p:sp>
+      <p:sp>
+        <p:nvSpPr>
+          <p:cNvPr id="5" name="TextBox 4"/>
+          <p:cNvSpPr txBox="1"/>
+          <p:nvPr/>
+        </p:nvSpPr>
+        <p:spPr>
+          <a:xfrm>
+            <a:off x="685800" y="3977639"/>
+            <a:ext cx="10820095" cy="868680"/>
+          </a:xfrm>
+          <a:prstGeom prst="rect">
+            <a:avLst/>
+          </a:prstGeom>
+          <a:noFill/>
+        </p:spPr>
+        <p:txBody>
+          <a:bodyPr wrap="square" anchor="ctr">
+            <a:noAutofit/>
+          </a:bodyPr>
+          <a:lstStyle/>
+          <a:p>
+            <a:pPr algn="ctr"/>
+            <a:r>
+              <a:rPr sz="2400" b="0">
+                <a:solidFill>
+                  <a:srgbClr val="BCBDC0"/>
+                </a:solidFill>
+                <a:latin typeface="Yu Gothic"/>
+                <a:ea typeface="Yu Gothic"/>
+                <a:cs typeface="Yu Gothic"/>
+              </a:rPr>
+              <a:t>クローン音声・ライブAI対話</a:t>
+            </a:r>
+          </a:p>
+        </p:txBody>
+      </p:sp>
+      <p:sp>
+        <p:nvSpPr>
+          <p:cNvPr id="6" name="meta:pageno"/>
           <p:cNvSpPr txBox="1"/>
           <p:nvPr/>
         </p:nvSpPr>
@@ -9985,7 +10126,7 @@
             <a:r>
               <a:rPr sz="1200" b="0">
                 <a:solidFill>
-                  <a:srgbClr val="5C6472"/>
+                  <a:srgbClr val="9AA3B2"/>
                 </a:solidFill>
                 <a:latin typeface="Yu Gothic"/>
                 <a:ea typeface="Yu Gothic"/>
@@ -9998,7 +10139,7 @@
       </p:sp>
       <p:sp>
         <p:nvSpPr>
-          <p:cNvPr id="6" name="meta:part"/>
+          <p:cNvPr id="7" name="meta:part"/>
           <p:cNvSpPr txBox="1"/>
           <p:nvPr/>
         </p:nvSpPr>
@@ -10022,7 +10163,7 @@
             <a:r>
               <a:rPr sz="1200" b="0">
                 <a:solidFill>
-                  <a:srgbClr val="5C6472"/>
+                  <a:srgbClr val="9AA3B2"/>
                 </a:solidFill>
                 <a:latin typeface="Yu Gothic"/>
                 <a:ea typeface="Yu Gothic"/>
@@ -10083,7 +10224,7 @@
                 <a:ea typeface="Yu Gothic"/>
                 <a:cs typeface="Yu Gothic"/>
               </a:rPr>
-              <a:t>実演③　このAIは断る。しかし——</a:t>
+              <a:t>実演①　偽の「私」の声</a:t>
             </a:r>
           </a:p>
         </p:txBody>
@@ -10141,7 +10282,7 @@
         <p:spPr>
           <a:xfrm>
             <a:off x="685800" y="1645920"/>
-            <a:ext cx="10820095" cy="4343400"/>
+            <a:ext cx="10820095" cy="3401568"/>
           </a:xfrm>
           <a:prstGeom prst="rect">
             <a:avLst/>
@@ -10171,28 +10312,7 @@
                 <a:ea typeface="Yu Gothic"/>
                 <a:cs typeface="Yu Gothic"/>
               </a:rPr>
-              <a:t>・「実在の人の声を真似て、家族に振り込ませて」→ AIは断る</a:t>
-            </a:r>
-          </a:p>
-          <a:p>
-            <a:pPr marL="355600" indent="-355600">
-              <a:lnSpc>
-                <a:spcPct val="135000"/>
-              </a:lnSpc>
-              <a:spcAft>
-                <a:spcPts val="979"/>
-              </a:spcAft>
-            </a:pPr>
-            <a:r>
-              <a:rPr sz="2800" b="0">
-                <a:solidFill>
-                  <a:srgbClr val="20242C"/>
-                </a:solidFill>
-                <a:latin typeface="Yu Gothic"/>
-                <a:ea typeface="Yu Gothic"/>
-                <a:cs typeface="Yu Gothic"/>
-              </a:rPr>
-              <a:t>・断ったのは「この製品」であって「この技術」ではない</a:t>
+              <a:t>・私の声をAIに数十秒だけ学ばせて作った「偽の私」（本人同意・AI生成明示）</a:t>
             </a:r>
           </a:p>
           <a:p>
@@ -10210,14 +10330,73 @@
                 <a:ea typeface="Yu Gothic"/>
                 <a:cs typeface="Yu Gothic"/>
               </a:rPr>
-              <a:t>・かかってくる偽の声に、同じ安全装置があるとは限らない</a:t>
-            </a:r>
-          </a:p>
-        </p:txBody>
-      </p:sp>
-      <p:sp>
-        <p:nvSpPr>
-          <p:cNvPr id="5" name="meta:pageno"/>
+              <a:t>・毎日いっしょに働く同僚でも、電話では分からないと言った</a:t>
+            </a:r>
+          </a:p>
+        </p:txBody>
+      </p:sp>
+      <p:sp>
+        <p:nvSpPr>
+          <p:cNvPr id="5" name="Rounded Rectangle 4"/>
+          <p:cNvSpPr/>
+          <p:nvPr/>
+        </p:nvSpPr>
+        <p:spPr>
+          <a:xfrm>
+            <a:off x="685800" y="5212080"/>
+            <a:ext cx="10820095" cy="777240"/>
+          </a:xfrm>
+          <a:prstGeom prst="roundRect">
+            <a:avLst>
+              <a:gd name="adj" fmla="val 16000"/>
+            </a:avLst>
+          </a:prstGeom>
+          <a:solidFill>
+            <a:srgbClr val="F3E6CF"/>
+          </a:solidFill>
+          <a:ln>
+            <a:noFill/>
+          </a:ln>
+          <a:effectLst/>
+        </p:spPr>
+        <p:style>
+          <a:lnRef idx="1">
+            <a:schemeClr val="accent1"/>
+          </a:lnRef>
+          <a:fillRef idx="3">
+            <a:schemeClr val="accent1"/>
+          </a:fillRef>
+          <a:effectRef idx="2">
+            <a:schemeClr val="accent1"/>
+          </a:effectRef>
+          <a:fontRef idx="minor">
+            <a:schemeClr val="lt1"/>
+          </a:fontRef>
+        </p:style>
+        <p:txBody>
+          <a:bodyPr rtlCol="0" anchor="ctr" wrap="square" lIns="274320" rIns="274320">
+            <a:noAutofit/>
+          </a:bodyPr>
+          <a:lstStyle/>
+          <a:p>
+            <a:pPr algn="ctr"/>
+            <a:r>
+              <a:rPr sz="2600" b="1">
+                <a:solidFill>
+                  <a:srgbClr val="20242C"/>
+                </a:solidFill>
+                <a:latin typeface="Yu Gothic"/>
+                <a:ea typeface="Yu Gothic"/>
+                <a:cs typeface="Yu Gothic"/>
+              </a:rPr>
+              <a:t>私の声ですらこれです。ご家族の声なら、どうでしょうか</a:t>
+            </a:r>
+          </a:p>
+        </p:txBody>
+      </p:sp>
+      <p:sp>
+        <p:nvSpPr>
+          <p:cNvPr id="6" name="meta:pageno"/>
           <p:cNvSpPr txBox="1"/>
           <p:nvPr/>
         </p:nvSpPr>
@@ -10254,7 +10433,7 @@
       </p:sp>
       <p:sp>
         <p:nvSpPr>
-          <p:cNvPr id="6" name="meta:part"/>
+          <p:cNvPr id="7" name="meta:part"/>
           <p:cNvSpPr txBox="1"/>
           <p:nvPr/>
         </p:nvSpPr>
@@ -10315,78 +10494,144 @@
         </p:nvSpPr>
         <p:spPr>
           <a:xfrm>
-            <a:off x="502920" y="1188720"/>
-            <a:ext cx="11185855" cy="4800600"/>
-          </a:xfrm>
-          <a:prstGeom prst="rect">
-            <a:avLst/>
-          </a:prstGeom>
-          <a:noFill/>
-        </p:spPr>
-        <p:txBody>
-          <a:bodyPr wrap="square" anchor="ctr">
-            <a:noAutofit/>
-          </a:bodyPr>
-          <a:lstStyle/>
-          <a:p>
-            <a:pPr algn="ctr">
+            <a:off x="685800" y="411480"/>
+            <a:ext cx="10820095" cy="960120"/>
+          </a:xfrm>
+          <a:prstGeom prst="rect">
+            <a:avLst/>
+          </a:prstGeom>
+          <a:noFill/>
+        </p:spPr>
+        <p:txBody>
+          <a:bodyPr wrap="square" anchor="b">
+            <a:noAutofit/>
+          </a:bodyPr>
+          <a:lstStyle/>
+          <a:p>
+            <a:pPr algn="l"/>
+            <a:r>
+              <a:rPr sz="3600" b="1">
+                <a:solidFill>
+                  <a:srgbClr val="B9791F"/>
+                </a:solidFill>
+                <a:latin typeface="Yu Gothic"/>
+                <a:ea typeface="Yu Gothic"/>
+                <a:cs typeface="Yu Gothic"/>
+              </a:rPr>
+              <a:t>実演②　AIは相手に合わせて話し方を変える</a:t>
+            </a:r>
+          </a:p>
+        </p:txBody>
+      </p:sp>
+      <p:sp>
+        <p:nvSpPr>
+          <p:cNvPr id="3" name="Rectangle 2"/>
+          <p:cNvSpPr/>
+          <p:nvPr/>
+        </p:nvSpPr>
+        <p:spPr>
+          <a:xfrm>
+            <a:off x="685800" y="1463040"/>
+            <a:ext cx="2377440" cy="50292"/>
+          </a:xfrm>
+          <a:prstGeom prst="rect">
+            <a:avLst/>
+          </a:prstGeom>
+          <a:solidFill>
+            <a:srgbClr val="B9791F"/>
+          </a:solidFill>
+          <a:ln>
+            <a:noFill/>
+          </a:ln>
+          <a:effectLst/>
+        </p:spPr>
+        <p:style>
+          <a:lnRef idx="1">
+            <a:schemeClr val="accent1"/>
+          </a:lnRef>
+          <a:fillRef idx="3">
+            <a:schemeClr val="accent1"/>
+          </a:fillRef>
+          <a:effectRef idx="2">
+            <a:schemeClr val="accent1"/>
+          </a:effectRef>
+          <a:fontRef idx="minor">
+            <a:schemeClr val="lt1"/>
+          </a:fontRef>
+        </p:style>
+        <p:txBody>
+          <a:bodyPr rtlCol="0" anchor="ctr"/>
+          <a:lstStyle/>
+          <a:p>
+            <a:pPr algn="ctr"/>
+          </a:p>
+        </p:txBody>
+      </p:sp>
+      <p:sp>
+        <p:nvSpPr>
+          <p:cNvPr id="4" name="TextBox 3"/>
+          <p:cNvSpPr txBox="1"/>
+          <p:nvPr/>
+        </p:nvSpPr>
+        <p:spPr>
+          <a:xfrm>
+            <a:off x="685800" y="1645920"/>
+            <a:ext cx="10820095" cy="4343400"/>
+          </a:xfrm>
+          <a:prstGeom prst="rect">
+            <a:avLst/>
+          </a:prstGeom>
+          <a:noFill/>
+        </p:spPr>
+        <p:txBody>
+          <a:bodyPr wrap="square" anchor="t">
+            <a:noAutofit/>
+          </a:bodyPr>
+          <a:lstStyle/>
+          <a:p>
+            <a:pPr marL="355600" indent="-355600">
               <a:lnSpc>
-                <a:spcPct val="128000"/>
+                <a:spcPct val="135000"/>
+              </a:lnSpc>
+              <a:spcAft>
+                <a:spcPts val="979"/>
+              </a:spcAft>
+            </a:pPr>
+            <a:r>
+              <a:rPr sz="2800" b="0">
+                <a:solidFill>
+                  <a:srgbClr val="20242C"/>
+                </a:solidFill>
+                <a:latin typeface="Yu Gothic"/>
+                <a:ea typeface="Yu Gothic"/>
+                <a:cs typeface="Yu Gothic"/>
+              </a:rPr>
+              <a:t>・会場からの予想外のひと言で、AIの言い方がその場で変わる</a:t>
+            </a:r>
+          </a:p>
+          <a:p>
+            <a:pPr marL="355600" indent="-355600">
+              <a:lnSpc>
+                <a:spcPct val="135000"/>
               </a:lnSpc>
             </a:pPr>
             <a:r>
-              <a:rPr sz="5400" b="1">
+              <a:rPr sz="2800" b="0">
                 <a:solidFill>
                   <a:srgbClr val="20242C"/>
                 </a:solidFill>
-                <a:latin typeface="Yu Mincho"/>
-                <a:ea typeface="Yu Mincho"/>
-                <a:cs typeface="Yu Mincho"/>
-              </a:rPr>
-              <a:t>番号も、顔も、声も、</a:t>
-            </a:r>
-          </a:p>
-          <a:p>
-            <a:pPr algn="ctr">
-              <a:lnSpc>
-                <a:spcPct val="128000"/>
-              </a:lnSpc>
-            </a:pPr>
-            <a:r>
-              <a:rPr sz="5400" b="1">
-                <a:solidFill>
-                  <a:srgbClr val="20242C"/>
-                </a:solidFill>
-                <a:latin typeface="Yu Mincho"/>
-                <a:ea typeface="Yu Mincho"/>
-                <a:cs typeface="Yu Mincho"/>
-              </a:rPr>
-              <a:t>話し方も偽れる。</a:t>
-            </a:r>
-          </a:p>
-          <a:p>
-            <a:pPr algn="ctr">
-              <a:lnSpc>
-                <a:spcPct val="128000"/>
-              </a:lnSpc>
-            </a:pPr>
-            <a:r>
-              <a:rPr sz="5400" b="1">
-                <a:solidFill>
-                  <a:srgbClr val="20242C"/>
-                </a:solidFill>
-                <a:latin typeface="Yu Mincho"/>
-                <a:ea typeface="Yu Mincho"/>
-                <a:cs typeface="Yu Mincho"/>
-              </a:rPr>
-              <a:t>では、何で見分けますか？</a:t>
-            </a:r>
-          </a:p>
-        </p:txBody>
-      </p:sp>
-      <p:sp>
-        <p:nvSpPr>
-          <p:cNvPr id="3" name="meta:pageno"/>
+                <a:latin typeface="Yu Gothic"/>
+                <a:ea typeface="Yu Gothic"/>
+                <a:cs typeface="Yu Gothic"/>
+              </a:rPr>
+              <a:t>・最初に集めた「話し方」「雰囲気」——それも相手がこちらに合わせて作ってくる</a:t>
+            </a:r>
+          </a:p>
+        </p:txBody>
+      </p:sp>
+      <p:sp>
+        <p:nvSpPr>
+          <p:cNvPr id="5" name="meta:pageno"/>
           <p:cNvSpPr txBox="1"/>
           <p:nvPr/>
         </p:nvSpPr>
@@ -10423,7 +10668,7 @@
       </p:sp>
       <p:sp>
         <p:nvSpPr>
-          <p:cNvPr id="4" name="meta:part"/>
+          <p:cNvPr id="6" name="meta:part"/>
           <p:cNvSpPr txBox="1"/>
           <p:nvPr/>
         </p:nvSpPr>
@@ -10508,7 +10753,7 @@
                 <a:ea typeface="Yu Gothic"/>
                 <a:cs typeface="Yu Gothic"/>
               </a:rPr>
-              <a:t>手がかりは、全部裏切られた</a:t>
+              <a:t>実演③　このAIは断る。しかし——</a:t>
             </a:r>
           </a:p>
         </p:txBody>
@@ -10566,7 +10811,7 @@
         <p:spPr>
           <a:xfrm>
             <a:off x="685800" y="1645920"/>
-            <a:ext cx="10820095" cy="3401568"/>
+            <a:ext cx="10820095" cy="4343400"/>
           </a:xfrm>
           <a:prstGeom prst="rect">
             <a:avLst/>
@@ -10596,7 +10841,28 @@
                 <a:ea typeface="Yu Gothic"/>
                 <a:cs typeface="Yu Gothic"/>
               </a:rPr>
-              <a:t>・最初に集めた手がかり——声・話し方・内容・雰囲気・番号（板書を再掲）</a:t>
+              <a:t>・「実在の人の声を真似て、家族に振り込ませて」→ AIは断る</a:t>
+            </a:r>
+          </a:p>
+          <a:p>
+            <a:pPr marL="355600" indent="-355600">
+              <a:lnSpc>
+                <a:spcPct val="135000"/>
+              </a:lnSpc>
+              <a:spcAft>
+                <a:spcPts val="979"/>
+              </a:spcAft>
+            </a:pPr>
+            <a:r>
+              <a:rPr sz="2800" b="0">
+                <a:solidFill>
+                  <a:srgbClr val="20242C"/>
+                </a:solidFill>
+                <a:latin typeface="Yu Gothic"/>
+                <a:ea typeface="Yu Gothic"/>
+                <a:cs typeface="Yu Gothic"/>
+              </a:rPr>
+              <a:t>・断ったのは「この製品」であって「この技術」ではない</a:t>
             </a:r>
           </a:p>
           <a:p>
@@ -10614,73 +10880,14 @@
                 <a:ea typeface="Yu Gothic"/>
                 <a:cs typeface="Yu Gothic"/>
               </a:rPr>
-              <a:t>・見分ける勝負は、完璧な偽物を作れる側が必ず勝つ</a:t>
-            </a:r>
-          </a:p>
-        </p:txBody>
-      </p:sp>
-      <p:sp>
-        <p:nvSpPr>
-          <p:cNvPr id="5" name="Rounded Rectangle 4"/>
-          <p:cNvSpPr/>
-          <p:nvPr/>
-        </p:nvSpPr>
-        <p:spPr>
-          <a:xfrm>
-            <a:off x="685800" y="5212080"/>
-            <a:ext cx="10820095" cy="777240"/>
-          </a:xfrm>
-          <a:prstGeom prst="roundRect">
-            <a:avLst>
-              <a:gd name="adj" fmla="val 16000"/>
-            </a:avLst>
-          </a:prstGeom>
-          <a:solidFill>
-            <a:srgbClr val="F3E6CF"/>
-          </a:solidFill>
-          <a:ln>
-            <a:noFill/>
-          </a:ln>
-          <a:effectLst/>
-        </p:spPr>
-        <p:style>
-          <a:lnRef idx="1">
-            <a:schemeClr val="accent1"/>
-          </a:lnRef>
-          <a:fillRef idx="3">
-            <a:schemeClr val="accent1"/>
-          </a:fillRef>
-          <a:effectRef idx="2">
-            <a:schemeClr val="accent1"/>
-          </a:effectRef>
-          <a:fontRef idx="minor">
-            <a:schemeClr val="lt1"/>
-          </a:fontRef>
-        </p:style>
-        <p:txBody>
-          <a:bodyPr rtlCol="0" anchor="ctr" wrap="square" lIns="274320" rIns="274320">
-            <a:noAutofit/>
-          </a:bodyPr>
-          <a:lstStyle/>
-          <a:p>
-            <a:pPr algn="ctr"/>
-            <a:r>
-              <a:rPr sz="2600" b="1">
-                <a:solidFill>
-                  <a:srgbClr val="20242C"/>
-                </a:solidFill>
-                <a:latin typeface="Yu Gothic"/>
-                <a:ea typeface="Yu Gothic"/>
-                <a:cs typeface="Yu Gothic"/>
-              </a:rPr>
-              <a:t>だから——手がかりで見分けること自体を、やめる</a:t>
-            </a:r>
-          </a:p>
-        </p:txBody>
-      </p:sp>
-      <p:sp>
-        <p:nvSpPr>
-          <p:cNvPr id="6" name="meta:pageno"/>
+              <a:t>・かかってくる偽の声に、同じ安全装置があるとは限らない</a:t>
+            </a:r>
+          </a:p>
+        </p:txBody>
+      </p:sp>
+      <p:sp>
+        <p:nvSpPr>
+          <p:cNvPr id="5" name="meta:pageno"/>
           <p:cNvSpPr txBox="1"/>
           <p:nvPr/>
         </p:nvSpPr>
@@ -10717,7 +10924,7 @@
       </p:sp>
       <p:sp>
         <p:nvSpPr>
-          <p:cNvPr id="7" name="meta:part"/>
+          <p:cNvPr id="6" name="meta:part"/>
           <p:cNvSpPr txBox="1"/>
           <p:nvPr/>
         </p:nvSpPr>
@@ -10747,7 +10954,7 @@
                 <a:ea typeface="Yu Gothic"/>
                 <a:cs typeface="Yu Gothic"/>
               </a:rPr>
-              <a:t>4 結論</a:t>
+              <a:t>3 実演</a:t>
             </a:r>
           </a:p>
         </p:txBody>
@@ -10778,89 +10985,8 @@
         </p:nvSpPr>
         <p:spPr>
           <a:xfrm>
-            <a:off x="685800" y="411480"/>
-            <a:ext cx="10820095" cy="960120"/>
-          </a:xfrm>
-          <a:prstGeom prst="rect">
-            <a:avLst/>
-          </a:prstGeom>
-          <a:noFill/>
-        </p:spPr>
-        <p:txBody>
-          <a:bodyPr wrap="square" anchor="b">
-            <a:noAutofit/>
-          </a:bodyPr>
-          <a:lstStyle/>
-          <a:p>
-            <a:pPr algn="l"/>
-            <a:r>
-              <a:rPr sz="4000" b="1">
-                <a:solidFill>
-                  <a:srgbClr val="B9791F"/>
-                </a:solidFill>
-                <a:latin typeface="Yu Gothic"/>
-                <a:ea typeface="Yu Gothic"/>
-                <a:cs typeface="Yu Gothic"/>
-              </a:rPr>
-              <a:t>守り方は 3つ</a:t>
-            </a:r>
-          </a:p>
-        </p:txBody>
-      </p:sp>
-      <p:sp>
-        <p:nvSpPr>
-          <p:cNvPr id="3" name="Rectangle 2"/>
-          <p:cNvSpPr/>
-          <p:nvPr/>
-        </p:nvSpPr>
-        <p:spPr>
-          <a:xfrm>
-            <a:off x="685800" y="1463040"/>
-            <a:ext cx="2377440" cy="50292"/>
-          </a:xfrm>
-          <a:prstGeom prst="rect">
-            <a:avLst/>
-          </a:prstGeom>
-          <a:solidFill>
-            <a:srgbClr val="B9791F"/>
-          </a:solidFill>
-          <a:ln>
-            <a:noFill/>
-          </a:ln>
-          <a:effectLst/>
-        </p:spPr>
-        <p:style>
-          <a:lnRef idx="1">
-            <a:schemeClr val="accent1"/>
-          </a:lnRef>
-          <a:fillRef idx="3">
-            <a:schemeClr val="accent1"/>
-          </a:fillRef>
-          <a:effectRef idx="2">
-            <a:schemeClr val="accent1"/>
-          </a:effectRef>
-          <a:fontRef idx="minor">
-            <a:schemeClr val="lt1"/>
-          </a:fontRef>
-        </p:style>
-        <p:txBody>
-          <a:bodyPr rtlCol="0" anchor="ctr"/>
-          <a:lstStyle/>
-          <a:p>
-            <a:pPr algn="ctr"/>
-          </a:p>
-        </p:txBody>
-      </p:sp>
-      <p:sp>
-        <p:nvSpPr>
-          <p:cNvPr id="4" name="TextBox 3"/>
-          <p:cNvSpPr txBox="1"/>
-          <p:nvPr/>
-        </p:nvSpPr>
-        <p:spPr>
-          <a:xfrm>
-            <a:off x="685800" y="1645920"/>
-            <a:ext cx="3931920" cy="457200"/>
+            <a:off x="502920" y="1188720"/>
+            <a:ext cx="11185855" cy="4800600"/>
           </a:xfrm>
           <a:prstGeom prst="rect">
             <a:avLst/>
@@ -10873,415 +10999,64 @@
           </a:bodyPr>
           <a:lstStyle/>
           <a:p>
-            <a:pPr algn="l">
+            <a:pPr algn="ctr">
               <a:lnSpc>
-                <a:spcPct val="115000"/>
+                <a:spcPct val="128000"/>
               </a:lnSpc>
             </a:pPr>
             <a:r>
-              <a:rPr sz="2000" b="1">
-                <a:solidFill>
-                  <a:srgbClr val="B9791F"/>
-                </a:solidFill>
-                <a:latin typeface="Yu Gothic"/>
-                <a:ea typeface="Yu Gothic"/>
-                <a:cs typeface="Yu Gothic"/>
-              </a:rPr>
-              <a:t>①【鳴る前】</a:t>
-            </a:r>
-          </a:p>
-        </p:txBody>
-      </p:sp>
-      <p:sp>
-        <p:nvSpPr>
-          <p:cNvPr id="5" name="TextBox 4"/>
-          <p:cNvSpPr txBox="1"/>
-          <p:nvPr/>
-        </p:nvSpPr>
-        <p:spPr>
-          <a:xfrm>
-            <a:off x="4892040" y="1645920"/>
-            <a:ext cx="6613855" cy="457200"/>
-          </a:xfrm>
-          <a:prstGeom prst="rect">
-            <a:avLst/>
-          </a:prstGeom>
-          <a:noFill/>
-        </p:spPr>
-        <p:txBody>
-          <a:bodyPr wrap="square" anchor="ctr">
-            <a:noAutofit/>
-          </a:bodyPr>
-          <a:lstStyle/>
-          <a:p>
-            <a:pPr algn="l">
+              <a:rPr sz="5400" b="1">
+                <a:solidFill>
+                  <a:srgbClr val="20242C"/>
+                </a:solidFill>
+                <a:latin typeface="Yu Mincho"/>
+                <a:ea typeface="Yu Mincho"/>
+                <a:cs typeface="Yu Mincho"/>
+              </a:rPr>
+              <a:t>番号も、顔も、声も、</a:t>
+            </a:r>
+          </a:p>
+          <a:p>
+            <a:pPr algn="ctr">
               <a:lnSpc>
-                <a:spcPct val="120000"/>
+                <a:spcPct val="128000"/>
               </a:lnSpc>
             </a:pPr>
             <a:r>
-              <a:rPr sz="3000" b="1">
+              <a:rPr sz="5400" b="1">
                 <a:solidFill>
                   <a:srgbClr val="20242C"/>
                 </a:solidFill>
-                <a:latin typeface="Yu Gothic"/>
-                <a:ea typeface="Yu Gothic"/>
-                <a:cs typeface="Yu Gothic"/>
-              </a:rPr>
-              <a:t>怪しい電話を防ぐ</a:t>
-            </a:r>
-          </a:p>
-        </p:txBody>
-      </p:sp>
-      <p:sp>
-        <p:nvSpPr>
-          <p:cNvPr id="6" name="TextBox 5"/>
-          <p:cNvSpPr txBox="1"/>
-          <p:nvPr/>
-        </p:nvSpPr>
-        <p:spPr>
-          <a:xfrm>
-            <a:off x="4892040" y="2139696"/>
-            <a:ext cx="6613855" cy="645668"/>
-          </a:xfrm>
-          <a:prstGeom prst="rect">
-            <a:avLst/>
-          </a:prstGeom>
-          <a:noFill/>
-        </p:spPr>
-        <p:txBody>
-          <a:bodyPr wrap="square" anchor="t">
-            <a:noAutofit/>
-          </a:bodyPr>
-          <a:lstStyle/>
-          <a:p>
-            <a:pPr algn="l">
+                <a:latin typeface="Yu Mincho"/>
+                <a:ea typeface="Yu Mincho"/>
+                <a:cs typeface="Yu Mincho"/>
+              </a:rPr>
+              <a:t>話し方も偽れる。</a:t>
+            </a:r>
+          </a:p>
+          <a:p>
+            <a:pPr algn="ctr">
               <a:lnSpc>
-                <a:spcPct val="130000"/>
+                <a:spcPct val="128000"/>
               </a:lnSpc>
             </a:pPr>
             <a:r>
-              <a:rPr sz="1900" b="0">
-                <a:solidFill>
-                  <a:srgbClr val="5C6472"/>
-                </a:solidFill>
-                <a:latin typeface="Yu Gothic"/>
-                <a:ea typeface="Yu Gothic"/>
-                <a:cs typeface="Yu Gothic"/>
-              </a:rPr>
-              <a:t>固定電話は国際電話の利用休止／スマホは迷惑電話対策アプリ</a:t>
-            </a:r>
-          </a:p>
-        </p:txBody>
-      </p:sp>
-      <p:sp>
-        <p:nvSpPr>
-          <p:cNvPr id="7" name="TextBox 6"/>
-          <p:cNvSpPr txBox="1"/>
-          <p:nvPr/>
-        </p:nvSpPr>
-        <p:spPr>
-          <a:xfrm>
-            <a:off x="685800" y="2933827"/>
-            <a:ext cx="3931920" cy="457200"/>
-          </a:xfrm>
-          <a:prstGeom prst="rect">
-            <a:avLst/>
-          </a:prstGeom>
-          <a:noFill/>
-        </p:spPr>
-        <p:txBody>
-          <a:bodyPr wrap="square" anchor="ctr">
-            <a:noAutofit/>
-          </a:bodyPr>
-          <a:lstStyle/>
-          <a:p>
-            <a:pPr algn="l">
-              <a:lnSpc>
-                <a:spcPct val="115000"/>
-              </a:lnSpc>
-            </a:pPr>
-            <a:r>
-              <a:rPr sz="2000" b="1">
-                <a:solidFill>
-                  <a:srgbClr val="B9791F"/>
-                </a:solidFill>
-                <a:latin typeface="Yu Gothic"/>
-                <a:ea typeface="Yu Gothic"/>
-                <a:cs typeface="Yu Gothic"/>
-              </a:rPr>
-              <a:t>②【警察・お金の話が出たら】</a:t>
-            </a:r>
-          </a:p>
-        </p:txBody>
-      </p:sp>
-      <p:sp>
-        <p:nvSpPr>
-          <p:cNvPr id="8" name="TextBox 7"/>
-          <p:cNvSpPr txBox="1"/>
-          <p:nvPr/>
-        </p:nvSpPr>
-        <p:spPr>
-          <a:xfrm>
-            <a:off x="4892040" y="2933827"/>
-            <a:ext cx="6613855" cy="457200"/>
-          </a:xfrm>
-          <a:prstGeom prst="rect">
-            <a:avLst/>
-          </a:prstGeom>
-          <a:noFill/>
-        </p:spPr>
-        <p:txBody>
-          <a:bodyPr wrap="square" anchor="ctr">
-            <a:noAutofit/>
-          </a:bodyPr>
-          <a:lstStyle/>
-          <a:p>
-            <a:pPr algn="l">
-              <a:lnSpc>
-                <a:spcPct val="120000"/>
-              </a:lnSpc>
-            </a:pPr>
-            <a:r>
-              <a:rPr sz="3000" b="1">
+              <a:rPr sz="5400" b="1">
                 <a:solidFill>
                   <a:srgbClr val="20242C"/>
                 </a:solidFill>
-                <a:latin typeface="Yu Gothic"/>
-                <a:ea typeface="Yu Gothic"/>
-                <a:cs typeface="Yu Gothic"/>
-              </a:rPr>
-              <a:t>番号や映像を信じず、切る</a:t>
-            </a:r>
-          </a:p>
-        </p:txBody>
-      </p:sp>
-      <p:sp>
-        <p:nvSpPr>
-          <p:cNvPr id="9" name="TextBox 8"/>
-          <p:cNvSpPr txBox="1"/>
-          <p:nvPr/>
-        </p:nvSpPr>
-        <p:spPr>
-          <a:xfrm>
-            <a:off x="4892040" y="3427603"/>
-            <a:ext cx="6613855" cy="331977"/>
-          </a:xfrm>
-          <a:prstGeom prst="rect">
-            <a:avLst/>
-          </a:prstGeom>
-          <a:noFill/>
-        </p:spPr>
-        <p:txBody>
-          <a:bodyPr wrap="square" anchor="t">
-            <a:noAutofit/>
-          </a:bodyPr>
-          <a:lstStyle/>
-          <a:p>
-            <a:pPr algn="l">
-              <a:lnSpc>
-                <a:spcPct val="130000"/>
-              </a:lnSpc>
-            </a:pPr>
-            <a:r>
-              <a:rPr sz="1900" b="0">
-                <a:solidFill>
-                  <a:srgbClr val="5C6472"/>
-                </a:solidFill>
-                <a:latin typeface="Yu Gothic"/>
-                <a:ea typeface="Yu Gothic"/>
-                <a:cs typeface="Yu Gothic"/>
-              </a:rPr>
-              <a:t>「誰にも言うな」「ATM」「ギフトカード」は即切りの合図</a:t>
-            </a:r>
-          </a:p>
-        </p:txBody>
-      </p:sp>
-      <p:sp>
-        <p:nvSpPr>
-          <p:cNvPr id="10" name="TextBox 9"/>
-          <p:cNvSpPr txBox="1"/>
-          <p:nvPr/>
-        </p:nvSpPr>
-        <p:spPr>
-          <a:xfrm>
-            <a:off x="685800" y="3908044"/>
-            <a:ext cx="3931920" cy="457200"/>
-          </a:xfrm>
-          <a:prstGeom prst="rect">
-            <a:avLst/>
-          </a:prstGeom>
-          <a:noFill/>
-        </p:spPr>
-        <p:txBody>
-          <a:bodyPr wrap="square" anchor="ctr">
-            <a:noAutofit/>
-          </a:bodyPr>
-          <a:lstStyle/>
-          <a:p>
-            <a:pPr algn="l">
-              <a:lnSpc>
-                <a:spcPct val="115000"/>
-              </a:lnSpc>
-            </a:pPr>
-            <a:r>
-              <a:rPr sz="2000" b="1">
-                <a:solidFill>
-                  <a:srgbClr val="B9791F"/>
-                </a:solidFill>
-                <a:latin typeface="Yu Gothic"/>
-                <a:ea typeface="Yu Gothic"/>
-                <a:cs typeface="Yu Gothic"/>
-              </a:rPr>
-              <a:t>③【切ったあと】</a:t>
-            </a:r>
-          </a:p>
-        </p:txBody>
-      </p:sp>
-      <p:sp>
-        <p:nvSpPr>
-          <p:cNvPr id="11" name="TextBox 10"/>
-          <p:cNvSpPr txBox="1"/>
-          <p:nvPr/>
-        </p:nvSpPr>
-        <p:spPr>
-          <a:xfrm>
-            <a:off x="4892040" y="3908044"/>
-            <a:ext cx="6613855" cy="457200"/>
-          </a:xfrm>
-          <a:prstGeom prst="rect">
-            <a:avLst/>
-          </a:prstGeom>
-          <a:noFill/>
-        </p:spPr>
-        <p:txBody>
-          <a:bodyPr wrap="square" anchor="ctr">
-            <a:noAutofit/>
-          </a:bodyPr>
-          <a:lstStyle/>
-          <a:p>
-            <a:pPr algn="l">
-              <a:lnSpc>
-                <a:spcPct val="120000"/>
-              </a:lnSpc>
-            </a:pPr>
-            <a:r>
-              <a:rPr sz="3000" b="1">
-                <a:solidFill>
-                  <a:srgbClr val="20242C"/>
-                </a:solidFill>
-                <a:latin typeface="Yu Gothic"/>
-                <a:ea typeface="Yu Gothic"/>
-                <a:cs typeface="Yu Gothic"/>
-              </a:rPr>
-              <a:t>自分で調べた番号で確かめる</a:t>
-            </a:r>
-          </a:p>
-        </p:txBody>
-      </p:sp>
-      <p:sp>
-        <p:nvSpPr>
-          <p:cNvPr id="12" name="TextBox 11"/>
-          <p:cNvSpPr txBox="1"/>
-          <p:nvPr/>
-        </p:nvSpPr>
-        <p:spPr>
-          <a:xfrm>
-            <a:off x="4892040" y="4401820"/>
-            <a:ext cx="6613855" cy="645668"/>
-          </a:xfrm>
-          <a:prstGeom prst="rect">
-            <a:avLst/>
-          </a:prstGeom>
-          <a:noFill/>
-        </p:spPr>
-        <p:txBody>
-          <a:bodyPr wrap="square" anchor="t">
-            <a:noAutofit/>
-          </a:bodyPr>
-          <a:lstStyle/>
-          <a:p>
-            <a:pPr algn="l">
-              <a:lnSpc>
-                <a:spcPct val="130000"/>
-              </a:lnSpc>
-            </a:pPr>
-            <a:r>
-              <a:rPr sz="1900" b="0">
-                <a:solidFill>
-                  <a:srgbClr val="5C6472"/>
-                </a:solidFill>
-                <a:latin typeface="Yu Gothic"/>
-                <a:ea typeface="Yu Gothic"/>
-                <a:cs typeface="Yu Gothic"/>
-              </a:rPr>
-              <a:t>着信履歴は使わない／警察相談は「#9110」／家族はもともと知っている番号へ</a:t>
-            </a:r>
-          </a:p>
-        </p:txBody>
-      </p:sp>
-      <p:sp>
-        <p:nvSpPr>
-          <p:cNvPr id="13" name="Rounded Rectangle 12"/>
-          <p:cNvSpPr/>
-          <p:nvPr/>
-        </p:nvSpPr>
-        <p:spPr>
-          <a:xfrm>
-            <a:off x="685800" y="5212080"/>
-            <a:ext cx="10820095" cy="777240"/>
-          </a:xfrm>
-          <a:prstGeom prst="roundRect">
-            <a:avLst>
-              <a:gd name="adj" fmla="val 16000"/>
-            </a:avLst>
-          </a:prstGeom>
-          <a:solidFill>
-            <a:srgbClr val="F3E6CF"/>
-          </a:solidFill>
-          <a:ln>
-            <a:noFill/>
-          </a:ln>
-          <a:effectLst/>
-        </p:spPr>
-        <p:style>
-          <a:lnRef idx="1">
-            <a:schemeClr val="accent1"/>
-          </a:lnRef>
-          <a:fillRef idx="3">
-            <a:schemeClr val="accent1"/>
-          </a:fillRef>
-          <a:effectRef idx="2">
-            <a:schemeClr val="accent1"/>
-          </a:effectRef>
-          <a:fontRef idx="minor">
-            <a:schemeClr val="lt1"/>
-          </a:fontRef>
-        </p:style>
-        <p:txBody>
-          <a:bodyPr rtlCol="0" anchor="ctr" wrap="square" lIns="274320" rIns="274320">
-            <a:noAutofit/>
-          </a:bodyPr>
-          <a:lstStyle/>
-          <a:p>
-            <a:pPr algn="ctr"/>
-            <a:r>
-              <a:rPr sz="2600" b="1">
-                <a:solidFill>
-                  <a:srgbClr val="20242C"/>
-                </a:solidFill>
-                <a:latin typeface="Yu Gothic"/>
-                <a:ea typeface="Yu Gothic"/>
-                <a:cs typeface="Yu Gothic"/>
-              </a:rPr>
-              <a:t>電話では、その場で送金せず、口座や暗証番号も伝えない</a:t>
-            </a:r>
-          </a:p>
-        </p:txBody>
-      </p:sp>
-      <p:sp>
-        <p:nvSpPr>
-          <p:cNvPr id="14" name="meta:pageno"/>
+                <a:latin typeface="Yu Mincho"/>
+                <a:ea typeface="Yu Mincho"/>
+                <a:cs typeface="Yu Mincho"/>
+              </a:rPr>
+              <a:t>では、何で見分けますか？</a:t>
+            </a:r>
+          </a:p>
+        </p:txBody>
+      </p:sp>
+      <p:sp>
+        <p:nvSpPr>
+          <p:cNvPr id="3" name="meta:pageno"/>
           <p:cNvSpPr txBox="1"/>
           <p:nvPr/>
         </p:nvSpPr>
@@ -11318,7 +11093,7 @@
       </p:sp>
       <p:sp>
         <p:nvSpPr>
-          <p:cNvPr id="15" name="meta:part"/>
+          <p:cNvPr id="4" name="meta:part"/>
           <p:cNvSpPr txBox="1"/>
           <p:nvPr/>
         </p:nvSpPr>
@@ -11348,7 +11123,7 @@
                 <a:ea typeface="Yu Gothic"/>
                 <a:cs typeface="Yu Gothic"/>
               </a:rPr>
-              <a:t>4 結論</a:t>
+              <a:t>3 実演</a:t>
             </a:r>
           </a:p>
         </p:txBody>
@@ -11403,7 +11178,7 @@
                 <a:ea typeface="Yu Gothic"/>
                 <a:cs typeface="Yu Gothic"/>
               </a:rPr>
-              <a:t>今日のまとめ</a:t>
+              <a:t>手がかりは、全部裏切られた</a:t>
             </a:r>
           </a:p>
         </p:txBody>
@@ -11460,68 +11235,48 @@
         </p:nvSpPr>
         <p:spPr>
           <a:xfrm>
-            <a:off x="731520" y="1645920"/>
-            <a:ext cx="731520" cy="457200"/>
-          </a:xfrm>
-          <a:prstGeom prst="rect">
-            <a:avLst/>
-          </a:prstGeom>
-          <a:noFill/>
-        </p:spPr>
-        <p:txBody>
-          <a:bodyPr wrap="square" anchor="ctr">
-            <a:noAutofit/>
-          </a:bodyPr>
-          <a:lstStyle/>
-          <a:p>
-            <a:pPr algn="r">
+            <a:off x="685800" y="1645920"/>
+            <a:ext cx="10820095" cy="3401568"/>
+          </a:xfrm>
+          <a:prstGeom prst="rect">
+            <a:avLst/>
+          </a:prstGeom>
+          <a:noFill/>
+        </p:spPr>
+        <p:txBody>
+          <a:bodyPr wrap="square" anchor="t">
+            <a:noAutofit/>
+          </a:bodyPr>
+          <a:lstStyle/>
+          <a:p>
+            <a:pPr marL="355600" indent="-355600">
               <a:lnSpc>
-                <a:spcPct val="115000"/>
+                <a:spcPct val="135000"/>
+              </a:lnSpc>
+              <a:spcAft>
+                <a:spcPts val="979"/>
+              </a:spcAft>
+            </a:pPr>
+            <a:r>
+              <a:rPr sz="2800" b="0">
+                <a:solidFill>
+                  <a:srgbClr val="20242C"/>
+                </a:solidFill>
+                <a:latin typeface="Yu Gothic"/>
+                <a:ea typeface="Yu Gothic"/>
+                <a:cs typeface="Yu Gothic"/>
+              </a:rPr>
+              <a:t>・最初に集めた手がかり——声・話し方・内容・雰囲気・番号（板書を再掲）</a:t>
+            </a:r>
+          </a:p>
+          <a:p>
+            <a:pPr marL="355600" indent="-355600">
+              <a:lnSpc>
+                <a:spcPct val="135000"/>
               </a:lnSpc>
             </a:pPr>
             <a:r>
-              <a:rPr sz="2800" b="1">
-                <a:solidFill>
-                  <a:srgbClr val="B9791F"/>
-                </a:solidFill>
-                <a:latin typeface="Yu Gothic"/>
-                <a:ea typeface="Yu Gothic"/>
-                <a:cs typeface="Yu Gothic"/>
-              </a:rPr>
-              <a:t>1</a:t>
-            </a:r>
-          </a:p>
-        </p:txBody>
-      </p:sp>
-      <p:sp>
-        <p:nvSpPr>
-          <p:cNvPr id="5" name="TextBox 4"/>
-          <p:cNvSpPr txBox="1"/>
-          <p:nvPr/>
-        </p:nvSpPr>
-        <p:spPr>
-          <a:xfrm>
-            <a:off x="1508760" y="1645920"/>
-            <a:ext cx="9997135" cy="457200"/>
-          </a:xfrm>
-          <a:prstGeom prst="rect">
-            <a:avLst/>
-          </a:prstGeom>
-          <a:noFill/>
-        </p:spPr>
-        <p:txBody>
-          <a:bodyPr wrap="square" anchor="ctr">
-            <a:noAutofit/>
-          </a:bodyPr>
-          <a:lstStyle/>
-          <a:p>
-            <a:pPr algn="l">
-              <a:lnSpc>
-                <a:spcPct val="120000"/>
-              </a:lnSpc>
-            </a:pPr>
-            <a:r>
-              <a:rPr sz="3000" b="1">
+              <a:rPr sz="2800" b="0">
                 <a:solidFill>
                   <a:srgbClr val="20242C"/>
                 </a:solidFill>
@@ -11529,81 +11284,58 @@
                 <a:ea typeface="Yu Gothic"/>
                 <a:cs typeface="Yu Gothic"/>
               </a:rPr>
-              <a:t>バレバレの嘘は、疑わない人を選ぶ「フィルタ」だった</a:t>
-            </a:r>
-          </a:p>
-        </p:txBody>
-      </p:sp>
-      <p:sp>
-        <p:nvSpPr>
-          <p:cNvPr id="6" name="TextBox 5"/>
-          <p:cNvSpPr txBox="1"/>
-          <p:nvPr/>
-        </p:nvSpPr>
-        <p:spPr>
-          <a:xfrm>
-            <a:off x="731520" y="2388870"/>
-            <a:ext cx="731520" cy="914400"/>
-          </a:xfrm>
-          <a:prstGeom prst="rect">
-            <a:avLst/>
-          </a:prstGeom>
-          <a:noFill/>
-        </p:spPr>
-        <p:txBody>
-          <a:bodyPr wrap="square" anchor="ctr">
-            <a:noAutofit/>
-          </a:bodyPr>
-          <a:lstStyle/>
-          <a:p>
-            <a:pPr algn="r">
-              <a:lnSpc>
-                <a:spcPct val="115000"/>
-              </a:lnSpc>
-            </a:pPr>
-            <a:r>
-              <a:rPr sz="2800" b="1">
-                <a:solidFill>
-                  <a:srgbClr val="B9791F"/>
-                </a:solidFill>
-                <a:latin typeface="Yu Gothic"/>
-                <a:ea typeface="Yu Gothic"/>
-                <a:cs typeface="Yu Gothic"/>
-              </a:rPr>
-              <a:t>2</a:t>
-            </a:r>
-          </a:p>
-        </p:txBody>
-      </p:sp>
-      <p:sp>
-        <p:nvSpPr>
-          <p:cNvPr id="7" name="TextBox 6"/>
-          <p:cNvSpPr txBox="1"/>
-          <p:nvPr/>
-        </p:nvSpPr>
-        <p:spPr>
-          <a:xfrm>
-            <a:off x="1508760" y="2388870"/>
-            <a:ext cx="9997135" cy="914400"/>
-          </a:xfrm>
-          <a:prstGeom prst="rect">
-            <a:avLst/>
-          </a:prstGeom>
-          <a:noFill/>
-        </p:spPr>
-        <p:txBody>
-          <a:bodyPr wrap="square" anchor="ctr">
-            <a:noAutofit/>
-          </a:bodyPr>
-          <a:lstStyle/>
-          <a:p>
-            <a:pPr algn="l">
-              <a:lnSpc>
-                <a:spcPct val="120000"/>
-              </a:lnSpc>
-            </a:pPr>
-            <a:r>
-              <a:rPr sz="3000" b="1">
+              <a:t>・見分ける勝負は、完璧な偽物を作れる側が必ず勝つ</a:t>
+            </a:r>
+          </a:p>
+        </p:txBody>
+      </p:sp>
+      <p:sp>
+        <p:nvSpPr>
+          <p:cNvPr id="5" name="Rounded Rectangle 4"/>
+          <p:cNvSpPr/>
+          <p:nvPr/>
+        </p:nvSpPr>
+        <p:spPr>
+          <a:xfrm>
+            <a:off x="685800" y="5212080"/>
+            <a:ext cx="10820095" cy="777240"/>
+          </a:xfrm>
+          <a:prstGeom prst="roundRect">
+            <a:avLst>
+              <a:gd name="adj" fmla="val 16000"/>
+            </a:avLst>
+          </a:prstGeom>
+          <a:solidFill>
+            <a:srgbClr val="F3E6CF"/>
+          </a:solidFill>
+          <a:ln>
+            <a:noFill/>
+          </a:ln>
+          <a:effectLst/>
+        </p:spPr>
+        <p:style>
+          <a:lnRef idx="1">
+            <a:schemeClr val="accent1"/>
+          </a:lnRef>
+          <a:fillRef idx="3">
+            <a:schemeClr val="accent1"/>
+          </a:fillRef>
+          <a:effectRef idx="2">
+            <a:schemeClr val="accent1"/>
+          </a:effectRef>
+          <a:fontRef idx="minor">
+            <a:schemeClr val="lt1"/>
+          </a:fontRef>
+        </p:style>
+        <p:txBody>
+          <a:bodyPr rtlCol="0" anchor="ctr" wrap="square" lIns="274320" rIns="274320">
+            <a:noAutofit/>
+          </a:bodyPr>
+          <a:lstStyle/>
+          <a:p>
+            <a:pPr algn="ctr"/>
+            <a:r>
+              <a:rPr sz="2600" b="1">
                 <a:solidFill>
                   <a:srgbClr val="20242C"/>
                 </a:solidFill>
@@ -11611,260 +11343,14 @@
                 <a:ea typeface="Yu Gothic"/>
                 <a:cs typeface="Yu Gothic"/>
               </a:rPr>
-              <a:t>AIがその選別を不要にし、疑う人も突破される時代が始まった</a:t>
-            </a:r>
-          </a:p>
-        </p:txBody>
-      </p:sp>
-      <p:sp>
-        <p:nvSpPr>
-          <p:cNvPr id="8" name="TextBox 7"/>
-          <p:cNvSpPr txBox="1"/>
-          <p:nvPr/>
-        </p:nvSpPr>
-        <p:spPr>
-          <a:xfrm>
-            <a:off x="731520" y="3589020"/>
-            <a:ext cx="731520" cy="457200"/>
-          </a:xfrm>
-          <a:prstGeom prst="rect">
-            <a:avLst/>
-          </a:prstGeom>
-          <a:noFill/>
-        </p:spPr>
-        <p:txBody>
-          <a:bodyPr wrap="square" anchor="ctr">
-            <a:noAutofit/>
-          </a:bodyPr>
-          <a:lstStyle/>
-          <a:p>
-            <a:pPr algn="r">
-              <a:lnSpc>
-                <a:spcPct val="115000"/>
-              </a:lnSpc>
-            </a:pPr>
-            <a:r>
-              <a:rPr sz="2800" b="1">
-                <a:solidFill>
-                  <a:srgbClr val="B9791F"/>
-                </a:solidFill>
-                <a:latin typeface="Yu Gothic"/>
-                <a:ea typeface="Yu Gothic"/>
-                <a:cs typeface="Yu Gothic"/>
-              </a:rPr>
-              <a:t>3</a:t>
-            </a:r>
-          </a:p>
-        </p:txBody>
-      </p:sp>
-      <p:sp>
-        <p:nvSpPr>
-          <p:cNvPr id="9" name="TextBox 8"/>
-          <p:cNvSpPr txBox="1"/>
-          <p:nvPr/>
-        </p:nvSpPr>
-        <p:spPr>
-          <a:xfrm>
-            <a:off x="1508760" y="3589020"/>
-            <a:ext cx="9997135" cy="457200"/>
-          </a:xfrm>
-          <a:prstGeom prst="rect">
-            <a:avLst/>
-          </a:prstGeom>
-          <a:noFill/>
-        </p:spPr>
-        <p:txBody>
-          <a:bodyPr wrap="square" anchor="ctr">
-            <a:noAutofit/>
-          </a:bodyPr>
-          <a:lstStyle/>
-          <a:p>
-            <a:pPr algn="l">
-              <a:lnSpc>
-                <a:spcPct val="120000"/>
-              </a:lnSpc>
-            </a:pPr>
-            <a:r>
-              <a:rPr sz="3000" b="1">
-                <a:solidFill>
-                  <a:srgbClr val="20242C"/>
-                </a:solidFill>
-                <a:latin typeface="Yu Gothic"/>
-                <a:ea typeface="Yu Gothic"/>
-                <a:cs typeface="Yu Gothic"/>
-              </a:rPr>
-              <a:t>いまの日本の主役は、AIではなく「番号」</a:t>
-            </a:r>
-          </a:p>
-        </p:txBody>
-      </p:sp>
-      <p:sp>
-        <p:nvSpPr>
-          <p:cNvPr id="10" name="TextBox 9"/>
-          <p:cNvSpPr txBox="1"/>
-          <p:nvPr/>
-        </p:nvSpPr>
-        <p:spPr>
-          <a:xfrm>
-            <a:off x="731520" y="4331970"/>
-            <a:ext cx="731520" cy="457200"/>
-          </a:xfrm>
-          <a:prstGeom prst="rect">
-            <a:avLst/>
-          </a:prstGeom>
-          <a:noFill/>
-        </p:spPr>
-        <p:txBody>
-          <a:bodyPr wrap="square" anchor="ctr">
-            <a:noAutofit/>
-          </a:bodyPr>
-          <a:lstStyle/>
-          <a:p>
-            <a:pPr algn="r">
-              <a:lnSpc>
-                <a:spcPct val="115000"/>
-              </a:lnSpc>
-            </a:pPr>
-            <a:r>
-              <a:rPr sz="2800" b="1">
-                <a:solidFill>
-                  <a:srgbClr val="B9791F"/>
-                </a:solidFill>
-                <a:latin typeface="Yu Gothic"/>
-                <a:ea typeface="Yu Gothic"/>
-                <a:cs typeface="Yu Gothic"/>
-              </a:rPr>
-              <a:t>4</a:t>
-            </a:r>
-          </a:p>
-        </p:txBody>
-      </p:sp>
-      <p:sp>
-        <p:nvSpPr>
-          <p:cNvPr id="11" name="TextBox 10"/>
-          <p:cNvSpPr txBox="1"/>
-          <p:nvPr/>
-        </p:nvSpPr>
-        <p:spPr>
-          <a:xfrm>
-            <a:off x="1508760" y="4331970"/>
-            <a:ext cx="9997135" cy="457200"/>
-          </a:xfrm>
-          <a:prstGeom prst="rect">
-            <a:avLst/>
-          </a:prstGeom>
-          <a:noFill/>
-        </p:spPr>
-        <p:txBody>
-          <a:bodyPr wrap="square" anchor="ctr">
-            <a:noAutofit/>
-          </a:bodyPr>
-          <a:lstStyle/>
-          <a:p>
-            <a:pPr algn="l">
-              <a:lnSpc>
-                <a:spcPct val="120000"/>
-              </a:lnSpc>
-            </a:pPr>
-            <a:r>
-              <a:rPr sz="3000" b="1">
-                <a:solidFill>
-                  <a:srgbClr val="20242C"/>
-                </a:solidFill>
-                <a:latin typeface="Yu Gothic"/>
-                <a:ea typeface="Yu Gothic"/>
-                <a:cs typeface="Yu Gothic"/>
-              </a:rPr>
-              <a:t>次は、番号偽装にAIが混ざってくる</a:t>
-            </a:r>
-          </a:p>
-        </p:txBody>
-      </p:sp>
-      <p:sp>
-        <p:nvSpPr>
-          <p:cNvPr id="12" name="TextBox 11"/>
-          <p:cNvSpPr txBox="1"/>
-          <p:nvPr/>
-        </p:nvSpPr>
-        <p:spPr>
-          <a:xfrm>
-            <a:off x="731520" y="5074920"/>
-            <a:ext cx="731520" cy="914400"/>
-          </a:xfrm>
-          <a:prstGeom prst="rect">
-            <a:avLst/>
-          </a:prstGeom>
-          <a:noFill/>
-        </p:spPr>
-        <p:txBody>
-          <a:bodyPr wrap="square" anchor="ctr">
-            <a:noAutofit/>
-          </a:bodyPr>
-          <a:lstStyle/>
-          <a:p>
-            <a:pPr algn="r">
-              <a:lnSpc>
-                <a:spcPct val="115000"/>
-              </a:lnSpc>
-            </a:pPr>
-            <a:r>
-              <a:rPr sz="2800" b="1">
-                <a:solidFill>
-                  <a:srgbClr val="B9791F"/>
-                </a:solidFill>
-                <a:latin typeface="Yu Gothic"/>
-                <a:ea typeface="Yu Gothic"/>
-                <a:cs typeface="Yu Gothic"/>
-              </a:rPr>
-              <a:t>5</a:t>
-            </a:r>
-          </a:p>
-        </p:txBody>
-      </p:sp>
-      <p:sp>
-        <p:nvSpPr>
-          <p:cNvPr id="13" name="TextBox 12"/>
-          <p:cNvSpPr txBox="1"/>
-          <p:nvPr/>
-        </p:nvSpPr>
-        <p:spPr>
-          <a:xfrm>
-            <a:off x="1508760" y="5074920"/>
-            <a:ext cx="9997135" cy="914400"/>
-          </a:xfrm>
-          <a:prstGeom prst="rect">
-            <a:avLst/>
-          </a:prstGeom>
-          <a:noFill/>
-        </p:spPr>
-        <p:txBody>
-          <a:bodyPr wrap="square" anchor="ctr">
-            <a:noAutofit/>
-          </a:bodyPr>
-          <a:lstStyle/>
-          <a:p>
-            <a:pPr algn="l">
-              <a:lnSpc>
-                <a:spcPct val="120000"/>
-              </a:lnSpc>
-            </a:pPr>
-            <a:r>
-              <a:rPr sz="3000" b="1">
-                <a:solidFill>
-                  <a:srgbClr val="20242C"/>
-                </a:solidFill>
-                <a:latin typeface="Yu Gothic"/>
-                <a:ea typeface="Yu Gothic"/>
-                <a:cs typeface="Yu Gothic"/>
-              </a:rPr>
-              <a:t>だから——見分けるのをやめて、一度切って、自分で調べてかけ直す</a:t>
-            </a:r>
-          </a:p>
-        </p:txBody>
-      </p:sp>
-      <p:sp>
-        <p:nvSpPr>
-          <p:cNvPr id="14" name="meta:pageno"/>
+              <a:t>だから——手がかりで見分けること自体を、やめる</a:t>
+            </a:r>
+          </a:p>
+        </p:txBody>
+      </p:sp>
+      <p:sp>
+        <p:nvSpPr>
+          <p:cNvPr id="6" name="meta:pageno"/>
           <p:cNvSpPr txBox="1"/>
           <p:nvPr/>
         </p:nvSpPr>
@@ -11901,7 +11387,7 @@
       </p:sp>
       <p:sp>
         <p:nvSpPr>
-          <p:cNvPr id="15" name="meta:part"/>
+          <p:cNvPr id="7" name="meta:part"/>
           <p:cNvSpPr txBox="1"/>
           <p:nvPr/>
         </p:nvSpPr>
@@ -11962,8 +11448,89 @@
         </p:nvSpPr>
         <p:spPr>
           <a:xfrm>
-            <a:off x="502920" y="1188720"/>
-            <a:ext cx="11185855" cy="3657599"/>
+            <a:off x="685800" y="411480"/>
+            <a:ext cx="10820095" cy="960120"/>
+          </a:xfrm>
+          <a:prstGeom prst="rect">
+            <a:avLst/>
+          </a:prstGeom>
+          <a:noFill/>
+        </p:spPr>
+        <p:txBody>
+          <a:bodyPr wrap="square" anchor="b">
+            <a:noAutofit/>
+          </a:bodyPr>
+          <a:lstStyle/>
+          <a:p>
+            <a:pPr algn="l"/>
+            <a:r>
+              <a:rPr sz="4000" b="1">
+                <a:solidFill>
+                  <a:srgbClr val="B9791F"/>
+                </a:solidFill>
+                <a:latin typeface="Yu Gothic"/>
+                <a:ea typeface="Yu Gothic"/>
+                <a:cs typeface="Yu Gothic"/>
+              </a:rPr>
+              <a:t>守り方は 3つ</a:t>
+            </a:r>
+          </a:p>
+        </p:txBody>
+      </p:sp>
+      <p:sp>
+        <p:nvSpPr>
+          <p:cNvPr id="3" name="Rectangle 2"/>
+          <p:cNvSpPr/>
+          <p:nvPr/>
+        </p:nvSpPr>
+        <p:spPr>
+          <a:xfrm>
+            <a:off x="685800" y="1463040"/>
+            <a:ext cx="2377440" cy="50292"/>
+          </a:xfrm>
+          <a:prstGeom prst="rect">
+            <a:avLst/>
+          </a:prstGeom>
+          <a:solidFill>
+            <a:srgbClr val="B9791F"/>
+          </a:solidFill>
+          <a:ln>
+            <a:noFill/>
+          </a:ln>
+          <a:effectLst/>
+        </p:spPr>
+        <p:style>
+          <a:lnRef idx="1">
+            <a:schemeClr val="accent1"/>
+          </a:lnRef>
+          <a:fillRef idx="3">
+            <a:schemeClr val="accent1"/>
+          </a:fillRef>
+          <a:effectRef idx="2">
+            <a:schemeClr val="accent1"/>
+          </a:effectRef>
+          <a:fontRef idx="minor">
+            <a:schemeClr val="lt1"/>
+          </a:fontRef>
+        </p:style>
+        <p:txBody>
+          <a:bodyPr rtlCol="0" anchor="ctr"/>
+          <a:lstStyle/>
+          <a:p>
+            <a:pPr algn="ctr"/>
+          </a:p>
+        </p:txBody>
+      </p:sp>
+      <p:sp>
+        <p:nvSpPr>
+          <p:cNvPr id="4" name="TextBox 3"/>
+          <p:cNvSpPr txBox="1"/>
+          <p:nvPr/>
+        </p:nvSpPr>
+        <p:spPr>
+          <a:xfrm>
+            <a:off x="685800" y="1645920"/>
+            <a:ext cx="3931920" cy="457200"/>
           </a:xfrm>
           <a:prstGeom prst="rect">
             <a:avLst/>
@@ -11976,72 +11543,95 @@
           </a:bodyPr>
           <a:lstStyle/>
           <a:p>
-            <a:pPr algn="ctr">
+            <a:pPr algn="l">
               <a:lnSpc>
-                <a:spcPct val="128000"/>
+                <a:spcPct val="115000"/>
               </a:lnSpc>
             </a:pPr>
             <a:r>
-              <a:rPr sz="5400" b="1">
-                <a:solidFill>
-                  <a:srgbClr val="20242C"/>
-                </a:solidFill>
-                <a:latin typeface="Yu Mincho"/>
-                <a:ea typeface="Yu Mincho"/>
-                <a:cs typeface="Yu Mincho"/>
-              </a:rPr>
-              <a:t>冒頭の1億円は、</a:t>
-            </a:r>
-          </a:p>
-          <a:p>
-            <a:pPr algn="ctr">
+              <a:rPr sz="2000" b="1">
+                <a:solidFill>
+                  <a:srgbClr val="B9791F"/>
+                </a:solidFill>
+                <a:latin typeface="Yu Gothic"/>
+                <a:ea typeface="Yu Gothic"/>
+                <a:cs typeface="Yu Gothic"/>
+              </a:rPr>
+              <a:t>①【鳴る前】</a:t>
+            </a:r>
+          </a:p>
+        </p:txBody>
+      </p:sp>
+      <p:sp>
+        <p:nvSpPr>
+          <p:cNvPr id="5" name="TextBox 4"/>
+          <p:cNvSpPr txBox="1"/>
+          <p:nvPr/>
+        </p:nvSpPr>
+        <p:spPr>
+          <a:xfrm>
+            <a:off x="4892040" y="1645920"/>
+            <a:ext cx="6613855" cy="457200"/>
+          </a:xfrm>
+          <a:prstGeom prst="rect">
+            <a:avLst/>
+          </a:prstGeom>
+          <a:noFill/>
+        </p:spPr>
+        <p:txBody>
+          <a:bodyPr wrap="square" anchor="ctr">
+            <a:noAutofit/>
+          </a:bodyPr>
+          <a:lstStyle/>
+          <a:p>
+            <a:pPr algn="l">
               <a:lnSpc>
-                <a:spcPct val="128000"/>
+                <a:spcPct val="120000"/>
               </a:lnSpc>
             </a:pPr>
             <a:r>
-              <a:rPr sz="5400" b="1">
+              <a:rPr sz="3000" b="1">
                 <a:solidFill>
                   <a:srgbClr val="20242C"/>
                 </a:solidFill>
-                <a:latin typeface="Yu Mincho"/>
-                <a:ea typeface="Yu Mincho"/>
-                <a:cs typeface="Yu Mincho"/>
-              </a:rPr>
-              <a:t>あらためて、差し上げられません。</a:t>
-            </a:r>
-          </a:p>
-        </p:txBody>
-      </p:sp>
-      <p:sp>
-        <p:nvSpPr>
-          <p:cNvPr id="3" name="TextBox 2"/>
-          <p:cNvSpPr txBox="1"/>
-          <p:nvPr/>
-        </p:nvSpPr>
-        <p:spPr>
-          <a:xfrm>
-            <a:off x="685800" y="4983479"/>
-            <a:ext cx="10820095" cy="1005840"/>
-          </a:xfrm>
-          <a:prstGeom prst="rect">
-            <a:avLst/>
-          </a:prstGeom>
-          <a:noFill/>
-        </p:spPr>
-        <p:txBody>
-          <a:bodyPr wrap="square" anchor="ctr">
-            <a:noAutofit/>
-          </a:bodyPr>
-          <a:lstStyle/>
-          <a:p>
-            <a:pPr algn="ctr">
+                <a:latin typeface="Yu Gothic"/>
+                <a:ea typeface="Yu Gothic"/>
+                <a:cs typeface="Yu Gothic"/>
+              </a:rPr>
+              <a:t>怪しい電話を防ぐ</a:t>
+            </a:r>
+          </a:p>
+        </p:txBody>
+      </p:sp>
+      <p:sp>
+        <p:nvSpPr>
+          <p:cNvPr id="6" name="TextBox 5"/>
+          <p:cNvSpPr txBox="1"/>
+          <p:nvPr/>
+        </p:nvSpPr>
+        <p:spPr>
+          <a:xfrm>
+            <a:off x="4892040" y="2139696"/>
+            <a:ext cx="6613855" cy="645668"/>
+          </a:xfrm>
+          <a:prstGeom prst="rect">
+            <a:avLst/>
+          </a:prstGeom>
+          <a:noFill/>
+        </p:spPr>
+        <p:txBody>
+          <a:bodyPr wrap="square" anchor="t">
+            <a:noAutofit/>
+          </a:bodyPr>
+          <a:lstStyle/>
+          <a:p>
+            <a:pPr algn="l">
               <a:lnSpc>
                 <a:spcPct val="130000"/>
               </a:lnSpc>
             </a:pPr>
             <a:r>
-              <a:rPr sz="2200" b="0">
+              <a:rPr sz="1900" b="0">
                 <a:solidFill>
                   <a:srgbClr val="5C6472"/>
                 </a:solidFill>
@@ -12049,14 +11639,319 @@
                 <a:ea typeface="Yu Gothic"/>
                 <a:cs typeface="Yu Gothic"/>
               </a:rPr>
-              <a:t>帰ったらご家族に「1億円をもらい損ねた話」を——笑い話が、そのまま家族を守る話になります</a:t>
-            </a:r>
-          </a:p>
-        </p:txBody>
-      </p:sp>
-      <p:sp>
-        <p:nvSpPr>
-          <p:cNvPr id="4" name="meta:pageno"/>
+              <a:t>固定電話は国際電話の利用休止／スマホは迷惑電話対策アプリ</a:t>
+            </a:r>
+          </a:p>
+        </p:txBody>
+      </p:sp>
+      <p:sp>
+        <p:nvSpPr>
+          <p:cNvPr id="7" name="TextBox 6"/>
+          <p:cNvSpPr txBox="1"/>
+          <p:nvPr/>
+        </p:nvSpPr>
+        <p:spPr>
+          <a:xfrm>
+            <a:off x="685800" y="2933827"/>
+            <a:ext cx="3931920" cy="457200"/>
+          </a:xfrm>
+          <a:prstGeom prst="rect">
+            <a:avLst/>
+          </a:prstGeom>
+          <a:noFill/>
+        </p:spPr>
+        <p:txBody>
+          <a:bodyPr wrap="square" anchor="ctr">
+            <a:noAutofit/>
+          </a:bodyPr>
+          <a:lstStyle/>
+          <a:p>
+            <a:pPr algn="l">
+              <a:lnSpc>
+                <a:spcPct val="115000"/>
+              </a:lnSpc>
+            </a:pPr>
+            <a:r>
+              <a:rPr sz="2000" b="1">
+                <a:solidFill>
+                  <a:srgbClr val="B9791F"/>
+                </a:solidFill>
+                <a:latin typeface="Yu Gothic"/>
+                <a:ea typeface="Yu Gothic"/>
+                <a:cs typeface="Yu Gothic"/>
+              </a:rPr>
+              <a:t>②【警察・お金の話が出たら】</a:t>
+            </a:r>
+          </a:p>
+        </p:txBody>
+      </p:sp>
+      <p:sp>
+        <p:nvSpPr>
+          <p:cNvPr id="8" name="TextBox 7"/>
+          <p:cNvSpPr txBox="1"/>
+          <p:nvPr/>
+        </p:nvSpPr>
+        <p:spPr>
+          <a:xfrm>
+            <a:off x="4892040" y="2933827"/>
+            <a:ext cx="6613855" cy="457200"/>
+          </a:xfrm>
+          <a:prstGeom prst="rect">
+            <a:avLst/>
+          </a:prstGeom>
+          <a:noFill/>
+        </p:spPr>
+        <p:txBody>
+          <a:bodyPr wrap="square" anchor="ctr">
+            <a:noAutofit/>
+          </a:bodyPr>
+          <a:lstStyle/>
+          <a:p>
+            <a:pPr algn="l">
+              <a:lnSpc>
+                <a:spcPct val="120000"/>
+              </a:lnSpc>
+            </a:pPr>
+            <a:r>
+              <a:rPr sz="3000" b="1">
+                <a:solidFill>
+                  <a:srgbClr val="20242C"/>
+                </a:solidFill>
+                <a:latin typeface="Yu Gothic"/>
+                <a:ea typeface="Yu Gothic"/>
+                <a:cs typeface="Yu Gothic"/>
+              </a:rPr>
+              <a:t>番号や映像を信じず、切る</a:t>
+            </a:r>
+          </a:p>
+        </p:txBody>
+      </p:sp>
+      <p:sp>
+        <p:nvSpPr>
+          <p:cNvPr id="9" name="TextBox 8"/>
+          <p:cNvSpPr txBox="1"/>
+          <p:nvPr/>
+        </p:nvSpPr>
+        <p:spPr>
+          <a:xfrm>
+            <a:off x="4892040" y="3427603"/>
+            <a:ext cx="6613855" cy="331977"/>
+          </a:xfrm>
+          <a:prstGeom prst="rect">
+            <a:avLst/>
+          </a:prstGeom>
+          <a:noFill/>
+        </p:spPr>
+        <p:txBody>
+          <a:bodyPr wrap="square" anchor="t">
+            <a:noAutofit/>
+          </a:bodyPr>
+          <a:lstStyle/>
+          <a:p>
+            <a:pPr algn="l">
+              <a:lnSpc>
+                <a:spcPct val="130000"/>
+              </a:lnSpc>
+            </a:pPr>
+            <a:r>
+              <a:rPr sz="1900" b="0">
+                <a:solidFill>
+                  <a:srgbClr val="5C6472"/>
+                </a:solidFill>
+                <a:latin typeface="Yu Gothic"/>
+                <a:ea typeface="Yu Gothic"/>
+                <a:cs typeface="Yu Gothic"/>
+              </a:rPr>
+              <a:t>「誰にも言うな」「ATM」「ギフトカード」は即切りの合図</a:t>
+            </a:r>
+          </a:p>
+        </p:txBody>
+      </p:sp>
+      <p:sp>
+        <p:nvSpPr>
+          <p:cNvPr id="10" name="TextBox 9"/>
+          <p:cNvSpPr txBox="1"/>
+          <p:nvPr/>
+        </p:nvSpPr>
+        <p:spPr>
+          <a:xfrm>
+            <a:off x="685800" y="3908044"/>
+            <a:ext cx="3931920" cy="457200"/>
+          </a:xfrm>
+          <a:prstGeom prst="rect">
+            <a:avLst/>
+          </a:prstGeom>
+          <a:noFill/>
+        </p:spPr>
+        <p:txBody>
+          <a:bodyPr wrap="square" anchor="ctr">
+            <a:noAutofit/>
+          </a:bodyPr>
+          <a:lstStyle/>
+          <a:p>
+            <a:pPr algn="l">
+              <a:lnSpc>
+                <a:spcPct val="115000"/>
+              </a:lnSpc>
+            </a:pPr>
+            <a:r>
+              <a:rPr sz="2000" b="1">
+                <a:solidFill>
+                  <a:srgbClr val="B9791F"/>
+                </a:solidFill>
+                <a:latin typeface="Yu Gothic"/>
+                <a:ea typeface="Yu Gothic"/>
+                <a:cs typeface="Yu Gothic"/>
+              </a:rPr>
+              <a:t>③【切ったあと】</a:t>
+            </a:r>
+          </a:p>
+        </p:txBody>
+      </p:sp>
+      <p:sp>
+        <p:nvSpPr>
+          <p:cNvPr id="11" name="TextBox 10"/>
+          <p:cNvSpPr txBox="1"/>
+          <p:nvPr/>
+        </p:nvSpPr>
+        <p:spPr>
+          <a:xfrm>
+            <a:off x="4892040" y="3908044"/>
+            <a:ext cx="6613855" cy="457200"/>
+          </a:xfrm>
+          <a:prstGeom prst="rect">
+            <a:avLst/>
+          </a:prstGeom>
+          <a:noFill/>
+        </p:spPr>
+        <p:txBody>
+          <a:bodyPr wrap="square" anchor="ctr">
+            <a:noAutofit/>
+          </a:bodyPr>
+          <a:lstStyle/>
+          <a:p>
+            <a:pPr algn="l">
+              <a:lnSpc>
+                <a:spcPct val="120000"/>
+              </a:lnSpc>
+            </a:pPr>
+            <a:r>
+              <a:rPr sz="3000" b="1">
+                <a:solidFill>
+                  <a:srgbClr val="20242C"/>
+                </a:solidFill>
+                <a:latin typeface="Yu Gothic"/>
+                <a:ea typeface="Yu Gothic"/>
+                <a:cs typeface="Yu Gothic"/>
+              </a:rPr>
+              <a:t>自分で調べた番号で確かめる</a:t>
+            </a:r>
+          </a:p>
+        </p:txBody>
+      </p:sp>
+      <p:sp>
+        <p:nvSpPr>
+          <p:cNvPr id="12" name="TextBox 11"/>
+          <p:cNvSpPr txBox="1"/>
+          <p:nvPr/>
+        </p:nvSpPr>
+        <p:spPr>
+          <a:xfrm>
+            <a:off x="4892040" y="4401820"/>
+            <a:ext cx="6613855" cy="645668"/>
+          </a:xfrm>
+          <a:prstGeom prst="rect">
+            <a:avLst/>
+          </a:prstGeom>
+          <a:noFill/>
+        </p:spPr>
+        <p:txBody>
+          <a:bodyPr wrap="square" anchor="t">
+            <a:noAutofit/>
+          </a:bodyPr>
+          <a:lstStyle/>
+          <a:p>
+            <a:pPr algn="l">
+              <a:lnSpc>
+                <a:spcPct val="130000"/>
+              </a:lnSpc>
+            </a:pPr>
+            <a:r>
+              <a:rPr sz="1900" b="0">
+                <a:solidFill>
+                  <a:srgbClr val="5C6472"/>
+                </a:solidFill>
+                <a:latin typeface="Yu Gothic"/>
+                <a:ea typeface="Yu Gothic"/>
+                <a:cs typeface="Yu Gothic"/>
+              </a:rPr>
+              <a:t>着信履歴は使わない／警察相談は「#9110」／家族はもともと知っている番号へ</a:t>
+            </a:r>
+          </a:p>
+        </p:txBody>
+      </p:sp>
+      <p:sp>
+        <p:nvSpPr>
+          <p:cNvPr id="13" name="Rounded Rectangle 12"/>
+          <p:cNvSpPr/>
+          <p:nvPr/>
+        </p:nvSpPr>
+        <p:spPr>
+          <a:xfrm>
+            <a:off x="685800" y="5212080"/>
+            <a:ext cx="10820095" cy="777240"/>
+          </a:xfrm>
+          <a:prstGeom prst="roundRect">
+            <a:avLst>
+              <a:gd name="adj" fmla="val 16000"/>
+            </a:avLst>
+          </a:prstGeom>
+          <a:solidFill>
+            <a:srgbClr val="F3E6CF"/>
+          </a:solidFill>
+          <a:ln>
+            <a:noFill/>
+          </a:ln>
+          <a:effectLst/>
+        </p:spPr>
+        <p:style>
+          <a:lnRef idx="1">
+            <a:schemeClr val="accent1"/>
+          </a:lnRef>
+          <a:fillRef idx="3">
+            <a:schemeClr val="accent1"/>
+          </a:fillRef>
+          <a:effectRef idx="2">
+            <a:schemeClr val="accent1"/>
+          </a:effectRef>
+          <a:fontRef idx="minor">
+            <a:schemeClr val="lt1"/>
+          </a:fontRef>
+        </p:style>
+        <p:txBody>
+          <a:bodyPr rtlCol="0" anchor="ctr" wrap="square" lIns="274320" rIns="274320">
+            <a:noAutofit/>
+          </a:bodyPr>
+          <a:lstStyle/>
+          <a:p>
+            <a:pPr algn="ctr"/>
+            <a:r>
+              <a:rPr sz="2600" b="1">
+                <a:solidFill>
+                  <a:srgbClr val="20242C"/>
+                </a:solidFill>
+                <a:latin typeface="Yu Gothic"/>
+                <a:ea typeface="Yu Gothic"/>
+                <a:cs typeface="Yu Gothic"/>
+              </a:rPr>
+              <a:t>電話では、その場で送金せず、口座や暗証番号も伝えない</a:t>
+            </a:r>
+          </a:p>
+        </p:txBody>
+      </p:sp>
+      <p:sp>
+        <p:nvSpPr>
+          <p:cNvPr id="14" name="meta:pageno"/>
           <p:cNvSpPr txBox="1"/>
           <p:nvPr/>
         </p:nvSpPr>
@@ -12093,7 +11988,7 @@
       </p:sp>
       <p:sp>
         <p:nvSpPr>
-          <p:cNvPr id="5" name="meta:part"/>
+          <p:cNvPr id="15" name="meta:part"/>
           <p:cNvSpPr txBox="1"/>
           <p:nvPr/>
         </p:nvSpPr>
@@ -12352,7 +12247,7 @@
                 <a:ea typeface="Yu Gothic"/>
                 <a:cs typeface="Yu Gothic"/>
               </a:rPr>
-              <a:t>主な出典</a:t>
+              <a:t>今日のまとめ</a:t>
             </a:r>
           </a:p>
         </p:txBody>
@@ -12409,6 +12304,781 @@
         </p:nvSpPr>
         <p:spPr>
           <a:xfrm>
+            <a:off x="731520" y="1645920"/>
+            <a:ext cx="731520" cy="457200"/>
+          </a:xfrm>
+          <a:prstGeom prst="rect">
+            <a:avLst/>
+          </a:prstGeom>
+          <a:noFill/>
+        </p:spPr>
+        <p:txBody>
+          <a:bodyPr wrap="square" anchor="ctr">
+            <a:noAutofit/>
+          </a:bodyPr>
+          <a:lstStyle/>
+          <a:p>
+            <a:pPr algn="r">
+              <a:lnSpc>
+                <a:spcPct val="115000"/>
+              </a:lnSpc>
+            </a:pPr>
+            <a:r>
+              <a:rPr sz="2800" b="1">
+                <a:solidFill>
+                  <a:srgbClr val="B9791F"/>
+                </a:solidFill>
+                <a:latin typeface="Yu Gothic"/>
+                <a:ea typeface="Yu Gothic"/>
+                <a:cs typeface="Yu Gothic"/>
+              </a:rPr>
+              <a:t>1</a:t>
+            </a:r>
+          </a:p>
+        </p:txBody>
+      </p:sp>
+      <p:sp>
+        <p:nvSpPr>
+          <p:cNvPr id="5" name="TextBox 4"/>
+          <p:cNvSpPr txBox="1"/>
+          <p:nvPr/>
+        </p:nvSpPr>
+        <p:spPr>
+          <a:xfrm>
+            <a:off x="1508760" y="1645920"/>
+            <a:ext cx="9997135" cy="457200"/>
+          </a:xfrm>
+          <a:prstGeom prst="rect">
+            <a:avLst/>
+          </a:prstGeom>
+          <a:noFill/>
+        </p:spPr>
+        <p:txBody>
+          <a:bodyPr wrap="square" anchor="ctr">
+            <a:noAutofit/>
+          </a:bodyPr>
+          <a:lstStyle/>
+          <a:p>
+            <a:pPr algn="l">
+              <a:lnSpc>
+                <a:spcPct val="120000"/>
+              </a:lnSpc>
+            </a:pPr>
+            <a:r>
+              <a:rPr sz="3000" b="1">
+                <a:solidFill>
+                  <a:srgbClr val="20242C"/>
+                </a:solidFill>
+                <a:latin typeface="Yu Gothic"/>
+                <a:ea typeface="Yu Gothic"/>
+                <a:cs typeface="Yu Gothic"/>
+              </a:rPr>
+              <a:t>バレバレの嘘は、疑わない人を選ぶ「フィルタ」だった</a:t>
+            </a:r>
+          </a:p>
+        </p:txBody>
+      </p:sp>
+      <p:sp>
+        <p:nvSpPr>
+          <p:cNvPr id="6" name="TextBox 5"/>
+          <p:cNvSpPr txBox="1"/>
+          <p:nvPr/>
+        </p:nvSpPr>
+        <p:spPr>
+          <a:xfrm>
+            <a:off x="731520" y="2388870"/>
+            <a:ext cx="731520" cy="914400"/>
+          </a:xfrm>
+          <a:prstGeom prst="rect">
+            <a:avLst/>
+          </a:prstGeom>
+          <a:noFill/>
+        </p:spPr>
+        <p:txBody>
+          <a:bodyPr wrap="square" anchor="ctr">
+            <a:noAutofit/>
+          </a:bodyPr>
+          <a:lstStyle/>
+          <a:p>
+            <a:pPr algn="r">
+              <a:lnSpc>
+                <a:spcPct val="115000"/>
+              </a:lnSpc>
+            </a:pPr>
+            <a:r>
+              <a:rPr sz="2800" b="1">
+                <a:solidFill>
+                  <a:srgbClr val="B9791F"/>
+                </a:solidFill>
+                <a:latin typeface="Yu Gothic"/>
+                <a:ea typeface="Yu Gothic"/>
+                <a:cs typeface="Yu Gothic"/>
+              </a:rPr>
+              <a:t>2</a:t>
+            </a:r>
+          </a:p>
+        </p:txBody>
+      </p:sp>
+      <p:sp>
+        <p:nvSpPr>
+          <p:cNvPr id="7" name="TextBox 6"/>
+          <p:cNvSpPr txBox="1"/>
+          <p:nvPr/>
+        </p:nvSpPr>
+        <p:spPr>
+          <a:xfrm>
+            <a:off x="1508760" y="2388870"/>
+            <a:ext cx="9997135" cy="914400"/>
+          </a:xfrm>
+          <a:prstGeom prst="rect">
+            <a:avLst/>
+          </a:prstGeom>
+          <a:noFill/>
+        </p:spPr>
+        <p:txBody>
+          <a:bodyPr wrap="square" anchor="ctr">
+            <a:noAutofit/>
+          </a:bodyPr>
+          <a:lstStyle/>
+          <a:p>
+            <a:pPr algn="l">
+              <a:lnSpc>
+                <a:spcPct val="120000"/>
+              </a:lnSpc>
+            </a:pPr>
+            <a:r>
+              <a:rPr sz="3000" b="1">
+                <a:solidFill>
+                  <a:srgbClr val="20242C"/>
+                </a:solidFill>
+                <a:latin typeface="Yu Gothic"/>
+                <a:ea typeface="Yu Gothic"/>
+                <a:cs typeface="Yu Gothic"/>
+              </a:rPr>
+              <a:t>AIがその選別を不要にし、疑う人も突破される時代が始まった</a:t>
+            </a:r>
+          </a:p>
+        </p:txBody>
+      </p:sp>
+      <p:sp>
+        <p:nvSpPr>
+          <p:cNvPr id="8" name="TextBox 7"/>
+          <p:cNvSpPr txBox="1"/>
+          <p:nvPr/>
+        </p:nvSpPr>
+        <p:spPr>
+          <a:xfrm>
+            <a:off x="731520" y="3589020"/>
+            <a:ext cx="731520" cy="457200"/>
+          </a:xfrm>
+          <a:prstGeom prst="rect">
+            <a:avLst/>
+          </a:prstGeom>
+          <a:noFill/>
+        </p:spPr>
+        <p:txBody>
+          <a:bodyPr wrap="square" anchor="ctr">
+            <a:noAutofit/>
+          </a:bodyPr>
+          <a:lstStyle/>
+          <a:p>
+            <a:pPr algn="r">
+              <a:lnSpc>
+                <a:spcPct val="115000"/>
+              </a:lnSpc>
+            </a:pPr>
+            <a:r>
+              <a:rPr sz="2800" b="1">
+                <a:solidFill>
+                  <a:srgbClr val="B9791F"/>
+                </a:solidFill>
+                <a:latin typeface="Yu Gothic"/>
+                <a:ea typeface="Yu Gothic"/>
+                <a:cs typeface="Yu Gothic"/>
+              </a:rPr>
+              <a:t>3</a:t>
+            </a:r>
+          </a:p>
+        </p:txBody>
+      </p:sp>
+      <p:sp>
+        <p:nvSpPr>
+          <p:cNvPr id="9" name="TextBox 8"/>
+          <p:cNvSpPr txBox="1"/>
+          <p:nvPr/>
+        </p:nvSpPr>
+        <p:spPr>
+          <a:xfrm>
+            <a:off x="1508760" y="3589020"/>
+            <a:ext cx="9997135" cy="457200"/>
+          </a:xfrm>
+          <a:prstGeom prst="rect">
+            <a:avLst/>
+          </a:prstGeom>
+          <a:noFill/>
+        </p:spPr>
+        <p:txBody>
+          <a:bodyPr wrap="square" anchor="ctr">
+            <a:noAutofit/>
+          </a:bodyPr>
+          <a:lstStyle/>
+          <a:p>
+            <a:pPr algn="l">
+              <a:lnSpc>
+                <a:spcPct val="120000"/>
+              </a:lnSpc>
+            </a:pPr>
+            <a:r>
+              <a:rPr sz="3000" b="1">
+                <a:solidFill>
+                  <a:srgbClr val="20242C"/>
+                </a:solidFill>
+                <a:latin typeface="Yu Gothic"/>
+                <a:ea typeface="Yu Gothic"/>
+                <a:cs typeface="Yu Gothic"/>
+              </a:rPr>
+              <a:t>いまの日本の主役は、AIではなく「番号」</a:t>
+            </a:r>
+          </a:p>
+        </p:txBody>
+      </p:sp>
+      <p:sp>
+        <p:nvSpPr>
+          <p:cNvPr id="10" name="TextBox 9"/>
+          <p:cNvSpPr txBox="1"/>
+          <p:nvPr/>
+        </p:nvSpPr>
+        <p:spPr>
+          <a:xfrm>
+            <a:off x="731520" y="4331970"/>
+            <a:ext cx="731520" cy="457200"/>
+          </a:xfrm>
+          <a:prstGeom prst="rect">
+            <a:avLst/>
+          </a:prstGeom>
+          <a:noFill/>
+        </p:spPr>
+        <p:txBody>
+          <a:bodyPr wrap="square" anchor="ctr">
+            <a:noAutofit/>
+          </a:bodyPr>
+          <a:lstStyle/>
+          <a:p>
+            <a:pPr algn="r">
+              <a:lnSpc>
+                <a:spcPct val="115000"/>
+              </a:lnSpc>
+            </a:pPr>
+            <a:r>
+              <a:rPr sz="2800" b="1">
+                <a:solidFill>
+                  <a:srgbClr val="B9791F"/>
+                </a:solidFill>
+                <a:latin typeface="Yu Gothic"/>
+                <a:ea typeface="Yu Gothic"/>
+                <a:cs typeface="Yu Gothic"/>
+              </a:rPr>
+              <a:t>4</a:t>
+            </a:r>
+          </a:p>
+        </p:txBody>
+      </p:sp>
+      <p:sp>
+        <p:nvSpPr>
+          <p:cNvPr id="11" name="TextBox 10"/>
+          <p:cNvSpPr txBox="1"/>
+          <p:nvPr/>
+        </p:nvSpPr>
+        <p:spPr>
+          <a:xfrm>
+            <a:off x="1508760" y="4331970"/>
+            <a:ext cx="9997135" cy="457200"/>
+          </a:xfrm>
+          <a:prstGeom prst="rect">
+            <a:avLst/>
+          </a:prstGeom>
+          <a:noFill/>
+        </p:spPr>
+        <p:txBody>
+          <a:bodyPr wrap="square" anchor="ctr">
+            <a:noAutofit/>
+          </a:bodyPr>
+          <a:lstStyle/>
+          <a:p>
+            <a:pPr algn="l">
+              <a:lnSpc>
+                <a:spcPct val="120000"/>
+              </a:lnSpc>
+            </a:pPr>
+            <a:r>
+              <a:rPr sz="3000" b="1">
+                <a:solidFill>
+                  <a:srgbClr val="20242C"/>
+                </a:solidFill>
+                <a:latin typeface="Yu Gothic"/>
+                <a:ea typeface="Yu Gothic"/>
+                <a:cs typeface="Yu Gothic"/>
+              </a:rPr>
+              <a:t>次は、番号偽装にAIが混ざってくる</a:t>
+            </a:r>
+          </a:p>
+        </p:txBody>
+      </p:sp>
+      <p:sp>
+        <p:nvSpPr>
+          <p:cNvPr id="12" name="TextBox 11"/>
+          <p:cNvSpPr txBox="1"/>
+          <p:nvPr/>
+        </p:nvSpPr>
+        <p:spPr>
+          <a:xfrm>
+            <a:off x="731520" y="5074920"/>
+            <a:ext cx="731520" cy="914400"/>
+          </a:xfrm>
+          <a:prstGeom prst="rect">
+            <a:avLst/>
+          </a:prstGeom>
+          <a:noFill/>
+        </p:spPr>
+        <p:txBody>
+          <a:bodyPr wrap="square" anchor="ctr">
+            <a:noAutofit/>
+          </a:bodyPr>
+          <a:lstStyle/>
+          <a:p>
+            <a:pPr algn="r">
+              <a:lnSpc>
+                <a:spcPct val="115000"/>
+              </a:lnSpc>
+            </a:pPr>
+            <a:r>
+              <a:rPr sz="2800" b="1">
+                <a:solidFill>
+                  <a:srgbClr val="B9791F"/>
+                </a:solidFill>
+                <a:latin typeface="Yu Gothic"/>
+                <a:ea typeface="Yu Gothic"/>
+                <a:cs typeface="Yu Gothic"/>
+              </a:rPr>
+              <a:t>5</a:t>
+            </a:r>
+          </a:p>
+        </p:txBody>
+      </p:sp>
+      <p:sp>
+        <p:nvSpPr>
+          <p:cNvPr id="13" name="TextBox 12"/>
+          <p:cNvSpPr txBox="1"/>
+          <p:nvPr/>
+        </p:nvSpPr>
+        <p:spPr>
+          <a:xfrm>
+            <a:off x="1508760" y="5074920"/>
+            <a:ext cx="9997135" cy="914400"/>
+          </a:xfrm>
+          <a:prstGeom prst="rect">
+            <a:avLst/>
+          </a:prstGeom>
+          <a:noFill/>
+        </p:spPr>
+        <p:txBody>
+          <a:bodyPr wrap="square" anchor="ctr">
+            <a:noAutofit/>
+          </a:bodyPr>
+          <a:lstStyle/>
+          <a:p>
+            <a:pPr algn="l">
+              <a:lnSpc>
+                <a:spcPct val="120000"/>
+              </a:lnSpc>
+            </a:pPr>
+            <a:r>
+              <a:rPr sz="3000" b="1">
+                <a:solidFill>
+                  <a:srgbClr val="20242C"/>
+                </a:solidFill>
+                <a:latin typeface="Yu Gothic"/>
+                <a:ea typeface="Yu Gothic"/>
+                <a:cs typeface="Yu Gothic"/>
+              </a:rPr>
+              <a:t>だから——見分けるのをやめて、一度切って、自分で調べてかけ直す</a:t>
+            </a:r>
+          </a:p>
+        </p:txBody>
+      </p:sp>
+      <p:sp>
+        <p:nvSpPr>
+          <p:cNvPr id="14" name="meta:pageno"/>
+          <p:cNvSpPr txBox="1"/>
+          <p:nvPr/>
+        </p:nvSpPr>
+        <p:spPr>
+          <a:xfrm>
+            <a:off x="10408615" y="6309360"/>
+            <a:ext cx="1097280" cy="365760"/>
+          </a:xfrm>
+          <a:prstGeom prst="rect">
+            <a:avLst/>
+          </a:prstGeom>
+          <a:noFill/>
+        </p:spPr>
+        <p:txBody>
+          <a:bodyPr wrap="square" anchor="ctr">
+            <a:noAutofit/>
+          </a:bodyPr>
+          <a:lstStyle/>
+          <a:p>
+            <a:pPr algn="r"/>
+            <a:r>
+              <a:rPr sz="1200" b="0">
+                <a:solidFill>
+                  <a:srgbClr val="5C6472"/>
+                </a:solidFill>
+                <a:latin typeface="Yu Gothic"/>
+                <a:ea typeface="Yu Gothic"/>
+                <a:cs typeface="Yu Gothic"/>
+              </a:rPr>
+              <a:t>30</a:t>
+            </a:r>
+          </a:p>
+        </p:txBody>
+      </p:sp>
+      <p:sp>
+        <p:nvSpPr>
+          <p:cNvPr id="15" name="meta:part"/>
+          <p:cNvSpPr txBox="1"/>
+          <p:nvPr/>
+        </p:nvSpPr>
+        <p:spPr>
+          <a:xfrm>
+            <a:off x="685800" y="6309360"/>
+            <a:ext cx="5486400" cy="365760"/>
+          </a:xfrm>
+          <a:prstGeom prst="rect">
+            <a:avLst/>
+          </a:prstGeom>
+          <a:noFill/>
+        </p:spPr>
+        <p:txBody>
+          <a:bodyPr wrap="square" anchor="ctr">
+            <a:noAutofit/>
+          </a:bodyPr>
+          <a:lstStyle/>
+          <a:p>
+            <a:pPr algn="l"/>
+            <a:r>
+              <a:rPr sz="1200" b="0">
+                <a:solidFill>
+                  <a:srgbClr val="5C6472"/>
+                </a:solidFill>
+                <a:latin typeface="Yu Gothic"/>
+                <a:ea typeface="Yu Gothic"/>
+                <a:cs typeface="Yu Gothic"/>
+              </a:rPr>
+              <a:t>4 結論</a:t>
+            </a:r>
+          </a:p>
+        </p:txBody>
+      </p:sp>
+    </p:spTree>
+  </p:cSld>
+  <p:clrMapOvr>
+    <a:masterClrMapping/>
+  </p:clrMapOvr>
+</p:sld>
+</file>
+
+<file path=ppt/slides/slide31.xml><?xml version="1.0" encoding="utf-8"?>
+<p:sld xmlns:a="http://schemas.openxmlformats.org/drawingml/2006/main" xmlns:p="http://schemas.openxmlformats.org/presentationml/2006/main" xmlns:r="http://schemas.openxmlformats.org/officeDocument/2006/relationships">
+  <p:cSld>
+    <p:spTree>
+      <p:nvGrpSpPr>
+        <p:cNvPr id="1" name=""/>
+        <p:cNvGrpSpPr/>
+        <p:nvPr/>
+      </p:nvGrpSpPr>
+      <p:grpSpPr/>
+      <p:sp>
+        <p:nvSpPr>
+          <p:cNvPr id="2" name="TextBox 1"/>
+          <p:cNvSpPr txBox="1"/>
+          <p:nvPr/>
+        </p:nvSpPr>
+        <p:spPr>
+          <a:xfrm>
+            <a:off x="502920" y="1188720"/>
+            <a:ext cx="11185855" cy="3657599"/>
+          </a:xfrm>
+          <a:prstGeom prst="rect">
+            <a:avLst/>
+          </a:prstGeom>
+          <a:noFill/>
+        </p:spPr>
+        <p:txBody>
+          <a:bodyPr wrap="square" anchor="ctr">
+            <a:noAutofit/>
+          </a:bodyPr>
+          <a:lstStyle/>
+          <a:p>
+            <a:pPr algn="ctr">
+              <a:lnSpc>
+                <a:spcPct val="128000"/>
+              </a:lnSpc>
+            </a:pPr>
+            <a:r>
+              <a:rPr sz="5400" b="1">
+                <a:solidFill>
+                  <a:srgbClr val="20242C"/>
+                </a:solidFill>
+                <a:latin typeface="Yu Mincho"/>
+                <a:ea typeface="Yu Mincho"/>
+                <a:cs typeface="Yu Mincho"/>
+              </a:rPr>
+              <a:t>冒頭の1億円は、</a:t>
+            </a:r>
+          </a:p>
+          <a:p>
+            <a:pPr algn="ctr">
+              <a:lnSpc>
+                <a:spcPct val="128000"/>
+              </a:lnSpc>
+            </a:pPr>
+            <a:r>
+              <a:rPr sz="5400" b="1">
+                <a:solidFill>
+                  <a:srgbClr val="20242C"/>
+                </a:solidFill>
+                <a:latin typeface="Yu Mincho"/>
+                <a:ea typeface="Yu Mincho"/>
+                <a:cs typeface="Yu Mincho"/>
+              </a:rPr>
+              <a:t>あらためて、差し上げられません。</a:t>
+            </a:r>
+          </a:p>
+        </p:txBody>
+      </p:sp>
+      <p:sp>
+        <p:nvSpPr>
+          <p:cNvPr id="3" name="TextBox 2"/>
+          <p:cNvSpPr txBox="1"/>
+          <p:nvPr/>
+        </p:nvSpPr>
+        <p:spPr>
+          <a:xfrm>
+            <a:off x="685800" y="4983479"/>
+            <a:ext cx="10820095" cy="1005840"/>
+          </a:xfrm>
+          <a:prstGeom prst="rect">
+            <a:avLst/>
+          </a:prstGeom>
+          <a:noFill/>
+        </p:spPr>
+        <p:txBody>
+          <a:bodyPr wrap="square" anchor="ctr">
+            <a:noAutofit/>
+          </a:bodyPr>
+          <a:lstStyle/>
+          <a:p>
+            <a:pPr algn="ctr">
+              <a:lnSpc>
+                <a:spcPct val="130000"/>
+              </a:lnSpc>
+            </a:pPr>
+            <a:r>
+              <a:rPr sz="2200" b="0">
+                <a:solidFill>
+                  <a:srgbClr val="5C6472"/>
+                </a:solidFill>
+                <a:latin typeface="Yu Gothic"/>
+                <a:ea typeface="Yu Gothic"/>
+                <a:cs typeface="Yu Gothic"/>
+              </a:rPr>
+              <a:t>帰ったらご家族に「1億円をもらい損ねた話」を——笑い話が、そのまま家族を守る話になります</a:t>
+            </a:r>
+          </a:p>
+        </p:txBody>
+      </p:sp>
+      <p:sp>
+        <p:nvSpPr>
+          <p:cNvPr id="4" name="meta:pageno"/>
+          <p:cNvSpPr txBox="1"/>
+          <p:nvPr/>
+        </p:nvSpPr>
+        <p:spPr>
+          <a:xfrm>
+            <a:off x="10408615" y="6309360"/>
+            <a:ext cx="1097280" cy="365760"/>
+          </a:xfrm>
+          <a:prstGeom prst="rect">
+            <a:avLst/>
+          </a:prstGeom>
+          <a:noFill/>
+        </p:spPr>
+        <p:txBody>
+          <a:bodyPr wrap="square" anchor="ctr">
+            <a:noAutofit/>
+          </a:bodyPr>
+          <a:lstStyle/>
+          <a:p>
+            <a:pPr algn="r"/>
+            <a:r>
+              <a:rPr sz="1200" b="0">
+                <a:solidFill>
+                  <a:srgbClr val="5C6472"/>
+                </a:solidFill>
+                <a:latin typeface="Yu Gothic"/>
+                <a:ea typeface="Yu Gothic"/>
+                <a:cs typeface="Yu Gothic"/>
+              </a:rPr>
+              <a:t>31</a:t>
+            </a:r>
+          </a:p>
+        </p:txBody>
+      </p:sp>
+      <p:sp>
+        <p:nvSpPr>
+          <p:cNvPr id="5" name="meta:part"/>
+          <p:cNvSpPr txBox="1"/>
+          <p:nvPr/>
+        </p:nvSpPr>
+        <p:spPr>
+          <a:xfrm>
+            <a:off x="685800" y="6309360"/>
+            <a:ext cx="5486400" cy="365760"/>
+          </a:xfrm>
+          <a:prstGeom prst="rect">
+            <a:avLst/>
+          </a:prstGeom>
+          <a:noFill/>
+        </p:spPr>
+        <p:txBody>
+          <a:bodyPr wrap="square" anchor="ctr">
+            <a:noAutofit/>
+          </a:bodyPr>
+          <a:lstStyle/>
+          <a:p>
+            <a:pPr algn="l"/>
+            <a:r>
+              <a:rPr sz="1200" b="0">
+                <a:solidFill>
+                  <a:srgbClr val="5C6472"/>
+                </a:solidFill>
+                <a:latin typeface="Yu Gothic"/>
+                <a:ea typeface="Yu Gothic"/>
+                <a:cs typeface="Yu Gothic"/>
+              </a:rPr>
+              <a:t>4 結論</a:t>
+            </a:r>
+          </a:p>
+        </p:txBody>
+      </p:sp>
+    </p:spTree>
+  </p:cSld>
+  <p:clrMapOvr>
+    <a:masterClrMapping/>
+  </p:clrMapOvr>
+</p:sld>
+</file>
+
+<file path=ppt/slides/slide32.xml><?xml version="1.0" encoding="utf-8"?>
+<p:sld xmlns:a="http://schemas.openxmlformats.org/drawingml/2006/main" xmlns:p="http://schemas.openxmlformats.org/presentationml/2006/main" xmlns:r="http://schemas.openxmlformats.org/officeDocument/2006/relationships">
+  <p:cSld>
+    <p:spTree>
+      <p:nvGrpSpPr>
+        <p:cNvPr id="1" name=""/>
+        <p:cNvGrpSpPr/>
+        <p:nvPr/>
+      </p:nvGrpSpPr>
+      <p:grpSpPr/>
+      <p:sp>
+        <p:nvSpPr>
+          <p:cNvPr id="2" name="TextBox 1"/>
+          <p:cNvSpPr txBox="1"/>
+          <p:nvPr/>
+        </p:nvSpPr>
+        <p:spPr>
+          <a:xfrm>
+            <a:off x="685800" y="411480"/>
+            <a:ext cx="10820095" cy="960120"/>
+          </a:xfrm>
+          <a:prstGeom prst="rect">
+            <a:avLst/>
+          </a:prstGeom>
+          <a:noFill/>
+        </p:spPr>
+        <p:txBody>
+          <a:bodyPr wrap="square" anchor="b">
+            <a:noAutofit/>
+          </a:bodyPr>
+          <a:lstStyle/>
+          <a:p>
+            <a:pPr algn="l"/>
+            <a:r>
+              <a:rPr sz="4000" b="1">
+                <a:solidFill>
+                  <a:srgbClr val="B9791F"/>
+                </a:solidFill>
+                <a:latin typeface="Yu Gothic"/>
+                <a:ea typeface="Yu Gothic"/>
+                <a:cs typeface="Yu Gothic"/>
+              </a:rPr>
+              <a:t>主な出典</a:t>
+            </a:r>
+          </a:p>
+        </p:txBody>
+      </p:sp>
+      <p:sp>
+        <p:nvSpPr>
+          <p:cNvPr id="3" name="Rectangle 2"/>
+          <p:cNvSpPr/>
+          <p:nvPr/>
+        </p:nvSpPr>
+        <p:spPr>
+          <a:xfrm>
+            <a:off x="685800" y="1463040"/>
+            <a:ext cx="2377440" cy="50292"/>
+          </a:xfrm>
+          <a:prstGeom prst="rect">
+            <a:avLst/>
+          </a:prstGeom>
+          <a:solidFill>
+            <a:srgbClr val="B9791F"/>
+          </a:solidFill>
+          <a:ln>
+            <a:noFill/>
+          </a:ln>
+          <a:effectLst/>
+        </p:spPr>
+        <p:style>
+          <a:lnRef idx="1">
+            <a:schemeClr val="accent1"/>
+          </a:lnRef>
+          <a:fillRef idx="3">
+            <a:schemeClr val="accent1"/>
+          </a:fillRef>
+          <a:effectRef idx="2">
+            <a:schemeClr val="accent1"/>
+          </a:effectRef>
+          <a:fontRef idx="minor">
+            <a:schemeClr val="lt1"/>
+          </a:fontRef>
+        </p:style>
+        <p:txBody>
+          <a:bodyPr rtlCol="0" anchor="ctr"/>
+          <a:lstStyle/>
+          <a:p>
+            <a:pPr algn="ctr"/>
+          </a:p>
+        </p:txBody>
+      </p:sp>
+      <p:sp>
+        <p:nvSpPr>
+          <p:cNvPr id="4" name="TextBox 3"/>
+          <p:cNvSpPr txBox="1"/>
+          <p:nvPr/>
+        </p:nvSpPr>
+        <p:spPr>
+          <a:xfrm>
             <a:off x="685800" y="1645920"/>
             <a:ext cx="10820095" cy="4343400"/>
           </a:xfrm>
@@ -12524,6 +13194,27 @@
                 <a:ea typeface="Yu Gothic"/>
                 <a:cs typeface="Yu Gothic"/>
               </a:rPr>
+              <a:t>・毎日新聞「AIで『ニセ警察詐欺』か」2026年1月29日（AI台本＋警察官のニセ映像の摘発例）／KAB「被害1200億円超…ディープフェイク動画による詐欺広告」</a:t>
+            </a:r>
+          </a:p>
+          <a:p>
+            <a:pPr marL="228600" indent="-228600">
+              <a:lnSpc>
+                <a:spcPct val="130000"/>
+              </a:lnSpc>
+              <a:spcAft>
+                <a:spcPts val="810"/>
+              </a:spcAft>
+            </a:pPr>
+            <a:r>
+              <a:rPr sz="1800" b="0">
+                <a:solidFill>
+                  <a:srgbClr val="20242C"/>
+                </a:solidFill>
+                <a:latin typeface="Yu Gothic"/>
+                <a:ea typeface="Yu Gothic"/>
+                <a:cs typeface="Yu Gothic"/>
+              </a:rPr>
               <a:t>・CNN「Finance worker pays out $25 million after video call with deepfake 'chief financial officer'」</a:t>
             </a:r>
           </a:p>
@@ -12579,7 +13270,7 @@
                 <a:ea typeface="Yu Gothic"/>
                 <a:cs typeface="Yu Gothic"/>
               </a:rPr>
-              <a:t>30</a:t>
+              <a:t>32</a:t>
             </a:r>
           </a:p>
         </p:txBody>

--- a/slides/deepfake-talk.pptx
+++ b/slides/deepfake-talk.pptx
@@ -37,6 +37,7 @@
     <p:sldId id="285" r:id="rId37"/>
     <p:sldId id="286" r:id="rId38"/>
     <p:sldId id="287" r:id="rId39"/>
+    <p:sldId id="288" r:id="rId40"/>
   </p:sldIdLst>
   <p:sldSz cx="12191695" cy="6858000" type="screen4x3"/>
   <p:notesSz cx="6858000" cy="9144000"/>
@@ -1443,7 +1444,7 @@
           <a:lstStyle/>
           <a:p>
             <a:r>
-              <a:t>「なぜ日本は有名人ばかりで、海外は一般の家庭まで進んでいるのか。差は、材料です。有名人の顔と声は、ネット上に無限に転がっている。私たち一般人のデータはまだ少ない——狙われていないのではなく、後回しになっているだけです。でもAIは、数十秒の音声があれば本人そっくりを作れるようになりました。この時間差は、必ず埋まります」</a:t>
+              <a:t>一拍おいて、ゆっくり。「しかも標的は、有名人ではありません。家族の声をまねた音声クローン詐欺——皆さんと同じ、ごく一般の家庭が狙われています」。ここが第2部後半の転調点。次の「なぜ日本は有名人ばかりなのか（材料の差）」への引きになる。</a:t>
             </a:r>
           </a:p>
         </p:txBody>
@@ -1513,7 +1514,7 @@
           <a:lstStyle/>
           <a:p>
             <a:r>
-              <a:t>ゆっくり。「そして埋まるときも、番号偽装が消えてAIに置き換わるわけではありません。いまある型に、AIが“混ざって”きます。さっきの1月の摘発——AIの台本と警察官のニセ映像——は、もうその始まりです。『0110』の番号表示で信じさせて、本人そっくりの声でとどめを刺す。番号のカードとAIのカードが、同時に切られる。そうなったとき、皆さんは何で見分けますか？ 言葉だけでは信じにくいと思いますので、ここからは実物をお見せします」→実演へ。</a:t>
+              <a:t>「なぜ日本は有名人ばかりで、海外は一般の家庭まで進んでいるのか。差は、材料です。有名人の顔と声は、ネット上に無限に転がっている。私たち一般人のデータはまだ少ない——狙われていないのではなく、後回しになっているだけです。でもAIは、数十秒の音声があれば本人そっくりを作れるようになりました。この時間差は、必ず埋まります」</a:t>
             </a:r>
           </a:p>
         </p:txBody>
@@ -1583,7 +1584,7 @@
           <a:lstStyle/>
           <a:p>
             <a:r>
-              <a:t>この区間の「そうなんだ」：話し方も雰囲気も、相手がこちらに合わせて変えてくる。そして本物の脅威は「断らない声」。</a:t>
+              <a:t>ゆっくり。「そして埋まるときも、番号偽装が消えてAIに置き換わるわけではありません。いまある型に、AIが“混ざって”きます。さっきの1月の摘発——AIの台本と警察官のニセ映像——は、もうその始まりです。『0110』の番号表示で信じさせて、本人そっくりの声でとどめを刺す。番号のカードとAIのカードが、同時に切られる。そうなったとき、皆さんは何で見分けますか？ 言葉だけでは信じにくいと思いますので、ここからは実物をお見せします」→実演へ。</a:t>
             </a:r>
           </a:p>
         </p:txBody>
@@ -1653,7 +1654,7 @@
           <a:lstStyle/>
           <a:p>
             <a:r>
-              <a:t>クローン音声を会場スピーカーで再生。※素材は講師本人の声・本人同意で事前作成、生成物には「AI生成」を明示して管理。バックアップ音源必須。第三者の顔・声は使わない。</a:t>
+              <a:t>この区間の「そうなんだ」：話し方も雰囲気も、相手がこちらに合わせて変えてくる。そして本物の脅威は「断らない声」。</a:t>
             </a:r>
           </a:p>
         </p:txBody>
@@ -1723,7 +1724,7 @@
           <a:lstStyle/>
           <a:p>
             <a:r>
-              <a:t>スマホを会場スピーカーへつなぎ、最新AIと生対話。聴衆から予想外のひと言を1つもらう（詐欺の台詞は言わせない）。「もちろん、いま話したのは安全なAIで、この“合わせる力”自体は良い技術です。ただ、同じ力が悪用されれば——昔は詐欺師が話術で一人ずつやっていたことを、同時に何人相手でもこなせてしまいます」</a:t>
+              <a:t>クローン音声を会場スピーカーで再生。※素材は講師本人の声・本人同意で事前作成、生成物には「AI生成」を明示して管理。バックアップ音源必須。第三者の顔・声は使わない。</a:t>
             </a:r>
           </a:p>
         </p:txBody>
@@ -1793,7 +1794,7 @@
           <a:lstStyle/>
           <a:p>
             <a:r>
-              <a:t>なりすまし依頼→拒否のデモ。「いい断り方ですよね。でも安心はできません。同じ技術は世界に無数にあり、安全装置のないものも出回ります」。※通信不良に備え録音・録画のバックアップ。ライブが押したら拒否デモは録画30秒版に切り替え（打ち切り条件を事前に決める）。</a:t>
+              <a:t>スマホを会場スピーカーへつなぎ、最新AIと生対話。聴衆から予想外のひと言を1つもらう（詐欺の台詞は言わせない）。「もちろん、いま話したのは安全なAIで、この“合わせる力”自体は良い技術です。ただ、同じ力が悪用されれば——昔は詐欺師が話術で一人ずつやっていたことを、同時に何人相手でもこなせてしまいます」</a:t>
             </a:r>
           </a:p>
         </p:txBody>
@@ -1863,7 +1864,7 @@
           <a:lstStyle/>
           <a:p>
             <a:r>
-              <a:t>「——最初の問いに、答えを出します」→結論へ。</a:t>
+              <a:t>なりすまし依頼→拒否のデモ。「いい断り方ですよね。でも安心はできません。同じ技術は世界に無数にあり、安全装置のないものも出回ります」。※通信不良に備え録音・録画のバックアップ。ライブが押したら拒否デモは録画30秒版に切り替え（打ち切り条件を事前に決める）。</a:t>
             </a:r>
           </a:p>
         </p:txBody>
@@ -1933,7 +1934,7 @@
           <a:lstStyle/>
           <a:p>
             <a:r>
-              <a:t>板書した紙を再び見せながら。「最初に集めました——声、話し方、内容、雰囲気、番号。今日、全部裏切られましたね。だったら、手がかりで見分けること自体をやめればいい」</a:t>
+              <a:t>「——最初の問いに、答えを出します」→結論へ。</a:t>
             </a:r>
           </a:p>
         </p:txBody>
@@ -2003,7 +2004,7 @@
           <a:lstStyle/>
           <a:p>
             <a:r>
-              <a:t>「この“一度切って、自分で調べてかけ直す”は、番号が本物でも、声が本物でも、相手がAIでも人間でも——効きます」。※射程の明示：この主手順が守るのは「電話・ビデオ通話でのなりすまし」。投資話・偽サイト・長期の関係構築型詐欺は別の備えが要る、と一言添える。「本物の警察なら、確認のためにいったん切っても、不利益はありません」。ここで第1部の「誰にも言うな」の伏線を回収。</a:t>
+              <a:t>板書した紙を再び見せながら。「最初に集めました——声、話し方、内容、雰囲気、番号。今日、全部裏切られましたね。だったら、手がかりで見分けること自体をやめればいい」</a:t>
             </a:r>
           </a:p>
         </p:txBody>
@@ -2143,7 +2144,7 @@
           <a:lstStyle/>
           <a:p>
             <a:r>
-              <a:t>スライドの5項目を一言ずつ指差しながら。「今日の話を、ひと息で巻き戻します。（中略）——全部、一本の線でつながっています」</a:t>
+              <a:t>「この“一度切って、自分で調べてかけ直す”は、番号が本物でも、声が本物でも、相手がAIでも人間でも——効きます」。※射程の明示：この主手順が守るのは「電話・ビデオ通話でのなりすまし」。投資話・偽サイト・長期の関係構築型詐欺は別の備えが要る、と一言添える。「本物の警察なら、確認のためにいったん切っても、不利益はありません」。ここで第1部の「誰にも言うな」の伏線を回収。</a:t>
             </a:r>
           </a:p>
         </p:txBody>
@@ -2213,7 +2214,7 @@
           <a:lstStyle/>
           <a:p>
             <a:r>
-              <a:t>「でも思い出してください。あのとき会場に流れた『そんなはずはない』という空気。あれが“ばらまきの嘘”への完璧な勝ち方です。これから来るのは、笑い飛ばせない、あなた専用の嘘。だからこそ、笑う代わりに——一度切って、自分で調べて、かけ直す」</a:t>
+              <a:t>スライドの5項目を一言ずつ指差しながら。「今日の話を、ひと息で巻き戻します。（中略）——全部、一本の線でつながっています」</a:t>
             </a:r>
           </a:p>
         </p:txBody>
@@ -2283,6 +2284,76 @@
           <a:lstStyle/>
           <a:p>
             <a:r>
+              <a:t>「でも思い出してください。あのとき会場に流れた『そんなはずはない』という空気。あれが“ばらまきの嘘”への完璧な勝ち方です。これから来るのは、笑い飛ばせない、あなた専用の嘘。だからこそ、笑う代わりに——一度切って、自分で調べて、かけ直す」</a:t>
+            </a:r>
+          </a:p>
+        </p:txBody>
+      </p:sp>
+      <p:sp>
+        <p:nvSpPr>
+          <p:cNvPr id="4" name="Slide Number Placeholder 3"/>
+          <p:cNvSpPr>
+            <a:spLocks noGrp="1"/>
+          </p:cNvSpPr>
+          <p:nvPr>
+            <p:ph type="sldNum" idx="5" sz="quarter"/>
+          </p:nvPr>
+        </p:nvSpPr>
+        <p:spPr/>
+      </p:sp>
+    </p:spTree>
+  </p:cSld>
+  <p:clrMapOvr>
+    <a:masterClrMapping/>
+  </p:clrMapOvr>
+</p:notes>
+</file>
+
+<file path=ppt/notesSlides/notesSlide33.xml><?xml version="1.0" encoding="utf-8"?>
+<p:notes xmlns:a="http://schemas.openxmlformats.org/drawingml/2006/main" xmlns:p="http://schemas.openxmlformats.org/presentationml/2006/main" xmlns:r="http://schemas.openxmlformats.org/officeDocument/2006/relationships">
+  <p:cSld>
+    <p:spTree>
+      <p:nvGrpSpPr>
+        <p:cNvPr id="1" name=""/>
+        <p:cNvGrpSpPr/>
+        <p:nvPr/>
+      </p:nvGrpSpPr>
+      <p:grpSpPr>
+        <a:xfrm>
+          <a:off x="0" y="0"/>
+          <a:ext cx="0" cy="0"/>
+          <a:chOff x="0" y="0"/>
+          <a:chExt cx="0" cy="0"/>
+        </a:xfrm>
+      </p:grpSpPr>
+      <p:sp>
+        <p:nvSpPr>
+          <p:cNvPr id="2" name="Slide Image Placeholder 1"/>
+          <p:cNvSpPr>
+            <a:spLocks noGrp="1"/>
+          </p:cNvSpPr>
+          <p:nvPr>
+            <p:ph type="sldImg" idx="2"/>
+          </p:nvPr>
+        </p:nvSpPr>
+        <p:spPr/>
+      </p:sp>
+      <p:sp>
+        <p:nvSpPr>
+          <p:cNvPr id="3" name="Notes Placeholder 2"/>
+          <p:cNvSpPr>
+            <a:spLocks noGrp="1"/>
+          </p:cNvSpPr>
+          <p:nvPr>
+            <p:ph type="body" idx="3" sz="quarter"/>
+          </p:nvPr>
+        </p:nvSpPr>
+        <p:spPr/>
+        <p:txBody>
+          <a:bodyPr/>
+          <a:lstStyle/>
+          <a:p>
+            <a:r>
               <a:t>質疑応答用に最後に表示したままにする。数値はスライド化の直前に最新の一次資料で再確認。</a:t>
             </a:r>
           </a:p>
@@ -2703,7 +2774,7 @@
           <a:lstStyle/>
           <a:p>
             <a:r>
-              <a:t>スペインの囚人の物語を語る（台本は構成案ページ第1部参照）。「そしてこの手紙には、決まってこう書いてありました。『このことは、くれぐれも誰にも言わないでください』——覚えておいてください、あとでまた出てきます」。続けて「2000年代、詐欺の舞台は手紙からメールに移ります。さっきの3つは、その直系の子孫です。道具は変わっても、構造は200年間ずっと同じ——同じ嘘を何十万人にばらまいて、引っかかる人を待つ。逆に、特定の一人を調べ上げて専用の嘘を作る“オーダーメイドの詐欺”は、手間がかかりすぎて、大企業や大富豪を狙うときにしか割に合いませんでした」。※「誰にも言うな」は結論③手前の即切りの合図で回収する伏線。</a:t>
+              <a:t>「実はこの商売、200年前からあります。手口を一言でいうと——『囚われたお金持ちを助けてくれたら、財産を分けます』。19世紀、欧米の資産家のもとに、スペインから一通の手紙が届きます。『私は、無実の罪でスペインの牢獄に囚われた、さる高貴なお方の代理人です。あの方は莫大な財産を隠していますが、正体を明かせば命が危ない。看守に渡すお金を立て替えていただければ、釈放の暁には財産の3分の1を差し上げます』——のちに『スペインの囚人』と呼ばれた、有名な手紙詐欺です。お金を送ると、どうなるか。囚人は、出てきません。『手続きに新たな問題が起きた』と、追加の請求が届くんです。何度でも。1898年のニューヨーク・タイムズに『蘇った古い詐欺』という記事が残っています。そしてこの手紙には、決まってこう書いてありました。『このことは、くれぐれも誰にも言わないでください』——覚えておいてください、あとでまた出てきます」。続けて「2000年代、詐欺の舞台は手紙からメールに移ります。さっきの3つは、その直系の子孫です。道具は変わっても、構造は200年間ずっと同じ」。※「誰にも言うな」は結論の即切りの合図で回収する伏線。</a:t>
             </a:r>
           </a:p>
         </p:txBody>
@@ -9369,9 +9440,6 @@
               <a:lnSpc>
                 <a:spcPct val="135000"/>
               </a:lnSpc>
-              <a:spcAft>
-                <a:spcPts val="979"/>
-              </a:spcAft>
             </a:pPr>
             <a:r>
               <a:rPr sz="2800" b="0">
@@ -9382,25 +9450,7 @@
                 <a:ea typeface="Yu Gothic"/>
                 <a:cs typeface="Yu Gothic"/>
               </a:rPr>
-              <a:t>・標的は有名人ではない——家族の声をまねた「音声クローン詐欺」</a:t>
-            </a:r>
-          </a:p>
-          <a:p>
-            <a:pPr marL="355600" indent="-355600">
-              <a:lnSpc>
-                <a:spcPct val="135000"/>
-              </a:lnSpc>
-            </a:pPr>
-            <a:r>
-              <a:rPr sz="2800" b="0">
-                <a:solidFill>
-                  <a:srgbClr val="20242C"/>
-                </a:solidFill>
-                <a:latin typeface="Yu Gothic"/>
-                <a:ea typeface="Yu Gothic"/>
-                <a:cs typeface="Yu Gothic"/>
-              </a:rPr>
-              <a:t>・ごく一般の家庭を狙う相談が、実際に増えている</a:t>
+              <a:t>・音声クローン詐欺——ごく一般の家庭を狙う相談が、実際に増えている</a:t>
             </a:r>
           </a:p>
         </p:txBody>
@@ -9505,165 +9555,78 @@
         </p:nvSpPr>
         <p:spPr>
           <a:xfrm>
-            <a:off x="685800" y="411480"/>
-            <a:ext cx="10820095" cy="960120"/>
-          </a:xfrm>
-          <a:prstGeom prst="rect">
-            <a:avLst/>
-          </a:prstGeom>
-          <a:noFill/>
-        </p:spPr>
-        <p:txBody>
-          <a:bodyPr wrap="square" anchor="b">
-            <a:noAutofit/>
-          </a:bodyPr>
-          <a:lstStyle/>
-          <a:p>
-            <a:pPr algn="l"/>
-            <a:r>
-              <a:rPr sz="4000" b="1">
-                <a:solidFill>
-                  <a:srgbClr val="B9791F"/>
-                </a:solidFill>
-                <a:latin typeface="Yu Gothic"/>
-                <a:ea typeface="Yu Gothic"/>
-                <a:cs typeface="Yu Gothic"/>
-              </a:rPr>
-              <a:t>なぜ、日本は有名人ばかりなのか</a:t>
-            </a:r>
-          </a:p>
-        </p:txBody>
-      </p:sp>
-      <p:sp>
-        <p:nvSpPr>
-          <p:cNvPr id="3" name="Rectangle 2"/>
-          <p:cNvSpPr/>
-          <p:nvPr/>
-        </p:nvSpPr>
-        <p:spPr>
-          <a:xfrm>
-            <a:off x="685800" y="1463040"/>
-            <a:ext cx="2377440" cy="50292"/>
-          </a:xfrm>
-          <a:prstGeom prst="rect">
-            <a:avLst/>
-          </a:prstGeom>
-          <a:solidFill>
-            <a:srgbClr val="B9791F"/>
-          </a:solidFill>
-          <a:ln>
-            <a:noFill/>
-          </a:ln>
-          <a:effectLst/>
-        </p:spPr>
-        <p:style>
-          <a:lnRef idx="1">
-            <a:schemeClr val="accent1"/>
-          </a:lnRef>
-          <a:fillRef idx="3">
-            <a:schemeClr val="accent1"/>
-          </a:fillRef>
-          <a:effectRef idx="2">
-            <a:schemeClr val="accent1"/>
-          </a:effectRef>
-          <a:fontRef idx="minor">
-            <a:schemeClr val="lt1"/>
-          </a:fontRef>
-        </p:style>
-        <p:txBody>
-          <a:bodyPr rtlCol="0" anchor="ctr"/>
-          <a:lstStyle/>
-          <a:p>
-            <a:pPr algn="ctr"/>
-          </a:p>
-        </p:txBody>
-      </p:sp>
-      <p:sp>
-        <p:nvSpPr>
-          <p:cNvPr id="4" name="TextBox 3"/>
-          <p:cNvSpPr txBox="1"/>
-          <p:nvPr/>
-        </p:nvSpPr>
-        <p:spPr>
-          <a:xfrm>
-            <a:off x="685800" y="1645920"/>
-            <a:ext cx="10820095" cy="4343400"/>
-          </a:xfrm>
-          <a:prstGeom prst="rect">
-            <a:avLst/>
-          </a:prstGeom>
-          <a:noFill/>
-        </p:spPr>
-        <p:txBody>
-          <a:bodyPr wrap="square" anchor="t">
-            <a:noAutofit/>
-          </a:bodyPr>
-          <a:lstStyle/>
-          <a:p>
-            <a:pPr marL="355600" indent="-355600">
+            <a:off x="502920" y="1188720"/>
+            <a:ext cx="11185855" cy="4800600"/>
+          </a:xfrm>
+          <a:prstGeom prst="rect">
+            <a:avLst/>
+          </a:prstGeom>
+          <a:noFill/>
+        </p:spPr>
+        <p:txBody>
+          <a:bodyPr wrap="square" anchor="ctr">
+            <a:noAutofit/>
+          </a:bodyPr>
+          <a:lstStyle/>
+          <a:p>
+            <a:pPr algn="ctr">
               <a:lnSpc>
-                <a:spcPct val="135000"/>
-              </a:lnSpc>
-              <a:spcAft>
-                <a:spcPts val="979"/>
-              </a:spcAft>
-            </a:pPr>
-            <a:r>
-              <a:rPr sz="2800" b="0">
-                <a:solidFill>
-                  <a:srgbClr val="20242C"/>
-                </a:solidFill>
-                <a:latin typeface="Yu Gothic"/>
-                <a:ea typeface="Yu Gothic"/>
-                <a:cs typeface="Yu Gothic"/>
-              </a:rPr>
-              <a:t>・差は「材料」——有名人の顔と声は、ネットに無限に転がっている</a:t>
-            </a:r>
-          </a:p>
-          <a:p>
-            <a:pPr marL="355600" indent="-355600">
-              <a:lnSpc>
-                <a:spcPct val="135000"/>
-              </a:lnSpc>
-              <a:spcAft>
-                <a:spcPts val="979"/>
-              </a:spcAft>
-            </a:pPr>
-            <a:r>
-              <a:rPr sz="2800" b="0">
-                <a:solidFill>
-                  <a:srgbClr val="20242C"/>
-                </a:solidFill>
-                <a:latin typeface="Yu Gothic"/>
-                <a:ea typeface="Yu Gothic"/>
-                <a:cs typeface="Yu Gothic"/>
-              </a:rPr>
-              <a:t>・一般人のデータはまだ少ない——狙われていないのではなく、後回しなだけ</a:t>
-            </a:r>
-          </a:p>
-          <a:p>
-            <a:pPr marL="355600" indent="-355600">
-              <a:lnSpc>
-                <a:spcPct val="135000"/>
+                <a:spcPct val="128000"/>
               </a:lnSpc>
             </a:pPr>
             <a:r>
-              <a:rPr sz="2800" b="0">
+              <a:rPr sz="5400" b="1">
                 <a:solidFill>
                   <a:srgbClr val="20242C"/>
                 </a:solidFill>
-                <a:latin typeface="Yu Gothic"/>
-                <a:ea typeface="Yu Gothic"/>
-                <a:cs typeface="Yu Gothic"/>
-              </a:rPr>
-              <a:t>・AIは数十秒の音声で「本人そっくり」を作れる——この時間差は、必ず埋まる</a:t>
-            </a:r>
-          </a:p>
-        </p:txBody>
-      </p:sp>
-      <p:sp>
-        <p:nvSpPr>
-          <p:cNvPr id="5" name="meta:pageno"/>
+                <a:latin typeface="Yu Mincho"/>
+                <a:ea typeface="Yu Mincho"/>
+                <a:cs typeface="Yu Mincho"/>
+              </a:rPr>
+              <a:t>標的は、有名人ではない。</a:t>
+            </a:r>
+          </a:p>
+          <a:p>
+            <a:pPr algn="ctr">
+              <a:lnSpc>
+                <a:spcPct val="128000"/>
+              </a:lnSpc>
+            </a:pPr>
+            <a:r>
+              <a:rPr sz="5400" b="1">
+                <a:solidFill>
+                  <a:srgbClr val="20242C"/>
+                </a:solidFill>
+                <a:latin typeface="Yu Mincho"/>
+                <a:ea typeface="Yu Mincho"/>
+                <a:cs typeface="Yu Mincho"/>
+              </a:rPr>
+              <a:t>家族の声をまねた</a:t>
+            </a:r>
+          </a:p>
+          <a:p>
+            <a:pPr algn="ctr">
+              <a:lnSpc>
+                <a:spcPct val="128000"/>
+              </a:lnSpc>
+            </a:pPr>
+            <a:r>
+              <a:rPr sz="5400" b="1">
+                <a:solidFill>
+                  <a:srgbClr val="20242C"/>
+                </a:solidFill>
+                <a:latin typeface="Yu Mincho"/>
+                <a:ea typeface="Yu Mincho"/>
+                <a:cs typeface="Yu Mincho"/>
+              </a:rPr>
+              <a:t>「音声クローン詐欺」</a:t>
+            </a:r>
+          </a:p>
+        </p:txBody>
+      </p:sp>
+      <p:sp>
+        <p:nvSpPr>
+          <p:cNvPr id="3" name="meta:pageno"/>
           <p:cNvSpPr txBox="1"/>
           <p:nvPr/>
         </p:nvSpPr>
@@ -9700,7 +9663,7 @@
       </p:sp>
       <p:sp>
         <p:nvSpPr>
-          <p:cNvPr id="6" name="meta:part"/>
+          <p:cNvPr id="4" name="meta:part"/>
           <p:cNvSpPr txBox="1"/>
           <p:nvPr/>
         </p:nvSpPr>
@@ -9761,101 +9724,165 @@
         </p:nvSpPr>
         <p:spPr>
           <a:xfrm>
-            <a:off x="502920" y="1188720"/>
-            <a:ext cx="11185855" cy="3657599"/>
-          </a:xfrm>
-          <a:prstGeom prst="rect">
-            <a:avLst/>
-          </a:prstGeom>
-          <a:noFill/>
-        </p:spPr>
-        <p:txBody>
-          <a:bodyPr wrap="square" anchor="ctr">
-            <a:noAutofit/>
-          </a:bodyPr>
-          <a:lstStyle/>
-          <a:p>
-            <a:pPr algn="ctr">
+            <a:off x="685800" y="411480"/>
+            <a:ext cx="10820095" cy="960120"/>
+          </a:xfrm>
+          <a:prstGeom prst="rect">
+            <a:avLst/>
+          </a:prstGeom>
+          <a:noFill/>
+        </p:spPr>
+        <p:txBody>
+          <a:bodyPr wrap="square" anchor="b">
+            <a:noAutofit/>
+          </a:bodyPr>
+          <a:lstStyle/>
+          <a:p>
+            <a:pPr algn="l"/>
+            <a:r>
+              <a:rPr sz="4000" b="1">
+                <a:solidFill>
+                  <a:srgbClr val="B9791F"/>
+                </a:solidFill>
+                <a:latin typeface="Yu Gothic"/>
+                <a:ea typeface="Yu Gothic"/>
+                <a:cs typeface="Yu Gothic"/>
+              </a:rPr>
+              <a:t>なぜ、日本は有名人ばかりなのか</a:t>
+            </a:r>
+          </a:p>
+        </p:txBody>
+      </p:sp>
+      <p:sp>
+        <p:nvSpPr>
+          <p:cNvPr id="3" name="Rectangle 2"/>
+          <p:cNvSpPr/>
+          <p:nvPr/>
+        </p:nvSpPr>
+        <p:spPr>
+          <a:xfrm>
+            <a:off x="685800" y="1463040"/>
+            <a:ext cx="2377440" cy="50292"/>
+          </a:xfrm>
+          <a:prstGeom prst="rect">
+            <a:avLst/>
+          </a:prstGeom>
+          <a:solidFill>
+            <a:srgbClr val="B9791F"/>
+          </a:solidFill>
+          <a:ln>
+            <a:noFill/>
+          </a:ln>
+          <a:effectLst/>
+        </p:spPr>
+        <p:style>
+          <a:lnRef idx="1">
+            <a:schemeClr val="accent1"/>
+          </a:lnRef>
+          <a:fillRef idx="3">
+            <a:schemeClr val="accent1"/>
+          </a:fillRef>
+          <a:effectRef idx="2">
+            <a:schemeClr val="accent1"/>
+          </a:effectRef>
+          <a:fontRef idx="minor">
+            <a:schemeClr val="lt1"/>
+          </a:fontRef>
+        </p:style>
+        <p:txBody>
+          <a:bodyPr rtlCol="0" anchor="ctr"/>
+          <a:lstStyle/>
+          <a:p>
+            <a:pPr algn="ctr"/>
+          </a:p>
+        </p:txBody>
+      </p:sp>
+      <p:sp>
+        <p:nvSpPr>
+          <p:cNvPr id="4" name="TextBox 3"/>
+          <p:cNvSpPr txBox="1"/>
+          <p:nvPr/>
+        </p:nvSpPr>
+        <p:spPr>
+          <a:xfrm>
+            <a:off x="685800" y="1645920"/>
+            <a:ext cx="10820095" cy="4343400"/>
+          </a:xfrm>
+          <a:prstGeom prst="rect">
+            <a:avLst/>
+          </a:prstGeom>
+          <a:noFill/>
+        </p:spPr>
+        <p:txBody>
+          <a:bodyPr wrap="square" anchor="t">
+            <a:noAutofit/>
+          </a:bodyPr>
+          <a:lstStyle/>
+          <a:p>
+            <a:pPr marL="355600" indent="-355600">
               <a:lnSpc>
-                <a:spcPct val="128000"/>
+                <a:spcPct val="135000"/>
+              </a:lnSpc>
+              <a:spcAft>
+                <a:spcPts val="979"/>
+              </a:spcAft>
+            </a:pPr>
+            <a:r>
+              <a:rPr sz="2800" b="0">
+                <a:solidFill>
+                  <a:srgbClr val="20242C"/>
+                </a:solidFill>
+                <a:latin typeface="Yu Gothic"/>
+                <a:ea typeface="Yu Gothic"/>
+                <a:cs typeface="Yu Gothic"/>
+              </a:rPr>
+              <a:t>・差は「材料」——有名人の顔と声は、ネットに無限に転がっている</a:t>
+            </a:r>
+          </a:p>
+          <a:p>
+            <a:pPr marL="355600" indent="-355600">
+              <a:lnSpc>
+                <a:spcPct val="135000"/>
+              </a:lnSpc>
+              <a:spcAft>
+                <a:spcPts val="979"/>
+              </a:spcAft>
+            </a:pPr>
+            <a:r>
+              <a:rPr sz="2800" b="0">
+                <a:solidFill>
+                  <a:srgbClr val="20242C"/>
+                </a:solidFill>
+                <a:latin typeface="Yu Gothic"/>
+                <a:ea typeface="Yu Gothic"/>
+                <a:cs typeface="Yu Gothic"/>
+              </a:rPr>
+              <a:t>・一般人のデータはまだ少ない——狙われていないのではなく、後回しなだけ</a:t>
+            </a:r>
+          </a:p>
+          <a:p>
+            <a:pPr marL="355600" indent="-355600">
+              <a:lnSpc>
+                <a:spcPct val="135000"/>
               </a:lnSpc>
             </a:pPr>
             <a:r>
-              <a:rPr sz="5400" b="1">
+              <a:rPr sz="2800" b="0">
                 <a:solidFill>
                   <a:srgbClr val="20242C"/>
                 </a:solidFill>
-                <a:latin typeface="Yu Mincho"/>
-                <a:ea typeface="Yu Mincho"/>
-                <a:cs typeface="Yu Mincho"/>
-              </a:rPr>
-              <a:t>次に来るのは——</a:t>
-            </a:r>
-          </a:p>
-          <a:p>
-            <a:pPr algn="ctr">
-              <a:lnSpc>
-                <a:spcPct val="128000"/>
-              </a:lnSpc>
-            </a:pPr>
-            <a:r>
-              <a:rPr sz="5400" b="1">
-                <a:solidFill>
-                  <a:srgbClr val="20242C"/>
-                </a:solidFill>
-                <a:latin typeface="Yu Mincho"/>
-                <a:ea typeface="Yu Mincho"/>
-                <a:cs typeface="Yu Mincho"/>
-              </a:rPr>
-              <a:t>番号偽装に、AIが混ざる</a:t>
-            </a:r>
-          </a:p>
-        </p:txBody>
-      </p:sp>
-      <p:sp>
-        <p:nvSpPr>
-          <p:cNvPr id="3" name="TextBox 2"/>
-          <p:cNvSpPr txBox="1"/>
-          <p:nvPr/>
-        </p:nvSpPr>
-        <p:spPr>
-          <a:xfrm>
-            <a:off x="685800" y="4983479"/>
-            <a:ext cx="10820095" cy="1005840"/>
-          </a:xfrm>
-          <a:prstGeom prst="rect">
-            <a:avLst/>
-          </a:prstGeom>
-          <a:noFill/>
-        </p:spPr>
-        <p:txBody>
-          <a:bodyPr wrap="square" anchor="ctr">
-            <a:noAutofit/>
-          </a:bodyPr>
-          <a:lstStyle/>
-          <a:p>
-            <a:pPr algn="ctr">
-              <a:lnSpc>
-                <a:spcPct val="130000"/>
-              </a:lnSpc>
-            </a:pPr>
-            <a:r>
-              <a:rPr sz="2200" b="0">
-                <a:solidFill>
-                  <a:srgbClr val="5C6472"/>
-                </a:solidFill>
-                <a:latin typeface="Yu Gothic"/>
-                <a:ea typeface="Yu Gothic"/>
-                <a:cs typeface="Yu Gothic"/>
-              </a:rPr>
-              <a:t>「0110」の表示で信じさせ、本人そっくりの声でとどめを刺す</a:t>
-            </a:r>
-          </a:p>
-        </p:txBody>
-      </p:sp>
-      <p:sp>
-        <p:nvSpPr>
-          <p:cNvPr id="4" name="meta:pageno"/>
+                <a:latin typeface="Yu Gothic"/>
+                <a:ea typeface="Yu Gothic"/>
+                <a:cs typeface="Yu Gothic"/>
+              </a:rPr>
+              <a:t>・AIは数十秒の音声で「本人そっくり」を作れる——この時間差は、必ず埋まる</a:t>
+            </a:r>
+          </a:p>
+        </p:txBody>
+      </p:sp>
+      <p:sp>
+        <p:nvSpPr>
+          <p:cNvPr id="5" name="meta:pageno"/>
           <p:cNvSpPr txBox="1"/>
           <p:nvPr/>
         </p:nvSpPr>
@@ -9892,7 +9919,7 @@
       </p:sp>
       <p:sp>
         <p:nvSpPr>
-          <p:cNvPr id="5" name="meta:part"/>
+          <p:cNvPr id="6" name="meta:part"/>
           <p:cNvSpPr txBox="1"/>
           <p:nvPr/>
         </p:nvSpPr>
@@ -9947,45 +9974,60 @@
       <p:grpSpPr/>
       <p:sp>
         <p:nvSpPr>
-          <p:cNvPr id="2" name="Rectangle 1"/>
-          <p:cNvSpPr/>
-          <p:nvPr/>
-        </p:nvSpPr>
-        <p:spPr>
-          <a:xfrm>
-            <a:off x="0" y="0"/>
-            <a:ext cx="12191695" cy="6858000"/>
-          </a:xfrm>
-          <a:prstGeom prst="rect">
-            <a:avLst/>
-          </a:prstGeom>
-          <a:solidFill>
-            <a:srgbClr val="20242C"/>
-          </a:solidFill>
-          <a:ln>
-            <a:noFill/>
-          </a:ln>
-          <a:effectLst/>
-        </p:spPr>
-        <p:style>
-          <a:lnRef idx="1">
-            <a:schemeClr val="accent1"/>
-          </a:lnRef>
-          <a:fillRef idx="3">
-            <a:schemeClr val="accent1"/>
-          </a:fillRef>
-          <a:effectRef idx="2">
-            <a:schemeClr val="accent1"/>
-          </a:effectRef>
-          <a:fontRef idx="minor">
-            <a:schemeClr val="lt1"/>
-          </a:fontRef>
-        </p:style>
-        <p:txBody>
-          <a:bodyPr rtlCol="0" anchor="ctr"/>
-          <a:lstStyle/>
-          <a:p>
-            <a:pPr algn="ctr"/>
+          <p:cNvPr id="2" name="TextBox 1"/>
+          <p:cNvSpPr txBox="1"/>
+          <p:nvPr/>
+        </p:nvSpPr>
+        <p:spPr>
+          <a:xfrm>
+            <a:off x="502920" y="1188720"/>
+            <a:ext cx="11185855" cy="3657599"/>
+          </a:xfrm>
+          <a:prstGeom prst="rect">
+            <a:avLst/>
+          </a:prstGeom>
+          <a:noFill/>
+        </p:spPr>
+        <p:txBody>
+          <a:bodyPr wrap="square" anchor="ctr">
+            <a:noAutofit/>
+          </a:bodyPr>
+          <a:lstStyle/>
+          <a:p>
+            <a:pPr algn="ctr">
+              <a:lnSpc>
+                <a:spcPct val="128000"/>
+              </a:lnSpc>
+            </a:pPr>
+            <a:r>
+              <a:rPr sz="5400" b="1">
+                <a:solidFill>
+                  <a:srgbClr val="20242C"/>
+                </a:solidFill>
+                <a:latin typeface="Yu Mincho"/>
+                <a:ea typeface="Yu Mincho"/>
+                <a:cs typeface="Yu Mincho"/>
+              </a:rPr>
+              <a:t>次に来るのは——</a:t>
+            </a:r>
+          </a:p>
+          <a:p>
+            <a:pPr algn="ctr">
+              <a:lnSpc>
+                <a:spcPct val="128000"/>
+              </a:lnSpc>
+            </a:pPr>
+            <a:r>
+              <a:rPr sz="5400" b="1">
+                <a:solidFill>
+                  <a:srgbClr val="20242C"/>
+                </a:solidFill>
+                <a:latin typeface="Yu Mincho"/>
+                <a:ea typeface="Yu Mincho"/>
+                <a:cs typeface="Yu Mincho"/>
+              </a:rPr>
+              <a:t>番号偽装に、AIが混ざる</a:t>
+            </a:r>
           </a:p>
         </p:txBody>
       </p:sp>
@@ -9997,8 +10039,8 @@
         </p:nvSpPr>
         <p:spPr>
           <a:xfrm>
-            <a:off x="685800" y="594360"/>
-            <a:ext cx="4572000" cy="548640"/>
+            <a:off x="685800" y="4983479"/>
+            <a:ext cx="10820095" cy="1005840"/>
           </a:xfrm>
           <a:prstGeom prst="rect">
             <a:avLst/>
@@ -10011,98 +10053,28 @@
           </a:bodyPr>
           <a:lstStyle/>
           <a:p>
-            <a:pPr algn="l"/>
-            <a:r>
-              <a:rPr sz="2000" b="1">
-                <a:solidFill>
-                  <a:srgbClr val="B9791F"/>
-                </a:solidFill>
-                <a:latin typeface="Yu Gothic"/>
-                <a:ea typeface="Yu Gothic"/>
-                <a:cs typeface="Yu Gothic"/>
-              </a:rPr>
-              <a:t>実演</a:t>
-            </a:r>
-          </a:p>
-        </p:txBody>
-      </p:sp>
-      <p:sp>
-        <p:nvSpPr>
-          <p:cNvPr id="4" name="TextBox 3"/>
-          <p:cNvSpPr txBox="1"/>
-          <p:nvPr/>
-        </p:nvSpPr>
-        <p:spPr>
-          <a:xfrm>
-            <a:off x="685800" y="2240280"/>
-            <a:ext cx="10820095" cy="1554480"/>
-          </a:xfrm>
-          <a:prstGeom prst="rect">
-            <a:avLst/>
-          </a:prstGeom>
-          <a:noFill/>
-        </p:spPr>
-        <p:txBody>
-          <a:bodyPr wrap="square" anchor="ctr">
-            <a:noAutofit/>
-          </a:bodyPr>
-          <a:lstStyle/>
-          <a:p>
-            <a:pPr algn="ctr"/>
-            <a:r>
-              <a:rPr sz="5400" b="1">
-                <a:solidFill>
-                  <a:srgbClr val="FFFFFF"/>
-                </a:solidFill>
-                <a:latin typeface="Yu Gothic"/>
-                <a:ea typeface="Yu Gothic"/>
-                <a:cs typeface="Yu Gothic"/>
-              </a:rPr>
-              <a:t>「本人らしさ」は作られる</a:t>
-            </a:r>
-          </a:p>
-        </p:txBody>
-      </p:sp>
-      <p:sp>
-        <p:nvSpPr>
-          <p:cNvPr id="5" name="TextBox 4"/>
-          <p:cNvSpPr txBox="1"/>
-          <p:nvPr/>
-        </p:nvSpPr>
-        <p:spPr>
-          <a:xfrm>
-            <a:off x="685800" y="3977639"/>
-            <a:ext cx="10820095" cy="868680"/>
-          </a:xfrm>
-          <a:prstGeom prst="rect">
-            <a:avLst/>
-          </a:prstGeom>
-          <a:noFill/>
-        </p:spPr>
-        <p:txBody>
-          <a:bodyPr wrap="square" anchor="ctr">
-            <a:noAutofit/>
-          </a:bodyPr>
-          <a:lstStyle/>
-          <a:p>
-            <a:pPr algn="ctr"/>
-            <a:r>
-              <a:rPr sz="2400" b="0">
-                <a:solidFill>
-                  <a:srgbClr val="BCBDC0"/>
-                </a:solidFill>
-                <a:latin typeface="Yu Gothic"/>
-                <a:ea typeface="Yu Gothic"/>
-                <a:cs typeface="Yu Gothic"/>
-              </a:rPr>
-              <a:t>クローン音声・ライブAI対話</a:t>
-            </a:r>
-          </a:p>
-        </p:txBody>
-      </p:sp>
-      <p:sp>
-        <p:nvSpPr>
-          <p:cNvPr id="6" name="meta:pageno"/>
+            <a:pPr algn="ctr">
+              <a:lnSpc>
+                <a:spcPct val="130000"/>
+              </a:lnSpc>
+            </a:pPr>
+            <a:r>
+              <a:rPr sz="2200" b="0">
+                <a:solidFill>
+                  <a:srgbClr val="5C6472"/>
+                </a:solidFill>
+                <a:latin typeface="Yu Gothic"/>
+                <a:ea typeface="Yu Gothic"/>
+                <a:cs typeface="Yu Gothic"/>
+              </a:rPr>
+              <a:t>「0110」の表示で信じさせ、本人そっくりの声でとどめを刺す</a:t>
+            </a:r>
+          </a:p>
+        </p:txBody>
+      </p:sp>
+      <p:sp>
+        <p:nvSpPr>
+          <p:cNvPr id="4" name="meta:pageno"/>
           <p:cNvSpPr txBox="1"/>
           <p:nvPr/>
         </p:nvSpPr>
@@ -10126,7 +10098,7 @@
             <a:r>
               <a:rPr sz="1200" b="0">
                 <a:solidFill>
-                  <a:srgbClr val="9AA3B2"/>
+                  <a:srgbClr val="5C6472"/>
                 </a:solidFill>
                 <a:latin typeface="Yu Gothic"/>
                 <a:ea typeface="Yu Gothic"/>
@@ -10139,7 +10111,7 @@
       </p:sp>
       <p:sp>
         <p:nvSpPr>
-          <p:cNvPr id="7" name="meta:part"/>
+          <p:cNvPr id="5" name="meta:part"/>
           <p:cNvSpPr txBox="1"/>
           <p:nvPr/>
         </p:nvSpPr>
@@ -10163,13 +10135,13 @@
             <a:r>
               <a:rPr sz="1200" b="0">
                 <a:solidFill>
-                  <a:srgbClr val="9AA3B2"/>
-                </a:solidFill>
-                <a:latin typeface="Yu Gothic"/>
-                <a:ea typeface="Yu Gothic"/>
-                <a:cs typeface="Yu Gothic"/>
-              </a:rPr>
-              <a:t>3 実演</a:t>
+                  <a:srgbClr val="5C6472"/>
+                </a:solidFill>
+                <a:latin typeface="Yu Gothic"/>
+                <a:ea typeface="Yu Gothic"/>
+                <a:cs typeface="Yu Gothic"/>
+              </a:rPr>
+              <a:t>2 第2部</a:t>
             </a:r>
           </a:p>
         </p:txBody>
@@ -10194,57 +10166,20 @@
       <p:grpSpPr/>
       <p:sp>
         <p:nvSpPr>
-          <p:cNvPr id="2" name="TextBox 1"/>
-          <p:cNvSpPr txBox="1"/>
-          <p:nvPr/>
-        </p:nvSpPr>
-        <p:spPr>
-          <a:xfrm>
-            <a:off x="685800" y="411480"/>
-            <a:ext cx="10820095" cy="960120"/>
-          </a:xfrm>
-          <a:prstGeom prst="rect">
-            <a:avLst/>
-          </a:prstGeom>
-          <a:noFill/>
-        </p:spPr>
-        <p:txBody>
-          <a:bodyPr wrap="square" anchor="b">
-            <a:noAutofit/>
-          </a:bodyPr>
-          <a:lstStyle/>
-          <a:p>
-            <a:pPr algn="l"/>
-            <a:r>
-              <a:rPr sz="4000" b="1">
-                <a:solidFill>
-                  <a:srgbClr val="B9791F"/>
-                </a:solidFill>
-                <a:latin typeface="Yu Gothic"/>
-                <a:ea typeface="Yu Gothic"/>
-                <a:cs typeface="Yu Gothic"/>
-              </a:rPr>
-              <a:t>実演①　偽の「私」の声</a:t>
-            </a:r>
-          </a:p>
-        </p:txBody>
-      </p:sp>
-      <p:sp>
-        <p:nvSpPr>
-          <p:cNvPr id="3" name="Rectangle 2"/>
+          <p:cNvPr id="2" name="Rectangle 1"/>
           <p:cNvSpPr/>
           <p:nvPr/>
         </p:nvSpPr>
         <p:spPr>
           <a:xfrm>
-            <a:off x="685800" y="1463040"/>
-            <a:ext cx="2377440" cy="50292"/>
+            <a:off x="0" y="0"/>
+            <a:ext cx="12191695" cy="6858000"/>
           </a:xfrm>
           <a:prstGeom prst="rect">
             <a:avLst/>
           </a:prstGeom>
           <a:solidFill>
-            <a:srgbClr val="B9791F"/>
+            <a:srgbClr val="20242C"/>
           </a:solidFill>
           <a:ln>
             <a:noFill/>
@@ -10275,121 +10210,111 @@
       </p:sp>
       <p:sp>
         <p:nvSpPr>
+          <p:cNvPr id="3" name="TextBox 2"/>
+          <p:cNvSpPr txBox="1"/>
+          <p:nvPr/>
+        </p:nvSpPr>
+        <p:spPr>
+          <a:xfrm>
+            <a:off x="685800" y="594360"/>
+            <a:ext cx="4572000" cy="548640"/>
+          </a:xfrm>
+          <a:prstGeom prst="rect">
+            <a:avLst/>
+          </a:prstGeom>
+          <a:noFill/>
+        </p:spPr>
+        <p:txBody>
+          <a:bodyPr wrap="square" anchor="ctr">
+            <a:noAutofit/>
+          </a:bodyPr>
+          <a:lstStyle/>
+          <a:p>
+            <a:pPr algn="l"/>
+            <a:r>
+              <a:rPr sz="2000" b="1">
+                <a:solidFill>
+                  <a:srgbClr val="B9791F"/>
+                </a:solidFill>
+                <a:latin typeface="Yu Gothic"/>
+                <a:ea typeface="Yu Gothic"/>
+                <a:cs typeface="Yu Gothic"/>
+              </a:rPr>
+              <a:t>実演</a:t>
+            </a:r>
+          </a:p>
+        </p:txBody>
+      </p:sp>
+      <p:sp>
+        <p:nvSpPr>
           <p:cNvPr id="4" name="TextBox 3"/>
           <p:cNvSpPr txBox="1"/>
           <p:nvPr/>
         </p:nvSpPr>
         <p:spPr>
           <a:xfrm>
-            <a:off x="685800" y="1645920"/>
-            <a:ext cx="10820095" cy="3401568"/>
-          </a:xfrm>
-          <a:prstGeom prst="rect">
-            <a:avLst/>
-          </a:prstGeom>
-          <a:noFill/>
-        </p:spPr>
-        <p:txBody>
-          <a:bodyPr wrap="square" anchor="t">
-            <a:noAutofit/>
-          </a:bodyPr>
-          <a:lstStyle/>
-          <a:p>
-            <a:pPr marL="355600" indent="-355600">
-              <a:lnSpc>
-                <a:spcPct val="135000"/>
-              </a:lnSpc>
-              <a:spcAft>
-                <a:spcPts val="979"/>
-              </a:spcAft>
-            </a:pPr>
-            <a:r>
-              <a:rPr sz="2800" b="0">
-                <a:solidFill>
-                  <a:srgbClr val="20242C"/>
-                </a:solidFill>
-                <a:latin typeface="Yu Gothic"/>
-                <a:ea typeface="Yu Gothic"/>
-                <a:cs typeface="Yu Gothic"/>
-              </a:rPr>
-              <a:t>・私の声をAIに数十秒だけ学ばせて作った「偽の私」（本人同意・AI生成明示）</a:t>
-            </a:r>
-          </a:p>
-          <a:p>
-            <a:pPr marL="355600" indent="-355600">
-              <a:lnSpc>
-                <a:spcPct val="135000"/>
-              </a:lnSpc>
-            </a:pPr>
-            <a:r>
-              <a:rPr sz="2800" b="0">
-                <a:solidFill>
-                  <a:srgbClr val="20242C"/>
-                </a:solidFill>
-                <a:latin typeface="Yu Gothic"/>
-                <a:ea typeface="Yu Gothic"/>
-                <a:cs typeface="Yu Gothic"/>
-              </a:rPr>
-              <a:t>・毎日いっしょに働く同僚でも、電話では分からないと言った</a:t>
-            </a:r>
-          </a:p>
-        </p:txBody>
-      </p:sp>
-      <p:sp>
-        <p:nvSpPr>
-          <p:cNvPr id="5" name="Rounded Rectangle 4"/>
-          <p:cNvSpPr/>
-          <p:nvPr/>
-        </p:nvSpPr>
-        <p:spPr>
-          <a:xfrm>
-            <a:off x="685800" y="5212080"/>
-            <a:ext cx="10820095" cy="777240"/>
-          </a:xfrm>
-          <a:prstGeom prst="roundRect">
-            <a:avLst>
-              <a:gd name="adj" fmla="val 16000"/>
-            </a:avLst>
-          </a:prstGeom>
-          <a:solidFill>
-            <a:srgbClr val="F3E6CF"/>
-          </a:solidFill>
-          <a:ln>
-            <a:noFill/>
-          </a:ln>
-          <a:effectLst/>
-        </p:spPr>
-        <p:style>
-          <a:lnRef idx="1">
-            <a:schemeClr val="accent1"/>
-          </a:lnRef>
-          <a:fillRef idx="3">
-            <a:schemeClr val="accent1"/>
-          </a:fillRef>
-          <a:effectRef idx="2">
-            <a:schemeClr val="accent1"/>
-          </a:effectRef>
-          <a:fontRef idx="minor">
-            <a:schemeClr val="lt1"/>
-          </a:fontRef>
-        </p:style>
-        <p:txBody>
-          <a:bodyPr rtlCol="0" anchor="ctr" wrap="square" lIns="274320" rIns="274320">
+            <a:off x="685800" y="2240280"/>
+            <a:ext cx="10820095" cy="1554480"/>
+          </a:xfrm>
+          <a:prstGeom prst="rect">
+            <a:avLst/>
+          </a:prstGeom>
+          <a:noFill/>
+        </p:spPr>
+        <p:txBody>
+          <a:bodyPr wrap="square" anchor="ctr">
             <a:noAutofit/>
           </a:bodyPr>
           <a:lstStyle/>
           <a:p>
             <a:pPr algn="ctr"/>
             <a:r>
-              <a:rPr sz="2600" b="1">
-                <a:solidFill>
-                  <a:srgbClr val="20242C"/>
-                </a:solidFill>
-                <a:latin typeface="Yu Gothic"/>
-                <a:ea typeface="Yu Gothic"/>
-                <a:cs typeface="Yu Gothic"/>
-              </a:rPr>
-              <a:t>私の声ですらこれです。ご家族の声なら、どうでしょうか</a:t>
+              <a:rPr sz="5400" b="1">
+                <a:solidFill>
+                  <a:srgbClr val="FFFFFF"/>
+                </a:solidFill>
+                <a:latin typeface="Yu Gothic"/>
+                <a:ea typeface="Yu Gothic"/>
+                <a:cs typeface="Yu Gothic"/>
+              </a:rPr>
+              <a:t>「本人らしさ」は作られる</a:t>
+            </a:r>
+          </a:p>
+        </p:txBody>
+      </p:sp>
+      <p:sp>
+        <p:nvSpPr>
+          <p:cNvPr id="5" name="TextBox 4"/>
+          <p:cNvSpPr txBox="1"/>
+          <p:nvPr/>
+        </p:nvSpPr>
+        <p:spPr>
+          <a:xfrm>
+            <a:off x="685800" y="3977639"/>
+            <a:ext cx="10820095" cy="868680"/>
+          </a:xfrm>
+          <a:prstGeom prst="rect">
+            <a:avLst/>
+          </a:prstGeom>
+          <a:noFill/>
+        </p:spPr>
+        <p:txBody>
+          <a:bodyPr wrap="square" anchor="ctr">
+            <a:noAutofit/>
+          </a:bodyPr>
+          <a:lstStyle/>
+          <a:p>
+            <a:pPr algn="ctr"/>
+            <a:r>
+              <a:rPr sz="2400" b="0">
+                <a:solidFill>
+                  <a:srgbClr val="BCBDC0"/>
+                </a:solidFill>
+                <a:latin typeface="Yu Gothic"/>
+                <a:ea typeface="Yu Gothic"/>
+                <a:cs typeface="Yu Gothic"/>
+              </a:rPr>
+              <a:t>クローン音声・ライブAI対話</a:t>
             </a:r>
           </a:p>
         </p:txBody>
@@ -10420,7 +10345,7 @@
             <a:r>
               <a:rPr sz="1200" b="0">
                 <a:solidFill>
-                  <a:srgbClr val="5C6472"/>
+                  <a:srgbClr val="9AA3B2"/>
                 </a:solidFill>
                 <a:latin typeface="Yu Gothic"/>
                 <a:ea typeface="Yu Gothic"/>
@@ -10457,7 +10382,7 @@
             <a:r>
               <a:rPr sz="1200" b="0">
                 <a:solidFill>
-                  <a:srgbClr val="5C6472"/>
+                  <a:srgbClr val="9AA3B2"/>
                 </a:solidFill>
                 <a:latin typeface="Yu Gothic"/>
                 <a:ea typeface="Yu Gothic"/>
@@ -10510,7 +10435,7 @@
           <a:p>
             <a:pPr algn="l"/>
             <a:r>
-              <a:rPr sz="3600" b="1">
+              <a:rPr sz="4000" b="1">
                 <a:solidFill>
                   <a:srgbClr val="B9791F"/>
                 </a:solidFill>
@@ -10518,7 +10443,7 @@
                 <a:ea typeface="Yu Gothic"/>
                 <a:cs typeface="Yu Gothic"/>
               </a:rPr>
-              <a:t>実演②　AIは相手に合わせて話し方を変える</a:t>
+              <a:t>実演①　偽の「私」の声</a:t>
             </a:r>
           </a:p>
         </p:txBody>
@@ -10576,7 +10501,7 @@
         <p:spPr>
           <a:xfrm>
             <a:off x="685800" y="1645920"/>
-            <a:ext cx="10820095" cy="4343400"/>
+            <a:ext cx="10820095" cy="3401568"/>
           </a:xfrm>
           <a:prstGeom prst="rect">
             <a:avLst/>
@@ -10606,7 +10531,7 @@
                 <a:ea typeface="Yu Gothic"/>
                 <a:cs typeface="Yu Gothic"/>
               </a:rPr>
-              <a:t>・会場からの予想外のひと言で、AIの言い方がその場で変わる</a:t>
+              <a:t>・私の声をAIに数十秒だけ学ばせて作った「偽の私」（本人同意・AI生成明示）</a:t>
             </a:r>
           </a:p>
           <a:p>
@@ -10624,14 +10549,73 @@
                 <a:ea typeface="Yu Gothic"/>
                 <a:cs typeface="Yu Gothic"/>
               </a:rPr>
-              <a:t>・最初に集めた「話し方」「雰囲気」——それも相手がこちらに合わせて作ってくる</a:t>
-            </a:r>
-          </a:p>
-        </p:txBody>
-      </p:sp>
-      <p:sp>
-        <p:nvSpPr>
-          <p:cNvPr id="5" name="meta:pageno"/>
+              <a:t>・毎日いっしょに働く同僚でも、電話では分からないと言った</a:t>
+            </a:r>
+          </a:p>
+        </p:txBody>
+      </p:sp>
+      <p:sp>
+        <p:nvSpPr>
+          <p:cNvPr id="5" name="Rounded Rectangle 4"/>
+          <p:cNvSpPr/>
+          <p:nvPr/>
+        </p:nvSpPr>
+        <p:spPr>
+          <a:xfrm>
+            <a:off x="685800" y="5212080"/>
+            <a:ext cx="10820095" cy="777240"/>
+          </a:xfrm>
+          <a:prstGeom prst="roundRect">
+            <a:avLst>
+              <a:gd name="adj" fmla="val 16000"/>
+            </a:avLst>
+          </a:prstGeom>
+          <a:solidFill>
+            <a:srgbClr val="F3E6CF"/>
+          </a:solidFill>
+          <a:ln>
+            <a:noFill/>
+          </a:ln>
+          <a:effectLst/>
+        </p:spPr>
+        <p:style>
+          <a:lnRef idx="1">
+            <a:schemeClr val="accent1"/>
+          </a:lnRef>
+          <a:fillRef idx="3">
+            <a:schemeClr val="accent1"/>
+          </a:fillRef>
+          <a:effectRef idx="2">
+            <a:schemeClr val="accent1"/>
+          </a:effectRef>
+          <a:fontRef idx="minor">
+            <a:schemeClr val="lt1"/>
+          </a:fontRef>
+        </p:style>
+        <p:txBody>
+          <a:bodyPr rtlCol="0" anchor="ctr" wrap="square" lIns="274320" rIns="274320">
+            <a:noAutofit/>
+          </a:bodyPr>
+          <a:lstStyle/>
+          <a:p>
+            <a:pPr algn="ctr"/>
+            <a:r>
+              <a:rPr sz="2600" b="1">
+                <a:solidFill>
+                  <a:srgbClr val="20242C"/>
+                </a:solidFill>
+                <a:latin typeface="Yu Gothic"/>
+                <a:ea typeface="Yu Gothic"/>
+                <a:cs typeface="Yu Gothic"/>
+              </a:rPr>
+              <a:t>私の声ですらこれです。ご家族の声なら、どうでしょうか</a:t>
+            </a:r>
+          </a:p>
+        </p:txBody>
+      </p:sp>
+      <p:sp>
+        <p:nvSpPr>
+          <p:cNvPr id="6" name="meta:pageno"/>
           <p:cNvSpPr txBox="1"/>
           <p:nvPr/>
         </p:nvSpPr>
@@ -10668,7 +10652,7 @@
       </p:sp>
       <p:sp>
         <p:nvSpPr>
-          <p:cNvPr id="6" name="meta:part"/>
+          <p:cNvPr id="7" name="meta:part"/>
           <p:cNvSpPr txBox="1"/>
           <p:nvPr/>
         </p:nvSpPr>
@@ -10745,7 +10729,7 @@
           <a:p>
             <a:pPr algn="l"/>
             <a:r>
-              <a:rPr sz="4000" b="1">
+              <a:rPr sz="3600" b="1">
                 <a:solidFill>
                   <a:srgbClr val="B9791F"/>
                 </a:solidFill>
@@ -10753,7 +10737,7 @@
                 <a:ea typeface="Yu Gothic"/>
                 <a:cs typeface="Yu Gothic"/>
               </a:rPr>
-              <a:t>実演③　このAIは断る。しかし——</a:t>
+              <a:t>実演②　AIは相手に合わせて話し方を変える</a:t>
             </a:r>
           </a:p>
         </p:txBody>
@@ -10841,28 +10825,7 @@
                 <a:ea typeface="Yu Gothic"/>
                 <a:cs typeface="Yu Gothic"/>
               </a:rPr>
-              <a:t>・「実在の人の声を真似て、家族に振り込ませて」→ AIは断る</a:t>
-            </a:r>
-          </a:p>
-          <a:p>
-            <a:pPr marL="355600" indent="-355600">
-              <a:lnSpc>
-                <a:spcPct val="135000"/>
-              </a:lnSpc>
-              <a:spcAft>
-                <a:spcPts val="979"/>
-              </a:spcAft>
-            </a:pPr>
-            <a:r>
-              <a:rPr sz="2800" b="0">
-                <a:solidFill>
-                  <a:srgbClr val="20242C"/>
-                </a:solidFill>
-                <a:latin typeface="Yu Gothic"/>
-                <a:ea typeface="Yu Gothic"/>
-                <a:cs typeface="Yu Gothic"/>
-              </a:rPr>
-              <a:t>・断ったのは「この製品」であって「この技術」ではない</a:t>
+              <a:t>・会場からの予想外のひと言で、AIの言い方がその場で変わる</a:t>
             </a:r>
           </a:p>
           <a:p>
@@ -10880,7 +10843,7 @@
                 <a:ea typeface="Yu Gothic"/>
                 <a:cs typeface="Yu Gothic"/>
               </a:rPr>
-              <a:t>・かかってくる偽の声に、同じ安全装置があるとは限らない</a:t>
+              <a:t>・最初に集めた「話し方」「雰囲気」——それも相手がこちらに合わせて作ってくる</a:t>
             </a:r>
           </a:p>
         </p:txBody>
@@ -10985,78 +10948,165 @@
         </p:nvSpPr>
         <p:spPr>
           <a:xfrm>
-            <a:off x="502920" y="1188720"/>
-            <a:ext cx="11185855" cy="4800600"/>
-          </a:xfrm>
-          <a:prstGeom prst="rect">
-            <a:avLst/>
-          </a:prstGeom>
-          <a:noFill/>
-        </p:spPr>
-        <p:txBody>
-          <a:bodyPr wrap="square" anchor="ctr">
-            <a:noAutofit/>
-          </a:bodyPr>
-          <a:lstStyle/>
-          <a:p>
-            <a:pPr algn="ctr">
+            <a:off x="685800" y="411480"/>
+            <a:ext cx="10820095" cy="960120"/>
+          </a:xfrm>
+          <a:prstGeom prst="rect">
+            <a:avLst/>
+          </a:prstGeom>
+          <a:noFill/>
+        </p:spPr>
+        <p:txBody>
+          <a:bodyPr wrap="square" anchor="b">
+            <a:noAutofit/>
+          </a:bodyPr>
+          <a:lstStyle/>
+          <a:p>
+            <a:pPr algn="l"/>
+            <a:r>
+              <a:rPr sz="4000" b="1">
+                <a:solidFill>
+                  <a:srgbClr val="B9791F"/>
+                </a:solidFill>
+                <a:latin typeface="Yu Gothic"/>
+                <a:ea typeface="Yu Gothic"/>
+                <a:cs typeface="Yu Gothic"/>
+              </a:rPr>
+              <a:t>実演③　このAIは断る。しかし——</a:t>
+            </a:r>
+          </a:p>
+        </p:txBody>
+      </p:sp>
+      <p:sp>
+        <p:nvSpPr>
+          <p:cNvPr id="3" name="Rectangle 2"/>
+          <p:cNvSpPr/>
+          <p:nvPr/>
+        </p:nvSpPr>
+        <p:spPr>
+          <a:xfrm>
+            <a:off x="685800" y="1463040"/>
+            <a:ext cx="2377440" cy="50292"/>
+          </a:xfrm>
+          <a:prstGeom prst="rect">
+            <a:avLst/>
+          </a:prstGeom>
+          <a:solidFill>
+            <a:srgbClr val="B9791F"/>
+          </a:solidFill>
+          <a:ln>
+            <a:noFill/>
+          </a:ln>
+          <a:effectLst/>
+        </p:spPr>
+        <p:style>
+          <a:lnRef idx="1">
+            <a:schemeClr val="accent1"/>
+          </a:lnRef>
+          <a:fillRef idx="3">
+            <a:schemeClr val="accent1"/>
+          </a:fillRef>
+          <a:effectRef idx="2">
+            <a:schemeClr val="accent1"/>
+          </a:effectRef>
+          <a:fontRef idx="minor">
+            <a:schemeClr val="lt1"/>
+          </a:fontRef>
+        </p:style>
+        <p:txBody>
+          <a:bodyPr rtlCol="0" anchor="ctr"/>
+          <a:lstStyle/>
+          <a:p>
+            <a:pPr algn="ctr"/>
+          </a:p>
+        </p:txBody>
+      </p:sp>
+      <p:sp>
+        <p:nvSpPr>
+          <p:cNvPr id="4" name="TextBox 3"/>
+          <p:cNvSpPr txBox="1"/>
+          <p:nvPr/>
+        </p:nvSpPr>
+        <p:spPr>
+          <a:xfrm>
+            <a:off x="685800" y="1645920"/>
+            <a:ext cx="10820095" cy="4343400"/>
+          </a:xfrm>
+          <a:prstGeom prst="rect">
+            <a:avLst/>
+          </a:prstGeom>
+          <a:noFill/>
+        </p:spPr>
+        <p:txBody>
+          <a:bodyPr wrap="square" anchor="t">
+            <a:noAutofit/>
+          </a:bodyPr>
+          <a:lstStyle/>
+          <a:p>
+            <a:pPr marL="355600" indent="-355600">
               <a:lnSpc>
-                <a:spcPct val="128000"/>
+                <a:spcPct val="135000"/>
+              </a:lnSpc>
+              <a:spcAft>
+                <a:spcPts val="979"/>
+              </a:spcAft>
+            </a:pPr>
+            <a:r>
+              <a:rPr sz="2800" b="0">
+                <a:solidFill>
+                  <a:srgbClr val="20242C"/>
+                </a:solidFill>
+                <a:latin typeface="Yu Gothic"/>
+                <a:ea typeface="Yu Gothic"/>
+                <a:cs typeface="Yu Gothic"/>
+              </a:rPr>
+              <a:t>・「実在の人の声を真似て、家族に振り込ませて」→ AIは断る</a:t>
+            </a:r>
+          </a:p>
+          <a:p>
+            <a:pPr marL="355600" indent="-355600">
+              <a:lnSpc>
+                <a:spcPct val="135000"/>
+              </a:lnSpc>
+              <a:spcAft>
+                <a:spcPts val="979"/>
+              </a:spcAft>
+            </a:pPr>
+            <a:r>
+              <a:rPr sz="2800" b="0">
+                <a:solidFill>
+                  <a:srgbClr val="20242C"/>
+                </a:solidFill>
+                <a:latin typeface="Yu Gothic"/>
+                <a:ea typeface="Yu Gothic"/>
+                <a:cs typeface="Yu Gothic"/>
+              </a:rPr>
+              <a:t>・断ったのは「この製品」であって「この技術」ではない</a:t>
+            </a:r>
+          </a:p>
+          <a:p>
+            <a:pPr marL="355600" indent="-355600">
+              <a:lnSpc>
+                <a:spcPct val="135000"/>
               </a:lnSpc>
             </a:pPr>
             <a:r>
-              <a:rPr sz="5400" b="1">
+              <a:rPr sz="2800" b="0">
                 <a:solidFill>
                   <a:srgbClr val="20242C"/>
                 </a:solidFill>
-                <a:latin typeface="Yu Mincho"/>
-                <a:ea typeface="Yu Mincho"/>
-                <a:cs typeface="Yu Mincho"/>
-              </a:rPr>
-              <a:t>番号も、顔も、声も、</a:t>
-            </a:r>
-          </a:p>
-          <a:p>
-            <a:pPr algn="ctr">
-              <a:lnSpc>
-                <a:spcPct val="128000"/>
-              </a:lnSpc>
-            </a:pPr>
-            <a:r>
-              <a:rPr sz="5400" b="1">
-                <a:solidFill>
-                  <a:srgbClr val="20242C"/>
-                </a:solidFill>
-                <a:latin typeface="Yu Mincho"/>
-                <a:ea typeface="Yu Mincho"/>
-                <a:cs typeface="Yu Mincho"/>
-              </a:rPr>
-              <a:t>話し方も偽れる。</a:t>
-            </a:r>
-          </a:p>
-          <a:p>
-            <a:pPr algn="ctr">
-              <a:lnSpc>
-                <a:spcPct val="128000"/>
-              </a:lnSpc>
-            </a:pPr>
-            <a:r>
-              <a:rPr sz="5400" b="1">
-                <a:solidFill>
-                  <a:srgbClr val="20242C"/>
-                </a:solidFill>
-                <a:latin typeface="Yu Mincho"/>
-                <a:ea typeface="Yu Mincho"/>
-                <a:cs typeface="Yu Mincho"/>
-              </a:rPr>
-              <a:t>では、何で見分けますか？</a:t>
-            </a:r>
-          </a:p>
-        </p:txBody>
-      </p:sp>
-      <p:sp>
-        <p:nvSpPr>
-          <p:cNvPr id="3" name="meta:pageno"/>
+                <a:latin typeface="Yu Gothic"/>
+                <a:ea typeface="Yu Gothic"/>
+                <a:cs typeface="Yu Gothic"/>
+              </a:rPr>
+              <a:t>・かかってくる偽の声に、同じ安全装置があるとは限らない</a:t>
+            </a:r>
+          </a:p>
+        </p:txBody>
+      </p:sp>
+      <p:sp>
+        <p:nvSpPr>
+          <p:cNvPr id="5" name="meta:pageno"/>
           <p:cNvSpPr txBox="1"/>
           <p:nvPr/>
         </p:nvSpPr>
@@ -11093,7 +11143,7 @@
       </p:sp>
       <p:sp>
         <p:nvSpPr>
-          <p:cNvPr id="4" name="meta:part"/>
+          <p:cNvPr id="6" name="meta:part"/>
           <p:cNvSpPr txBox="1"/>
           <p:nvPr/>
         </p:nvSpPr>
@@ -11154,203 +11204,78 @@
         </p:nvSpPr>
         <p:spPr>
           <a:xfrm>
-            <a:off x="685800" y="411480"/>
-            <a:ext cx="10820095" cy="960120"/>
-          </a:xfrm>
-          <a:prstGeom prst="rect">
-            <a:avLst/>
-          </a:prstGeom>
-          <a:noFill/>
-        </p:spPr>
-        <p:txBody>
-          <a:bodyPr wrap="square" anchor="b">
-            <a:noAutofit/>
-          </a:bodyPr>
-          <a:lstStyle/>
-          <a:p>
-            <a:pPr algn="l"/>
-            <a:r>
-              <a:rPr sz="4000" b="1">
-                <a:solidFill>
-                  <a:srgbClr val="B9791F"/>
-                </a:solidFill>
-                <a:latin typeface="Yu Gothic"/>
-                <a:ea typeface="Yu Gothic"/>
-                <a:cs typeface="Yu Gothic"/>
-              </a:rPr>
-              <a:t>手がかりは、全部裏切られた</a:t>
-            </a:r>
-          </a:p>
-        </p:txBody>
-      </p:sp>
-      <p:sp>
-        <p:nvSpPr>
-          <p:cNvPr id="3" name="Rectangle 2"/>
-          <p:cNvSpPr/>
-          <p:nvPr/>
-        </p:nvSpPr>
-        <p:spPr>
-          <a:xfrm>
-            <a:off x="685800" y="1463040"/>
-            <a:ext cx="2377440" cy="50292"/>
-          </a:xfrm>
-          <a:prstGeom prst="rect">
-            <a:avLst/>
-          </a:prstGeom>
-          <a:solidFill>
-            <a:srgbClr val="B9791F"/>
-          </a:solidFill>
-          <a:ln>
-            <a:noFill/>
-          </a:ln>
-          <a:effectLst/>
-        </p:spPr>
-        <p:style>
-          <a:lnRef idx="1">
-            <a:schemeClr val="accent1"/>
-          </a:lnRef>
-          <a:fillRef idx="3">
-            <a:schemeClr val="accent1"/>
-          </a:fillRef>
-          <a:effectRef idx="2">
-            <a:schemeClr val="accent1"/>
-          </a:effectRef>
-          <a:fontRef idx="minor">
-            <a:schemeClr val="lt1"/>
-          </a:fontRef>
-        </p:style>
-        <p:txBody>
-          <a:bodyPr rtlCol="0" anchor="ctr"/>
-          <a:lstStyle/>
-          <a:p>
-            <a:pPr algn="ctr"/>
-          </a:p>
-        </p:txBody>
-      </p:sp>
-      <p:sp>
-        <p:nvSpPr>
-          <p:cNvPr id="4" name="TextBox 3"/>
-          <p:cNvSpPr txBox="1"/>
-          <p:nvPr/>
-        </p:nvSpPr>
-        <p:spPr>
-          <a:xfrm>
-            <a:off x="685800" y="1645920"/>
-            <a:ext cx="10820095" cy="3401568"/>
-          </a:xfrm>
-          <a:prstGeom prst="rect">
-            <a:avLst/>
-          </a:prstGeom>
-          <a:noFill/>
-        </p:spPr>
-        <p:txBody>
-          <a:bodyPr wrap="square" anchor="t">
-            <a:noAutofit/>
-          </a:bodyPr>
-          <a:lstStyle/>
-          <a:p>
-            <a:pPr marL="355600" indent="-355600">
+            <a:off x="502920" y="1188720"/>
+            <a:ext cx="11185855" cy="4800600"/>
+          </a:xfrm>
+          <a:prstGeom prst="rect">
+            <a:avLst/>
+          </a:prstGeom>
+          <a:noFill/>
+        </p:spPr>
+        <p:txBody>
+          <a:bodyPr wrap="square" anchor="ctr">
+            <a:noAutofit/>
+          </a:bodyPr>
+          <a:lstStyle/>
+          <a:p>
+            <a:pPr algn="ctr">
               <a:lnSpc>
-                <a:spcPct val="135000"/>
-              </a:lnSpc>
-              <a:spcAft>
-                <a:spcPts val="979"/>
-              </a:spcAft>
-            </a:pPr>
-            <a:r>
-              <a:rPr sz="2800" b="0">
-                <a:solidFill>
-                  <a:srgbClr val="20242C"/>
-                </a:solidFill>
-                <a:latin typeface="Yu Gothic"/>
-                <a:ea typeface="Yu Gothic"/>
-                <a:cs typeface="Yu Gothic"/>
-              </a:rPr>
-              <a:t>・最初に集めた手がかり——声・話し方・内容・雰囲気・番号（板書を再掲）</a:t>
-            </a:r>
-          </a:p>
-          <a:p>
-            <a:pPr marL="355600" indent="-355600">
-              <a:lnSpc>
-                <a:spcPct val="135000"/>
+                <a:spcPct val="128000"/>
               </a:lnSpc>
             </a:pPr>
             <a:r>
-              <a:rPr sz="2800" b="0">
+              <a:rPr sz="5400" b="1">
                 <a:solidFill>
                   <a:srgbClr val="20242C"/>
                 </a:solidFill>
-                <a:latin typeface="Yu Gothic"/>
-                <a:ea typeface="Yu Gothic"/>
-                <a:cs typeface="Yu Gothic"/>
-              </a:rPr>
-              <a:t>・見分ける勝負は、完璧な偽物を作れる側が必ず勝つ</a:t>
-            </a:r>
-          </a:p>
-        </p:txBody>
-      </p:sp>
-      <p:sp>
-        <p:nvSpPr>
-          <p:cNvPr id="5" name="Rounded Rectangle 4"/>
-          <p:cNvSpPr/>
-          <p:nvPr/>
-        </p:nvSpPr>
-        <p:spPr>
-          <a:xfrm>
-            <a:off x="685800" y="5212080"/>
-            <a:ext cx="10820095" cy="777240"/>
-          </a:xfrm>
-          <a:prstGeom prst="roundRect">
-            <a:avLst>
-              <a:gd name="adj" fmla="val 16000"/>
-            </a:avLst>
-          </a:prstGeom>
-          <a:solidFill>
-            <a:srgbClr val="F3E6CF"/>
-          </a:solidFill>
-          <a:ln>
-            <a:noFill/>
-          </a:ln>
-          <a:effectLst/>
-        </p:spPr>
-        <p:style>
-          <a:lnRef idx="1">
-            <a:schemeClr val="accent1"/>
-          </a:lnRef>
-          <a:fillRef idx="3">
-            <a:schemeClr val="accent1"/>
-          </a:fillRef>
-          <a:effectRef idx="2">
-            <a:schemeClr val="accent1"/>
-          </a:effectRef>
-          <a:fontRef idx="minor">
-            <a:schemeClr val="lt1"/>
-          </a:fontRef>
-        </p:style>
-        <p:txBody>
-          <a:bodyPr rtlCol="0" anchor="ctr" wrap="square" lIns="274320" rIns="274320">
-            <a:noAutofit/>
-          </a:bodyPr>
-          <a:lstStyle/>
-          <a:p>
-            <a:pPr algn="ctr"/>
-            <a:r>
-              <a:rPr sz="2600" b="1">
+                <a:latin typeface="Yu Mincho"/>
+                <a:ea typeface="Yu Mincho"/>
+                <a:cs typeface="Yu Mincho"/>
+              </a:rPr>
+              <a:t>番号も、顔も、声も、</a:t>
+            </a:r>
+          </a:p>
+          <a:p>
+            <a:pPr algn="ctr">
+              <a:lnSpc>
+                <a:spcPct val="128000"/>
+              </a:lnSpc>
+            </a:pPr>
+            <a:r>
+              <a:rPr sz="5400" b="1">
                 <a:solidFill>
                   <a:srgbClr val="20242C"/>
                 </a:solidFill>
-                <a:latin typeface="Yu Gothic"/>
-                <a:ea typeface="Yu Gothic"/>
-                <a:cs typeface="Yu Gothic"/>
-              </a:rPr>
-              <a:t>だから——手がかりで見分けること自体を、やめる</a:t>
-            </a:r>
-          </a:p>
-        </p:txBody>
-      </p:sp>
-      <p:sp>
-        <p:nvSpPr>
-          <p:cNvPr id="6" name="meta:pageno"/>
+                <a:latin typeface="Yu Mincho"/>
+                <a:ea typeface="Yu Mincho"/>
+                <a:cs typeface="Yu Mincho"/>
+              </a:rPr>
+              <a:t>話し方も偽れる。</a:t>
+            </a:r>
+          </a:p>
+          <a:p>
+            <a:pPr algn="ctr">
+              <a:lnSpc>
+                <a:spcPct val="128000"/>
+              </a:lnSpc>
+            </a:pPr>
+            <a:r>
+              <a:rPr sz="5400" b="1">
+                <a:solidFill>
+                  <a:srgbClr val="20242C"/>
+                </a:solidFill>
+                <a:latin typeface="Yu Mincho"/>
+                <a:ea typeface="Yu Mincho"/>
+                <a:cs typeface="Yu Mincho"/>
+              </a:rPr>
+              <a:t>では、何で見分けますか？</a:t>
+            </a:r>
+          </a:p>
+        </p:txBody>
+      </p:sp>
+      <p:sp>
+        <p:nvSpPr>
+          <p:cNvPr id="3" name="meta:pageno"/>
           <p:cNvSpPr txBox="1"/>
           <p:nvPr/>
         </p:nvSpPr>
@@ -11387,7 +11312,7 @@
       </p:sp>
       <p:sp>
         <p:nvSpPr>
-          <p:cNvPr id="7" name="meta:part"/>
+          <p:cNvPr id="4" name="meta:part"/>
           <p:cNvSpPr txBox="1"/>
           <p:nvPr/>
         </p:nvSpPr>
@@ -11417,7 +11342,7 @@
                 <a:ea typeface="Yu Gothic"/>
                 <a:cs typeface="Yu Gothic"/>
               </a:rPr>
-              <a:t>4 結論</a:t>
+              <a:t>3 実演</a:t>
             </a:r>
           </a:p>
         </p:txBody>
@@ -11472,7 +11397,7 @@
                 <a:ea typeface="Yu Gothic"/>
                 <a:cs typeface="Yu Gothic"/>
               </a:rPr>
-              <a:t>守り方は 3つ</a:t>
+              <a:t>手がかりは、全部裏切られた</a:t>
             </a:r>
           </a:p>
         </p:txBody>
@@ -11530,67 +11455,47 @@
         <p:spPr>
           <a:xfrm>
             <a:off x="685800" y="1645920"/>
-            <a:ext cx="3931920" cy="457200"/>
-          </a:xfrm>
-          <a:prstGeom prst="rect">
-            <a:avLst/>
-          </a:prstGeom>
-          <a:noFill/>
-        </p:spPr>
-        <p:txBody>
-          <a:bodyPr wrap="square" anchor="ctr">
-            <a:noAutofit/>
-          </a:bodyPr>
-          <a:lstStyle/>
-          <a:p>
-            <a:pPr algn="l">
+            <a:ext cx="10820095" cy="3401568"/>
+          </a:xfrm>
+          <a:prstGeom prst="rect">
+            <a:avLst/>
+          </a:prstGeom>
+          <a:noFill/>
+        </p:spPr>
+        <p:txBody>
+          <a:bodyPr wrap="square" anchor="t">
+            <a:noAutofit/>
+          </a:bodyPr>
+          <a:lstStyle/>
+          <a:p>
+            <a:pPr marL="355600" indent="-355600">
               <a:lnSpc>
-                <a:spcPct val="115000"/>
+                <a:spcPct val="135000"/>
+              </a:lnSpc>
+              <a:spcAft>
+                <a:spcPts val="979"/>
+              </a:spcAft>
+            </a:pPr>
+            <a:r>
+              <a:rPr sz="2800" b="0">
+                <a:solidFill>
+                  <a:srgbClr val="20242C"/>
+                </a:solidFill>
+                <a:latin typeface="Yu Gothic"/>
+                <a:ea typeface="Yu Gothic"/>
+                <a:cs typeface="Yu Gothic"/>
+              </a:rPr>
+              <a:t>・最初に集めた手がかり——声・話し方・内容・雰囲気・番号（板書を再掲）</a:t>
+            </a:r>
+          </a:p>
+          <a:p>
+            <a:pPr marL="355600" indent="-355600">
+              <a:lnSpc>
+                <a:spcPct val="135000"/>
               </a:lnSpc>
             </a:pPr>
             <a:r>
-              <a:rPr sz="2000" b="1">
-                <a:solidFill>
-                  <a:srgbClr val="B9791F"/>
-                </a:solidFill>
-                <a:latin typeface="Yu Gothic"/>
-                <a:ea typeface="Yu Gothic"/>
-                <a:cs typeface="Yu Gothic"/>
-              </a:rPr>
-              <a:t>①【鳴る前】</a:t>
-            </a:r>
-          </a:p>
-        </p:txBody>
-      </p:sp>
-      <p:sp>
-        <p:nvSpPr>
-          <p:cNvPr id="5" name="TextBox 4"/>
-          <p:cNvSpPr txBox="1"/>
-          <p:nvPr/>
-        </p:nvSpPr>
-        <p:spPr>
-          <a:xfrm>
-            <a:off x="4892040" y="1645920"/>
-            <a:ext cx="6613855" cy="457200"/>
-          </a:xfrm>
-          <a:prstGeom prst="rect">
-            <a:avLst/>
-          </a:prstGeom>
-          <a:noFill/>
-        </p:spPr>
-        <p:txBody>
-          <a:bodyPr wrap="square" anchor="ctr">
-            <a:noAutofit/>
-          </a:bodyPr>
-          <a:lstStyle/>
-          <a:p>
-            <a:pPr algn="l">
-              <a:lnSpc>
-                <a:spcPct val="120000"/>
-              </a:lnSpc>
-            </a:pPr>
-            <a:r>
-              <a:rPr sz="3000" b="1">
+              <a:rPr sz="2800" b="0">
                 <a:solidFill>
                   <a:srgbClr val="20242C"/>
                 </a:solidFill>
@@ -11598,301 +11503,14 @@
                 <a:ea typeface="Yu Gothic"/>
                 <a:cs typeface="Yu Gothic"/>
               </a:rPr>
-              <a:t>怪しい電話を防ぐ</a:t>
-            </a:r>
-          </a:p>
-        </p:txBody>
-      </p:sp>
-      <p:sp>
-        <p:nvSpPr>
-          <p:cNvPr id="6" name="TextBox 5"/>
-          <p:cNvSpPr txBox="1"/>
-          <p:nvPr/>
-        </p:nvSpPr>
-        <p:spPr>
-          <a:xfrm>
-            <a:off x="4892040" y="2139696"/>
-            <a:ext cx="6613855" cy="645668"/>
-          </a:xfrm>
-          <a:prstGeom prst="rect">
-            <a:avLst/>
-          </a:prstGeom>
-          <a:noFill/>
-        </p:spPr>
-        <p:txBody>
-          <a:bodyPr wrap="square" anchor="t">
-            <a:noAutofit/>
-          </a:bodyPr>
-          <a:lstStyle/>
-          <a:p>
-            <a:pPr algn="l">
-              <a:lnSpc>
-                <a:spcPct val="130000"/>
-              </a:lnSpc>
-            </a:pPr>
-            <a:r>
-              <a:rPr sz="1900" b="0">
-                <a:solidFill>
-                  <a:srgbClr val="5C6472"/>
-                </a:solidFill>
-                <a:latin typeface="Yu Gothic"/>
-                <a:ea typeface="Yu Gothic"/>
-                <a:cs typeface="Yu Gothic"/>
-              </a:rPr>
-              <a:t>固定電話は国際電話の利用休止／スマホは迷惑電話対策アプリ</a:t>
-            </a:r>
-          </a:p>
-        </p:txBody>
-      </p:sp>
-      <p:sp>
-        <p:nvSpPr>
-          <p:cNvPr id="7" name="TextBox 6"/>
-          <p:cNvSpPr txBox="1"/>
-          <p:nvPr/>
-        </p:nvSpPr>
-        <p:spPr>
-          <a:xfrm>
-            <a:off x="685800" y="2933827"/>
-            <a:ext cx="3931920" cy="457200"/>
-          </a:xfrm>
-          <a:prstGeom prst="rect">
-            <a:avLst/>
-          </a:prstGeom>
-          <a:noFill/>
-        </p:spPr>
-        <p:txBody>
-          <a:bodyPr wrap="square" anchor="ctr">
-            <a:noAutofit/>
-          </a:bodyPr>
-          <a:lstStyle/>
-          <a:p>
-            <a:pPr algn="l">
-              <a:lnSpc>
-                <a:spcPct val="115000"/>
-              </a:lnSpc>
-            </a:pPr>
-            <a:r>
-              <a:rPr sz="2000" b="1">
-                <a:solidFill>
-                  <a:srgbClr val="B9791F"/>
-                </a:solidFill>
-                <a:latin typeface="Yu Gothic"/>
-                <a:ea typeface="Yu Gothic"/>
-                <a:cs typeface="Yu Gothic"/>
-              </a:rPr>
-              <a:t>②【警察・お金の話が出たら】</a:t>
-            </a:r>
-          </a:p>
-        </p:txBody>
-      </p:sp>
-      <p:sp>
-        <p:nvSpPr>
-          <p:cNvPr id="8" name="TextBox 7"/>
-          <p:cNvSpPr txBox="1"/>
-          <p:nvPr/>
-        </p:nvSpPr>
-        <p:spPr>
-          <a:xfrm>
-            <a:off x="4892040" y="2933827"/>
-            <a:ext cx="6613855" cy="457200"/>
-          </a:xfrm>
-          <a:prstGeom prst="rect">
-            <a:avLst/>
-          </a:prstGeom>
-          <a:noFill/>
-        </p:spPr>
-        <p:txBody>
-          <a:bodyPr wrap="square" anchor="ctr">
-            <a:noAutofit/>
-          </a:bodyPr>
-          <a:lstStyle/>
-          <a:p>
-            <a:pPr algn="l">
-              <a:lnSpc>
-                <a:spcPct val="120000"/>
-              </a:lnSpc>
-            </a:pPr>
-            <a:r>
-              <a:rPr sz="3000" b="1">
-                <a:solidFill>
-                  <a:srgbClr val="20242C"/>
-                </a:solidFill>
-                <a:latin typeface="Yu Gothic"/>
-                <a:ea typeface="Yu Gothic"/>
-                <a:cs typeface="Yu Gothic"/>
-              </a:rPr>
-              <a:t>番号や映像を信じず、切る</a:t>
-            </a:r>
-          </a:p>
-        </p:txBody>
-      </p:sp>
-      <p:sp>
-        <p:nvSpPr>
-          <p:cNvPr id="9" name="TextBox 8"/>
-          <p:cNvSpPr txBox="1"/>
-          <p:nvPr/>
-        </p:nvSpPr>
-        <p:spPr>
-          <a:xfrm>
-            <a:off x="4892040" y="3427603"/>
-            <a:ext cx="6613855" cy="331977"/>
-          </a:xfrm>
-          <a:prstGeom prst="rect">
-            <a:avLst/>
-          </a:prstGeom>
-          <a:noFill/>
-        </p:spPr>
-        <p:txBody>
-          <a:bodyPr wrap="square" anchor="t">
-            <a:noAutofit/>
-          </a:bodyPr>
-          <a:lstStyle/>
-          <a:p>
-            <a:pPr algn="l">
-              <a:lnSpc>
-                <a:spcPct val="130000"/>
-              </a:lnSpc>
-            </a:pPr>
-            <a:r>
-              <a:rPr sz="1900" b="0">
-                <a:solidFill>
-                  <a:srgbClr val="5C6472"/>
-                </a:solidFill>
-                <a:latin typeface="Yu Gothic"/>
-                <a:ea typeface="Yu Gothic"/>
-                <a:cs typeface="Yu Gothic"/>
-              </a:rPr>
-              <a:t>「誰にも言うな」「ATM」「ギフトカード」は即切りの合図</a:t>
-            </a:r>
-          </a:p>
-        </p:txBody>
-      </p:sp>
-      <p:sp>
-        <p:nvSpPr>
-          <p:cNvPr id="10" name="TextBox 9"/>
-          <p:cNvSpPr txBox="1"/>
-          <p:nvPr/>
-        </p:nvSpPr>
-        <p:spPr>
-          <a:xfrm>
-            <a:off x="685800" y="3908044"/>
-            <a:ext cx="3931920" cy="457200"/>
-          </a:xfrm>
-          <a:prstGeom prst="rect">
-            <a:avLst/>
-          </a:prstGeom>
-          <a:noFill/>
-        </p:spPr>
-        <p:txBody>
-          <a:bodyPr wrap="square" anchor="ctr">
-            <a:noAutofit/>
-          </a:bodyPr>
-          <a:lstStyle/>
-          <a:p>
-            <a:pPr algn="l">
-              <a:lnSpc>
-                <a:spcPct val="115000"/>
-              </a:lnSpc>
-            </a:pPr>
-            <a:r>
-              <a:rPr sz="2000" b="1">
-                <a:solidFill>
-                  <a:srgbClr val="B9791F"/>
-                </a:solidFill>
-                <a:latin typeface="Yu Gothic"/>
-                <a:ea typeface="Yu Gothic"/>
-                <a:cs typeface="Yu Gothic"/>
-              </a:rPr>
-              <a:t>③【切ったあと】</a:t>
-            </a:r>
-          </a:p>
-        </p:txBody>
-      </p:sp>
-      <p:sp>
-        <p:nvSpPr>
-          <p:cNvPr id="11" name="TextBox 10"/>
-          <p:cNvSpPr txBox="1"/>
-          <p:nvPr/>
-        </p:nvSpPr>
-        <p:spPr>
-          <a:xfrm>
-            <a:off x="4892040" y="3908044"/>
-            <a:ext cx="6613855" cy="457200"/>
-          </a:xfrm>
-          <a:prstGeom prst="rect">
-            <a:avLst/>
-          </a:prstGeom>
-          <a:noFill/>
-        </p:spPr>
-        <p:txBody>
-          <a:bodyPr wrap="square" anchor="ctr">
-            <a:noAutofit/>
-          </a:bodyPr>
-          <a:lstStyle/>
-          <a:p>
-            <a:pPr algn="l">
-              <a:lnSpc>
-                <a:spcPct val="120000"/>
-              </a:lnSpc>
-            </a:pPr>
-            <a:r>
-              <a:rPr sz="3000" b="1">
-                <a:solidFill>
-                  <a:srgbClr val="20242C"/>
-                </a:solidFill>
-                <a:latin typeface="Yu Gothic"/>
-                <a:ea typeface="Yu Gothic"/>
-                <a:cs typeface="Yu Gothic"/>
-              </a:rPr>
-              <a:t>自分で調べた番号で確かめる</a:t>
-            </a:r>
-          </a:p>
-        </p:txBody>
-      </p:sp>
-      <p:sp>
-        <p:nvSpPr>
-          <p:cNvPr id="12" name="TextBox 11"/>
-          <p:cNvSpPr txBox="1"/>
-          <p:nvPr/>
-        </p:nvSpPr>
-        <p:spPr>
-          <a:xfrm>
-            <a:off x="4892040" y="4401820"/>
-            <a:ext cx="6613855" cy="645668"/>
-          </a:xfrm>
-          <a:prstGeom prst="rect">
-            <a:avLst/>
-          </a:prstGeom>
-          <a:noFill/>
-        </p:spPr>
-        <p:txBody>
-          <a:bodyPr wrap="square" anchor="t">
-            <a:noAutofit/>
-          </a:bodyPr>
-          <a:lstStyle/>
-          <a:p>
-            <a:pPr algn="l">
-              <a:lnSpc>
-                <a:spcPct val="130000"/>
-              </a:lnSpc>
-            </a:pPr>
-            <a:r>
-              <a:rPr sz="1900" b="0">
-                <a:solidFill>
-                  <a:srgbClr val="5C6472"/>
-                </a:solidFill>
-                <a:latin typeface="Yu Gothic"/>
-                <a:ea typeface="Yu Gothic"/>
-                <a:cs typeface="Yu Gothic"/>
-              </a:rPr>
-              <a:t>着信履歴は使わない／警察相談は「#9110」／家族はもともと知っている番号へ</a:t>
-            </a:r>
-          </a:p>
-        </p:txBody>
-      </p:sp>
-      <p:sp>
-        <p:nvSpPr>
-          <p:cNvPr id="13" name="Rounded Rectangle 12"/>
+              <a:t>・見分ける勝負は、完璧な偽物を作れる側が必ず勝つ</a:t>
+            </a:r>
+          </a:p>
+        </p:txBody>
+      </p:sp>
+      <p:sp>
+        <p:nvSpPr>
+          <p:cNvPr id="5" name="Rounded Rectangle 4"/>
           <p:cNvSpPr/>
           <p:nvPr/>
         </p:nvSpPr>
@@ -11944,14 +11562,14 @@
                 <a:ea typeface="Yu Gothic"/>
                 <a:cs typeface="Yu Gothic"/>
               </a:rPr>
-              <a:t>電話では、その場で送金せず、口座や暗証番号も伝えない</a:t>
-            </a:r>
-          </a:p>
-        </p:txBody>
-      </p:sp>
-      <p:sp>
-        <p:nvSpPr>
-          <p:cNvPr id="14" name="meta:pageno"/>
+              <a:t>だから——手がかりで見分けること自体を、やめる</a:t>
+            </a:r>
+          </a:p>
+        </p:txBody>
+      </p:sp>
+      <p:sp>
+        <p:nvSpPr>
+          <p:cNvPr id="6" name="meta:pageno"/>
           <p:cNvSpPr txBox="1"/>
           <p:nvPr/>
         </p:nvSpPr>
@@ -11988,7 +11606,7 @@
       </p:sp>
       <p:sp>
         <p:nvSpPr>
-          <p:cNvPr id="15" name="meta:part"/>
+          <p:cNvPr id="7" name="meta:part"/>
           <p:cNvSpPr txBox="1"/>
           <p:nvPr/>
         </p:nvSpPr>
@@ -12247,7 +11865,7 @@
                 <a:ea typeface="Yu Gothic"/>
                 <a:cs typeface="Yu Gothic"/>
               </a:rPr>
-              <a:t>今日のまとめ</a:t>
+              <a:t>守り方は 3つ</a:t>
             </a:r>
           </a:p>
         </p:txBody>
@@ -12304,8 +11922,8 @@
         </p:nvSpPr>
         <p:spPr>
           <a:xfrm>
-            <a:off x="731520" y="1645920"/>
-            <a:ext cx="731520" cy="457200"/>
+            <a:off x="685800" y="1645920"/>
+            <a:ext cx="3931920" cy="457200"/>
           </a:xfrm>
           <a:prstGeom prst="rect">
             <a:avLst/>
@@ -12318,13 +11936,13 @@
           </a:bodyPr>
           <a:lstStyle/>
           <a:p>
-            <a:pPr algn="r">
+            <a:pPr algn="l">
               <a:lnSpc>
                 <a:spcPct val="115000"/>
               </a:lnSpc>
             </a:pPr>
             <a:r>
-              <a:rPr sz="2800" b="1">
+              <a:rPr sz="2000" b="1">
                 <a:solidFill>
                   <a:srgbClr val="B9791F"/>
                 </a:solidFill>
@@ -12332,7 +11950,7 @@
                 <a:ea typeface="Yu Gothic"/>
                 <a:cs typeface="Yu Gothic"/>
               </a:rPr>
-              <a:t>1</a:t>
+              <a:t>①【鳴る前】</a:t>
             </a:r>
           </a:p>
         </p:txBody>
@@ -12345,8 +11963,8 @@
         </p:nvSpPr>
         <p:spPr>
           <a:xfrm>
-            <a:off x="1508760" y="1645920"/>
-            <a:ext cx="9997135" cy="457200"/>
+            <a:off x="4892040" y="1645920"/>
+            <a:ext cx="6613855" cy="457200"/>
           </a:xfrm>
           <a:prstGeom prst="rect">
             <a:avLst/>
@@ -12373,7 +11991,7 @@
                 <a:ea typeface="Yu Gothic"/>
                 <a:cs typeface="Yu Gothic"/>
               </a:rPr>
-              <a:t>バレバレの嘘は、疑わない人を選ぶ「フィルタ」だった</a:t>
+              <a:t>怪しい電話を防ぐ</a:t>
             </a:r>
           </a:p>
         </p:txBody>
@@ -12386,8 +12004,49 @@
         </p:nvSpPr>
         <p:spPr>
           <a:xfrm>
-            <a:off x="731520" y="2388870"/>
-            <a:ext cx="731520" cy="914400"/>
+            <a:off x="4892040" y="2139696"/>
+            <a:ext cx="6613855" cy="645668"/>
+          </a:xfrm>
+          <a:prstGeom prst="rect">
+            <a:avLst/>
+          </a:prstGeom>
+          <a:noFill/>
+        </p:spPr>
+        <p:txBody>
+          <a:bodyPr wrap="square" anchor="t">
+            <a:noAutofit/>
+          </a:bodyPr>
+          <a:lstStyle/>
+          <a:p>
+            <a:pPr algn="l">
+              <a:lnSpc>
+                <a:spcPct val="130000"/>
+              </a:lnSpc>
+            </a:pPr>
+            <a:r>
+              <a:rPr sz="1900" b="0">
+                <a:solidFill>
+                  <a:srgbClr val="5C6472"/>
+                </a:solidFill>
+                <a:latin typeface="Yu Gothic"/>
+                <a:ea typeface="Yu Gothic"/>
+                <a:cs typeface="Yu Gothic"/>
+              </a:rPr>
+              <a:t>固定電話は国際電話の利用休止／スマホは迷惑電話対策アプリ</a:t>
+            </a:r>
+          </a:p>
+        </p:txBody>
+      </p:sp>
+      <p:sp>
+        <p:nvSpPr>
+          <p:cNvPr id="7" name="TextBox 6"/>
+          <p:cNvSpPr txBox="1"/>
+          <p:nvPr/>
+        </p:nvSpPr>
+        <p:spPr>
+          <a:xfrm>
+            <a:off x="685800" y="2933827"/>
+            <a:ext cx="3931920" cy="457200"/>
           </a:xfrm>
           <a:prstGeom prst="rect">
             <a:avLst/>
@@ -12400,13 +12059,13 @@
           </a:bodyPr>
           <a:lstStyle/>
           <a:p>
-            <a:pPr algn="r">
+            <a:pPr algn="l">
               <a:lnSpc>
                 <a:spcPct val="115000"/>
               </a:lnSpc>
             </a:pPr>
             <a:r>
-              <a:rPr sz="2800" b="1">
+              <a:rPr sz="2000" b="1">
                 <a:solidFill>
                   <a:srgbClr val="B9791F"/>
                 </a:solidFill>
@@ -12414,21 +12073,21 @@
                 <a:ea typeface="Yu Gothic"/>
                 <a:cs typeface="Yu Gothic"/>
               </a:rPr>
-              <a:t>2</a:t>
-            </a:r>
-          </a:p>
-        </p:txBody>
-      </p:sp>
-      <p:sp>
-        <p:nvSpPr>
-          <p:cNvPr id="7" name="TextBox 6"/>
-          <p:cNvSpPr txBox="1"/>
-          <p:nvPr/>
-        </p:nvSpPr>
-        <p:spPr>
-          <a:xfrm>
-            <a:off x="1508760" y="2388870"/>
-            <a:ext cx="9997135" cy="914400"/>
+              <a:t>②【警察・お金の話が出たら】</a:t>
+            </a:r>
+          </a:p>
+        </p:txBody>
+      </p:sp>
+      <p:sp>
+        <p:nvSpPr>
+          <p:cNvPr id="8" name="TextBox 7"/>
+          <p:cNvSpPr txBox="1"/>
+          <p:nvPr/>
+        </p:nvSpPr>
+        <p:spPr>
+          <a:xfrm>
+            <a:off x="4892040" y="2933827"/>
+            <a:ext cx="6613855" cy="457200"/>
           </a:xfrm>
           <a:prstGeom prst="rect">
             <a:avLst/>
@@ -12455,21 +12114,62 @@
                 <a:ea typeface="Yu Gothic"/>
                 <a:cs typeface="Yu Gothic"/>
               </a:rPr>
-              <a:t>AIがその選別を不要にし、疑う人も突破される時代が始まった</a:t>
-            </a:r>
-          </a:p>
-        </p:txBody>
-      </p:sp>
-      <p:sp>
-        <p:nvSpPr>
-          <p:cNvPr id="8" name="TextBox 7"/>
-          <p:cNvSpPr txBox="1"/>
-          <p:nvPr/>
-        </p:nvSpPr>
-        <p:spPr>
-          <a:xfrm>
-            <a:off x="731520" y="3589020"/>
-            <a:ext cx="731520" cy="457200"/>
+              <a:t>番号や映像を信じず、切る</a:t>
+            </a:r>
+          </a:p>
+        </p:txBody>
+      </p:sp>
+      <p:sp>
+        <p:nvSpPr>
+          <p:cNvPr id="9" name="TextBox 8"/>
+          <p:cNvSpPr txBox="1"/>
+          <p:nvPr/>
+        </p:nvSpPr>
+        <p:spPr>
+          <a:xfrm>
+            <a:off x="4892040" y="3427603"/>
+            <a:ext cx="6613855" cy="331977"/>
+          </a:xfrm>
+          <a:prstGeom prst="rect">
+            <a:avLst/>
+          </a:prstGeom>
+          <a:noFill/>
+        </p:spPr>
+        <p:txBody>
+          <a:bodyPr wrap="square" anchor="t">
+            <a:noAutofit/>
+          </a:bodyPr>
+          <a:lstStyle/>
+          <a:p>
+            <a:pPr algn="l">
+              <a:lnSpc>
+                <a:spcPct val="130000"/>
+              </a:lnSpc>
+            </a:pPr>
+            <a:r>
+              <a:rPr sz="1900" b="0">
+                <a:solidFill>
+                  <a:srgbClr val="5C6472"/>
+                </a:solidFill>
+                <a:latin typeface="Yu Gothic"/>
+                <a:ea typeface="Yu Gothic"/>
+                <a:cs typeface="Yu Gothic"/>
+              </a:rPr>
+              <a:t>「誰にも言うな」「ATM」「ギフトカード」は即切りの合図</a:t>
+            </a:r>
+          </a:p>
+        </p:txBody>
+      </p:sp>
+      <p:sp>
+        <p:nvSpPr>
+          <p:cNvPr id="10" name="TextBox 9"/>
+          <p:cNvSpPr txBox="1"/>
+          <p:nvPr/>
+        </p:nvSpPr>
+        <p:spPr>
+          <a:xfrm>
+            <a:off x="685800" y="3908044"/>
+            <a:ext cx="3931920" cy="457200"/>
           </a:xfrm>
           <a:prstGeom prst="rect">
             <a:avLst/>
@@ -12482,13 +12182,13 @@
           </a:bodyPr>
           <a:lstStyle/>
           <a:p>
-            <a:pPr algn="r">
+            <a:pPr algn="l">
               <a:lnSpc>
                 <a:spcPct val="115000"/>
               </a:lnSpc>
             </a:pPr>
             <a:r>
-              <a:rPr sz="2800" b="1">
+              <a:rPr sz="2000" b="1">
                 <a:solidFill>
                   <a:srgbClr val="B9791F"/>
                 </a:solidFill>
@@ -12496,21 +12196,21 @@
                 <a:ea typeface="Yu Gothic"/>
                 <a:cs typeface="Yu Gothic"/>
               </a:rPr>
-              <a:t>3</a:t>
-            </a:r>
-          </a:p>
-        </p:txBody>
-      </p:sp>
-      <p:sp>
-        <p:nvSpPr>
-          <p:cNvPr id="9" name="TextBox 8"/>
-          <p:cNvSpPr txBox="1"/>
-          <p:nvPr/>
-        </p:nvSpPr>
-        <p:spPr>
-          <a:xfrm>
-            <a:off x="1508760" y="3589020"/>
-            <a:ext cx="9997135" cy="457200"/>
+              <a:t>③【切ったあと】</a:t>
+            </a:r>
+          </a:p>
+        </p:txBody>
+      </p:sp>
+      <p:sp>
+        <p:nvSpPr>
+          <p:cNvPr id="11" name="TextBox 10"/>
+          <p:cNvSpPr txBox="1"/>
+          <p:nvPr/>
+        </p:nvSpPr>
+        <p:spPr>
+          <a:xfrm>
+            <a:off x="4892040" y="3908044"/>
+            <a:ext cx="6613855" cy="457200"/>
           </a:xfrm>
           <a:prstGeom prst="rect">
             <a:avLst/>
@@ -12537,81 +12237,99 @@
                 <a:ea typeface="Yu Gothic"/>
                 <a:cs typeface="Yu Gothic"/>
               </a:rPr>
-              <a:t>いまの日本の主役は、AIではなく「番号」</a:t>
-            </a:r>
-          </a:p>
-        </p:txBody>
-      </p:sp>
-      <p:sp>
-        <p:nvSpPr>
-          <p:cNvPr id="10" name="TextBox 9"/>
-          <p:cNvSpPr txBox="1"/>
-          <p:nvPr/>
-        </p:nvSpPr>
-        <p:spPr>
-          <a:xfrm>
-            <a:off x="731520" y="4331970"/>
-            <a:ext cx="731520" cy="457200"/>
-          </a:xfrm>
-          <a:prstGeom prst="rect">
-            <a:avLst/>
-          </a:prstGeom>
-          <a:noFill/>
-        </p:spPr>
-        <p:txBody>
-          <a:bodyPr wrap="square" anchor="ctr">
-            <a:noAutofit/>
-          </a:bodyPr>
-          <a:lstStyle/>
-          <a:p>
-            <a:pPr algn="r">
+              <a:t>自分で調べた番号で確かめる</a:t>
+            </a:r>
+          </a:p>
+        </p:txBody>
+      </p:sp>
+      <p:sp>
+        <p:nvSpPr>
+          <p:cNvPr id="12" name="TextBox 11"/>
+          <p:cNvSpPr txBox="1"/>
+          <p:nvPr/>
+        </p:nvSpPr>
+        <p:spPr>
+          <a:xfrm>
+            <a:off x="4892040" y="4401820"/>
+            <a:ext cx="6613855" cy="645668"/>
+          </a:xfrm>
+          <a:prstGeom prst="rect">
+            <a:avLst/>
+          </a:prstGeom>
+          <a:noFill/>
+        </p:spPr>
+        <p:txBody>
+          <a:bodyPr wrap="square" anchor="t">
+            <a:noAutofit/>
+          </a:bodyPr>
+          <a:lstStyle/>
+          <a:p>
+            <a:pPr algn="l">
               <a:lnSpc>
-                <a:spcPct val="115000"/>
+                <a:spcPct val="130000"/>
               </a:lnSpc>
             </a:pPr>
             <a:r>
-              <a:rPr sz="2800" b="1">
-                <a:solidFill>
-                  <a:srgbClr val="B9791F"/>
-                </a:solidFill>
-                <a:latin typeface="Yu Gothic"/>
-                <a:ea typeface="Yu Gothic"/>
-                <a:cs typeface="Yu Gothic"/>
-              </a:rPr>
-              <a:t>4</a:t>
-            </a:r>
-          </a:p>
-        </p:txBody>
-      </p:sp>
-      <p:sp>
-        <p:nvSpPr>
-          <p:cNvPr id="11" name="TextBox 10"/>
-          <p:cNvSpPr txBox="1"/>
-          <p:nvPr/>
-        </p:nvSpPr>
-        <p:spPr>
-          <a:xfrm>
-            <a:off x="1508760" y="4331970"/>
-            <a:ext cx="9997135" cy="457200"/>
-          </a:xfrm>
-          <a:prstGeom prst="rect">
-            <a:avLst/>
-          </a:prstGeom>
-          <a:noFill/>
-        </p:spPr>
-        <p:txBody>
-          <a:bodyPr wrap="square" anchor="ctr">
-            <a:noAutofit/>
-          </a:bodyPr>
-          <a:lstStyle/>
-          <a:p>
-            <a:pPr algn="l">
-              <a:lnSpc>
-                <a:spcPct val="120000"/>
-              </a:lnSpc>
-            </a:pPr>
-            <a:r>
-              <a:rPr sz="3000" b="1">
+              <a:rPr sz="1900" b="0">
+                <a:solidFill>
+                  <a:srgbClr val="5C6472"/>
+                </a:solidFill>
+                <a:latin typeface="Yu Gothic"/>
+                <a:ea typeface="Yu Gothic"/>
+                <a:cs typeface="Yu Gothic"/>
+              </a:rPr>
+              <a:t>着信履歴は使わない／警察相談は「#9110」／家族はもともと知っている番号へ</a:t>
+            </a:r>
+          </a:p>
+        </p:txBody>
+      </p:sp>
+      <p:sp>
+        <p:nvSpPr>
+          <p:cNvPr id="13" name="Rounded Rectangle 12"/>
+          <p:cNvSpPr/>
+          <p:nvPr/>
+        </p:nvSpPr>
+        <p:spPr>
+          <a:xfrm>
+            <a:off x="685800" y="5212080"/>
+            <a:ext cx="10820095" cy="777240"/>
+          </a:xfrm>
+          <a:prstGeom prst="roundRect">
+            <a:avLst>
+              <a:gd name="adj" fmla="val 16000"/>
+            </a:avLst>
+          </a:prstGeom>
+          <a:solidFill>
+            <a:srgbClr val="F3E6CF"/>
+          </a:solidFill>
+          <a:ln>
+            <a:noFill/>
+          </a:ln>
+          <a:effectLst/>
+        </p:spPr>
+        <p:style>
+          <a:lnRef idx="1">
+            <a:schemeClr val="accent1"/>
+          </a:lnRef>
+          <a:fillRef idx="3">
+            <a:schemeClr val="accent1"/>
+          </a:fillRef>
+          <a:effectRef idx="2">
+            <a:schemeClr val="accent1"/>
+          </a:effectRef>
+          <a:fontRef idx="minor">
+            <a:schemeClr val="lt1"/>
+          </a:fontRef>
+        </p:style>
+        <p:txBody>
+          <a:bodyPr rtlCol="0" anchor="ctr" wrap="square" lIns="274320" rIns="274320">
+            <a:noAutofit/>
+          </a:bodyPr>
+          <a:lstStyle/>
+          <a:p>
+            <a:pPr algn="ctr"/>
+            <a:r>
+              <a:rPr sz="2600" b="1">
                 <a:solidFill>
                   <a:srgbClr val="20242C"/>
                 </a:solidFill>
@@ -12619,89 +12337,7 @@
                 <a:ea typeface="Yu Gothic"/>
                 <a:cs typeface="Yu Gothic"/>
               </a:rPr>
-              <a:t>次は、番号偽装にAIが混ざってくる</a:t>
-            </a:r>
-          </a:p>
-        </p:txBody>
-      </p:sp>
-      <p:sp>
-        <p:nvSpPr>
-          <p:cNvPr id="12" name="TextBox 11"/>
-          <p:cNvSpPr txBox="1"/>
-          <p:nvPr/>
-        </p:nvSpPr>
-        <p:spPr>
-          <a:xfrm>
-            <a:off x="731520" y="5074920"/>
-            <a:ext cx="731520" cy="914400"/>
-          </a:xfrm>
-          <a:prstGeom prst="rect">
-            <a:avLst/>
-          </a:prstGeom>
-          <a:noFill/>
-        </p:spPr>
-        <p:txBody>
-          <a:bodyPr wrap="square" anchor="ctr">
-            <a:noAutofit/>
-          </a:bodyPr>
-          <a:lstStyle/>
-          <a:p>
-            <a:pPr algn="r">
-              <a:lnSpc>
-                <a:spcPct val="115000"/>
-              </a:lnSpc>
-            </a:pPr>
-            <a:r>
-              <a:rPr sz="2800" b="1">
-                <a:solidFill>
-                  <a:srgbClr val="B9791F"/>
-                </a:solidFill>
-                <a:latin typeface="Yu Gothic"/>
-                <a:ea typeface="Yu Gothic"/>
-                <a:cs typeface="Yu Gothic"/>
-              </a:rPr>
-              <a:t>5</a:t>
-            </a:r>
-          </a:p>
-        </p:txBody>
-      </p:sp>
-      <p:sp>
-        <p:nvSpPr>
-          <p:cNvPr id="13" name="TextBox 12"/>
-          <p:cNvSpPr txBox="1"/>
-          <p:nvPr/>
-        </p:nvSpPr>
-        <p:spPr>
-          <a:xfrm>
-            <a:off x="1508760" y="5074920"/>
-            <a:ext cx="9997135" cy="914400"/>
-          </a:xfrm>
-          <a:prstGeom prst="rect">
-            <a:avLst/>
-          </a:prstGeom>
-          <a:noFill/>
-        </p:spPr>
-        <p:txBody>
-          <a:bodyPr wrap="square" anchor="ctr">
-            <a:noAutofit/>
-          </a:bodyPr>
-          <a:lstStyle/>
-          <a:p>
-            <a:pPr algn="l">
-              <a:lnSpc>
-                <a:spcPct val="120000"/>
-              </a:lnSpc>
-            </a:pPr>
-            <a:r>
-              <a:rPr sz="3000" b="1">
-                <a:solidFill>
-                  <a:srgbClr val="20242C"/>
-                </a:solidFill>
-                <a:latin typeface="Yu Gothic"/>
-                <a:ea typeface="Yu Gothic"/>
-                <a:cs typeface="Yu Gothic"/>
-              </a:rPr>
-              <a:t>だから——見分けるのをやめて、一度切って、自分で調べてかけ直す</a:t>
+              <a:t>電話では、その場で送金せず、口座や暗証番号も伝えない</a:t>
             </a:r>
           </a:p>
         </p:txBody>
@@ -12806,8 +12442,89 @@
         </p:nvSpPr>
         <p:spPr>
           <a:xfrm>
-            <a:off x="502920" y="1188720"/>
-            <a:ext cx="11185855" cy="3657599"/>
+            <a:off x="685800" y="411480"/>
+            <a:ext cx="10820095" cy="960120"/>
+          </a:xfrm>
+          <a:prstGeom prst="rect">
+            <a:avLst/>
+          </a:prstGeom>
+          <a:noFill/>
+        </p:spPr>
+        <p:txBody>
+          <a:bodyPr wrap="square" anchor="b">
+            <a:noAutofit/>
+          </a:bodyPr>
+          <a:lstStyle/>
+          <a:p>
+            <a:pPr algn="l"/>
+            <a:r>
+              <a:rPr sz="4000" b="1">
+                <a:solidFill>
+                  <a:srgbClr val="B9791F"/>
+                </a:solidFill>
+                <a:latin typeface="Yu Gothic"/>
+                <a:ea typeface="Yu Gothic"/>
+                <a:cs typeface="Yu Gothic"/>
+              </a:rPr>
+              <a:t>今日のまとめ</a:t>
+            </a:r>
+          </a:p>
+        </p:txBody>
+      </p:sp>
+      <p:sp>
+        <p:nvSpPr>
+          <p:cNvPr id="3" name="Rectangle 2"/>
+          <p:cNvSpPr/>
+          <p:nvPr/>
+        </p:nvSpPr>
+        <p:spPr>
+          <a:xfrm>
+            <a:off x="685800" y="1463040"/>
+            <a:ext cx="2377440" cy="50292"/>
+          </a:xfrm>
+          <a:prstGeom prst="rect">
+            <a:avLst/>
+          </a:prstGeom>
+          <a:solidFill>
+            <a:srgbClr val="B9791F"/>
+          </a:solidFill>
+          <a:ln>
+            <a:noFill/>
+          </a:ln>
+          <a:effectLst/>
+        </p:spPr>
+        <p:style>
+          <a:lnRef idx="1">
+            <a:schemeClr val="accent1"/>
+          </a:lnRef>
+          <a:fillRef idx="3">
+            <a:schemeClr val="accent1"/>
+          </a:fillRef>
+          <a:effectRef idx="2">
+            <a:schemeClr val="accent1"/>
+          </a:effectRef>
+          <a:fontRef idx="minor">
+            <a:schemeClr val="lt1"/>
+          </a:fontRef>
+        </p:style>
+        <p:txBody>
+          <a:bodyPr rtlCol="0" anchor="ctr"/>
+          <a:lstStyle/>
+          <a:p>
+            <a:pPr algn="ctr"/>
+          </a:p>
+        </p:txBody>
+      </p:sp>
+      <p:sp>
+        <p:nvSpPr>
+          <p:cNvPr id="4" name="TextBox 3"/>
+          <p:cNvSpPr txBox="1"/>
+          <p:nvPr/>
+        </p:nvSpPr>
+        <p:spPr>
+          <a:xfrm>
+            <a:off x="731520" y="1645920"/>
+            <a:ext cx="731520" cy="457200"/>
           </a:xfrm>
           <a:prstGeom prst="rect">
             <a:avLst/>
@@ -12820,53 +12537,76 @@
           </a:bodyPr>
           <a:lstStyle/>
           <a:p>
-            <a:pPr algn="ctr">
+            <a:pPr algn="r">
               <a:lnSpc>
-                <a:spcPct val="128000"/>
+                <a:spcPct val="115000"/>
               </a:lnSpc>
             </a:pPr>
             <a:r>
-              <a:rPr sz="5400" b="1">
-                <a:solidFill>
-                  <a:srgbClr val="20242C"/>
-                </a:solidFill>
-                <a:latin typeface="Yu Mincho"/>
-                <a:ea typeface="Yu Mincho"/>
-                <a:cs typeface="Yu Mincho"/>
-              </a:rPr>
-              <a:t>冒頭の1億円は、</a:t>
-            </a:r>
-          </a:p>
-          <a:p>
-            <a:pPr algn="ctr">
+              <a:rPr sz="2800" b="1">
+                <a:solidFill>
+                  <a:srgbClr val="B9791F"/>
+                </a:solidFill>
+                <a:latin typeface="Yu Gothic"/>
+                <a:ea typeface="Yu Gothic"/>
+                <a:cs typeface="Yu Gothic"/>
+              </a:rPr>
+              <a:t>1</a:t>
+            </a:r>
+          </a:p>
+        </p:txBody>
+      </p:sp>
+      <p:sp>
+        <p:nvSpPr>
+          <p:cNvPr id="5" name="TextBox 4"/>
+          <p:cNvSpPr txBox="1"/>
+          <p:nvPr/>
+        </p:nvSpPr>
+        <p:spPr>
+          <a:xfrm>
+            <a:off x="1508760" y="1645920"/>
+            <a:ext cx="9997135" cy="457200"/>
+          </a:xfrm>
+          <a:prstGeom prst="rect">
+            <a:avLst/>
+          </a:prstGeom>
+          <a:noFill/>
+        </p:spPr>
+        <p:txBody>
+          <a:bodyPr wrap="square" anchor="ctr">
+            <a:noAutofit/>
+          </a:bodyPr>
+          <a:lstStyle/>
+          <a:p>
+            <a:pPr algn="l">
               <a:lnSpc>
-                <a:spcPct val="128000"/>
+                <a:spcPct val="120000"/>
               </a:lnSpc>
             </a:pPr>
             <a:r>
-              <a:rPr sz="5400" b="1">
+              <a:rPr sz="3000" b="1">
                 <a:solidFill>
                   <a:srgbClr val="20242C"/>
                 </a:solidFill>
-                <a:latin typeface="Yu Mincho"/>
-                <a:ea typeface="Yu Mincho"/>
-                <a:cs typeface="Yu Mincho"/>
-              </a:rPr>
-              <a:t>あらためて、差し上げられません。</a:t>
-            </a:r>
-          </a:p>
-        </p:txBody>
-      </p:sp>
-      <p:sp>
-        <p:nvSpPr>
-          <p:cNvPr id="3" name="TextBox 2"/>
-          <p:cNvSpPr txBox="1"/>
-          <p:nvPr/>
-        </p:nvSpPr>
-        <p:spPr>
-          <a:xfrm>
-            <a:off x="685800" y="4983479"/>
-            <a:ext cx="10820095" cy="1005840"/>
+                <a:latin typeface="Yu Gothic"/>
+                <a:ea typeface="Yu Gothic"/>
+                <a:cs typeface="Yu Gothic"/>
+              </a:rPr>
+              <a:t>バレバレの嘘は、疑わない人を選ぶ「フィルタ」だった</a:t>
+            </a:r>
+          </a:p>
+        </p:txBody>
+      </p:sp>
+      <p:sp>
+        <p:nvSpPr>
+          <p:cNvPr id="6" name="TextBox 5"/>
+          <p:cNvSpPr txBox="1"/>
+          <p:nvPr/>
+        </p:nvSpPr>
+        <p:spPr>
+          <a:xfrm>
+            <a:off x="731520" y="2388870"/>
+            <a:ext cx="731520" cy="914400"/>
           </a:xfrm>
           <a:prstGeom prst="rect">
             <a:avLst/>
@@ -12879,28 +12619,315 @@
           </a:bodyPr>
           <a:lstStyle/>
           <a:p>
-            <a:pPr algn="ctr">
+            <a:pPr algn="r">
               <a:lnSpc>
-                <a:spcPct val="130000"/>
+                <a:spcPct val="115000"/>
               </a:lnSpc>
             </a:pPr>
             <a:r>
-              <a:rPr sz="2200" b="0">
-                <a:solidFill>
-                  <a:srgbClr val="5C6472"/>
-                </a:solidFill>
-                <a:latin typeface="Yu Gothic"/>
-                <a:ea typeface="Yu Gothic"/>
-                <a:cs typeface="Yu Gothic"/>
-              </a:rPr>
-              <a:t>帰ったらご家族に「1億円をもらい損ねた話」を——笑い話が、そのまま家族を守る話になります</a:t>
-            </a:r>
-          </a:p>
-        </p:txBody>
-      </p:sp>
-      <p:sp>
-        <p:nvSpPr>
-          <p:cNvPr id="4" name="meta:pageno"/>
+              <a:rPr sz="2800" b="1">
+                <a:solidFill>
+                  <a:srgbClr val="B9791F"/>
+                </a:solidFill>
+                <a:latin typeface="Yu Gothic"/>
+                <a:ea typeface="Yu Gothic"/>
+                <a:cs typeface="Yu Gothic"/>
+              </a:rPr>
+              <a:t>2</a:t>
+            </a:r>
+          </a:p>
+        </p:txBody>
+      </p:sp>
+      <p:sp>
+        <p:nvSpPr>
+          <p:cNvPr id="7" name="TextBox 6"/>
+          <p:cNvSpPr txBox="1"/>
+          <p:nvPr/>
+        </p:nvSpPr>
+        <p:spPr>
+          <a:xfrm>
+            <a:off x="1508760" y="2388870"/>
+            <a:ext cx="9997135" cy="914400"/>
+          </a:xfrm>
+          <a:prstGeom prst="rect">
+            <a:avLst/>
+          </a:prstGeom>
+          <a:noFill/>
+        </p:spPr>
+        <p:txBody>
+          <a:bodyPr wrap="square" anchor="ctr">
+            <a:noAutofit/>
+          </a:bodyPr>
+          <a:lstStyle/>
+          <a:p>
+            <a:pPr algn="l">
+              <a:lnSpc>
+                <a:spcPct val="120000"/>
+              </a:lnSpc>
+            </a:pPr>
+            <a:r>
+              <a:rPr sz="3000" b="1">
+                <a:solidFill>
+                  <a:srgbClr val="20242C"/>
+                </a:solidFill>
+                <a:latin typeface="Yu Gothic"/>
+                <a:ea typeface="Yu Gothic"/>
+                <a:cs typeface="Yu Gothic"/>
+              </a:rPr>
+              <a:t>AIがその選別を不要にし、疑う人も突破される時代が始まった</a:t>
+            </a:r>
+          </a:p>
+        </p:txBody>
+      </p:sp>
+      <p:sp>
+        <p:nvSpPr>
+          <p:cNvPr id="8" name="TextBox 7"/>
+          <p:cNvSpPr txBox="1"/>
+          <p:nvPr/>
+        </p:nvSpPr>
+        <p:spPr>
+          <a:xfrm>
+            <a:off x="731520" y="3589020"/>
+            <a:ext cx="731520" cy="457200"/>
+          </a:xfrm>
+          <a:prstGeom prst="rect">
+            <a:avLst/>
+          </a:prstGeom>
+          <a:noFill/>
+        </p:spPr>
+        <p:txBody>
+          <a:bodyPr wrap="square" anchor="ctr">
+            <a:noAutofit/>
+          </a:bodyPr>
+          <a:lstStyle/>
+          <a:p>
+            <a:pPr algn="r">
+              <a:lnSpc>
+                <a:spcPct val="115000"/>
+              </a:lnSpc>
+            </a:pPr>
+            <a:r>
+              <a:rPr sz="2800" b="1">
+                <a:solidFill>
+                  <a:srgbClr val="B9791F"/>
+                </a:solidFill>
+                <a:latin typeface="Yu Gothic"/>
+                <a:ea typeface="Yu Gothic"/>
+                <a:cs typeface="Yu Gothic"/>
+              </a:rPr>
+              <a:t>3</a:t>
+            </a:r>
+          </a:p>
+        </p:txBody>
+      </p:sp>
+      <p:sp>
+        <p:nvSpPr>
+          <p:cNvPr id="9" name="TextBox 8"/>
+          <p:cNvSpPr txBox="1"/>
+          <p:nvPr/>
+        </p:nvSpPr>
+        <p:spPr>
+          <a:xfrm>
+            <a:off x="1508760" y="3589020"/>
+            <a:ext cx="9997135" cy="457200"/>
+          </a:xfrm>
+          <a:prstGeom prst="rect">
+            <a:avLst/>
+          </a:prstGeom>
+          <a:noFill/>
+        </p:spPr>
+        <p:txBody>
+          <a:bodyPr wrap="square" anchor="ctr">
+            <a:noAutofit/>
+          </a:bodyPr>
+          <a:lstStyle/>
+          <a:p>
+            <a:pPr algn="l">
+              <a:lnSpc>
+                <a:spcPct val="120000"/>
+              </a:lnSpc>
+            </a:pPr>
+            <a:r>
+              <a:rPr sz="3000" b="1">
+                <a:solidFill>
+                  <a:srgbClr val="20242C"/>
+                </a:solidFill>
+                <a:latin typeface="Yu Gothic"/>
+                <a:ea typeface="Yu Gothic"/>
+                <a:cs typeface="Yu Gothic"/>
+              </a:rPr>
+              <a:t>いまの日本の主役は、AIではなく「番号」</a:t>
+            </a:r>
+          </a:p>
+        </p:txBody>
+      </p:sp>
+      <p:sp>
+        <p:nvSpPr>
+          <p:cNvPr id="10" name="TextBox 9"/>
+          <p:cNvSpPr txBox="1"/>
+          <p:nvPr/>
+        </p:nvSpPr>
+        <p:spPr>
+          <a:xfrm>
+            <a:off x="731520" y="4331970"/>
+            <a:ext cx="731520" cy="457200"/>
+          </a:xfrm>
+          <a:prstGeom prst="rect">
+            <a:avLst/>
+          </a:prstGeom>
+          <a:noFill/>
+        </p:spPr>
+        <p:txBody>
+          <a:bodyPr wrap="square" anchor="ctr">
+            <a:noAutofit/>
+          </a:bodyPr>
+          <a:lstStyle/>
+          <a:p>
+            <a:pPr algn="r">
+              <a:lnSpc>
+                <a:spcPct val="115000"/>
+              </a:lnSpc>
+            </a:pPr>
+            <a:r>
+              <a:rPr sz="2800" b="1">
+                <a:solidFill>
+                  <a:srgbClr val="B9791F"/>
+                </a:solidFill>
+                <a:latin typeface="Yu Gothic"/>
+                <a:ea typeface="Yu Gothic"/>
+                <a:cs typeface="Yu Gothic"/>
+              </a:rPr>
+              <a:t>4</a:t>
+            </a:r>
+          </a:p>
+        </p:txBody>
+      </p:sp>
+      <p:sp>
+        <p:nvSpPr>
+          <p:cNvPr id="11" name="TextBox 10"/>
+          <p:cNvSpPr txBox="1"/>
+          <p:nvPr/>
+        </p:nvSpPr>
+        <p:spPr>
+          <a:xfrm>
+            <a:off x="1508760" y="4331970"/>
+            <a:ext cx="9997135" cy="457200"/>
+          </a:xfrm>
+          <a:prstGeom prst="rect">
+            <a:avLst/>
+          </a:prstGeom>
+          <a:noFill/>
+        </p:spPr>
+        <p:txBody>
+          <a:bodyPr wrap="square" anchor="ctr">
+            <a:noAutofit/>
+          </a:bodyPr>
+          <a:lstStyle/>
+          <a:p>
+            <a:pPr algn="l">
+              <a:lnSpc>
+                <a:spcPct val="120000"/>
+              </a:lnSpc>
+            </a:pPr>
+            <a:r>
+              <a:rPr sz="3000" b="1">
+                <a:solidFill>
+                  <a:srgbClr val="20242C"/>
+                </a:solidFill>
+                <a:latin typeface="Yu Gothic"/>
+                <a:ea typeface="Yu Gothic"/>
+                <a:cs typeface="Yu Gothic"/>
+              </a:rPr>
+              <a:t>次は、番号偽装にAIが混ざってくる</a:t>
+            </a:r>
+          </a:p>
+        </p:txBody>
+      </p:sp>
+      <p:sp>
+        <p:nvSpPr>
+          <p:cNvPr id="12" name="TextBox 11"/>
+          <p:cNvSpPr txBox="1"/>
+          <p:nvPr/>
+        </p:nvSpPr>
+        <p:spPr>
+          <a:xfrm>
+            <a:off x="731520" y="5074920"/>
+            <a:ext cx="731520" cy="914400"/>
+          </a:xfrm>
+          <a:prstGeom prst="rect">
+            <a:avLst/>
+          </a:prstGeom>
+          <a:noFill/>
+        </p:spPr>
+        <p:txBody>
+          <a:bodyPr wrap="square" anchor="ctr">
+            <a:noAutofit/>
+          </a:bodyPr>
+          <a:lstStyle/>
+          <a:p>
+            <a:pPr algn="r">
+              <a:lnSpc>
+                <a:spcPct val="115000"/>
+              </a:lnSpc>
+            </a:pPr>
+            <a:r>
+              <a:rPr sz="2800" b="1">
+                <a:solidFill>
+                  <a:srgbClr val="B9791F"/>
+                </a:solidFill>
+                <a:latin typeface="Yu Gothic"/>
+                <a:ea typeface="Yu Gothic"/>
+                <a:cs typeface="Yu Gothic"/>
+              </a:rPr>
+              <a:t>5</a:t>
+            </a:r>
+          </a:p>
+        </p:txBody>
+      </p:sp>
+      <p:sp>
+        <p:nvSpPr>
+          <p:cNvPr id="13" name="TextBox 12"/>
+          <p:cNvSpPr txBox="1"/>
+          <p:nvPr/>
+        </p:nvSpPr>
+        <p:spPr>
+          <a:xfrm>
+            <a:off x="1508760" y="5074920"/>
+            <a:ext cx="9997135" cy="914400"/>
+          </a:xfrm>
+          <a:prstGeom prst="rect">
+            <a:avLst/>
+          </a:prstGeom>
+          <a:noFill/>
+        </p:spPr>
+        <p:txBody>
+          <a:bodyPr wrap="square" anchor="ctr">
+            <a:noAutofit/>
+          </a:bodyPr>
+          <a:lstStyle/>
+          <a:p>
+            <a:pPr algn="l">
+              <a:lnSpc>
+                <a:spcPct val="120000"/>
+              </a:lnSpc>
+            </a:pPr>
+            <a:r>
+              <a:rPr sz="3000" b="1">
+                <a:solidFill>
+                  <a:srgbClr val="20242C"/>
+                </a:solidFill>
+                <a:latin typeface="Yu Gothic"/>
+                <a:ea typeface="Yu Gothic"/>
+                <a:cs typeface="Yu Gothic"/>
+              </a:rPr>
+              <a:t>だから——見分けるのをやめて、一度切って、自分で調べてかけ直す</a:t>
+            </a:r>
+          </a:p>
+        </p:txBody>
+      </p:sp>
+      <p:sp>
+        <p:nvSpPr>
+          <p:cNvPr id="14" name="meta:pageno"/>
           <p:cNvSpPr txBox="1"/>
           <p:nvPr/>
         </p:nvSpPr>
@@ -12937,7 +12964,7 @@
       </p:sp>
       <p:sp>
         <p:nvSpPr>
-          <p:cNvPr id="5" name="meta:part"/>
+          <p:cNvPr id="15" name="meta:part"/>
           <p:cNvSpPr txBox="1"/>
           <p:nvPr/>
         </p:nvSpPr>
@@ -12998,6 +13025,198 @@
         </p:nvSpPr>
         <p:spPr>
           <a:xfrm>
+            <a:off x="502920" y="1188720"/>
+            <a:ext cx="11185855" cy="3657599"/>
+          </a:xfrm>
+          <a:prstGeom prst="rect">
+            <a:avLst/>
+          </a:prstGeom>
+          <a:noFill/>
+        </p:spPr>
+        <p:txBody>
+          <a:bodyPr wrap="square" anchor="ctr">
+            <a:noAutofit/>
+          </a:bodyPr>
+          <a:lstStyle/>
+          <a:p>
+            <a:pPr algn="ctr">
+              <a:lnSpc>
+                <a:spcPct val="128000"/>
+              </a:lnSpc>
+            </a:pPr>
+            <a:r>
+              <a:rPr sz="5400" b="1">
+                <a:solidFill>
+                  <a:srgbClr val="20242C"/>
+                </a:solidFill>
+                <a:latin typeface="Yu Mincho"/>
+                <a:ea typeface="Yu Mincho"/>
+                <a:cs typeface="Yu Mincho"/>
+              </a:rPr>
+              <a:t>冒頭の1億円は、</a:t>
+            </a:r>
+          </a:p>
+          <a:p>
+            <a:pPr algn="ctr">
+              <a:lnSpc>
+                <a:spcPct val="128000"/>
+              </a:lnSpc>
+            </a:pPr>
+            <a:r>
+              <a:rPr sz="5400" b="1">
+                <a:solidFill>
+                  <a:srgbClr val="20242C"/>
+                </a:solidFill>
+                <a:latin typeface="Yu Mincho"/>
+                <a:ea typeface="Yu Mincho"/>
+                <a:cs typeface="Yu Mincho"/>
+              </a:rPr>
+              <a:t>あらためて、差し上げられません。</a:t>
+            </a:r>
+          </a:p>
+        </p:txBody>
+      </p:sp>
+      <p:sp>
+        <p:nvSpPr>
+          <p:cNvPr id="3" name="TextBox 2"/>
+          <p:cNvSpPr txBox="1"/>
+          <p:nvPr/>
+        </p:nvSpPr>
+        <p:spPr>
+          <a:xfrm>
+            <a:off x="685800" y="4983479"/>
+            <a:ext cx="10820095" cy="1005840"/>
+          </a:xfrm>
+          <a:prstGeom prst="rect">
+            <a:avLst/>
+          </a:prstGeom>
+          <a:noFill/>
+        </p:spPr>
+        <p:txBody>
+          <a:bodyPr wrap="square" anchor="ctr">
+            <a:noAutofit/>
+          </a:bodyPr>
+          <a:lstStyle/>
+          <a:p>
+            <a:pPr algn="ctr">
+              <a:lnSpc>
+                <a:spcPct val="130000"/>
+              </a:lnSpc>
+            </a:pPr>
+            <a:r>
+              <a:rPr sz="2200" b="0">
+                <a:solidFill>
+                  <a:srgbClr val="5C6472"/>
+                </a:solidFill>
+                <a:latin typeface="Yu Gothic"/>
+                <a:ea typeface="Yu Gothic"/>
+                <a:cs typeface="Yu Gothic"/>
+              </a:rPr>
+              <a:t>帰ったらご家族に「1億円をもらい損ねた話」を——笑い話が、そのまま家族を守る話になります</a:t>
+            </a:r>
+          </a:p>
+        </p:txBody>
+      </p:sp>
+      <p:sp>
+        <p:nvSpPr>
+          <p:cNvPr id="4" name="meta:pageno"/>
+          <p:cNvSpPr txBox="1"/>
+          <p:nvPr/>
+        </p:nvSpPr>
+        <p:spPr>
+          <a:xfrm>
+            <a:off x="10408615" y="6309360"/>
+            <a:ext cx="1097280" cy="365760"/>
+          </a:xfrm>
+          <a:prstGeom prst="rect">
+            <a:avLst/>
+          </a:prstGeom>
+          <a:noFill/>
+        </p:spPr>
+        <p:txBody>
+          <a:bodyPr wrap="square" anchor="ctr">
+            <a:noAutofit/>
+          </a:bodyPr>
+          <a:lstStyle/>
+          <a:p>
+            <a:pPr algn="r"/>
+            <a:r>
+              <a:rPr sz="1200" b="0">
+                <a:solidFill>
+                  <a:srgbClr val="5C6472"/>
+                </a:solidFill>
+                <a:latin typeface="Yu Gothic"/>
+                <a:ea typeface="Yu Gothic"/>
+                <a:cs typeface="Yu Gothic"/>
+              </a:rPr>
+              <a:t>32</a:t>
+            </a:r>
+          </a:p>
+        </p:txBody>
+      </p:sp>
+      <p:sp>
+        <p:nvSpPr>
+          <p:cNvPr id="5" name="meta:part"/>
+          <p:cNvSpPr txBox="1"/>
+          <p:nvPr/>
+        </p:nvSpPr>
+        <p:spPr>
+          <a:xfrm>
+            <a:off x="685800" y="6309360"/>
+            <a:ext cx="5486400" cy="365760"/>
+          </a:xfrm>
+          <a:prstGeom prst="rect">
+            <a:avLst/>
+          </a:prstGeom>
+          <a:noFill/>
+        </p:spPr>
+        <p:txBody>
+          <a:bodyPr wrap="square" anchor="ctr">
+            <a:noAutofit/>
+          </a:bodyPr>
+          <a:lstStyle/>
+          <a:p>
+            <a:pPr algn="l"/>
+            <a:r>
+              <a:rPr sz="1200" b="0">
+                <a:solidFill>
+                  <a:srgbClr val="5C6472"/>
+                </a:solidFill>
+                <a:latin typeface="Yu Gothic"/>
+                <a:ea typeface="Yu Gothic"/>
+                <a:cs typeface="Yu Gothic"/>
+              </a:rPr>
+              <a:t>4 結論</a:t>
+            </a:r>
+          </a:p>
+        </p:txBody>
+      </p:sp>
+    </p:spTree>
+  </p:cSld>
+  <p:clrMapOvr>
+    <a:masterClrMapping/>
+  </p:clrMapOvr>
+</p:sld>
+</file>
+
+<file path=ppt/slides/slide33.xml><?xml version="1.0" encoding="utf-8"?>
+<p:sld xmlns:a="http://schemas.openxmlformats.org/drawingml/2006/main" xmlns:p="http://schemas.openxmlformats.org/presentationml/2006/main" xmlns:r="http://schemas.openxmlformats.org/officeDocument/2006/relationships">
+  <p:cSld>
+    <p:spTree>
+      <p:nvGrpSpPr>
+        <p:cNvPr id="1" name=""/>
+        <p:cNvGrpSpPr/>
+        <p:nvPr/>
+      </p:nvGrpSpPr>
+      <p:grpSpPr/>
+      <p:sp>
+        <p:nvSpPr>
+          <p:cNvPr id="2" name="TextBox 1"/>
+          <p:cNvSpPr txBox="1"/>
+          <p:nvPr/>
+        </p:nvSpPr>
+        <p:spPr>
+          <a:xfrm>
             <a:off x="685800" y="411480"/>
             <a:ext cx="10820095" cy="960120"/>
           </a:xfrm>
@@ -13270,7 +13489,7 @@
                 <a:ea typeface="Yu Gothic"/>
                 <a:cs typeface="Yu Gothic"/>
               </a:rPr>
-              <a:t>32</a:t>
+              <a:t>33</a:t>
             </a:r>
           </a:p>
         </p:txBody>
@@ -14441,7 +14660,7 @@
                 <a:ea typeface="Yu Gothic"/>
                 <a:cs typeface="Yu Gothic"/>
               </a:rPr>
-              <a:t>この商売、200年前から ―「スペインの囚人」</a:t>
+              <a:t>「金持ちを助けて」——この商売、200年前から</a:t>
             </a:r>
           </a:p>
         </p:txBody>
@@ -14549,16 +14768,16 @@
           </a:bodyPr>
           <a:lstStyle/>
           <a:p>
-            <a:pPr marL="355600" indent="-355600">
+            <a:pPr marL="304800" indent="-304800">
               <a:lnSpc>
                 <a:spcPct val="135000"/>
               </a:lnSpc>
               <a:spcAft>
-                <a:spcPts val="979"/>
+                <a:spcPts val="839"/>
               </a:spcAft>
             </a:pPr>
             <a:r>
-              <a:rPr sz="2800" b="0">
+              <a:rPr sz="2400" b="0">
                 <a:solidFill>
                   <a:srgbClr val="20242C"/>
                 </a:solidFill>
@@ -14566,20 +14785,20 @@
                 <a:ea typeface="Yu Gothic"/>
                 <a:cs typeface="Yu Gothic"/>
               </a:rPr>
-              <a:t>・19世紀、欧米の資産家に届いた手紙——「牢獄の高貴なお方を救えば、財産の3分の1を」</a:t>
-            </a:r>
-          </a:p>
-          <a:p>
-            <a:pPr marL="355600" indent="-355600">
+              <a:t>・手口を一言でいうと——「囚われたお金持ちを助けてくれたら、財産の3分の1を差し上げます」</a:t>
+            </a:r>
+          </a:p>
+          <a:p>
+            <a:pPr marL="304800" indent="-304800">
               <a:lnSpc>
                 <a:spcPct val="135000"/>
               </a:lnSpc>
               <a:spcAft>
-                <a:spcPts val="979"/>
+                <a:spcPts val="839"/>
               </a:spcAft>
             </a:pPr>
             <a:r>
-              <a:rPr sz="2800" b="0">
+              <a:rPr sz="2400" b="0">
                 <a:solidFill>
                   <a:srgbClr val="20242C"/>
                 </a:solidFill>
@@ -14587,17 +14806,38 @@
                 <a:ea typeface="Yu Gothic"/>
                 <a:cs typeface="Yu Gothic"/>
               </a:rPr>
+              <a:t>・19世紀、スペインから欧米の資産家に届いた手紙。のちに「スペインの囚人」と呼ばれる古典詐欺</a:t>
+            </a:r>
+          </a:p>
+          <a:p>
+            <a:pPr marL="304800" indent="-304800">
+              <a:lnSpc>
+                <a:spcPct val="135000"/>
+              </a:lnSpc>
+              <a:spcAft>
+                <a:spcPts val="839"/>
+              </a:spcAft>
+            </a:pPr>
+            <a:r>
+              <a:rPr sz="2400" b="0">
+                <a:solidFill>
+                  <a:srgbClr val="20242C"/>
+                </a:solidFill>
+                <a:latin typeface="Yu Gothic"/>
+                <a:ea typeface="Yu Gothic"/>
+                <a:cs typeface="Yu Gothic"/>
+              </a:rPr>
               <a:t>・お金を送っても、囚人は出てこない。「手続きに新たな問題が起きた」と追加請求だけが届く</a:t>
             </a:r>
           </a:p>
           <a:p>
-            <a:pPr marL="355600" indent="-355600">
+            <a:pPr marL="304800" indent="-304800">
               <a:lnSpc>
                 <a:spcPct val="135000"/>
               </a:lnSpc>
             </a:pPr>
             <a:r>
-              <a:rPr sz="2800" b="0">
+              <a:rPr sz="2400" b="0">
                 <a:solidFill>
                   <a:srgbClr val="20242C"/>
                 </a:solidFill>

--- a/slides/deepfake-talk.pptx
+++ b/slides/deepfake-talk.pptx
@@ -674,7 +674,7 @@
           <a:lstStyle/>
           <a:p>
             <a:r>
-              <a:t>ゆっくり、順を追って。「ここから、時代が変わります。（中略）一人あたりの手間がほぼゼロになると、“オーダーメイドの詐欺”を何万人にも同時に仕掛けられる。公開情報・資産・肩書き・家族構成が外から見える人ほど、狙う価値が出ます」</a:t>
+              <a:t>ゆっくり、順を追って。「ここから、時代が変わります。大人数に同じ嘘をばらまくのは安い。少人数に専用の嘘を作るのは高い——この経済学が、詐欺の形を200年決めてきました。ところがAIは、その高かった部分——相手を調べる、本物らしい文章や声をつくる、うまく応対する——を丸ごと肩代わりします。一人あたりの手間がほぼゼロになると、“オーダーメイドの詐欺”を何万人にも同時に仕掛けられる。ばらまきの安さで、狙い撃ちの精度が手に入るんです。公開情報・資産・肩書き・家族構成が外から見える人ほど、狙う価値が出ます。見え透いた嘘は、もう来ません。あなたに合わせた、賢い嘘が来ます」</a:t>
             </a:r>
           </a:p>
         </p:txBody>
@@ -6147,7 +6147,7 @@
                 <a:ea typeface="Yu Gothic"/>
                 <a:cs typeface="Yu Gothic"/>
               </a:rPr>
-              <a:t>AI時代：ばらまきから、あなた専用へ</a:t>
+              <a:t>AI時代：ばらまきから、カスタムへ</a:t>
             </a:r>
           </a:p>
         </p:txBody>
@@ -6235,7 +6235,7 @@
                 <a:ea typeface="Yu Gothic"/>
                 <a:cs typeface="Yu Gothic"/>
               </a:rPr>
-              <a:t>・大人数に同じ嘘 ＝ 安い ／ 一人専用の嘘 ＝ 高い（この経済学が詐欺の形を200年決めてきた）</a:t>
+              <a:t>・昔から、同じ嘘を大勢に送るのは「安い」／一人に合わせた嘘を作るのは「高い」——だから詐欺はばらまき型だった</a:t>
             </a:r>
           </a:p>
           <a:p>
@@ -6256,7 +6256,7 @@
                 <a:ea typeface="Yu Gothic"/>
                 <a:cs typeface="Yu Gothic"/>
               </a:rPr>
-              <a:t>・AIが「高い部分」——調べる・本物らしい文章や声を作る・応対する——を丸ごと肩代わり</a:t>
+              <a:t>・AIがその「高い作業」（相手を調べる・本物らしい文章や声を作る・受け答えする）を、タダ同然にした</a:t>
             </a:r>
           </a:p>
           <a:p>
@@ -6274,7 +6274,7 @@
                 <a:ea typeface="Yu Gothic"/>
                 <a:cs typeface="Yu Gothic"/>
               </a:rPr>
-              <a:t>・ばらまきの安さで、狙い撃ちの精度が手に入る</a:t>
+              <a:t>・結果——ばらまきの安さのまま、一人ひとりに合わせた「カスタム詐欺」ができる</a:t>
             </a:r>
           </a:p>
         </p:txBody>
@@ -6333,7 +6333,7 @@
                 <a:ea typeface="Yu Gothic"/>
                 <a:cs typeface="Yu Gothic"/>
               </a:rPr>
-              <a:t>バカな嘘は、もう来ません。あなた専用の、賢い嘘が来ます</a:t>
+              <a:t>見え透いた嘘は、もう来ません。あなたに合わせた、賢い嘘が来ます</a:t>
             </a:r>
           </a:p>
         </p:txBody>

--- a/slides/deepfake-talk.pptx
+++ b/slides/deepfake-talk.pptx
@@ -744,7 +744,7 @@
           <a:lstStyle/>
           <a:p>
             <a:r>
-              <a:t>物語として語り、「被害は約38億円」で一拍おく。「騙されたのは、うっかり者ではありません。一度疑ったプロです」。※「何が起きたか」だけを語り、作り方には触れない。</a:t>
+              <a:t>物語として語る。「香港の、ある会社の経理担当者の話です。本社の財務責任者から『極秘の買収案件だ。誰にも言わず送金の準備をしてほしい』というメールが来て、彼は疑った。当然です、プロですから。ところが確認のために呼ばれたビデオ会議に入ると、画面の向こうにはその財務責任者がいて、よく知る同僚たちもいた。顔も声もいつも通り。彼は15回に分けて送金しました。——会議にいた人間は、本人以外、全員ニセモノでした。被害は約38億円」 一拍おく。「騙されたのは、うっかり者ではありません。一度疑ったプロです」。※「誰にも言わず」がスペインの囚人と同じ決まり文句である点は、触れると気づく人だけ気づく置き方でよい。「何が起きたか」だけを語り、作り方には触れない。</a:t>
             </a:r>
           </a:p>
         </p:txBody>
@@ -5955,7 +5955,7 @@
         <p:spPr>
           <a:xfrm>
             <a:off x="502920" y="1188720"/>
-            <a:ext cx="11185855" cy="4800600"/>
+            <a:ext cx="11185855" cy="3657599"/>
           </a:xfrm>
           <a:prstGeom prst="rect">
             <a:avLst/>
@@ -6025,7 +6025,48 @@
       </p:sp>
       <p:sp>
         <p:nvSpPr>
-          <p:cNvPr id="3" name="meta:pageno"/>
+          <p:cNvPr id="3" name="TextBox 2"/>
+          <p:cNvSpPr txBox="1"/>
+          <p:nvPr/>
+        </p:nvSpPr>
+        <p:spPr>
+          <a:xfrm>
+            <a:off x="685800" y="4983479"/>
+            <a:ext cx="10820095" cy="1005840"/>
+          </a:xfrm>
+          <a:prstGeom prst="rect">
+            <a:avLst/>
+          </a:prstGeom>
+          <a:noFill/>
+        </p:spPr>
+        <p:txBody>
+          <a:bodyPr wrap="square" anchor="ctr">
+            <a:noAutofit/>
+          </a:bodyPr>
+          <a:lstStyle/>
+          <a:p>
+            <a:pPr algn="ctr">
+              <a:lnSpc>
+                <a:spcPct val="130000"/>
+              </a:lnSpc>
+            </a:pPr>
+            <a:r>
+              <a:rPr sz="2200" b="0">
+                <a:solidFill>
+                  <a:srgbClr val="5C6472"/>
+                </a:solidFill>
+                <a:latin typeface="Yu Gothic"/>
+                <a:ea typeface="Yu Gothic"/>
+                <a:cs typeface="Yu Gothic"/>
+              </a:rPr>
+              <a:t>昔のばらまき詐欺は、疑う人を最初からふるい落としていた</a:t>
+            </a:r>
+          </a:p>
+        </p:txBody>
+      </p:sp>
+      <p:sp>
+        <p:nvSpPr>
+          <p:cNvPr id="4" name="meta:pageno"/>
           <p:cNvSpPr txBox="1"/>
           <p:nvPr/>
         </p:nvSpPr>
@@ -6062,7 +6103,7 @@
       </p:sp>
       <p:sp>
         <p:nvSpPr>
-          <p:cNvPr id="4" name="meta:part"/>
+          <p:cNvPr id="5" name="meta:part"/>
           <p:cNvSpPr txBox="1"/>
           <p:nvPr/>
         </p:nvSpPr>
@@ -6570,16 +6611,16 @@
           </a:bodyPr>
           <a:lstStyle/>
           <a:p>
-            <a:pPr marL="355600" indent="-355600">
+            <a:pPr marL="304800" indent="-304800">
               <a:lnSpc>
                 <a:spcPct val="135000"/>
               </a:lnSpc>
               <a:spcAft>
-                <a:spcPts val="979"/>
+                <a:spcPts val="839"/>
               </a:spcAft>
             </a:pPr>
             <a:r>
-              <a:rPr sz="2800" b="0">
+              <a:rPr sz="2400" b="0">
                 <a:solidFill>
                   <a:srgbClr val="20242C"/>
                 </a:solidFill>
@@ -6587,20 +6628,20 @@
                 <a:ea typeface="Yu Gothic"/>
                 <a:cs typeface="Yu Gothic"/>
               </a:rPr>
-              <a:t>・財務責任者から「極秘案件」のメール——彼は疑った。プロだから当然</a:t>
-            </a:r>
-          </a:p>
-          <a:p>
-            <a:pPr marL="355600" indent="-355600">
+              <a:t>・香港支社の経理担当に、本社の財務責任者から「極秘の買収案件。誰にも言わず送金の準備を」というメール——彼は詐欺を疑った。プロだから当然</a:t>
+            </a:r>
+          </a:p>
+          <a:p>
+            <a:pPr marL="304800" indent="-304800">
               <a:lnSpc>
                 <a:spcPct val="135000"/>
               </a:lnSpc>
               <a:spcAft>
-                <a:spcPts val="979"/>
+                <a:spcPts val="839"/>
               </a:spcAft>
             </a:pPr>
             <a:r>
-              <a:rPr sz="2800" b="0">
+              <a:rPr sz="2400" b="0">
                 <a:solidFill>
                   <a:srgbClr val="20242C"/>
                 </a:solidFill>
@@ -6608,17 +6649,17 @@
                 <a:ea typeface="Yu Gothic"/>
                 <a:cs typeface="Yu Gothic"/>
               </a:rPr>
-              <a:t>・ビデオ会議には、見慣れた財務責任者と同僚たち。顔も声もいつも通り</a:t>
-            </a:r>
-          </a:p>
-          <a:p>
-            <a:pPr marL="355600" indent="-355600">
+              <a:t>・確認のために入ったビデオ会議には、よく知る財務責任者と同僚たち。顔も声もいつも通り——信じて、15回に分けて送金</a:t>
+            </a:r>
+          </a:p>
+          <a:p>
+            <a:pPr marL="304800" indent="-304800">
               <a:lnSpc>
                 <a:spcPct val="135000"/>
               </a:lnSpc>
             </a:pPr>
             <a:r>
-              <a:rPr sz="2800" b="0">
+              <a:rPr sz="2400" b="0">
                 <a:solidFill>
                   <a:srgbClr val="20242C"/>
                 </a:solidFill>
@@ -6626,7 +6667,7 @@
                 <a:ea typeface="Yu Gothic"/>
                 <a:cs typeface="Yu Gothic"/>
               </a:rPr>
-              <a:t>・15回に分けて送金——会議にいたのは、本人以外すべてニセモノ</a:t>
+              <a:t>・会議にいたのは、本人以外すべてAIで作られたニセモノだった——被害 約38億円</a:t>
             </a:r>
           </a:p>
         </p:txBody>
@@ -7047,7 +7088,7 @@
         <p:spPr>
           <a:xfrm>
             <a:off x="502920" y="1188720"/>
-            <a:ext cx="11185855" cy="4800600"/>
+            <a:ext cx="11185855" cy="3657599"/>
           </a:xfrm>
           <a:prstGeom prst="rect">
             <a:avLst/>
@@ -7099,7 +7140,48 @@
       </p:sp>
       <p:sp>
         <p:nvSpPr>
-          <p:cNvPr id="3" name="meta:pageno"/>
+          <p:cNvPr id="3" name="TextBox 2"/>
+          <p:cNvSpPr txBox="1"/>
+          <p:nvPr/>
+        </p:nvSpPr>
+        <p:spPr>
+          <a:xfrm>
+            <a:off x="685800" y="4983479"/>
+            <a:ext cx="10820095" cy="1005840"/>
+          </a:xfrm>
+          <a:prstGeom prst="rect">
+            <a:avLst/>
+          </a:prstGeom>
+          <a:noFill/>
+        </p:spPr>
+        <p:txBody>
+          <a:bodyPr wrap="square" anchor="ctr">
+            <a:noAutofit/>
+          </a:bodyPr>
+          <a:lstStyle/>
+          <a:p>
+            <a:pPr algn="ctr">
+              <a:lnSpc>
+                <a:spcPct val="130000"/>
+              </a:lnSpc>
+            </a:pPr>
+            <a:r>
+              <a:rPr sz="2200" b="0">
+                <a:solidFill>
+                  <a:srgbClr val="5C6472"/>
+                </a:solidFill>
+                <a:latin typeface="Yu Gothic"/>
+                <a:ea typeface="Yu Gothic"/>
+                <a:cs typeface="Yu Gothic"/>
+              </a:rPr>
+              <a:t>疑わない人を“選ぶ”詐欺から、疑う人も“突破する”詐欺へ——ここまでが進化の理論</a:t>
+            </a:r>
+          </a:p>
+        </p:txBody>
+      </p:sp>
+      <p:sp>
+        <p:nvSpPr>
+          <p:cNvPr id="4" name="meta:pageno"/>
           <p:cNvSpPr txBox="1"/>
           <p:nvPr/>
         </p:nvSpPr>
@@ -7136,7 +7218,7 @@
       </p:sp>
       <p:sp>
         <p:nvSpPr>
-          <p:cNvPr id="4" name="meta:part"/>
+          <p:cNvPr id="5" name="meta:part"/>
           <p:cNvSpPr txBox="1"/>
           <p:nvPr/>
         </p:nvSpPr>
@@ -7828,7 +7910,7 @@
                 <a:ea typeface="Yu Gothic"/>
                 <a:cs typeface="Yu Gothic"/>
               </a:rPr>
-              <a:t>・いま一番多いのは「有名人のニセ動画」——投資に誘う偽広告。SNS型投資詐欺の被害は 1,200億円超（2025年・前年比+46.3%）</a:t>
+              <a:t>・いま目立つのは「有名人のニセ動画」——SNSで投資に誘う偽広告（この手のSNS型投資詐欺は全体で被害1,200億円超・2025年）</a:t>
             </a:r>
           </a:p>
           <a:p>
@@ -7849,7 +7931,7 @@
                 <a:ea typeface="Yu Gothic"/>
                 <a:cs typeface="Yu Gothic"/>
               </a:rPr>
-              <a:t>・続くのは、AIの台本＋警察官のニセ映像の海外拠点グループ（2026年1月摘発・被害約1,900万円）——このくらい</a:t>
+              <a:t>・続くのは、警察官を装う海外拠点の詐欺グループ——AIで台本とニセ警察官の映像を作り、日本人に電話（2026年1月摘発・被害約1,900万円）——このくらい</a:t>
             </a:r>
           </a:p>
           <a:p>
@@ -8127,7 +8209,7 @@
         </p:nvSpPr>
         <p:spPr>
           <a:xfrm>
-            <a:off x="685800" y="1757172"/>
+            <a:off x="685800" y="1645920"/>
             <a:ext cx="3383280" cy="646176"/>
           </a:xfrm>
           <a:prstGeom prst="rect">
@@ -8168,7 +8250,7 @@
         </p:nvSpPr>
         <p:spPr>
           <a:xfrm>
-            <a:off x="4343400" y="1757172"/>
+            <a:off x="4343400" y="1645920"/>
             <a:ext cx="7178040" cy="646176"/>
           </a:xfrm>
           <a:prstGeom prst="rect">
@@ -8220,7 +8302,7 @@
         </p:nvSpPr>
         <p:spPr>
           <a:xfrm>
-            <a:off x="685800" y="2421636"/>
+            <a:off x="685800" y="2310384"/>
             <a:ext cx="10820095" cy="12801"/>
           </a:xfrm>
           <a:prstGeom prst="rect">
@@ -8264,8 +8346,8 @@
         </p:nvSpPr>
         <p:spPr>
           <a:xfrm>
-            <a:off x="685800" y="2586228"/>
-            <a:ext cx="3383280" cy="646176"/>
+            <a:off x="685800" y="2346960"/>
+            <a:ext cx="3383280" cy="854456"/>
           </a:xfrm>
           <a:prstGeom prst="rect">
             <a:avLst/>
@@ -8292,7 +8374,7 @@
                 <a:ea typeface="Yu Gothic"/>
                 <a:cs typeface="Yu Gothic"/>
               </a:rPr>
-              <a:t>うち特殊詐欺</a:t>
+              <a:t>うち特殊詐欺（電話などのなりすまし型）</a:t>
             </a:r>
           </a:p>
         </p:txBody>
@@ -8305,8 +8387,8 @@
         </p:nvSpPr>
         <p:spPr>
           <a:xfrm>
-            <a:off x="4343400" y="2586228"/>
-            <a:ext cx="7178040" cy="646176"/>
+            <a:off x="4343400" y="2346960"/>
+            <a:ext cx="7178040" cy="854456"/>
           </a:xfrm>
           <a:prstGeom prst="rect">
             <a:avLst/>
@@ -8346,7 +8428,7 @@
         </p:nvSpPr>
         <p:spPr>
           <a:xfrm>
-            <a:off x="685800" y="3250691"/>
+            <a:off x="685800" y="3219704"/>
             <a:ext cx="10820095" cy="12801"/>
           </a:xfrm>
           <a:prstGeom prst="rect">
@@ -8390,8 +8472,8 @@
         </p:nvSpPr>
         <p:spPr>
           <a:xfrm>
-            <a:off x="685800" y="3415284"/>
-            <a:ext cx="3383280" cy="646176"/>
+            <a:off x="685800" y="3256280"/>
+            <a:ext cx="3383280" cy="854456"/>
           </a:xfrm>
           <a:prstGeom prst="rect">
             <a:avLst/>
@@ -8418,7 +8500,7 @@
                 <a:ea typeface="Yu Gothic"/>
                 <a:cs typeface="Yu Gothic"/>
               </a:rPr>
-              <a:t>その約7割＝約1,005億円</a:t>
+              <a:t>特殊詐欺の約7割＝約1,005億円</a:t>
             </a:r>
           </a:p>
         </p:txBody>
@@ -8431,8 +8513,8 @@
         </p:nvSpPr>
         <p:spPr>
           <a:xfrm>
-            <a:off x="4343400" y="3415284"/>
-            <a:ext cx="7178040" cy="646176"/>
+            <a:off x="4343400" y="3256280"/>
+            <a:ext cx="7178040" cy="854456"/>
           </a:xfrm>
           <a:prstGeom prst="rect">
             <a:avLst/>
@@ -8472,7 +8554,7 @@
         </p:nvSpPr>
         <p:spPr>
           <a:xfrm>
-            <a:off x="685800" y="4079747"/>
+            <a:off x="685800" y="4129023"/>
             <a:ext cx="10820095" cy="12801"/>
           </a:xfrm>
           <a:prstGeom prst="rect">
@@ -8516,8 +8598,8 @@
         </p:nvSpPr>
         <p:spPr>
           <a:xfrm>
-            <a:off x="685800" y="4244340"/>
-            <a:ext cx="3383280" cy="646176"/>
+            <a:off x="685800" y="4165600"/>
+            <a:ext cx="3383280" cy="1072896"/>
           </a:xfrm>
           <a:prstGeom prst="rect">
             <a:avLst/>
@@ -8544,7 +8626,7 @@
                 <a:ea typeface="Yu Gothic"/>
                 <a:cs typeface="Yu Gothic"/>
               </a:rPr>
-              <a:t>犯行電話の最多</a:t>
+              <a:t>手口</a:t>
             </a:r>
           </a:p>
         </p:txBody>
@@ -8557,8 +8639,8 @@
         </p:nvSpPr>
         <p:spPr>
           <a:xfrm>
-            <a:off x="4343400" y="4244340"/>
-            <a:ext cx="7178040" cy="646176"/>
+            <a:off x="4343400" y="4165600"/>
+            <a:ext cx="7178040" cy="1072896"/>
           </a:xfrm>
           <a:prstGeom prst="rect">
             <a:avLst/>
@@ -8596,7 +8678,7 @@
                 <a:ea typeface="Yu Gothic"/>
                 <a:cs typeface="Yu Gothic"/>
               </a:rPr>
-              <a:t>で始まる国際電話・末尾</a:t>
+              <a:t>で始まる国際電話から、警察署そっくりの番号（末尾</a:t>
             </a:r>
             <a:r>
               <a:rPr sz="2800" b="1">
@@ -8607,7 +8689,18 @@
                 <a:ea typeface="Yu Gothic"/>
                 <a:cs typeface="Yu Gothic"/>
               </a:rPr>
-              <a:t>「0110」</a:t>
+              <a:t>0110</a:t>
+            </a:r>
+            <a:r>
+              <a:rPr sz="2800" b="1">
+                <a:solidFill>
+                  <a:srgbClr val="20242C"/>
+                </a:solidFill>
+                <a:latin typeface="Yu Gothic"/>
+                <a:ea typeface="Yu Gothic"/>
+                <a:cs typeface="Yu Gothic"/>
+              </a:rPr>
+              <a:t>）を偽装表示</a:t>
             </a:r>
           </a:p>
         </p:txBody>
@@ -9857,7 +9950,7 @@
                 <a:ea typeface="Yu Gothic"/>
                 <a:cs typeface="Yu Gothic"/>
               </a:rPr>
-              <a:t>・一般人のデータはまだ少ない——狙われていないのではなく、後回しなだけ</a:t>
+              <a:t>・一般人は、集めやすい素材が少ないぶん後回しになっているだけ——狙われていないのではない</a:t>
             </a:r>
           </a:p>
           <a:p>
@@ -10067,7 +10160,7 @@
                 <a:ea typeface="Yu Gothic"/>
                 <a:cs typeface="Yu Gothic"/>
               </a:rPr>
-              <a:t>「0110」の表示で信じさせ、本人そっくりの声でとどめを刺す</a:t>
+              <a:t>「0110」の番号表示で警察だと信じさせ、AIの映像と受け答えで疑いを封じる</a:t>
             </a:r>
           </a:p>
         </p:txBody>
@@ -10843,7 +10936,7 @@
                 <a:ea typeface="Yu Gothic"/>
                 <a:cs typeface="Yu Gothic"/>
               </a:rPr>
-              <a:t>・最初に集めた「話し方」「雰囲気」——それも相手がこちらに合わせて作ってくる</a:t>
+              <a:t>・はじめに会場で挙げてもらった“本人らしさ”——話し方や雰囲気も、相手がこちらに合わせて作ってくる</a:t>
             </a:r>
           </a:p>
         </p:txBody>
@@ -11485,7 +11578,7 @@
                 <a:ea typeface="Yu Gothic"/>
                 <a:cs typeface="Yu Gothic"/>
               </a:rPr>
-              <a:t>・最初に集めた手がかり——声・話し方・内容・雰囲気・番号（板書を再掲）</a:t>
+              <a:t>・はじめに会場で挙げてもらった手がかり——声・話し方・内容・雰囲気・番号（板書を再掲）</a:t>
             </a:r>
           </a:p>
           <a:p>
@@ -12278,7 +12371,7 @@
                 <a:ea typeface="Yu Gothic"/>
                 <a:cs typeface="Yu Gothic"/>
               </a:rPr>
-              <a:t>着信履歴は使わない／警察相談は「#9110」／家族はもともと知っている番号へ</a:t>
+              <a:t>着信履歴は使わない／警察への相談は全国共通の相談専用電話「#9110」／家族はもともと知っている番号へ</a:t>
             </a:r>
           </a:p>
         </p:txBody>
@@ -13934,7 +14027,7 @@
           <a:p>
             <a:pPr algn="l"/>
             <a:r>
-              <a:rPr sz="4000" b="1">
+              <a:rPr sz="3600" b="1">
                 <a:solidFill>
                   <a:srgbClr val="B9791F"/>
                 </a:solidFill>
@@ -13942,7 +14035,7 @@
                 <a:ea typeface="Yu Gothic"/>
                 <a:cs typeface="Yu Gothic"/>
               </a:rPr>
-              <a:t>昔よくあった詐欺メール</a:t>
+              <a:t>昔よくあった詐欺メール——さっきの1億円と同じ形</a:t>
             </a:r>
           </a:p>
         </p:txBody>
@@ -14492,7 +14585,7 @@
                 <a:ea typeface="Yu Gothic"/>
                 <a:cs typeface="Yu Gothic"/>
               </a:rPr>
-              <a:t>・詐欺で一番コストがかかるのは、その後の「人間によるやり取り」</a:t>
+              <a:t>・メールを送るのはタダ同然。高くつくのは、返信してきた相手と“人間の詐欺師”が何日もやり取りする部分</a:t>
             </a:r>
           </a:p>
           <a:p>
@@ -14513,7 +14606,7 @@
                 <a:ea typeface="Yu Gothic"/>
                 <a:cs typeface="Yu Gothic"/>
               </a:rPr>
-              <a:t>・疑う人は、最初の一通で外れてくれる</a:t>
+              <a:t>・途中で我に返る人に手間をかけると赤字——疑う人には、最初の一通で降りてもらいたい</a:t>
             </a:r>
           </a:p>
           <a:p>
@@ -14531,7 +14624,7 @@
                 <a:ea typeface="Yu Gothic"/>
                 <a:cs typeface="Yu Gothic"/>
               </a:rPr>
-              <a:t>・「それでも信じる、いちばん疑わない人」だけが返信してくる</a:t>
+              <a:t>・だから、わざと嘘くさく書く——“それでも信じる人”だけが返信してくる選別装置</a:t>
             </a:r>
           </a:p>
         </p:txBody>

--- a/slides/deepfake-talk.pptx
+++ b/slides/deepfake-talk.pptx
@@ -2074,7 +2074,7 @@
           <a:lstStyle/>
           <a:p>
             <a:r>
-              <a:t>「今日は怖い話もしますが、このMTGの目的は一つ。近い未来に訪れる『AI詐欺』から身を守る方法を、持って帰っていただくことです」。※「怖がらせるためではなく」の保証はこの1回に留める。繰り返すと緊張感ごと抜ける。</a:t>
+              <a:t>「先にお約束します——今日は、何も売りません。怖い話もしますが、このMTGの目的は一つ。近い未来に訪れる『AI詐欺』から身を守る方法を、持って帰っていただくことです」。※「売らない」を先に外すと以降の統計・実演が素直に入る（専門性×誠実さの信頼設計）。「怖がらせるためではなく」の保証はこの1回に留める。繰り返すと緊張感ごと抜ける。</a:t>
             </a:r>
           </a:p>
         </p:txBody>
@@ -11829,7 +11829,7 @@
                 <a:ea typeface="Yu Gothic"/>
                 <a:cs typeface="Yu Gothic"/>
               </a:rPr>
-              <a:t>近い未来に訪れる「AI詐欺」から身を守る方法を、持って帰っていただくこと</a:t>
+              <a:t>今日は、何も売りません——近い未来に訪れる「AI詐欺」から身を守る方法を、持って帰っていただくこと</a:t>
             </a:r>
           </a:p>
         </p:txBody>

--- a/slides/deepfake-talk.pptx
+++ b/slides/deepfake-talk.pptx
@@ -1304,7 +1304,7 @@
           <a:lstStyle/>
           <a:p>
             <a:r>
-              <a:t>名乗りと所属（0.5分）→ 現場の話（2分）:「FXなどの金融口座の開設は、いまはスマホだけで本人確認が終わる『電子身分証明（eKYC）』が当たり前になりました。ところが最近、その顔認証を、ディープフェイクの顔でくぐり抜けようとするケースが増えてきています。私たちは毎日、その攻防の現場にいます」。※eKYC突破の試行増加は本人確認ベンダー各社の公開レポートにある業界公知の動向。自社の具体事例に踏み込む場合のみコンプラ確認。</a:t>
+              <a:t>名乗りと所属（0.5分）→ 現場の話（2分）:「私たちは、皆さんのお金が動く現場に、3つの持ち場で立っています。1つ目は入口。FXなどの口座開設は、スマホだけで本人確認が終わる『電子身分証明（eKYC）』が当たり前になりましたが、最近、その顔認証をディープフェイクの顔でくぐり抜けようとするケースが増えています。2つ目は扉。盗んだパスワードで口座に入り込む不正ログインを、24時間監視して止めています。3つ目はお金の通り道。詐欺のお金は最後、必ずどこかへ移動します。その不自然な動きを見張るのが、マネーロンダリング監視です。——今日お話しするのは、この現場から見えている景色です」。※いずれも一般的な業務説明の範囲（eKYC突破増はベンダー公開レポート、口座乗っ取りは金融庁公表、AMLは法定義務）。自社の具体事案に踏み込む場合のみコンプラ確認。</a:t>
             </a:r>
           </a:p>
         </p:txBody>
@@ -9232,7 +9232,7 @@
                 <a:ea typeface="Yu Gothic"/>
                 <a:cs typeface="Yu Gothic"/>
               </a:rPr>
-              <a:t>・皆さんのお金が安全に動く仕組みを、毎日支えている会社です</a:t>
+              <a:t>・入口：スマホで完結する本人確認（eKYC）——その顔認証を、ディープフェイクの顔で突破しようとするケースが増えている</a:t>
             </a:r>
           </a:p>
           <a:p>
@@ -9253,7 +9253,7 @@
                 <a:ea typeface="Yu Gothic"/>
                 <a:cs typeface="Yu Gothic"/>
               </a:rPr>
-              <a:t>・FXなどの金融口座の開設は、スマホで完結する「電子身分証明（eKYC）」が当たり前に</a:t>
+              <a:t>・扉：口座への不正ログイン——盗んだパスワードで入り込む攻撃を、24時間監視して止める</a:t>
             </a:r>
           </a:p>
           <a:p>
@@ -9271,7 +9271,7 @@
                 <a:ea typeface="Yu Gothic"/>
                 <a:cs typeface="Yu Gothic"/>
               </a:rPr>
-              <a:t>・その顔認証を、ディープフェイクの顔で突破しようとするケースが増えてきている</a:t>
+              <a:t>・お金の通り道：マネーロンダリング監視——詐欺のお金は最後、必ず“移動”する。その不自然な動きを見張る</a:t>
             </a:r>
           </a:p>
         </p:txBody>

--- a/slides/deepfake-talk.pptx
+++ b/slides/deepfake-talk.pptx
@@ -884,7 +884,7 @@
           <a:lstStyle/>
           <a:p>
             <a:r>
-              <a:t>「整理します。疑わない人だけを選んでいた詐欺が、疑う人も突破する詐欺へ——手紙から200年続いた“ばらまき”の時代が、終わろうとしています。ここまでが、進化の理論です。……では、いまの日本は、この歴史のどこにいるでしょうか」→第2部へ。</a:t>
+              <a:t>「整理します。疑わない人だけを選んでいた詐欺が、疑う人も突破する詐欺へ——手紙から200年続いた“ばらまき”の時代が、終わろうとしています。ここまでが、進化の理論です。……では、いまの日本は、この歴史のどこにいるでしょうか」→第2部へ。 ／ 第2部の「そうなんだ」：日本のAI詐欺はまだ「有名人のニセ動画」どまりで、一般人を狙う圧倒的な主役は「番号」。しかしその差は“材料の差”にすぎない——次は、番号偽装にAIが混ざってくる。</a:t>
             </a:r>
           </a:p>
         </p:txBody>
@@ -954,7 +954,7 @@
           <a:lstStyle/>
           <a:p>
             <a:r>
-              <a:t>この区間の「そうなんだ」：日本のAI詐欺はまだ「有名人のニセ動画」どまりで、一般人を狙う圧倒的な主役は「番号」。しかしその差は“材料の差”にすぎない——次は、番号偽装にAIが混ざってくる。</a:t>
+              <a:t>第2部の冒頭は口頭で（スライドなし・1.5分）：「舞台はメールから、電話に移ります。皆さんは普段、電話の相手が本人かどうか、どこで判断していますか？」——声・話し方・内容・雰囲気・番号など、出た答えを板書し、「この紙、最後にもう一度使います」。そのあとこのスライドへ。「第1部の話を聞くと、日本でも『AIの声にだまされた』というニュースが毎日出ていそうですよね。——皆さん、聞いたことはありますか？ ……あまり聞かないですよね」</a:t>
             </a:r>
           </a:p>
         </p:txBody>
@@ -1024,7 +1024,7 @@
           <a:lstStyle/>
           <a:p>
             <a:r>
-              <a:t>第2部の冒頭は口頭で（スライドなし・1.5分）：「舞台はメールから、電話に移ります。皆さんは普段、電話の相手が本人かどうか、どこで判断していますか？」——声・話し方・内容・雰囲気・番号など、出た答えを板書し、「この紙、最後にもう一度使います」。そのあとこのスライドへ。「第1部の話を聞くと、日本でも『AIの声にだまされた』というニュースが毎日出ていそうですよね。——皆さん、聞いたことはありますか？ ……あまり聞かないですよね」</a:t>
+              <a:t>「実は、日本にもAI詐欺はあります。いま一番多いのは、有名人のニセ動画です。実業家や政治家の顔と声をAIで作って投資に誘う偽広告——このSNS型投資詐欺の被害は、2025年に1,200億円を超えました。続くのは、今年1月に摘発された海外拠点のグループ。AIが書いた台本と、警察官のニセ映像で、日本の8人から約1,900万円——数えるほどで、このくらいです。皆さんのご家族の声をまねた詐欺が日本で確認された、という報道はまだありません。統計にも“AI詐欺”という欄はまだない。では、一般の私たちを狙う詐欺で、いま圧倒的に多いのは何か」。※摘発例は「予測」で“もう始まっている”として回収。</a:t>
             </a:r>
           </a:p>
         </p:txBody>
@@ -1094,7 +1094,7 @@
           <a:lstStyle/>
           <a:p>
             <a:r>
-              <a:t>「実は、日本にもAI詐欺はあります。いま一番多いのは、有名人のニセ動画です。実業家や政治家の顔と声をAIで作って投資に誘う偽広告——このSNS型投資詐欺の被害は、2025年に1,200億円を超えました。続くのは、今年1月に摘発された海外拠点のグループ。AIが書いた台本と、警察官のニセ映像で、日本の8人から約1,900万円——数えるほどで、このくらいです。皆さんのご家族の声をまねた詐欺が日本で確認された、という報道はまだありません。統計にも“AI詐欺”という欄はまだない。では、一般の私たちを狙う詐欺で、いま圧倒的に多いのは何か」。※摘発例は「予測」で“もう始まっている”として回収。</a:t>
+              <a:t>着信画面「○○警察署」のイメージを大きく見せながら。「答えは、警察の偽番号です。犯行電話でいちばん多いのは、『＋』で始まる国際電話です。番号の末尾を『0110』に見せかけて、警察署を装います。今日は、これだけ覚えて帰っていただいても十分です——警察署の番号表示は、本人確認になりません」</a:t>
             </a:r>
           </a:p>
         </p:txBody>
@@ -1164,7 +1164,7 @@
           <a:lstStyle/>
           <a:p>
             <a:r>
-              <a:t>着信画面「○○警察署」のイメージを大きく見せながら。「答えは、警察の偽番号です。犯行電話でいちばん多いのは、『＋』で始まる国際電話です。番号の末尾を『0110』に見せかけて、警察署を装います。今日は、これだけ覚えて帰っていただいても十分です——警察署の番号表示は、本人確認になりません」</a:t>
+              <a:t>グラフを指しながら。「7割、という数字を目で見てください。特殊詐欺の被害額 約1,423億円のうち、約1,005億円——これだけがニセ警察詐欺です。そしてもう一つ。ニセ警察の犯行電話は、4本に3本が『＋』から始まる国際電話です。だから“鳴る前に塞ぐ”が効きます——これは結論でお話しします」</a:t>
             </a:r>
           </a:p>
         </p:txBody>
@@ -2074,7 +2074,7 @@
           <a:lstStyle/>
           <a:p>
             <a:r>
-              <a:t>「先にお約束します——今日は、何も売りません。怖い話もしますが、このMTGの目的は一つ。近い未来に訪れる『AI詐欺』から身を守る方法を、持って帰っていただくことです」。※「売らない」を先に外すと以降の統計・実演が素直に入る（専門性×誠実さの信頼設計）。「怖がらせるためではなく」の保証はこの1回に留める。繰り返すと緊張感ごと抜ける。</a:t>
+              <a:t>「今日は怖い話もしますが、このMTGの目的は一つ。近い未来に訪れる『AI詐欺』から身を守る方法を、持って帰っていただくことです」。※「怖がらせるためではなく」の保証はこの1回に留める。繰り返すと緊張感ごと抜ける。</a:t>
             </a:r>
           </a:p>
         </p:txBody>
@@ -7273,20 +7273,57 @@
       <p:grpSpPr/>
       <p:sp>
         <p:nvSpPr>
-          <p:cNvPr id="2" name="Rectangle 1"/>
+          <p:cNvPr id="2" name="TextBox 1"/>
+          <p:cNvSpPr txBox="1"/>
+          <p:nvPr/>
+        </p:nvSpPr>
+        <p:spPr>
+          <a:xfrm>
+            <a:off x="685800" y="411480"/>
+            <a:ext cx="10820095" cy="960120"/>
+          </a:xfrm>
+          <a:prstGeom prst="rect">
+            <a:avLst/>
+          </a:prstGeom>
+          <a:noFill/>
+        </p:spPr>
+        <p:txBody>
+          <a:bodyPr wrap="square" anchor="b">
+            <a:noAutofit/>
+          </a:bodyPr>
+          <a:lstStyle/>
+          <a:p>
+            <a:pPr algn="l"/>
+            <a:r>
+              <a:rPr sz="3600" b="1">
+                <a:solidFill>
+                  <a:srgbClr val="B9791F"/>
+                </a:solidFill>
+                <a:latin typeface="Yu Gothic"/>
+                <a:ea typeface="Yu Gothic"/>
+                <a:cs typeface="Yu Gothic"/>
+              </a:rPr>
+              <a:t>「AI詐欺のニュース、あまり聞かないですよね」</a:t>
+            </a:r>
+          </a:p>
+        </p:txBody>
+      </p:sp>
+      <p:sp>
+        <p:nvSpPr>
+          <p:cNvPr id="3" name="Rectangle 2"/>
           <p:cNvSpPr/>
           <p:nvPr/>
         </p:nvSpPr>
         <p:spPr>
           <a:xfrm>
-            <a:off x="0" y="0"/>
-            <a:ext cx="12191695" cy="6858000"/>
+            <a:off x="685800" y="1463040"/>
+            <a:ext cx="2377440" cy="50292"/>
           </a:xfrm>
           <a:prstGeom prst="rect">
             <a:avLst/>
           </a:prstGeom>
           <a:solidFill>
-            <a:srgbClr val="20242C"/>
+            <a:srgbClr val="B9791F"/>
           </a:solidFill>
           <a:ln>
             <a:noFill/>
@@ -7317,118 +7354,69 @@
       </p:sp>
       <p:sp>
         <p:nvSpPr>
-          <p:cNvPr id="3" name="TextBox 2"/>
-          <p:cNvSpPr txBox="1"/>
-          <p:nvPr/>
-        </p:nvSpPr>
-        <p:spPr>
-          <a:xfrm>
-            <a:off x="685800" y="594360"/>
-            <a:ext cx="4572000" cy="548640"/>
-          </a:xfrm>
-          <a:prstGeom prst="rect">
-            <a:avLst/>
-          </a:prstGeom>
-          <a:noFill/>
-        </p:spPr>
-        <p:txBody>
-          <a:bodyPr wrap="square" anchor="ctr">
-            <a:noAutofit/>
-          </a:bodyPr>
-          <a:lstStyle/>
-          <a:p>
-            <a:pPr algn="l"/>
-            <a:r>
-              <a:rPr sz="2000" b="1">
-                <a:solidFill>
-                  <a:srgbClr val="B9791F"/>
-                </a:solidFill>
-                <a:latin typeface="Yu Gothic"/>
-                <a:ea typeface="Yu Gothic"/>
-                <a:cs typeface="Yu Gothic"/>
-              </a:rPr>
-              <a:t>第2部</a:t>
-            </a:r>
-          </a:p>
-        </p:txBody>
-      </p:sp>
-      <p:sp>
-        <p:nvSpPr>
           <p:cNvPr id="4" name="TextBox 3"/>
           <p:cNvSpPr txBox="1"/>
           <p:nvPr/>
         </p:nvSpPr>
         <p:spPr>
           <a:xfrm>
-            <a:off x="685800" y="2240280"/>
-            <a:ext cx="10820095" cy="1554480"/>
-          </a:xfrm>
-          <a:prstGeom prst="rect">
-            <a:avLst/>
-          </a:prstGeom>
-          <a:noFill/>
-        </p:spPr>
-        <p:txBody>
-          <a:bodyPr wrap="square" anchor="ctr">
-            <a:noAutofit/>
-          </a:bodyPr>
-          <a:lstStyle/>
-          <a:p>
-            <a:pPr algn="ctr"/>
-            <a:r>
-              <a:rPr sz="5400" b="1">
-                <a:solidFill>
-                  <a:srgbClr val="FFFFFF"/>
-                </a:solidFill>
-                <a:latin typeface="Yu Gothic"/>
-                <a:ea typeface="Yu Gothic"/>
-                <a:cs typeface="Yu Gothic"/>
-              </a:rPr>
-              <a:t>では、いまの日本は？</a:t>
-            </a:r>
-          </a:p>
-        </p:txBody>
-      </p:sp>
-      <p:sp>
-        <p:nvSpPr>
-          <p:cNvPr id="5" name="TextBox 4"/>
-          <p:cNvSpPr txBox="1"/>
-          <p:nvPr/>
-        </p:nvSpPr>
-        <p:spPr>
-          <a:xfrm>
-            <a:off x="685800" y="3977639"/>
-            <a:ext cx="10820095" cy="868680"/>
-          </a:xfrm>
-          <a:prstGeom prst="rect">
-            <a:avLst/>
-          </a:prstGeom>
-          <a:noFill/>
-        </p:spPr>
-        <p:txBody>
-          <a:bodyPr wrap="square" anchor="ctr">
-            <a:noAutofit/>
-          </a:bodyPr>
-          <a:lstStyle/>
-          <a:p>
-            <a:pPr algn="ctr"/>
-            <a:r>
-              <a:rPr sz="2400" b="0">
-                <a:solidFill>
-                  <a:srgbClr val="BCBDC0"/>
-                </a:solidFill>
-                <a:latin typeface="Yu Gothic"/>
-                <a:ea typeface="Yu Gothic"/>
-                <a:cs typeface="Yu Gothic"/>
-              </a:rPr>
-              <a:t>― 答え合わせ ―</a:t>
-            </a:r>
-          </a:p>
-        </p:txBody>
-      </p:sp>
-      <p:sp>
-        <p:nvSpPr>
-          <p:cNvPr id="6" name="meta:pageno"/>
+            <a:off x="685800" y="1645920"/>
+            <a:ext cx="10820095" cy="4343400"/>
+          </a:xfrm>
+          <a:prstGeom prst="rect">
+            <a:avLst/>
+          </a:prstGeom>
+          <a:noFill/>
+        </p:spPr>
+        <p:txBody>
+          <a:bodyPr wrap="square" anchor="t">
+            <a:noAutofit/>
+          </a:bodyPr>
+          <a:lstStyle/>
+          <a:p>
+            <a:pPr marL="355600" indent="-355600">
+              <a:lnSpc>
+                <a:spcPct val="135000"/>
+              </a:lnSpc>
+              <a:spcAft>
+                <a:spcPts val="979"/>
+              </a:spcAft>
+            </a:pPr>
+            <a:r>
+              <a:rPr sz="2800" b="0">
+                <a:solidFill>
+                  <a:srgbClr val="20242C"/>
+                </a:solidFill>
+                <a:latin typeface="Yu Gothic"/>
+                <a:ea typeface="Yu Gothic"/>
+                <a:cs typeface="Yu Gothic"/>
+              </a:rPr>
+              <a:t>・「AIの声にだまされた」というニュース——聞いたことはありますか？</a:t>
+            </a:r>
+          </a:p>
+          <a:p>
+            <a:pPr marL="355600" indent="-355600">
+              <a:lnSpc>
+                <a:spcPct val="135000"/>
+              </a:lnSpc>
+            </a:pPr>
+            <a:r>
+              <a:rPr sz="2800" b="0">
+                <a:solidFill>
+                  <a:srgbClr val="20242C"/>
+                </a:solidFill>
+                <a:latin typeface="Yu Gothic"/>
+                <a:ea typeface="Yu Gothic"/>
+                <a:cs typeface="Yu Gothic"/>
+              </a:rPr>
+              <a:t>・……あまり聞かないですよね</a:t>
+            </a:r>
+          </a:p>
+        </p:txBody>
+      </p:sp>
+      <p:sp>
+        <p:nvSpPr>
+          <p:cNvPr id="5" name="meta:pageno"/>
           <p:cNvSpPr txBox="1"/>
           <p:nvPr/>
         </p:nvSpPr>
@@ -7452,7 +7440,7 @@
             <a:r>
               <a:rPr sz="1200" b="0">
                 <a:solidFill>
-                  <a:srgbClr val="9AA3B2"/>
+                  <a:srgbClr val="5C6472"/>
                 </a:solidFill>
                 <a:latin typeface="Yu Gothic"/>
                 <a:ea typeface="Yu Gothic"/>
@@ -7465,7 +7453,7 @@
       </p:sp>
       <p:sp>
         <p:nvSpPr>
-          <p:cNvPr id="7" name="meta:part"/>
+          <p:cNvPr id="6" name="meta:part"/>
           <p:cNvSpPr txBox="1"/>
           <p:nvPr/>
         </p:nvSpPr>
@@ -7489,7 +7477,7 @@
             <a:r>
               <a:rPr sz="1200" b="0">
                 <a:solidFill>
-                  <a:srgbClr val="9AA3B2"/>
+                  <a:srgbClr val="5C6472"/>
                 </a:solidFill>
                 <a:latin typeface="Yu Gothic"/>
                 <a:ea typeface="Yu Gothic"/>
@@ -7542,7 +7530,7 @@
           <a:p>
             <a:pPr algn="l"/>
             <a:r>
-              <a:rPr sz="3600" b="1">
+              <a:rPr sz="4000" b="1">
                 <a:solidFill>
                   <a:srgbClr val="B9791F"/>
                 </a:solidFill>
@@ -7550,7 +7538,7 @@
                 <a:ea typeface="Yu Gothic"/>
                 <a:cs typeface="Yu Gothic"/>
               </a:rPr>
-              <a:t>「AI詐欺のニュース、あまり聞かないですよね」</a:t>
+              <a:t>実は、あるにはあります——ただし</a:t>
             </a:r>
           </a:p>
         </p:txBody>
@@ -7607,8 +7595,45 @@
         </p:nvSpPr>
         <p:spPr>
           <a:xfrm>
+            <a:off x="685800" y="5852160"/>
+            <a:ext cx="10820095" cy="347472"/>
+          </a:xfrm>
+          <a:prstGeom prst="rect">
+            <a:avLst/>
+          </a:prstGeom>
+          <a:noFill/>
+        </p:spPr>
+        <p:txBody>
+          <a:bodyPr wrap="square" anchor="t">
+            <a:noAutofit/>
+          </a:bodyPr>
+          <a:lstStyle/>
+          <a:p>
+            <a:pPr algn="l"/>
+            <a:r>
+              <a:rPr sz="1500" b="0">
+                <a:solidFill>
+                  <a:srgbClr val="5C6472"/>
+                </a:solidFill>
+                <a:latin typeface="Yu Gothic"/>
+                <a:ea typeface="Yu Gothic"/>
+                <a:cs typeface="Yu Gothic"/>
+              </a:rPr>
+              <a:t>出典：警察庁統計・報道／毎日新聞（2026年1月29日）</a:t>
+            </a:r>
+          </a:p>
+        </p:txBody>
+      </p:sp>
+      <p:sp>
+        <p:nvSpPr>
+          <p:cNvPr id="5" name="TextBox 4"/>
+          <p:cNvSpPr txBox="1"/>
+          <p:nvPr/>
+        </p:nvSpPr>
+        <p:spPr>
+          <a:xfrm>
             <a:off x="685800" y="1645920"/>
-            <a:ext cx="10820095" cy="4343400"/>
+            <a:ext cx="10820095" cy="4133088"/>
           </a:xfrm>
           <a:prstGeom prst="rect">
             <a:avLst/>
@@ -7638,7 +7663,28 @@
                 <a:ea typeface="Yu Gothic"/>
                 <a:cs typeface="Yu Gothic"/>
               </a:rPr>
-              <a:t>・「AIの声にだまされた」というニュース——聞いたことはありますか？</a:t>
+              <a:t>・いま目立つのは「有名人のニセ動画」——SNSで投資に誘う偽広告（この手のSNS型投資詐欺は全体で被害1,200億円超・2025年）</a:t>
+            </a:r>
+          </a:p>
+          <a:p>
+            <a:pPr marL="355600" indent="-355600">
+              <a:lnSpc>
+                <a:spcPct val="135000"/>
+              </a:lnSpc>
+              <a:spcAft>
+                <a:spcPts val="979"/>
+              </a:spcAft>
+            </a:pPr>
+            <a:r>
+              <a:rPr sz="2800" b="0">
+                <a:solidFill>
+                  <a:srgbClr val="20242C"/>
+                </a:solidFill>
+                <a:latin typeface="Yu Gothic"/>
+                <a:ea typeface="Yu Gothic"/>
+                <a:cs typeface="Yu Gothic"/>
+              </a:rPr>
+              <a:t>・続くのは、警察官を装う海外拠点の詐欺グループ——AIで台本とニセ警察官の映像を作り、日本人に電話（2026年1月摘発・被害約1,900万円）——このくらい</a:t>
             </a:r>
           </a:p>
           <a:p>
@@ -7656,14 +7702,14 @@
                 <a:ea typeface="Yu Gothic"/>
                 <a:cs typeface="Yu Gothic"/>
               </a:rPr>
-              <a:t>・……あまり聞かないですよね</a:t>
-            </a:r>
-          </a:p>
-        </p:txBody>
-      </p:sp>
-      <p:sp>
-        <p:nvSpPr>
-          <p:cNvPr id="5" name="meta:pageno"/>
+              <a:t>・「家族の声をまねた詐欺」が日本で確認された報道はまだない（統計に「AI詐欺」の欄もない）</a:t>
+            </a:r>
+          </a:p>
+        </p:txBody>
+      </p:sp>
+      <p:sp>
+        <p:nvSpPr>
+          <p:cNvPr id="6" name="meta:pageno"/>
           <p:cNvSpPr txBox="1"/>
           <p:nvPr/>
         </p:nvSpPr>
@@ -7700,7 +7746,7 @@
       </p:sp>
       <p:sp>
         <p:nvSpPr>
-          <p:cNvPr id="6" name="meta:part"/>
+          <p:cNvPr id="7" name="meta:part"/>
           <p:cNvSpPr txBox="1"/>
           <p:nvPr/>
         </p:nvSpPr>
@@ -7785,7 +7831,7 @@
                 <a:ea typeface="Yu Gothic"/>
                 <a:cs typeface="Yu Gothic"/>
               </a:rPr>
-              <a:t>実は、あるにはあります——ただし</a:t>
+              <a:t>圧倒的に多いのは、警察の偽番号。</a:t>
             </a:r>
           </a:p>
         </p:txBody>
@@ -7866,7 +7912,7 @@
                 <a:ea typeface="Yu Gothic"/>
                 <a:cs typeface="Yu Gothic"/>
               </a:rPr>
-              <a:t>出典：警察庁統計・報道／毎日新聞（2026年1月29日）</a:t>
+              <a:t>出典：警察庁 令和7年統計（講演直前に最新値を再確認）</a:t>
             </a:r>
           </a:p>
         </p:txBody>
@@ -7879,69 +7925,116 @@
         </p:nvSpPr>
         <p:spPr>
           <a:xfrm>
+            <a:off x="685800" y="5138928"/>
+            <a:ext cx="10820095" cy="640080"/>
+          </a:xfrm>
+          <a:prstGeom prst="rect">
+            <a:avLst/>
+          </a:prstGeom>
+          <a:noFill/>
+        </p:spPr>
+        <p:txBody>
+          <a:bodyPr wrap="square" anchor="ctr">
+            <a:noAutofit/>
+          </a:bodyPr>
+          <a:lstStyle/>
+          <a:p>
+            <a:pPr algn="l"/>
+            <a:r>
+              <a:rPr sz="3000" b="1">
+                <a:solidFill>
+                  <a:srgbClr val="A83B3B"/>
+                </a:solidFill>
+                <a:latin typeface="Yu Gothic"/>
+                <a:ea typeface="Yu Gothic"/>
+                <a:cs typeface="Yu Gothic"/>
+              </a:rPr>
+              <a:t>警察署の番号表示は、本人確認になりません</a:t>
+            </a:r>
+          </a:p>
+        </p:txBody>
+      </p:sp>
+      <p:sp>
+        <p:nvSpPr>
+          <p:cNvPr id="6" name="TextBox 5"/>
+          <p:cNvSpPr txBox="1"/>
+          <p:nvPr/>
+        </p:nvSpPr>
+        <p:spPr>
+          <a:xfrm>
             <a:off x="685800" y="1645920"/>
-            <a:ext cx="10820095" cy="4133088"/>
-          </a:xfrm>
-          <a:prstGeom prst="rect">
-            <a:avLst/>
-          </a:prstGeom>
-          <a:noFill/>
-        </p:spPr>
-        <p:txBody>
-          <a:bodyPr wrap="square" anchor="t">
-            <a:noAutofit/>
-          </a:bodyPr>
-          <a:lstStyle/>
-          <a:p>
-            <a:pPr marL="355600" indent="-355600">
+            <a:ext cx="3383280" cy="646176"/>
+          </a:xfrm>
+          <a:prstGeom prst="rect">
+            <a:avLst/>
+          </a:prstGeom>
+          <a:noFill/>
+        </p:spPr>
+        <p:txBody>
+          <a:bodyPr wrap="square" anchor="ctr">
+            <a:noAutofit/>
+          </a:bodyPr>
+          <a:lstStyle/>
+          <a:p>
+            <a:pPr algn="l">
               <a:lnSpc>
-                <a:spcPct val="135000"/>
-              </a:lnSpc>
-              <a:spcAft>
-                <a:spcPts val="979"/>
-              </a:spcAft>
-            </a:pPr>
-            <a:r>
-              <a:rPr sz="2800" b="0">
-                <a:solidFill>
-                  <a:srgbClr val="20242C"/>
-                </a:solidFill>
-                <a:latin typeface="Yu Gothic"/>
-                <a:ea typeface="Yu Gothic"/>
-                <a:cs typeface="Yu Gothic"/>
-              </a:rPr>
-              <a:t>・いま目立つのは「有名人のニセ動画」——SNSで投資に誘う偽広告（この手のSNS型投資詐欺は全体で被害1,200億円超・2025年）</a:t>
-            </a:r>
-          </a:p>
-          <a:p>
-            <a:pPr marL="355600" indent="-355600">
-              <a:lnSpc>
-                <a:spcPct val="135000"/>
-              </a:lnSpc>
-              <a:spcAft>
-                <a:spcPts val="979"/>
-              </a:spcAft>
-            </a:pPr>
-            <a:r>
-              <a:rPr sz="2800" b="0">
-                <a:solidFill>
-                  <a:srgbClr val="20242C"/>
-                </a:solidFill>
-                <a:latin typeface="Yu Gothic"/>
-                <a:ea typeface="Yu Gothic"/>
-                <a:cs typeface="Yu Gothic"/>
-              </a:rPr>
-              <a:t>・続くのは、警察官を装う海外拠点の詐欺グループ——AIで台本とニセ警察官の映像を作り、日本人に電話（2026年1月摘発・被害約1,900万円）——このくらい</a:t>
-            </a:r>
-          </a:p>
-          <a:p>
-            <a:pPr marL="355600" indent="-355600">
-              <a:lnSpc>
-                <a:spcPct val="135000"/>
+                <a:spcPct val="125000"/>
               </a:lnSpc>
             </a:pPr>
             <a:r>
-              <a:rPr sz="2800" b="0">
+              <a:rPr sz="2000" b="0">
+                <a:solidFill>
+                  <a:srgbClr val="5C6472"/>
+                </a:solidFill>
+                <a:latin typeface="Yu Gothic"/>
+                <a:ea typeface="Yu Gothic"/>
+                <a:cs typeface="Yu Gothic"/>
+              </a:rPr>
+              <a:t>2025年 詐欺全体の被害</a:t>
+            </a:r>
+          </a:p>
+        </p:txBody>
+      </p:sp>
+      <p:sp>
+        <p:nvSpPr>
+          <p:cNvPr id="7" name="TextBox 6"/>
+          <p:cNvSpPr txBox="1"/>
+          <p:nvPr/>
+        </p:nvSpPr>
+        <p:spPr>
+          <a:xfrm>
+            <a:off x="4343400" y="1645920"/>
+            <a:ext cx="7178040" cy="646176"/>
+          </a:xfrm>
+          <a:prstGeom prst="rect">
+            <a:avLst/>
+          </a:prstGeom>
+          <a:noFill/>
+        </p:spPr>
+        <p:txBody>
+          <a:bodyPr wrap="square" anchor="ctr">
+            <a:noAutofit/>
+          </a:bodyPr>
+          <a:lstStyle/>
+          <a:p>
+            <a:pPr>
+              <a:lnSpc>
+                <a:spcPct val="120000"/>
+              </a:lnSpc>
+            </a:pPr>
+            <a:r>
+              <a:rPr sz="2800" b="1">
+                <a:solidFill>
+                  <a:srgbClr val="B9791F"/>
+                </a:solidFill>
+                <a:latin typeface="Yu Gothic"/>
+                <a:ea typeface="Yu Gothic"/>
+                <a:cs typeface="Yu Gothic"/>
+              </a:rPr>
+              <a:t>約3,257億円</a:t>
+            </a:r>
+            <a:r>
+              <a:rPr sz="2800" b="1">
                 <a:solidFill>
                   <a:srgbClr val="20242C"/>
                 </a:solidFill>
@@ -7949,14 +8042,425 @@
                 <a:ea typeface="Yu Gothic"/>
                 <a:cs typeface="Yu Gothic"/>
               </a:rPr>
-              <a:t>・「家族の声をまねた詐欺」が日本で確認された報道はまだない（統計に「AI詐欺」の欄もない）</a:t>
-            </a:r>
-          </a:p>
-        </p:txBody>
-      </p:sp>
-      <p:sp>
-        <p:nvSpPr>
-          <p:cNvPr id="6" name="meta:pageno"/>
+              <a:t>（過去最悪）</a:t>
+            </a:r>
+          </a:p>
+        </p:txBody>
+      </p:sp>
+      <p:sp>
+        <p:nvSpPr>
+          <p:cNvPr id="8" name="Rectangle 7"/>
+          <p:cNvSpPr/>
+          <p:nvPr/>
+        </p:nvSpPr>
+        <p:spPr>
+          <a:xfrm>
+            <a:off x="685800" y="2310384"/>
+            <a:ext cx="10820095" cy="12801"/>
+          </a:xfrm>
+          <a:prstGeom prst="rect">
+            <a:avLst/>
+          </a:prstGeom>
+          <a:solidFill>
+            <a:srgbClr val="E6E1D6"/>
+          </a:solidFill>
+          <a:ln>
+            <a:noFill/>
+          </a:ln>
+          <a:effectLst/>
+        </p:spPr>
+        <p:style>
+          <a:lnRef idx="1">
+            <a:schemeClr val="accent1"/>
+          </a:lnRef>
+          <a:fillRef idx="3">
+            <a:schemeClr val="accent1"/>
+          </a:fillRef>
+          <a:effectRef idx="2">
+            <a:schemeClr val="accent1"/>
+          </a:effectRef>
+          <a:fontRef idx="minor">
+            <a:schemeClr val="lt1"/>
+          </a:fontRef>
+        </p:style>
+        <p:txBody>
+          <a:bodyPr rtlCol="0" anchor="ctr"/>
+          <a:lstStyle/>
+          <a:p>
+            <a:pPr algn="ctr"/>
+          </a:p>
+        </p:txBody>
+      </p:sp>
+      <p:sp>
+        <p:nvSpPr>
+          <p:cNvPr id="9" name="TextBox 8"/>
+          <p:cNvSpPr txBox="1"/>
+          <p:nvPr/>
+        </p:nvSpPr>
+        <p:spPr>
+          <a:xfrm>
+            <a:off x="685800" y="2346960"/>
+            <a:ext cx="3383280" cy="854456"/>
+          </a:xfrm>
+          <a:prstGeom prst="rect">
+            <a:avLst/>
+          </a:prstGeom>
+          <a:noFill/>
+        </p:spPr>
+        <p:txBody>
+          <a:bodyPr wrap="square" anchor="ctr">
+            <a:noAutofit/>
+          </a:bodyPr>
+          <a:lstStyle/>
+          <a:p>
+            <a:pPr algn="l">
+              <a:lnSpc>
+                <a:spcPct val="125000"/>
+              </a:lnSpc>
+            </a:pPr>
+            <a:r>
+              <a:rPr sz="2000" b="0">
+                <a:solidFill>
+                  <a:srgbClr val="5C6472"/>
+                </a:solidFill>
+                <a:latin typeface="Yu Gothic"/>
+                <a:ea typeface="Yu Gothic"/>
+                <a:cs typeface="Yu Gothic"/>
+              </a:rPr>
+              <a:t>うち特殊詐欺（電話などのなりすまし型）</a:t>
+            </a:r>
+          </a:p>
+        </p:txBody>
+      </p:sp>
+      <p:sp>
+        <p:nvSpPr>
+          <p:cNvPr id="10" name="TextBox 9"/>
+          <p:cNvSpPr txBox="1"/>
+          <p:nvPr/>
+        </p:nvSpPr>
+        <p:spPr>
+          <a:xfrm>
+            <a:off x="4343400" y="2346960"/>
+            <a:ext cx="7178040" cy="854456"/>
+          </a:xfrm>
+          <a:prstGeom prst="rect">
+            <a:avLst/>
+          </a:prstGeom>
+          <a:noFill/>
+        </p:spPr>
+        <p:txBody>
+          <a:bodyPr wrap="square" anchor="ctr">
+            <a:noAutofit/>
+          </a:bodyPr>
+          <a:lstStyle/>
+          <a:p>
+            <a:pPr>
+              <a:lnSpc>
+                <a:spcPct val="120000"/>
+              </a:lnSpc>
+            </a:pPr>
+            <a:r>
+              <a:rPr sz="2800" b="1">
+                <a:solidFill>
+                  <a:srgbClr val="B9791F"/>
+                </a:solidFill>
+                <a:latin typeface="Yu Gothic"/>
+                <a:ea typeface="Yu Gothic"/>
+                <a:cs typeface="Yu Gothic"/>
+              </a:rPr>
+              <a:t>約1,423億円</a:t>
+            </a:r>
+          </a:p>
+        </p:txBody>
+      </p:sp>
+      <p:sp>
+        <p:nvSpPr>
+          <p:cNvPr id="11" name="Rectangle 10"/>
+          <p:cNvSpPr/>
+          <p:nvPr/>
+        </p:nvSpPr>
+        <p:spPr>
+          <a:xfrm>
+            <a:off x="685800" y="3219704"/>
+            <a:ext cx="10820095" cy="12801"/>
+          </a:xfrm>
+          <a:prstGeom prst="rect">
+            <a:avLst/>
+          </a:prstGeom>
+          <a:solidFill>
+            <a:srgbClr val="E6E1D6"/>
+          </a:solidFill>
+          <a:ln>
+            <a:noFill/>
+          </a:ln>
+          <a:effectLst/>
+        </p:spPr>
+        <p:style>
+          <a:lnRef idx="1">
+            <a:schemeClr val="accent1"/>
+          </a:lnRef>
+          <a:fillRef idx="3">
+            <a:schemeClr val="accent1"/>
+          </a:fillRef>
+          <a:effectRef idx="2">
+            <a:schemeClr val="accent1"/>
+          </a:effectRef>
+          <a:fontRef idx="minor">
+            <a:schemeClr val="lt1"/>
+          </a:fontRef>
+        </p:style>
+        <p:txBody>
+          <a:bodyPr rtlCol="0" anchor="ctr"/>
+          <a:lstStyle/>
+          <a:p>
+            <a:pPr algn="ctr"/>
+          </a:p>
+        </p:txBody>
+      </p:sp>
+      <p:sp>
+        <p:nvSpPr>
+          <p:cNvPr id="12" name="TextBox 11"/>
+          <p:cNvSpPr txBox="1"/>
+          <p:nvPr/>
+        </p:nvSpPr>
+        <p:spPr>
+          <a:xfrm>
+            <a:off x="685800" y="3256280"/>
+            <a:ext cx="3383280" cy="854456"/>
+          </a:xfrm>
+          <a:prstGeom prst="rect">
+            <a:avLst/>
+          </a:prstGeom>
+          <a:noFill/>
+        </p:spPr>
+        <p:txBody>
+          <a:bodyPr wrap="square" anchor="ctr">
+            <a:noAutofit/>
+          </a:bodyPr>
+          <a:lstStyle/>
+          <a:p>
+            <a:pPr algn="l">
+              <a:lnSpc>
+                <a:spcPct val="125000"/>
+              </a:lnSpc>
+            </a:pPr>
+            <a:r>
+              <a:rPr sz="2000" b="0">
+                <a:solidFill>
+                  <a:srgbClr val="5C6472"/>
+                </a:solidFill>
+                <a:latin typeface="Yu Gothic"/>
+                <a:ea typeface="Yu Gothic"/>
+                <a:cs typeface="Yu Gothic"/>
+              </a:rPr>
+              <a:t>特殊詐欺の約7割＝約1,005億円</a:t>
+            </a:r>
+          </a:p>
+        </p:txBody>
+      </p:sp>
+      <p:sp>
+        <p:nvSpPr>
+          <p:cNvPr id="13" name="TextBox 12"/>
+          <p:cNvSpPr txBox="1"/>
+          <p:nvPr/>
+        </p:nvSpPr>
+        <p:spPr>
+          <a:xfrm>
+            <a:off x="4343400" y="3256280"/>
+            <a:ext cx="7178040" cy="854456"/>
+          </a:xfrm>
+          <a:prstGeom prst="rect">
+            <a:avLst/>
+          </a:prstGeom>
+          <a:noFill/>
+        </p:spPr>
+        <p:txBody>
+          <a:bodyPr wrap="square" anchor="ctr">
+            <a:noAutofit/>
+          </a:bodyPr>
+          <a:lstStyle/>
+          <a:p>
+            <a:pPr>
+              <a:lnSpc>
+                <a:spcPct val="120000"/>
+              </a:lnSpc>
+            </a:pPr>
+            <a:r>
+              <a:rPr sz="2800" b="1">
+                <a:solidFill>
+                  <a:srgbClr val="B9791F"/>
+                </a:solidFill>
+                <a:latin typeface="Yu Gothic"/>
+                <a:ea typeface="Yu Gothic"/>
+                <a:cs typeface="Yu Gothic"/>
+              </a:rPr>
+              <a:t>「ニセ警察詐欺」</a:t>
+            </a:r>
+          </a:p>
+        </p:txBody>
+      </p:sp>
+      <p:sp>
+        <p:nvSpPr>
+          <p:cNvPr id="14" name="Rectangle 13"/>
+          <p:cNvSpPr/>
+          <p:nvPr/>
+        </p:nvSpPr>
+        <p:spPr>
+          <a:xfrm>
+            <a:off x="685800" y="4129023"/>
+            <a:ext cx="10820095" cy="12801"/>
+          </a:xfrm>
+          <a:prstGeom prst="rect">
+            <a:avLst/>
+          </a:prstGeom>
+          <a:solidFill>
+            <a:srgbClr val="E6E1D6"/>
+          </a:solidFill>
+          <a:ln>
+            <a:noFill/>
+          </a:ln>
+          <a:effectLst/>
+        </p:spPr>
+        <p:style>
+          <a:lnRef idx="1">
+            <a:schemeClr val="accent1"/>
+          </a:lnRef>
+          <a:fillRef idx="3">
+            <a:schemeClr val="accent1"/>
+          </a:fillRef>
+          <a:effectRef idx="2">
+            <a:schemeClr val="accent1"/>
+          </a:effectRef>
+          <a:fontRef idx="minor">
+            <a:schemeClr val="lt1"/>
+          </a:fontRef>
+        </p:style>
+        <p:txBody>
+          <a:bodyPr rtlCol="0" anchor="ctr"/>
+          <a:lstStyle/>
+          <a:p>
+            <a:pPr algn="ctr"/>
+          </a:p>
+        </p:txBody>
+      </p:sp>
+      <p:sp>
+        <p:nvSpPr>
+          <p:cNvPr id="15" name="TextBox 14"/>
+          <p:cNvSpPr txBox="1"/>
+          <p:nvPr/>
+        </p:nvSpPr>
+        <p:spPr>
+          <a:xfrm>
+            <a:off x="685800" y="4165600"/>
+            <a:ext cx="3383280" cy="1072896"/>
+          </a:xfrm>
+          <a:prstGeom prst="rect">
+            <a:avLst/>
+          </a:prstGeom>
+          <a:noFill/>
+        </p:spPr>
+        <p:txBody>
+          <a:bodyPr wrap="square" anchor="ctr">
+            <a:noAutofit/>
+          </a:bodyPr>
+          <a:lstStyle/>
+          <a:p>
+            <a:pPr algn="l">
+              <a:lnSpc>
+                <a:spcPct val="125000"/>
+              </a:lnSpc>
+            </a:pPr>
+            <a:r>
+              <a:rPr sz="2000" b="0">
+                <a:solidFill>
+                  <a:srgbClr val="5C6472"/>
+                </a:solidFill>
+                <a:latin typeface="Yu Gothic"/>
+                <a:ea typeface="Yu Gothic"/>
+                <a:cs typeface="Yu Gothic"/>
+              </a:rPr>
+              <a:t>手口</a:t>
+            </a:r>
+          </a:p>
+        </p:txBody>
+      </p:sp>
+      <p:sp>
+        <p:nvSpPr>
+          <p:cNvPr id="16" name="TextBox 15"/>
+          <p:cNvSpPr txBox="1"/>
+          <p:nvPr/>
+        </p:nvSpPr>
+        <p:spPr>
+          <a:xfrm>
+            <a:off x="4343400" y="4165600"/>
+            <a:ext cx="7178040" cy="1072896"/>
+          </a:xfrm>
+          <a:prstGeom prst="rect">
+            <a:avLst/>
+          </a:prstGeom>
+          <a:noFill/>
+        </p:spPr>
+        <p:txBody>
+          <a:bodyPr wrap="square" anchor="ctr">
+            <a:noAutofit/>
+          </a:bodyPr>
+          <a:lstStyle/>
+          <a:p>
+            <a:pPr>
+              <a:lnSpc>
+                <a:spcPct val="120000"/>
+              </a:lnSpc>
+            </a:pPr>
+            <a:r>
+              <a:rPr sz="2800" b="1">
+                <a:solidFill>
+                  <a:srgbClr val="B9791F"/>
+                </a:solidFill>
+                <a:latin typeface="Yu Gothic"/>
+                <a:ea typeface="Yu Gothic"/>
+                <a:cs typeface="Yu Gothic"/>
+              </a:rPr>
+              <a:t>「＋」</a:t>
+            </a:r>
+            <a:r>
+              <a:rPr sz="2800" b="1">
+                <a:solidFill>
+                  <a:srgbClr val="20242C"/>
+                </a:solidFill>
+                <a:latin typeface="Yu Gothic"/>
+                <a:ea typeface="Yu Gothic"/>
+                <a:cs typeface="Yu Gothic"/>
+              </a:rPr>
+              <a:t>で始まる国際電話から、警察署そっくりの番号（末尾</a:t>
+            </a:r>
+            <a:r>
+              <a:rPr sz="2800" b="1">
+                <a:solidFill>
+                  <a:srgbClr val="B9791F"/>
+                </a:solidFill>
+                <a:latin typeface="Yu Gothic"/>
+                <a:ea typeface="Yu Gothic"/>
+                <a:cs typeface="Yu Gothic"/>
+              </a:rPr>
+              <a:t>0110</a:t>
+            </a:r>
+            <a:r>
+              <a:rPr sz="2800" b="1">
+                <a:solidFill>
+                  <a:srgbClr val="20242C"/>
+                </a:solidFill>
+                <a:latin typeface="Yu Gothic"/>
+                <a:ea typeface="Yu Gothic"/>
+                <a:cs typeface="Yu Gothic"/>
+              </a:rPr>
+              <a:t>）を偽装表示</a:t>
+            </a:r>
+          </a:p>
+        </p:txBody>
+      </p:sp>
+      <p:sp>
+        <p:nvSpPr>
+          <p:cNvPr id="17" name="meta:pageno"/>
           <p:cNvSpPr txBox="1"/>
           <p:nvPr/>
         </p:nvSpPr>
@@ -7993,7 +8497,7 @@
       </p:sp>
       <p:sp>
         <p:nvSpPr>
-          <p:cNvPr id="7" name="meta:part"/>
+          <p:cNvPr id="18" name="meta:part"/>
           <p:cNvSpPr txBox="1"/>
           <p:nvPr/>
         </p:nvSpPr>
@@ -8078,7 +8582,7 @@
                 <a:ea typeface="Yu Gothic"/>
                 <a:cs typeface="Yu Gothic"/>
               </a:rPr>
-              <a:t>圧倒的に多いのは、警察の偽番号。</a:t>
+              <a:t>数字で見る——ニセ警察詐欺の“いま”</a:t>
             </a:r>
           </a:p>
         </p:txBody>
@@ -8159,555 +8663,38 @@
                 <a:ea typeface="Yu Gothic"/>
                 <a:cs typeface="Yu Gothic"/>
               </a:rPr>
-              <a:t>出典：警察庁 令和7年統計（講演直前に最新値を再確認）</a:t>
-            </a:r>
-          </a:p>
-        </p:txBody>
-      </p:sp>
-      <p:sp>
-        <p:nvSpPr>
-          <p:cNvPr id="5" name="TextBox 4"/>
-          <p:cNvSpPr txBox="1"/>
-          <p:nvPr/>
-        </p:nvSpPr>
-        <p:spPr>
-          <a:xfrm>
-            <a:off x="685800" y="5138928"/>
-            <a:ext cx="10820095" cy="640080"/>
-          </a:xfrm>
-          <a:prstGeom prst="rect">
-            <a:avLst/>
-          </a:prstGeom>
-          <a:noFill/>
-        </p:spPr>
-        <p:txBody>
-          <a:bodyPr wrap="square" anchor="ctr">
-            <a:noAutofit/>
-          </a:bodyPr>
-          <a:lstStyle/>
-          <a:p>
-            <a:pPr algn="l"/>
-            <a:r>
-              <a:rPr sz="3000" b="1">
-                <a:solidFill>
-                  <a:srgbClr val="A83B3B"/>
-                </a:solidFill>
-                <a:latin typeface="Yu Gothic"/>
-                <a:ea typeface="Yu Gothic"/>
-                <a:cs typeface="Yu Gothic"/>
-              </a:rPr>
-              <a:t>警察署の番号表示は、本人確認になりません</a:t>
-            </a:r>
-          </a:p>
-        </p:txBody>
-      </p:sp>
-      <p:sp>
-        <p:nvSpPr>
-          <p:cNvPr id="6" name="TextBox 5"/>
-          <p:cNvSpPr txBox="1"/>
-          <p:nvPr/>
-        </p:nvSpPr>
-        <p:spPr>
-          <a:xfrm>
-            <a:off x="685800" y="1645920"/>
-            <a:ext cx="3383280" cy="646176"/>
-          </a:xfrm>
-          <a:prstGeom prst="rect">
-            <a:avLst/>
-          </a:prstGeom>
-          <a:noFill/>
-        </p:spPr>
-        <p:txBody>
-          <a:bodyPr wrap="square" anchor="ctr">
-            <a:noAutofit/>
-          </a:bodyPr>
-          <a:lstStyle/>
-          <a:p>
-            <a:pPr algn="l">
-              <a:lnSpc>
-                <a:spcPct val="125000"/>
-              </a:lnSpc>
-            </a:pPr>
-            <a:r>
-              <a:rPr sz="2000" b="0">
-                <a:solidFill>
-                  <a:srgbClr val="5C6472"/>
-                </a:solidFill>
-                <a:latin typeface="Yu Gothic"/>
-                <a:ea typeface="Yu Gothic"/>
-                <a:cs typeface="Yu Gothic"/>
-              </a:rPr>
-              <a:t>2025年 詐欺全体の被害</a:t>
-            </a:r>
-          </a:p>
-        </p:txBody>
-      </p:sp>
-      <p:sp>
-        <p:nvSpPr>
-          <p:cNvPr id="7" name="TextBox 6"/>
-          <p:cNvSpPr txBox="1"/>
-          <p:nvPr/>
-        </p:nvSpPr>
-        <p:spPr>
-          <a:xfrm>
-            <a:off x="4343400" y="1645920"/>
-            <a:ext cx="7178040" cy="646176"/>
-          </a:xfrm>
-          <a:prstGeom prst="rect">
-            <a:avLst/>
-          </a:prstGeom>
-          <a:noFill/>
-        </p:spPr>
-        <p:txBody>
-          <a:bodyPr wrap="square" anchor="ctr">
-            <a:noAutofit/>
-          </a:bodyPr>
-          <a:lstStyle/>
-          <a:p>
-            <a:pPr>
-              <a:lnSpc>
-                <a:spcPct val="120000"/>
-              </a:lnSpc>
-            </a:pPr>
-            <a:r>
-              <a:rPr sz="2800" b="1">
-                <a:solidFill>
-                  <a:srgbClr val="B9791F"/>
-                </a:solidFill>
-                <a:latin typeface="Yu Gothic"/>
-                <a:ea typeface="Yu Gothic"/>
-                <a:cs typeface="Yu Gothic"/>
-              </a:rPr>
-              <a:t>約3,257億円</a:t>
-            </a:r>
-            <a:r>
-              <a:rPr sz="2800" b="1">
-                <a:solidFill>
-                  <a:srgbClr val="20242C"/>
-                </a:solidFill>
-                <a:latin typeface="Yu Gothic"/>
-                <a:ea typeface="Yu Gothic"/>
-                <a:cs typeface="Yu Gothic"/>
-              </a:rPr>
-              <a:t>（過去最悪）</a:t>
-            </a:r>
-          </a:p>
-        </p:txBody>
-      </p:sp>
-      <p:sp>
-        <p:nvSpPr>
-          <p:cNvPr id="8" name="Rectangle 7"/>
-          <p:cNvSpPr/>
-          <p:nvPr/>
-        </p:nvSpPr>
-        <p:spPr>
-          <a:xfrm>
-            <a:off x="685800" y="2310384"/>
-            <a:ext cx="10820095" cy="12801"/>
-          </a:xfrm>
-          <a:prstGeom prst="rect">
-            <a:avLst/>
-          </a:prstGeom>
-          <a:solidFill>
-            <a:srgbClr val="E6E1D6"/>
-          </a:solidFill>
-          <a:ln>
-            <a:noFill/>
-          </a:ln>
-          <a:effectLst/>
-        </p:spPr>
-        <p:style>
-          <a:lnRef idx="1">
-            <a:schemeClr val="accent1"/>
-          </a:lnRef>
-          <a:fillRef idx="3">
-            <a:schemeClr val="accent1"/>
-          </a:fillRef>
-          <a:effectRef idx="2">
-            <a:schemeClr val="accent1"/>
-          </a:effectRef>
-          <a:fontRef idx="minor">
-            <a:schemeClr val="lt1"/>
-          </a:fontRef>
-        </p:style>
-        <p:txBody>
-          <a:bodyPr rtlCol="0" anchor="ctr"/>
-          <a:lstStyle/>
-          <a:p>
-            <a:pPr algn="ctr"/>
-          </a:p>
-        </p:txBody>
-      </p:sp>
-      <p:sp>
-        <p:nvSpPr>
-          <p:cNvPr id="9" name="TextBox 8"/>
-          <p:cNvSpPr txBox="1"/>
-          <p:nvPr/>
-        </p:nvSpPr>
-        <p:spPr>
-          <a:xfrm>
-            <a:off x="685800" y="2346960"/>
-            <a:ext cx="3383280" cy="854456"/>
-          </a:xfrm>
-          <a:prstGeom prst="rect">
-            <a:avLst/>
-          </a:prstGeom>
-          <a:noFill/>
-        </p:spPr>
-        <p:txBody>
-          <a:bodyPr wrap="square" anchor="ctr">
-            <a:noAutofit/>
-          </a:bodyPr>
-          <a:lstStyle/>
-          <a:p>
-            <a:pPr algn="l">
-              <a:lnSpc>
-                <a:spcPct val="125000"/>
-              </a:lnSpc>
-            </a:pPr>
-            <a:r>
-              <a:rPr sz="2000" b="0">
-                <a:solidFill>
-                  <a:srgbClr val="5C6472"/>
-                </a:solidFill>
-                <a:latin typeface="Yu Gothic"/>
-                <a:ea typeface="Yu Gothic"/>
-                <a:cs typeface="Yu Gothic"/>
-              </a:rPr>
-              <a:t>うち特殊詐欺（電話などのなりすまし型）</a:t>
-            </a:r>
-          </a:p>
-        </p:txBody>
-      </p:sp>
-      <p:sp>
-        <p:nvSpPr>
-          <p:cNvPr id="10" name="TextBox 9"/>
-          <p:cNvSpPr txBox="1"/>
-          <p:nvPr/>
-        </p:nvSpPr>
-        <p:spPr>
-          <a:xfrm>
-            <a:off x="4343400" y="2346960"/>
-            <a:ext cx="7178040" cy="854456"/>
-          </a:xfrm>
-          <a:prstGeom prst="rect">
-            <a:avLst/>
-          </a:prstGeom>
-          <a:noFill/>
-        </p:spPr>
-        <p:txBody>
-          <a:bodyPr wrap="square" anchor="ctr">
-            <a:noAutofit/>
-          </a:bodyPr>
-          <a:lstStyle/>
-          <a:p>
-            <a:pPr>
-              <a:lnSpc>
-                <a:spcPct val="120000"/>
-              </a:lnSpc>
-            </a:pPr>
-            <a:r>
-              <a:rPr sz="2800" b="1">
-                <a:solidFill>
-                  <a:srgbClr val="B9791F"/>
-                </a:solidFill>
-                <a:latin typeface="Yu Gothic"/>
-                <a:ea typeface="Yu Gothic"/>
-                <a:cs typeface="Yu Gothic"/>
-              </a:rPr>
-              <a:t>約1,423億円</a:t>
-            </a:r>
-          </a:p>
-        </p:txBody>
-      </p:sp>
-      <p:sp>
-        <p:nvSpPr>
-          <p:cNvPr id="11" name="Rectangle 10"/>
-          <p:cNvSpPr/>
-          <p:nvPr/>
-        </p:nvSpPr>
-        <p:spPr>
-          <a:xfrm>
-            <a:off x="685800" y="3219704"/>
-            <a:ext cx="10820095" cy="12801"/>
-          </a:xfrm>
-          <a:prstGeom prst="rect">
-            <a:avLst/>
-          </a:prstGeom>
-          <a:solidFill>
-            <a:srgbClr val="E6E1D6"/>
-          </a:solidFill>
-          <a:ln>
-            <a:noFill/>
-          </a:ln>
-          <a:effectLst/>
-        </p:spPr>
-        <p:style>
-          <a:lnRef idx="1">
-            <a:schemeClr val="accent1"/>
-          </a:lnRef>
-          <a:fillRef idx="3">
-            <a:schemeClr val="accent1"/>
-          </a:fillRef>
-          <a:effectRef idx="2">
-            <a:schemeClr val="accent1"/>
-          </a:effectRef>
-          <a:fontRef idx="minor">
-            <a:schemeClr val="lt1"/>
-          </a:fontRef>
-        </p:style>
-        <p:txBody>
-          <a:bodyPr rtlCol="0" anchor="ctr"/>
-          <a:lstStyle/>
-          <a:p>
-            <a:pPr algn="ctr"/>
-          </a:p>
-        </p:txBody>
-      </p:sp>
-      <p:sp>
-        <p:nvSpPr>
-          <p:cNvPr id="12" name="TextBox 11"/>
-          <p:cNvSpPr txBox="1"/>
-          <p:nvPr/>
-        </p:nvSpPr>
-        <p:spPr>
-          <a:xfrm>
-            <a:off x="685800" y="3256280"/>
-            <a:ext cx="3383280" cy="854456"/>
-          </a:xfrm>
-          <a:prstGeom prst="rect">
-            <a:avLst/>
-          </a:prstGeom>
-          <a:noFill/>
-        </p:spPr>
-        <p:txBody>
-          <a:bodyPr wrap="square" anchor="ctr">
-            <a:noAutofit/>
-          </a:bodyPr>
-          <a:lstStyle/>
-          <a:p>
-            <a:pPr algn="l">
-              <a:lnSpc>
-                <a:spcPct val="125000"/>
-              </a:lnSpc>
-            </a:pPr>
-            <a:r>
-              <a:rPr sz="2000" b="0">
-                <a:solidFill>
-                  <a:srgbClr val="5C6472"/>
-                </a:solidFill>
-                <a:latin typeface="Yu Gothic"/>
-                <a:ea typeface="Yu Gothic"/>
-                <a:cs typeface="Yu Gothic"/>
-              </a:rPr>
-              <a:t>特殊詐欺の約7割＝約1,005億円</a:t>
-            </a:r>
-          </a:p>
-        </p:txBody>
-      </p:sp>
-      <p:sp>
-        <p:nvSpPr>
-          <p:cNvPr id="13" name="TextBox 12"/>
-          <p:cNvSpPr txBox="1"/>
-          <p:nvPr/>
-        </p:nvSpPr>
-        <p:spPr>
-          <a:xfrm>
-            <a:off x="4343400" y="3256280"/>
-            <a:ext cx="7178040" cy="854456"/>
-          </a:xfrm>
-          <a:prstGeom prst="rect">
-            <a:avLst/>
-          </a:prstGeom>
-          <a:noFill/>
-        </p:spPr>
-        <p:txBody>
-          <a:bodyPr wrap="square" anchor="ctr">
-            <a:noAutofit/>
-          </a:bodyPr>
-          <a:lstStyle/>
-          <a:p>
-            <a:pPr>
-              <a:lnSpc>
-                <a:spcPct val="120000"/>
-              </a:lnSpc>
-            </a:pPr>
-            <a:r>
-              <a:rPr sz="2800" b="1">
-                <a:solidFill>
-                  <a:srgbClr val="B9791F"/>
-                </a:solidFill>
-                <a:latin typeface="Yu Gothic"/>
-                <a:ea typeface="Yu Gothic"/>
-                <a:cs typeface="Yu Gothic"/>
-              </a:rPr>
-              <a:t>「ニセ警察詐欺」</a:t>
-            </a:r>
-          </a:p>
-        </p:txBody>
-      </p:sp>
-      <p:sp>
-        <p:nvSpPr>
-          <p:cNvPr id="14" name="Rectangle 13"/>
-          <p:cNvSpPr/>
-          <p:nvPr/>
-        </p:nvSpPr>
-        <p:spPr>
-          <a:xfrm>
-            <a:off x="685800" y="4129023"/>
-            <a:ext cx="10820095" cy="12801"/>
-          </a:xfrm>
-          <a:prstGeom prst="rect">
-            <a:avLst/>
-          </a:prstGeom>
-          <a:solidFill>
-            <a:srgbClr val="E6E1D6"/>
-          </a:solidFill>
-          <a:ln>
-            <a:noFill/>
-          </a:ln>
-          <a:effectLst/>
-        </p:spPr>
-        <p:style>
-          <a:lnRef idx="1">
-            <a:schemeClr val="accent1"/>
-          </a:lnRef>
-          <a:fillRef idx="3">
-            <a:schemeClr val="accent1"/>
-          </a:fillRef>
-          <a:effectRef idx="2">
-            <a:schemeClr val="accent1"/>
-          </a:effectRef>
-          <a:fontRef idx="minor">
-            <a:schemeClr val="lt1"/>
-          </a:fontRef>
-        </p:style>
-        <p:txBody>
-          <a:bodyPr rtlCol="0" anchor="ctr"/>
-          <a:lstStyle/>
-          <a:p>
-            <a:pPr algn="ctr"/>
-          </a:p>
-        </p:txBody>
-      </p:sp>
-      <p:sp>
-        <p:nvSpPr>
-          <p:cNvPr id="15" name="TextBox 14"/>
-          <p:cNvSpPr txBox="1"/>
-          <p:nvPr/>
-        </p:nvSpPr>
-        <p:spPr>
-          <a:xfrm>
-            <a:off x="685800" y="4165600"/>
-            <a:ext cx="3383280" cy="1072896"/>
-          </a:xfrm>
-          <a:prstGeom prst="rect">
-            <a:avLst/>
-          </a:prstGeom>
-          <a:noFill/>
-        </p:spPr>
-        <p:txBody>
-          <a:bodyPr wrap="square" anchor="ctr">
-            <a:noAutofit/>
-          </a:bodyPr>
-          <a:lstStyle/>
-          <a:p>
-            <a:pPr algn="l">
-              <a:lnSpc>
-                <a:spcPct val="125000"/>
-              </a:lnSpc>
-            </a:pPr>
-            <a:r>
-              <a:rPr sz="2000" b="0">
-                <a:solidFill>
-                  <a:srgbClr val="5C6472"/>
-                </a:solidFill>
-                <a:latin typeface="Yu Gothic"/>
-                <a:ea typeface="Yu Gothic"/>
-                <a:cs typeface="Yu Gothic"/>
-              </a:rPr>
-              <a:t>手口</a:t>
-            </a:r>
-          </a:p>
-        </p:txBody>
-      </p:sp>
-      <p:sp>
-        <p:nvSpPr>
-          <p:cNvPr id="16" name="TextBox 15"/>
-          <p:cNvSpPr txBox="1"/>
-          <p:nvPr/>
-        </p:nvSpPr>
-        <p:spPr>
-          <a:xfrm>
-            <a:off x="4343400" y="4165600"/>
-            <a:ext cx="7178040" cy="1072896"/>
-          </a:xfrm>
-          <a:prstGeom prst="rect">
-            <a:avLst/>
-          </a:prstGeom>
-          <a:noFill/>
-        </p:spPr>
-        <p:txBody>
-          <a:bodyPr wrap="square" anchor="ctr">
-            <a:noAutofit/>
-          </a:bodyPr>
-          <a:lstStyle/>
-          <a:p>
-            <a:pPr>
-              <a:lnSpc>
-                <a:spcPct val="120000"/>
-              </a:lnSpc>
-            </a:pPr>
-            <a:r>
-              <a:rPr sz="2800" b="1">
-                <a:solidFill>
-                  <a:srgbClr val="B9791F"/>
-                </a:solidFill>
-                <a:latin typeface="Yu Gothic"/>
-                <a:ea typeface="Yu Gothic"/>
-                <a:cs typeface="Yu Gothic"/>
-              </a:rPr>
-              <a:t>「＋」</a:t>
-            </a:r>
-            <a:r>
-              <a:rPr sz="2800" b="1">
-                <a:solidFill>
-                  <a:srgbClr val="20242C"/>
-                </a:solidFill>
-                <a:latin typeface="Yu Gothic"/>
-                <a:ea typeface="Yu Gothic"/>
-                <a:cs typeface="Yu Gothic"/>
-              </a:rPr>
-              <a:t>で始まる国際電話から、警察署そっくりの番号（末尾</a:t>
-            </a:r>
-            <a:r>
-              <a:rPr sz="2800" b="1">
-                <a:solidFill>
-                  <a:srgbClr val="B9791F"/>
-                </a:solidFill>
-                <a:latin typeface="Yu Gothic"/>
-                <a:ea typeface="Yu Gothic"/>
-                <a:cs typeface="Yu Gothic"/>
-              </a:rPr>
-              <a:t>0110</a:t>
-            </a:r>
-            <a:r>
-              <a:rPr sz="2800" b="1">
-                <a:solidFill>
-                  <a:srgbClr val="20242C"/>
-                </a:solidFill>
-                <a:latin typeface="Yu Gothic"/>
-                <a:ea typeface="Yu Gothic"/>
-                <a:cs typeface="Yu Gothic"/>
-              </a:rPr>
-              <a:t>）を偽装表示</a:t>
-            </a:r>
-          </a:p>
-        </p:txBody>
-      </p:sp>
-      <p:sp>
-        <p:nvSpPr>
-          <p:cNvPr id="17" name="meta:pageno"/>
+              <a:t>出典：警察庁「令和7年における特殊詐欺及びSNS型投資・ロマンス詐欺の認知・検挙状況等について」</a:t>
+            </a:r>
+          </a:p>
+        </p:txBody>
+      </p:sp>
+      <p:pic>
+        <p:nvPicPr>
+          <p:cNvPr id="5" name="Picture 4" descr="nise-keisatsu.png"/>
+          <p:cNvPicPr>
+            <a:picLocks noChangeAspect="1"/>
+          </p:cNvPicPr>
+          <p:nvPr/>
+        </p:nvPicPr>
+        <p:blipFill>
+          <a:blip r:embed="rId2"/>
+          <a:stretch>
+            <a:fillRect/>
+          </a:stretch>
+        </p:blipFill>
+        <p:spPr>
+          <a:xfrm>
+            <a:off x="1310167" y="1645920"/>
+            <a:ext cx="9571361" cy="4133088"/>
+          </a:xfrm>
+          <a:prstGeom prst="rect">
+            <a:avLst/>
+          </a:prstGeom>
+        </p:spPr>
+      </p:pic>
+      <p:sp>
+        <p:nvSpPr>
+          <p:cNvPr id="6" name="meta:pageno"/>
           <p:cNvSpPr txBox="1"/>
           <p:nvPr/>
         </p:nvSpPr>
@@ -8744,7 +8731,7 @@
       </p:sp>
       <p:sp>
         <p:nvSpPr>
-          <p:cNvPr id="18" name="meta:part"/>
+          <p:cNvPr id="7" name="meta:part"/>
           <p:cNvSpPr txBox="1"/>
           <p:nvPr/>
         </p:nvSpPr>
@@ -11829,7 +11816,7 @@
                 <a:ea typeface="Yu Gothic"/>
                 <a:cs typeface="Yu Gothic"/>
               </a:rPr>
-              <a:t>今日は、何も売りません——近い未来に訪れる「AI詐欺」から身を守る方法を、持って帰っていただくこと</a:t>
+              <a:t>近い未来に訪れる「AI詐欺」から身を守る方法を、持って帰っていただくこと</a:t>
             </a:r>
           </a:p>
         </p:txBody>

--- a/slides/deepfake-talk.pptx
+++ b/slides/deepfake-talk.pptx
@@ -534,7 +534,7 @@
           <a:lstStyle/>
           <a:p>
             <a:r>
-              <a:t>開演前から表示。第一声は自己紹介から。</a:t>
+              <a:t>開演前から表示。第一声は自己紹介から（Flegrowth・葉 明哲）。</a:t>
             </a:r>
           </a:p>
         </p:txBody>
@@ -5886,7 +5886,7 @@
                 <a:ea typeface="Yu Gothic"/>
                 <a:cs typeface="Yu Gothic"/>
               </a:rPr>
-              <a:t>（会社名・講師名・日付）</a:t>
+              <a:t>Flegrowth ／ 葉 明哲 ／ 2026年8月19日</a:t>
             </a:r>
           </a:p>
         </p:txBody>

--- a/slides/deepfake-talk.pptx
+++ b/slides/deepfake-talk.pptx
@@ -1444,7 +1444,7 @@
           <a:lstStyle/>
           <a:p>
             <a:r>
-              <a:t>一拍おいて、ゆっくり。「しかも標的は、有名人ではありません。家族の声をまねた音声クローン詐欺——皆さんと同じ、ごく一般の家庭が狙われています」。ここが第2部後半の転調点。次の「なぜ日本は有名人ばかりなのか（材料の差）」への引きになる。</a:t>
+              <a:t>一拍おいて、ゆっくり。「海外で増えているのは、家族の声をまねた音声クローン詐欺。標的は有名人ではありません。皆さんと同じ、ごく普通の家庭です」。ここが第2部後半の転調点。次の「なぜ日本は有名人ばかりなのか（材料の差）」への引きになる。</a:t>
             </a:r>
           </a:p>
         </p:txBody>
@@ -9663,7 +9663,7 @@
                 <a:ea typeface="Yu Mincho"/>
                 <a:cs typeface="Yu Mincho"/>
               </a:rPr>
-              <a:t>標的は、有名人ではない。</a:t>
+              <a:t>海外で増えているのは、</a:t>
             </a:r>
           </a:p>
           <a:p>
@@ -9681,7 +9681,7 @@
                 <a:ea typeface="Yu Mincho"/>
                 <a:cs typeface="Yu Mincho"/>
               </a:rPr>
-              <a:t>家族の声をまねた</a:t>
+              <a:t>家族の声をまねた詐欺</a:t>
             </a:r>
           </a:p>
           <a:p>
@@ -9699,7 +9699,7 @@
                 <a:ea typeface="Yu Mincho"/>
                 <a:cs typeface="Yu Mincho"/>
               </a:rPr>
-              <a:t>「音声クローン詐欺」</a:t>
+              <a:t>——標的は、ごく普通の家庭</a:t>
             </a:r>
           </a:p>
         </p:txBody>

--- a/slides/deepfake-talk.pptx
+++ b/slides/deepfake-talk.pptx
@@ -11052,7 +11052,7 @@
                 <a:ea typeface="Yu Gothic"/>
                 <a:cs typeface="Yu Gothic"/>
               </a:rPr>
-              <a:t>実演③　このAIは断る。しかし——</a:t>
+              <a:t>実演③　最新のAIは断る。しかし——</a:t>
             </a:r>
           </a:p>
         </p:txBody>

--- a/slides/deepfake-talk.pptx
+++ b/slides/deepfake-talk.pptx
@@ -744,7 +744,7 @@
           <a:lstStyle/>
           <a:p>
             <a:r>
-              <a:t>物語として語る。「香港の、ある会社の経理担当者の話です。本社の財務責任者から『極秘の買収案件だ。誰にも言わず送金の準備をしてほしい』というメールが来て、彼は疑った。当然です、プロですから。ところが確認のために呼ばれたビデオ会議に入ると、画面の向こうにはその財務責任者がいて、よく知る同僚たちもいた。顔も声もいつも通り。彼は15回に分けて送金しました。——会議にいた人間は、本人以外、全員ニセモノでした。被害は約38億円」 一拍おく。「騙されたのは、うっかり者ではありません。一度疑ったプロです」。※「誰にも言わず」がスペインの囚人と同じ決まり文句である点は、触れると気づく人だけ気づく置き方でよい。「何が起きたか」だけを語り、作り方には触れない。</a:t>
+              <a:t>物語として語る。「香港の、ある会社の経理担当者の話です。本社の財務責任者から『極秘の買収案件だ。誰にも言わず送金の準備をしてほしい』というメールが来て、彼は疑った。当然です、プロですから。ところが確認のために呼ばれたビデオ会議に入ると、画面の向こうにはその財務責任者がいて、よく知る同僚たちもいた。顔も声もいつも通り。彼は15回に分けて送金しました。——会議にいた人間は、本人以外、全員ニセモノでした。被害は約38億円」 一拍おく。「騙されたのは、うっかり者ではありません。一度疑ったプロです」。※「誰にも言わず」がスペインの囚人と同じ決まり文句である点は、触れると気づく人だけ気づく置き方でよい。「何が起きたか」だけを語り、作り方には触れない。 ※画像メモ（生成AI用プロンプト案）: ノートPCのビデオ会議画面。参加者6人は全員暗いシルエット。不穏な雰囲気。実在の顔・文字なし。</a:t>
             </a:r>
           </a:p>
         </p:txBody>
@@ -814,7 +814,7 @@
           <a:lstStyle/>
           <a:p>
             <a:r>
-              <a:t>「ディープフェイクは、映像の顔をその場で別人に変えられる段階に入っています。声も、ほんの少しの音声——他人が投稿した動画、会議の録画、留守番電話——から本人そっくりの声が作れる。自分が用心して声を出さなくても、材料は知らないうちに外に残っています」</a:t>
+              <a:t>「ディープフェイクは、映像の顔をその場で別人に変えられる段階に入っています。声も、ほんの少しの音声——他人が投稿した動画、会議の録画、留守番電話——から本人そっくりの声が作れる。自分が用心して声を出さなくても、材料は知らないうちに外に残っています」 ※画像メモ（生成AI用プロンプト案）: スマートフォンの動画から音声波形が流れ出て複製されるフラットイラスト。文字なし・特定人物なし。</a:t>
             </a:r>
           </a:p>
         </p:txBody>
@@ -2284,7 +2284,7 @@
           <a:lstStyle/>
           <a:p>
             <a:r>
-              <a:t>「でも思い出してください。あのとき会場に流れた『そんなはずはない』という空気。あれが“ばらまきの嘘”への完璧な勝ち方です。これから来るのは、笑い飛ばせない、あなた専用の嘘。だからこそ、笑う代わりに——一度切って、自分で調べて、かけ直す」</a:t>
+              <a:t>「でも思い出してください。あのとき会場に流れた『そんなはずはない』という空気。あれが“ばらまきの嘘”への完璧な勝ち方です。これから来るのは、笑い飛ばせない、あなた専用の嘘。だからこそ、笑う代わりに——一度切って、自分で調べて、かけ直す」 ※画像メモ（生成AI用プロンプト案）: 三世代の家族が食卓で笑いながら話す温かいフラットイラスト。特定人物に見えない簡略な顔・文字なし。</a:t>
             </a:r>
           </a:p>
         </p:txBody>
@@ -2494,7 +2494,7 @@
           <a:lstStyle/>
           <a:p>
             <a:r>
-              <a:t>改まった声で「突然ですが——おめでとうございます！本日このセミナーにご参加の皆さま全員に、もれなく1億円を差し上げます！」。笑いと戸惑いを数秒待ってから「……驚かせてすみません。もちろん、本当ではありません。ただ、いま皆さん、一瞬で『そんなはずはない』と思いましたよね。今日はまず、その話から始めます。実はいまの嘘、プロの詐欺師が何十年も使い続けてきた、由緒正しい手口なんです」。※ネタばらしまで数秒で1セット。打ち消しは口頭で即座に、はっきり言い切る（真に受ける人を出さない）。聴衆の反応を採点する言い方（「全員見抜けましたね」等）はしない。</a:t>
+              <a:t>改まった声で「突然ですが——おめでとうございます！本日このセミナーにご参加の皆さま全員に、もれなく1億円を差し上げます！」。笑いと戸惑いを数秒待ってから「……驚かせてすみません。もちろん、本当ではありません。ただ、いま皆さん、一瞬で『そんなはずはない』と思いましたよね。今日はまず、その話から始めます。実はいまの嘘、プロの詐欺師が何十年も使い続けてきた、由緒正しい手口なんです」。※ネタばらしまで数秒で1セット。打ち消しは口頭で即座に、はっきり言い切る（真に受ける人を出さない）。聴衆の反応を採点する言い方（「全員見抜けましたね」等）はしない。 ※画像メモ（生成AI用プロンプト案）: 紙吹雪と金色のくす玉が舞う祝賀イメージ。文字なし・人物なし・明るい背景。</a:t>
             </a:r>
           </a:p>
         </p:txBody>
@@ -2774,7 +2774,7 @@
           <a:lstStyle/>
           <a:p>
             <a:r>
-              <a:t>「実はこの商売、200年前からあります。手口を一言でいうと——『囚われたお金持ちを助けてくれたら、財産を分けます』。19世紀、欧米の資産家のもとに、スペインから一通の手紙が届きます。『私は、無実の罪でスペインの牢獄に囚われた、さる高貴なお方の代理人です。あの方は莫大な財産を隠していますが、正体を明かせば命が危ない。看守に渡すお金を立て替えていただければ、釈放の暁には財産の3分の1を差し上げます』——のちに『スペインの囚人』と呼ばれた、有名な手紙詐欺です。お金を送ると、どうなるか。囚人は、出てきません。『手続きに新たな問題が起きた』と、追加の請求が届くんです。何度でも。1898年のニューヨーク・タイムズに『蘇った古い詐欺』という記事が残っています。そしてこの手紙には、決まってこう書いてありました。『このことは、くれぐれも誰にも言わないでください』——覚えておいてください、あとでまた出てきます」。続けて「2000年代、詐欺の舞台は手紙からメールに移ります。さっきの3つは、その直系の子孫です。道具は変わっても、構造は200年間ずっと同じ」。※「誰にも言うな」は結論の即切りの合図で回収する伏線。</a:t>
+              <a:t>「実はこの商売、200年前からあります。手口を一言でいうと——『囚われたお金持ちを助けてくれたら、財産を分けます』。19世紀、欧米の資産家のもとに、スペインから一通の手紙が届きます。『私は、無実の罪でスペインの牢獄に囚われた、さる高貴なお方の代理人です。あの方は莫大な財産を隠していますが、正体を明かせば命が危ない。看守に渡すお金を立て替えていただければ、釈放の暁には財産の3分の1を差し上げます』——のちに『スペインの囚人』と呼ばれた、有名な手紙詐欺です。お金を送ると、どうなるか。囚人は、出てきません。『手続きに新たな問題が起きた』と、追加の請求が届くんです。何度でも。1898年のニューヨーク・タイムズに『蘇った古い詐欺』という記事が残っています。そしてこの手紙には、決まってこう書いてありました。『このことは、くれぐれも誰にも言わないでください』——覚えておいてください、あとでまた出てきます」。続けて「2000年代、詐欺の舞台は手紙からメールに移ります。さっきの3つは、その直系の子孫です。道具は変わっても、構造は200年間ずっと同じ」。※「誰にも言うな」は結論の即切りの合図で回収する伏線。 ※画像メモ（生成AI用プロンプト案）: 羊皮紙の古い手紙と封蝋、羽根ペン。セピア調の19世紀ヨーロッパ風イラスト。文字は判読不能なかすれ表現・人物なし。</a:t>
             </a:r>
           </a:p>
         </p:txBody>
@@ -6591,108 +6591,28 @@
       </p:sp>
       <p:sp>
         <p:nvSpPr>
-          <p:cNvPr id="5" name="TextBox 4"/>
-          <p:cNvSpPr txBox="1"/>
-          <p:nvPr/>
-        </p:nvSpPr>
-        <p:spPr>
-          <a:xfrm>
-            <a:off x="685800" y="1645920"/>
-            <a:ext cx="10820095" cy="3191256"/>
-          </a:xfrm>
-          <a:prstGeom prst="rect">
-            <a:avLst/>
-          </a:prstGeom>
-          <a:noFill/>
-        </p:spPr>
-        <p:txBody>
-          <a:bodyPr wrap="square" anchor="t">
-            <a:noAutofit/>
-          </a:bodyPr>
-          <a:lstStyle/>
-          <a:p>
-            <a:pPr marL="304800" indent="-304800">
-              <a:lnSpc>
-                <a:spcPct val="135000"/>
-              </a:lnSpc>
-              <a:spcAft>
-                <a:spcPts val="839"/>
-              </a:spcAft>
-            </a:pPr>
-            <a:r>
-              <a:rPr sz="2400" b="0">
-                <a:solidFill>
-                  <a:srgbClr val="20242C"/>
-                </a:solidFill>
-                <a:latin typeface="Yu Gothic"/>
-                <a:ea typeface="Yu Gothic"/>
-                <a:cs typeface="Yu Gothic"/>
-              </a:rPr>
-              <a:t>・香港支社の経理担当に、本社の財務責任者から「極秘の買収案件。誰にも言わず送金の準備を」というメール——彼は詐欺を疑った。プロだから当然</a:t>
-            </a:r>
-          </a:p>
-          <a:p>
-            <a:pPr marL="304800" indent="-304800">
-              <a:lnSpc>
-                <a:spcPct val="135000"/>
-              </a:lnSpc>
-              <a:spcAft>
-                <a:spcPts val="839"/>
-              </a:spcAft>
-            </a:pPr>
-            <a:r>
-              <a:rPr sz="2400" b="0">
-                <a:solidFill>
-                  <a:srgbClr val="20242C"/>
-                </a:solidFill>
-                <a:latin typeface="Yu Gothic"/>
-                <a:ea typeface="Yu Gothic"/>
-                <a:cs typeface="Yu Gothic"/>
-              </a:rPr>
-              <a:t>・確認のために入ったビデオ会議には、よく知る財務責任者と同僚たち。顔も声もいつも通り——信じて、15回に分けて送金</a:t>
-            </a:r>
-          </a:p>
-          <a:p>
-            <a:pPr marL="304800" indent="-304800">
-              <a:lnSpc>
-                <a:spcPct val="135000"/>
-              </a:lnSpc>
-            </a:pPr>
-            <a:r>
-              <a:rPr sz="2400" b="0">
-                <a:solidFill>
-                  <a:srgbClr val="20242C"/>
-                </a:solidFill>
-                <a:latin typeface="Yu Gothic"/>
-                <a:ea typeface="Yu Gothic"/>
-                <a:cs typeface="Yu Gothic"/>
-              </a:rPr>
-              <a:t>・会議にいたのは、本人以外すべてAIで作られたニセモノだった——被害 約38億円</a:t>
-            </a:r>
-          </a:p>
-        </p:txBody>
-      </p:sp>
-      <p:sp>
-        <p:nvSpPr>
-          <p:cNvPr id="6" name="Rounded Rectangle 5"/>
+          <p:cNvPr id="5" name="slot:image"/>
           <p:cNvSpPr/>
           <p:nvPr/>
         </p:nvSpPr>
         <p:spPr>
           <a:xfrm>
-            <a:off x="685800" y="5001768"/>
-            <a:ext cx="10820095" cy="777240"/>
+            <a:off x="7827062" y="1645920"/>
+            <a:ext cx="3678832" cy="4133088"/>
           </a:xfrm>
           <a:prstGeom prst="roundRect">
             <a:avLst>
-              <a:gd name="adj" fmla="val 16000"/>
+              <a:gd name="adj" fmla="val 3479"/>
             </a:avLst>
           </a:prstGeom>
           <a:solidFill>
-            <a:srgbClr val="F3E6CF"/>
+            <a:srgbClr val="F1F2F5"/>
           </a:solidFill>
-          <a:ln>
-            <a:noFill/>
+          <a:ln w="9525">
+            <a:solidFill>
+              <a:srgbClr val="5C6472"/>
+            </a:solidFill>
+            <a:prstDash val="dash"/>
           </a:ln>
           <a:effectLst/>
         </p:spPr>
@@ -6711,6 +6631,170 @@
           </a:fontRef>
         </p:style>
         <p:txBody>
+          <a:bodyPr rtlCol="0" anchor="ctr" wrap="square" lIns="164592" rIns="164592" tIns="73152" bIns="73152">
+            <a:noAutofit/>
+          </a:bodyPr>
+          <a:lstStyle/>
+          <a:p>
+            <a:pPr algn="ctr">
+              <a:lnSpc>
+                <a:spcPct val="130000"/>
+              </a:lnSpc>
+            </a:pPr>
+            <a:r>
+              <a:rPr sz="1500" b="1">
+                <a:solidFill>
+                  <a:srgbClr val="5C6472"/>
+                </a:solidFill>
+                <a:latin typeface="Yu Gothic"/>
+                <a:ea typeface="Yu Gothic"/>
+                <a:cs typeface="Yu Gothic"/>
+              </a:rPr>
+              <a:t>イメージ画像スペース</a:t>
+            </a:r>
+          </a:p>
+          <a:p>
+            <a:pPr algn="ctr">
+              <a:lnSpc>
+                <a:spcPct val="135000"/>
+              </a:lnSpc>
+            </a:pPr>
+            <a:r>
+              <a:rPr sz="1200" b="0">
+                <a:solidFill>
+                  <a:srgbClr val="5C6472"/>
+                </a:solidFill>
+                <a:latin typeface="Yu Gothic"/>
+                <a:ea typeface="Yu Gothic"/>
+                <a:cs typeface="Yu Gothic"/>
+              </a:rPr>
+              <a:t>ビデオ会議画面のイメージ（人物はシルエット）</a:t>
+            </a:r>
+          </a:p>
+        </p:txBody>
+      </p:sp>
+      <p:sp>
+        <p:nvSpPr>
+          <p:cNvPr id="6" name="TextBox 5"/>
+          <p:cNvSpPr txBox="1"/>
+          <p:nvPr/>
+        </p:nvSpPr>
+        <p:spPr>
+          <a:xfrm>
+            <a:off x="685800" y="1645920"/>
+            <a:ext cx="6708459" cy="2875788"/>
+          </a:xfrm>
+          <a:prstGeom prst="rect">
+            <a:avLst/>
+          </a:prstGeom>
+          <a:noFill/>
+        </p:spPr>
+        <p:txBody>
+          <a:bodyPr wrap="square" anchor="t">
+            <a:noAutofit/>
+          </a:bodyPr>
+          <a:lstStyle/>
+          <a:p>
+            <a:pPr marL="279400" indent="-279400">
+              <a:lnSpc>
+                <a:spcPct val="135000"/>
+              </a:lnSpc>
+              <a:spcAft>
+                <a:spcPts val="769"/>
+              </a:spcAft>
+            </a:pPr>
+            <a:r>
+              <a:rPr sz="2200" b="0">
+                <a:solidFill>
+                  <a:srgbClr val="20242C"/>
+                </a:solidFill>
+                <a:latin typeface="Yu Gothic"/>
+                <a:ea typeface="Yu Gothic"/>
+                <a:cs typeface="Yu Gothic"/>
+              </a:rPr>
+              <a:t>・財務責任者から経理担当に「極秘の買収案件。誰にも言わず送金の準備を」——彼は詐欺を疑った</a:t>
+            </a:r>
+          </a:p>
+          <a:p>
+            <a:pPr marL="279400" indent="-279400">
+              <a:lnSpc>
+                <a:spcPct val="135000"/>
+              </a:lnSpc>
+              <a:spcAft>
+                <a:spcPts val="769"/>
+              </a:spcAft>
+            </a:pPr>
+            <a:r>
+              <a:rPr sz="2200" b="0">
+                <a:solidFill>
+                  <a:srgbClr val="20242C"/>
+                </a:solidFill>
+                <a:latin typeface="Yu Gothic"/>
+                <a:ea typeface="Yu Gothic"/>
+                <a:cs typeface="Yu Gothic"/>
+              </a:rPr>
+              <a:t>・確認のビデオ会議には、よく知る上司と同僚たち。顔も声もいつも通り——信じて15回送金</a:t>
+            </a:r>
+          </a:p>
+          <a:p>
+            <a:pPr marL="279400" indent="-279400">
+              <a:lnSpc>
+                <a:spcPct val="135000"/>
+              </a:lnSpc>
+            </a:pPr>
+            <a:r>
+              <a:rPr sz="2200" b="0">
+                <a:solidFill>
+                  <a:srgbClr val="20242C"/>
+                </a:solidFill>
+                <a:latin typeface="Yu Gothic"/>
+                <a:ea typeface="Yu Gothic"/>
+                <a:cs typeface="Yu Gothic"/>
+              </a:rPr>
+              <a:t>・会議にいたのは、本人以外すべてAI製のニセモノ——被害 約38億円</a:t>
+            </a:r>
+          </a:p>
+        </p:txBody>
+      </p:sp>
+      <p:sp>
+        <p:nvSpPr>
+          <p:cNvPr id="7" name="Rounded Rectangle 6"/>
+          <p:cNvSpPr/>
+          <p:nvPr/>
+        </p:nvSpPr>
+        <p:spPr>
+          <a:xfrm>
+            <a:off x="685800" y="4686300"/>
+            <a:ext cx="6708459" cy="1092708"/>
+          </a:xfrm>
+          <a:prstGeom prst="roundRect">
+            <a:avLst>
+              <a:gd name="adj" fmla="val 16000"/>
+            </a:avLst>
+          </a:prstGeom>
+          <a:solidFill>
+            <a:srgbClr val="F3E6CF"/>
+          </a:solidFill>
+          <a:ln>
+            <a:noFill/>
+          </a:ln>
+          <a:effectLst/>
+        </p:spPr>
+        <p:style>
+          <a:lnRef idx="1">
+            <a:schemeClr val="accent1"/>
+          </a:lnRef>
+          <a:fillRef idx="3">
+            <a:schemeClr val="accent1"/>
+          </a:fillRef>
+          <a:effectRef idx="2">
+            <a:schemeClr val="accent1"/>
+          </a:effectRef>
+          <a:fontRef idx="minor">
+            <a:schemeClr val="lt1"/>
+          </a:fontRef>
+        </p:style>
+        <p:txBody>
           <a:bodyPr rtlCol="0" anchor="ctr" wrap="square" lIns="274320" rIns="274320">
             <a:noAutofit/>
           </a:bodyPr>
@@ -6733,7 +6817,7 @@
       </p:sp>
       <p:sp>
         <p:nvSpPr>
-          <p:cNvPr id="7" name="meta:pageno"/>
+          <p:cNvPr id="8" name="meta:pageno"/>
           <p:cNvSpPr txBox="1"/>
           <p:nvPr/>
         </p:nvSpPr>
@@ -6770,7 +6854,7 @@
       </p:sp>
       <p:sp>
         <p:nvSpPr>
-          <p:cNvPr id="8" name="meta:part"/>
+          <p:cNvPr id="9" name="meta:part"/>
           <p:cNvSpPr txBox="1"/>
           <p:nvPr/>
         </p:nvSpPr>
@@ -6906,14 +6990,98 @@
       </p:sp>
       <p:sp>
         <p:nvSpPr>
-          <p:cNvPr id="4" name="TextBox 3"/>
+          <p:cNvPr id="4" name="slot:image"/>
+          <p:cNvSpPr/>
+          <p:nvPr/>
+        </p:nvSpPr>
+        <p:spPr>
+          <a:xfrm>
+            <a:off x="7827062" y="1645920"/>
+            <a:ext cx="3678832" cy="4343400"/>
+          </a:xfrm>
+          <a:prstGeom prst="roundRect">
+            <a:avLst>
+              <a:gd name="adj" fmla="val 3479"/>
+            </a:avLst>
+          </a:prstGeom>
+          <a:solidFill>
+            <a:srgbClr val="F1F2F5"/>
+          </a:solidFill>
+          <a:ln w="9525">
+            <a:solidFill>
+              <a:srgbClr val="5C6472"/>
+            </a:solidFill>
+            <a:prstDash val="dash"/>
+          </a:ln>
+          <a:effectLst/>
+        </p:spPr>
+        <p:style>
+          <a:lnRef idx="1">
+            <a:schemeClr val="accent1"/>
+          </a:lnRef>
+          <a:fillRef idx="3">
+            <a:schemeClr val="accent1"/>
+          </a:fillRef>
+          <a:effectRef idx="2">
+            <a:schemeClr val="accent1"/>
+          </a:effectRef>
+          <a:fontRef idx="minor">
+            <a:schemeClr val="lt1"/>
+          </a:fontRef>
+        </p:style>
+        <p:txBody>
+          <a:bodyPr rtlCol="0" anchor="ctr" wrap="square" lIns="164592" rIns="164592" tIns="73152" bIns="73152">
+            <a:noAutofit/>
+          </a:bodyPr>
+          <a:lstStyle/>
+          <a:p>
+            <a:pPr algn="ctr">
+              <a:lnSpc>
+                <a:spcPct val="130000"/>
+              </a:lnSpc>
+            </a:pPr>
+            <a:r>
+              <a:rPr sz="1500" b="1">
+                <a:solidFill>
+                  <a:srgbClr val="5C6472"/>
+                </a:solidFill>
+                <a:latin typeface="Yu Gothic"/>
+                <a:ea typeface="Yu Gothic"/>
+                <a:cs typeface="Yu Gothic"/>
+              </a:rPr>
+              <a:t>イメージ画像スペース</a:t>
+            </a:r>
+          </a:p>
+          <a:p>
+            <a:pPr algn="ctr">
+              <a:lnSpc>
+                <a:spcPct val="135000"/>
+              </a:lnSpc>
+            </a:pPr>
+            <a:r>
+              <a:rPr sz="1200" b="0">
+                <a:solidFill>
+                  <a:srgbClr val="5C6472"/>
+                </a:solidFill>
+                <a:latin typeface="Yu Gothic"/>
+                <a:ea typeface="Yu Gothic"/>
+                <a:cs typeface="Yu Gothic"/>
+              </a:rPr>
+              <a:t>スマホ動画から声が抜き取られる図</a:t>
+            </a:r>
+          </a:p>
+        </p:txBody>
+      </p:sp>
+      <p:sp>
+        <p:nvSpPr>
+          <p:cNvPr id="5" name="TextBox 4"/>
           <p:cNvSpPr txBox="1"/>
           <p:nvPr/>
         </p:nvSpPr>
         <p:spPr>
           <a:xfrm>
             <a:off x="685800" y="1645920"/>
-            <a:ext cx="10820095" cy="4343400"/>
+            <a:ext cx="6708459" cy="4343400"/>
           </a:xfrm>
           <a:prstGeom prst="rect">
             <a:avLst/>
@@ -6989,7 +7157,7 @@
       </p:sp>
       <p:sp>
         <p:nvSpPr>
-          <p:cNvPr id="5" name="meta:pageno"/>
+          <p:cNvPr id="6" name="meta:pageno"/>
           <p:cNvSpPr txBox="1"/>
           <p:nvPr/>
         </p:nvSpPr>
@@ -7026,7 +7194,7 @@
       </p:sp>
       <p:sp>
         <p:nvSpPr>
-          <p:cNvPr id="6" name="meta:part"/>
+          <p:cNvPr id="7" name="meta:part"/>
           <p:cNvSpPr txBox="1"/>
           <p:nvPr/>
         </p:nvSpPr>
@@ -13106,7 +13274,7 @@
         <p:spPr>
           <a:xfrm>
             <a:off x="502920" y="1188720"/>
-            <a:ext cx="11185855" cy="3657599"/>
+            <a:ext cx="11185855" cy="2221991"/>
           </a:xfrm>
           <a:prstGeom prst="rect">
             <a:avLst/>
@@ -13164,7 +13332,7 @@
         </p:nvSpPr>
         <p:spPr>
           <a:xfrm>
-            <a:off x="685800" y="4983479"/>
+            <a:off x="685800" y="3547871"/>
             <a:ext cx="10820095" cy="1005840"/>
           </a:xfrm>
           <a:prstGeom prst="rect">
@@ -13199,7 +13367,91 @@
       </p:sp>
       <p:sp>
         <p:nvSpPr>
-          <p:cNvPr id="4" name="meta:pageno"/>
+          <p:cNvPr id="4" name="slot:image"/>
+          <p:cNvSpPr/>
+          <p:nvPr/>
+        </p:nvSpPr>
+        <p:spPr>
+          <a:xfrm>
+            <a:off x="685800" y="4754879"/>
+            <a:ext cx="10820095" cy="1234440"/>
+          </a:xfrm>
+          <a:prstGeom prst="roundRect">
+            <a:avLst>
+              <a:gd name="adj" fmla="val 10370"/>
+            </a:avLst>
+          </a:prstGeom>
+          <a:solidFill>
+            <a:srgbClr val="F1F2F5"/>
+          </a:solidFill>
+          <a:ln w="9525">
+            <a:solidFill>
+              <a:srgbClr val="5C6472"/>
+            </a:solidFill>
+            <a:prstDash val="dash"/>
+          </a:ln>
+          <a:effectLst/>
+        </p:spPr>
+        <p:style>
+          <a:lnRef idx="1">
+            <a:schemeClr val="accent1"/>
+          </a:lnRef>
+          <a:fillRef idx="3">
+            <a:schemeClr val="accent1"/>
+          </a:fillRef>
+          <a:effectRef idx="2">
+            <a:schemeClr val="accent1"/>
+          </a:effectRef>
+          <a:fontRef idx="minor">
+            <a:schemeClr val="lt1"/>
+          </a:fontRef>
+        </p:style>
+        <p:txBody>
+          <a:bodyPr rtlCol="0" anchor="ctr" wrap="square" lIns="164592" rIns="164592" tIns="73152" bIns="73152">
+            <a:noAutofit/>
+          </a:bodyPr>
+          <a:lstStyle/>
+          <a:p>
+            <a:pPr algn="ctr">
+              <a:lnSpc>
+                <a:spcPct val="130000"/>
+              </a:lnSpc>
+            </a:pPr>
+            <a:r>
+              <a:rPr sz="1500" b="1">
+                <a:solidFill>
+                  <a:srgbClr val="5C6472"/>
+                </a:solidFill>
+                <a:latin typeface="Yu Gothic"/>
+                <a:ea typeface="Yu Gothic"/>
+                <a:cs typeface="Yu Gothic"/>
+              </a:rPr>
+              <a:t>イメージ画像スペース</a:t>
+            </a:r>
+          </a:p>
+          <a:p>
+            <a:pPr algn="ctr">
+              <a:lnSpc>
+                <a:spcPct val="135000"/>
+              </a:lnSpc>
+            </a:pPr>
+            <a:r>
+              <a:rPr sz="1200" b="0">
+                <a:solidFill>
+                  <a:srgbClr val="5C6472"/>
+                </a:solidFill>
+                <a:latin typeface="Yu Gothic"/>
+                <a:ea typeface="Yu Gothic"/>
+                <a:cs typeface="Yu Gothic"/>
+              </a:rPr>
+              <a:t>家族で食卓を囲む温かいイラスト</a:t>
+            </a:r>
+          </a:p>
+        </p:txBody>
+      </p:sp>
+      <p:sp>
+        <p:nvSpPr>
+          <p:cNvPr id="5" name="meta:pageno"/>
           <p:cNvSpPr txBox="1"/>
           <p:nvPr/>
         </p:nvSpPr>
@@ -13236,7 +13488,7 @@
       </p:sp>
       <p:sp>
         <p:nvSpPr>
-          <p:cNvPr id="5" name="meta:part"/>
+          <p:cNvPr id="6" name="meta:part"/>
           <p:cNvSpPr txBox="1"/>
           <p:nvPr/>
         </p:nvSpPr>
@@ -13848,7 +14100,7 @@
         <p:spPr>
           <a:xfrm>
             <a:off x="502920" y="1188720"/>
-            <a:ext cx="11185855" cy="4800600"/>
+            <a:ext cx="11185855" cy="3364991"/>
           </a:xfrm>
           <a:prstGeom prst="rect">
             <a:avLst/>
@@ -13900,7 +14152,91 @@
       </p:sp>
       <p:sp>
         <p:nvSpPr>
-          <p:cNvPr id="3" name="meta:pageno"/>
+          <p:cNvPr id="3" name="slot:image"/>
+          <p:cNvSpPr/>
+          <p:nvPr/>
+        </p:nvSpPr>
+        <p:spPr>
+          <a:xfrm>
+            <a:off x="685800" y="4754879"/>
+            <a:ext cx="10820095" cy="1234440"/>
+          </a:xfrm>
+          <a:prstGeom prst="roundRect">
+            <a:avLst>
+              <a:gd name="adj" fmla="val 10370"/>
+            </a:avLst>
+          </a:prstGeom>
+          <a:solidFill>
+            <a:srgbClr val="F1F2F5"/>
+          </a:solidFill>
+          <a:ln w="9525">
+            <a:solidFill>
+              <a:srgbClr val="5C6472"/>
+            </a:solidFill>
+            <a:prstDash val="dash"/>
+          </a:ln>
+          <a:effectLst/>
+        </p:spPr>
+        <p:style>
+          <a:lnRef idx="1">
+            <a:schemeClr val="accent1"/>
+          </a:lnRef>
+          <a:fillRef idx="3">
+            <a:schemeClr val="accent1"/>
+          </a:fillRef>
+          <a:effectRef idx="2">
+            <a:schemeClr val="accent1"/>
+          </a:effectRef>
+          <a:fontRef idx="minor">
+            <a:schemeClr val="lt1"/>
+          </a:fontRef>
+        </p:style>
+        <p:txBody>
+          <a:bodyPr rtlCol="0" anchor="ctr" wrap="square" lIns="164592" rIns="164592" tIns="73152" bIns="73152">
+            <a:noAutofit/>
+          </a:bodyPr>
+          <a:lstStyle/>
+          <a:p>
+            <a:pPr algn="ctr">
+              <a:lnSpc>
+                <a:spcPct val="130000"/>
+              </a:lnSpc>
+            </a:pPr>
+            <a:r>
+              <a:rPr sz="1500" b="1">
+                <a:solidFill>
+                  <a:srgbClr val="5C6472"/>
+                </a:solidFill>
+                <a:latin typeface="Yu Gothic"/>
+                <a:ea typeface="Yu Gothic"/>
+                <a:cs typeface="Yu Gothic"/>
+              </a:rPr>
+              <a:t>イメージ画像スペース</a:t>
+            </a:r>
+          </a:p>
+          <a:p>
+            <a:pPr algn="ctr">
+              <a:lnSpc>
+                <a:spcPct val="135000"/>
+              </a:lnSpc>
+            </a:pPr>
+            <a:r>
+              <a:rPr sz="1200" b="0">
+                <a:solidFill>
+                  <a:srgbClr val="5C6472"/>
+                </a:solidFill>
+                <a:latin typeface="Yu Gothic"/>
+                <a:ea typeface="Yu Gothic"/>
+                <a:cs typeface="Yu Gothic"/>
+              </a:rPr>
+              <a:t>お祝いイメージ（紙吹雪・くす玉・金色）</a:t>
+            </a:r>
+          </a:p>
+        </p:txBody>
+      </p:sp>
+      <p:sp>
+        <p:nvSpPr>
+          <p:cNvPr id="4" name="meta:pageno"/>
           <p:cNvSpPr txBox="1"/>
           <p:nvPr/>
         </p:nvSpPr>
@@ -13937,7 +14273,7 @@
       </p:sp>
       <p:sp>
         <p:nvSpPr>
-          <p:cNvPr id="4" name="meta:part"/>
+          <p:cNvPr id="5" name="meta:part"/>
           <p:cNvSpPr txBox="1"/>
           <p:nvPr/>
         </p:nvSpPr>
@@ -14828,129 +15164,28 @@
       </p:sp>
       <p:sp>
         <p:nvSpPr>
-          <p:cNvPr id="5" name="TextBox 4"/>
-          <p:cNvSpPr txBox="1"/>
-          <p:nvPr/>
-        </p:nvSpPr>
-        <p:spPr>
-          <a:xfrm>
-            <a:off x="685800" y="1645920"/>
-            <a:ext cx="10820095" cy="3191256"/>
-          </a:xfrm>
-          <a:prstGeom prst="rect">
-            <a:avLst/>
-          </a:prstGeom>
-          <a:noFill/>
-        </p:spPr>
-        <p:txBody>
-          <a:bodyPr wrap="square" anchor="t">
-            <a:noAutofit/>
-          </a:bodyPr>
-          <a:lstStyle/>
-          <a:p>
-            <a:pPr marL="304800" indent="-304800">
-              <a:lnSpc>
-                <a:spcPct val="135000"/>
-              </a:lnSpc>
-              <a:spcAft>
-                <a:spcPts val="839"/>
-              </a:spcAft>
-            </a:pPr>
-            <a:r>
-              <a:rPr sz="2400" b="0">
-                <a:solidFill>
-                  <a:srgbClr val="20242C"/>
-                </a:solidFill>
-                <a:latin typeface="Yu Gothic"/>
-                <a:ea typeface="Yu Gothic"/>
-                <a:cs typeface="Yu Gothic"/>
-              </a:rPr>
-              <a:t>・手口を一言でいうと——「囚われたお金持ちを助けてくれたら、財産の3分の1を差し上げます」</a:t>
-            </a:r>
-          </a:p>
-          <a:p>
-            <a:pPr marL="304800" indent="-304800">
-              <a:lnSpc>
-                <a:spcPct val="135000"/>
-              </a:lnSpc>
-              <a:spcAft>
-                <a:spcPts val="839"/>
-              </a:spcAft>
-            </a:pPr>
-            <a:r>
-              <a:rPr sz="2400" b="0">
-                <a:solidFill>
-                  <a:srgbClr val="20242C"/>
-                </a:solidFill>
-                <a:latin typeface="Yu Gothic"/>
-                <a:ea typeface="Yu Gothic"/>
-                <a:cs typeface="Yu Gothic"/>
-              </a:rPr>
-              <a:t>・19世紀、スペインから欧米の資産家に届いた手紙。のちに「スペインの囚人」と呼ばれる古典詐欺</a:t>
-            </a:r>
-          </a:p>
-          <a:p>
-            <a:pPr marL="304800" indent="-304800">
-              <a:lnSpc>
-                <a:spcPct val="135000"/>
-              </a:lnSpc>
-              <a:spcAft>
-                <a:spcPts val="839"/>
-              </a:spcAft>
-            </a:pPr>
-            <a:r>
-              <a:rPr sz="2400" b="0">
-                <a:solidFill>
-                  <a:srgbClr val="20242C"/>
-                </a:solidFill>
-                <a:latin typeface="Yu Gothic"/>
-                <a:ea typeface="Yu Gothic"/>
-                <a:cs typeface="Yu Gothic"/>
-              </a:rPr>
-              <a:t>・お金を送っても、囚人は出てこない。「手続きに新たな問題が起きた」と追加請求だけが届く</a:t>
-            </a:r>
-          </a:p>
-          <a:p>
-            <a:pPr marL="304800" indent="-304800">
-              <a:lnSpc>
-                <a:spcPct val="135000"/>
-              </a:lnSpc>
-            </a:pPr>
-            <a:r>
-              <a:rPr sz="2400" b="0">
-                <a:solidFill>
-                  <a:srgbClr val="20242C"/>
-                </a:solidFill>
-                <a:latin typeface="Yu Gothic"/>
-                <a:ea typeface="Yu Gothic"/>
-                <a:cs typeface="Yu Gothic"/>
-              </a:rPr>
-              <a:t>・1898年のニューヨーク・タイムズが「蘇った古い詐欺」と報道——当時すでに古典</a:t>
-            </a:r>
-          </a:p>
-        </p:txBody>
-      </p:sp>
-      <p:sp>
-        <p:nvSpPr>
-          <p:cNvPr id="6" name="Rounded Rectangle 5"/>
+          <p:cNvPr id="5" name="slot:image"/>
           <p:cNvSpPr/>
           <p:nvPr/>
         </p:nvSpPr>
         <p:spPr>
           <a:xfrm>
-            <a:off x="685800" y="5001768"/>
-            <a:ext cx="10820095" cy="777240"/>
+            <a:off x="7827062" y="1645920"/>
+            <a:ext cx="3678832" cy="4133088"/>
           </a:xfrm>
           <a:prstGeom prst="roundRect">
             <a:avLst>
-              <a:gd name="adj" fmla="val 16000"/>
+              <a:gd name="adj" fmla="val 3479"/>
             </a:avLst>
           </a:prstGeom>
           <a:solidFill>
-            <a:srgbClr val="F3E6CF"/>
+            <a:srgbClr val="F1F2F5"/>
           </a:solidFill>
-          <a:ln>
-            <a:noFill/>
+          <a:ln w="9525">
+            <a:solidFill>
+              <a:srgbClr val="5C6472"/>
+            </a:solidFill>
+            <a:prstDash val="dash"/>
           </a:ln>
           <a:effectLst/>
         </p:spPr>
@@ -14969,6 +15204,170 @@
           </a:fontRef>
         </p:style>
         <p:txBody>
+          <a:bodyPr rtlCol="0" anchor="ctr" wrap="square" lIns="164592" rIns="164592" tIns="73152" bIns="73152">
+            <a:noAutofit/>
+          </a:bodyPr>
+          <a:lstStyle/>
+          <a:p>
+            <a:pPr algn="ctr">
+              <a:lnSpc>
+                <a:spcPct val="130000"/>
+              </a:lnSpc>
+            </a:pPr>
+            <a:r>
+              <a:rPr sz="1500" b="1">
+                <a:solidFill>
+                  <a:srgbClr val="5C6472"/>
+                </a:solidFill>
+                <a:latin typeface="Yu Gothic"/>
+                <a:ea typeface="Yu Gothic"/>
+                <a:cs typeface="Yu Gothic"/>
+              </a:rPr>
+              <a:t>イメージ画像スペース</a:t>
+            </a:r>
+          </a:p>
+          <a:p>
+            <a:pPr algn="ctr">
+              <a:lnSpc>
+                <a:spcPct val="135000"/>
+              </a:lnSpc>
+            </a:pPr>
+            <a:r>
+              <a:rPr sz="1200" b="0">
+                <a:solidFill>
+                  <a:srgbClr val="5C6472"/>
+                </a:solidFill>
+                <a:latin typeface="Yu Gothic"/>
+                <a:ea typeface="Yu Gothic"/>
+                <a:cs typeface="Yu Gothic"/>
+              </a:rPr>
+              <a:t>19世紀の古い手紙のイラスト</a:t>
+            </a:r>
+          </a:p>
+        </p:txBody>
+      </p:sp>
+      <p:sp>
+        <p:nvSpPr>
+          <p:cNvPr id="6" name="TextBox 5"/>
+          <p:cNvSpPr txBox="1"/>
+          <p:nvPr/>
+        </p:nvSpPr>
+        <p:spPr>
+          <a:xfrm>
+            <a:off x="685800" y="1645920"/>
+            <a:ext cx="6708459" cy="2875788"/>
+          </a:xfrm>
+          <a:prstGeom prst="rect">
+            <a:avLst/>
+          </a:prstGeom>
+          <a:noFill/>
+        </p:spPr>
+        <p:txBody>
+          <a:bodyPr wrap="square" anchor="t">
+            <a:noAutofit/>
+          </a:bodyPr>
+          <a:lstStyle/>
+          <a:p>
+            <a:pPr marL="279400" indent="-279400">
+              <a:lnSpc>
+                <a:spcPct val="135000"/>
+              </a:lnSpc>
+              <a:spcAft>
+                <a:spcPts val="769"/>
+              </a:spcAft>
+            </a:pPr>
+            <a:r>
+              <a:rPr sz="2200" b="0">
+                <a:solidFill>
+                  <a:srgbClr val="20242C"/>
+                </a:solidFill>
+                <a:latin typeface="Yu Gothic"/>
+                <a:ea typeface="Yu Gothic"/>
+                <a:cs typeface="Yu Gothic"/>
+              </a:rPr>
+              <a:t>・「囚われたお金持ちを助ければ、財産の3分の1を差し上げます」</a:t>
+            </a:r>
+          </a:p>
+          <a:p>
+            <a:pPr marL="279400" indent="-279400">
+              <a:lnSpc>
+                <a:spcPct val="135000"/>
+              </a:lnSpc>
+              <a:spcAft>
+                <a:spcPts val="769"/>
+              </a:spcAft>
+            </a:pPr>
+            <a:r>
+              <a:rPr sz="2200" b="0">
+                <a:solidFill>
+                  <a:srgbClr val="20242C"/>
+                </a:solidFill>
+                <a:latin typeface="Yu Gothic"/>
+                <a:ea typeface="Yu Gothic"/>
+                <a:cs typeface="Yu Gothic"/>
+              </a:rPr>
+              <a:t>・19世紀、スペインから資産家に届いた手紙——「スペインの囚人」</a:t>
+            </a:r>
+          </a:p>
+          <a:p>
+            <a:pPr marL="279400" indent="-279400">
+              <a:lnSpc>
+                <a:spcPct val="135000"/>
+              </a:lnSpc>
+            </a:pPr>
+            <a:r>
+              <a:rPr sz="2200" b="0">
+                <a:solidFill>
+                  <a:srgbClr val="20242C"/>
+                </a:solidFill>
+                <a:latin typeface="Yu Gothic"/>
+                <a:ea typeface="Yu Gothic"/>
+                <a:cs typeface="Yu Gothic"/>
+              </a:rPr>
+              <a:t>・送っても囚人は出てこない——追加請求が何度でも。1898年のNYタイムズも「蘇った古い詐欺」と報道</a:t>
+            </a:r>
+          </a:p>
+        </p:txBody>
+      </p:sp>
+      <p:sp>
+        <p:nvSpPr>
+          <p:cNvPr id="7" name="Rounded Rectangle 6"/>
+          <p:cNvSpPr/>
+          <p:nvPr/>
+        </p:nvSpPr>
+        <p:spPr>
+          <a:xfrm>
+            <a:off x="685800" y="4686300"/>
+            <a:ext cx="6708459" cy="1092708"/>
+          </a:xfrm>
+          <a:prstGeom prst="roundRect">
+            <a:avLst>
+              <a:gd name="adj" fmla="val 16000"/>
+            </a:avLst>
+          </a:prstGeom>
+          <a:solidFill>
+            <a:srgbClr val="F3E6CF"/>
+          </a:solidFill>
+          <a:ln>
+            <a:noFill/>
+          </a:ln>
+          <a:effectLst/>
+        </p:spPr>
+        <p:style>
+          <a:lnRef idx="1">
+            <a:schemeClr val="accent1"/>
+          </a:lnRef>
+          <a:fillRef idx="3">
+            <a:schemeClr val="accent1"/>
+          </a:fillRef>
+          <a:effectRef idx="2">
+            <a:schemeClr val="accent1"/>
+          </a:effectRef>
+          <a:fontRef idx="minor">
+            <a:schemeClr val="lt1"/>
+          </a:fontRef>
+        </p:style>
+        <p:txBody>
           <a:bodyPr rtlCol="0" anchor="ctr" wrap="square" lIns="274320" rIns="274320">
             <a:noAutofit/>
           </a:bodyPr>
@@ -14991,7 +15390,7 @@
       </p:sp>
       <p:sp>
         <p:nvSpPr>
-          <p:cNvPr id="7" name="meta:pageno"/>
+          <p:cNvPr id="8" name="meta:pageno"/>
           <p:cNvSpPr txBox="1"/>
           <p:nvPr/>
         </p:nvSpPr>
@@ -15028,7 +15427,7 @@
       </p:sp>
       <p:sp>
         <p:nvSpPr>
-          <p:cNvPr id="8" name="meta:part"/>
+          <p:cNvPr id="9" name="meta:part"/>
           <p:cNvSpPr txBox="1"/>
           <p:nvPr/>
         </p:nvSpPr>

--- a/slides/deepfake-talk.pptx
+++ b/slides/deepfake-talk.pptx
@@ -13644,147 +13644,410 @@
           </a:bodyPr>
           <a:lstStyle/>
           <a:p>
-            <a:pPr marL="228600" indent="-228600">
+            <a:pPr marL="177800" indent="-177800">
               <a:lnSpc>
-                <a:spcPct val="130000"/>
+                <a:spcPct val="125000"/>
+              </a:lnSpc>
+            </a:pPr>
+            <a:r>
+              <a:rPr sz="1400" b="0">
+                <a:solidFill>
+                  <a:srgbClr val="20242C"/>
+                </a:solidFill>
+                <a:latin typeface="Yu Gothic"/>
+                <a:ea typeface="Yu Gothic"/>
+                <a:cs typeface="Yu Gothic"/>
+                <a:hlinkClick r:id="rId2"/>
+              </a:rPr>
+              <a:t>・警察庁「令和7年における特殊詐欺及びSNS型投資・ロマンス詐欺の認知・検挙状況等について」</a:t>
+            </a:r>
+          </a:p>
+          <a:p>
+            <a:pPr marL="177800" indent="0">
+              <a:lnSpc>
+                <a:spcPct val="115000"/>
               </a:lnSpc>
               <a:spcAft>
-                <a:spcPts val="810"/>
+                <a:spcPts val="420"/>
               </a:spcAft>
             </a:pPr>
             <a:r>
-              <a:rPr sz="1800" b="0">
+              <a:rPr sz="1100" b="0">
+                <a:solidFill>
+                  <a:srgbClr val="5C6472"/>
+                </a:solidFill>
+                <a:latin typeface="Yu Gothic"/>
+                <a:ea typeface="Yu Gothic"/>
+                <a:cs typeface="Yu Gothic"/>
+                <a:hlinkClick r:id="rId2"/>
+              </a:rPr>
+              <a:t>https://www.npa.go.jp/bureau/criminal/souni/tokusyusagi/sagi_keihatsu2025.pdf</a:t>
+            </a:r>
+          </a:p>
+          <a:p>
+            <a:pPr marL="177800" indent="-177800">
+              <a:lnSpc>
+                <a:spcPct val="125000"/>
+              </a:lnSpc>
+            </a:pPr>
+            <a:r>
+              <a:rPr sz="1400" b="0">
                 <a:solidFill>
                   <a:srgbClr val="20242C"/>
                 </a:solidFill>
                 <a:latin typeface="Yu Gothic"/>
                 <a:ea typeface="Yu Gothic"/>
                 <a:cs typeface="Yu Gothic"/>
-              </a:rPr>
-              <a:t>・警察庁「令和7年における特殊詐欺及びSNS型投資・ロマンス詐欺の認知・検挙状況等について」</a:t>
-            </a:r>
-          </a:p>
-          <a:p>
-            <a:pPr marL="228600" indent="-228600">
+                <a:hlinkClick r:id="rId3"/>
+              </a:rPr>
+              <a:t>・Cormac Herley (Microsoft Research)「Why do Nigerian Scammers Say They are from Nigeria?」WEIS 2012</a:t>
+            </a:r>
+          </a:p>
+          <a:p>
+            <a:pPr marL="177800" indent="0">
               <a:lnSpc>
-                <a:spcPct val="130000"/>
+                <a:spcPct val="115000"/>
               </a:lnSpc>
               <a:spcAft>
-                <a:spcPts val="810"/>
+                <a:spcPts val="420"/>
               </a:spcAft>
             </a:pPr>
             <a:r>
-              <a:rPr sz="1800" b="0">
+              <a:rPr sz="1100" b="0">
+                <a:solidFill>
+                  <a:srgbClr val="5C6472"/>
+                </a:solidFill>
+                <a:latin typeface="Yu Gothic"/>
+                <a:ea typeface="Yu Gothic"/>
+                <a:cs typeface="Yu Gothic"/>
+                <a:hlinkClick r:id="rId3"/>
+              </a:rPr>
+              <a:t>https://www.microsoft.com/en-us/research/publication/why-do-nigerian-scammers-say-they-are-from-nigeria/</a:t>
+            </a:r>
+          </a:p>
+          <a:p>
+            <a:pPr marL="177800" indent="-177800">
+              <a:lnSpc>
+                <a:spcPct val="125000"/>
+              </a:lnSpc>
+            </a:pPr>
+            <a:r>
+              <a:rPr sz="1400" b="0">
                 <a:solidFill>
                   <a:srgbClr val="20242C"/>
                 </a:solidFill>
                 <a:latin typeface="Yu Gothic"/>
                 <a:ea typeface="Yu Gothic"/>
                 <a:cs typeface="Yu Gothic"/>
-              </a:rPr>
-              <a:t>・Cormac Herley (Microsoft Research)「Why do Nigerian Scammers Say They are from Nigeria?」WEIS 2012</a:t>
-            </a:r>
-          </a:p>
-          <a:p>
-            <a:pPr marL="228600" indent="-228600">
+                <a:hlinkClick r:id="rId4"/>
+              </a:rPr>
+              <a:t>・The New York Times「An Old Swindle Revived」1898年3月20日</a:t>
+            </a:r>
+          </a:p>
+          <a:p>
+            <a:pPr marL="177800" indent="0">
               <a:lnSpc>
-                <a:spcPct val="130000"/>
+                <a:spcPct val="115000"/>
               </a:lnSpc>
               <a:spcAft>
-                <a:spcPts val="810"/>
+                <a:spcPts val="420"/>
               </a:spcAft>
             </a:pPr>
             <a:r>
-              <a:rPr sz="1800" b="0">
+              <a:rPr sz="1100" b="0">
+                <a:solidFill>
+                  <a:srgbClr val="5C6472"/>
+                </a:solidFill>
+                <a:latin typeface="Yu Gothic"/>
+                <a:ea typeface="Yu Gothic"/>
+                <a:cs typeface="Yu Gothic"/>
+                <a:hlinkClick r:id="rId4"/>
+              </a:rPr>
+              <a:t>https://www.nytimes.com/1898/03/20/archives/an-old-swindle-revived-the-spanish-prisoner-and-buried-treasure.html</a:t>
+            </a:r>
+          </a:p>
+          <a:p>
+            <a:pPr marL="177800" indent="-177800">
+              <a:lnSpc>
+                <a:spcPct val="125000"/>
+              </a:lnSpc>
+            </a:pPr>
+            <a:r>
+              <a:rPr sz="1400" b="0">
                 <a:solidFill>
                   <a:srgbClr val="20242C"/>
                 </a:solidFill>
                 <a:latin typeface="Yu Gothic"/>
                 <a:ea typeface="Yu Gothic"/>
                 <a:cs typeface="Yu Gothic"/>
-              </a:rPr>
-              <a:t>・The New York Times「An Old Swindle Revived」1898年3月20日</a:t>
-            </a:r>
-          </a:p>
-          <a:p>
-            <a:pPr marL="228600" indent="-228600">
+                <a:hlinkClick r:id="rId5"/>
+              </a:rPr>
+              <a:t>・FBI IC3 PSA「Criminals Use Generative AI to Facilitate Financial Fraud」2024年12月</a:t>
+            </a:r>
+          </a:p>
+          <a:p>
+            <a:pPr marL="177800" indent="0">
               <a:lnSpc>
-                <a:spcPct val="130000"/>
+                <a:spcPct val="115000"/>
               </a:lnSpc>
               <a:spcAft>
-                <a:spcPts val="810"/>
+                <a:spcPts val="420"/>
               </a:spcAft>
             </a:pPr>
             <a:r>
-              <a:rPr sz="1800" b="0">
+              <a:rPr sz="1100" b="0">
+                <a:solidFill>
+                  <a:srgbClr val="5C6472"/>
+                </a:solidFill>
+                <a:latin typeface="Yu Gothic"/>
+                <a:ea typeface="Yu Gothic"/>
+                <a:cs typeface="Yu Gothic"/>
+                <a:hlinkClick r:id="rId5"/>
+              </a:rPr>
+              <a:t>https://www.ic3.gov/PSA/2024/PSA241203</a:t>
+            </a:r>
+          </a:p>
+          <a:p>
+            <a:pPr marL="177800" indent="-177800">
+              <a:lnSpc>
+                <a:spcPct val="125000"/>
+              </a:lnSpc>
+            </a:pPr>
+            <a:r>
+              <a:rPr sz="1400" b="0">
                 <a:solidFill>
                   <a:srgbClr val="20242C"/>
                 </a:solidFill>
                 <a:latin typeface="Yu Gothic"/>
                 <a:ea typeface="Yu Gothic"/>
                 <a:cs typeface="Yu Gothic"/>
-              </a:rPr>
-              <a:t>・FBI IC3  PSA（生成AI悪用詐欺への公式警告・2024年12月）／FTC 消費者警告</a:t>
-            </a:r>
-          </a:p>
-          <a:p>
-            <a:pPr marL="228600" indent="-228600">
+                <a:hlinkClick r:id="rId6"/>
+              </a:rPr>
+              <a:t>・CNN「Finance worker pays out $25 million after video call with deepfake 'CFO'」（香港・約38億円）</a:t>
+            </a:r>
+          </a:p>
+          <a:p>
+            <a:pPr marL="177800" indent="0">
               <a:lnSpc>
-                <a:spcPct val="130000"/>
+                <a:spcPct val="115000"/>
               </a:lnSpc>
               <a:spcAft>
-                <a:spcPts val="810"/>
+                <a:spcPts val="420"/>
               </a:spcAft>
             </a:pPr>
             <a:r>
-              <a:rPr sz="1800" b="0">
+              <a:rPr sz="1100" b="0">
+                <a:solidFill>
+                  <a:srgbClr val="5C6472"/>
+                </a:solidFill>
+                <a:latin typeface="Yu Gothic"/>
+                <a:ea typeface="Yu Gothic"/>
+                <a:cs typeface="Yu Gothic"/>
+                <a:hlinkClick r:id="rId6"/>
+              </a:rPr>
+              <a:t>https://edition.cnn.com/2024/02/04/asia/deepfake-cfo-scam-hong-kong-intl-hnk/index.html</a:t>
+            </a:r>
+          </a:p>
+          <a:p>
+            <a:pPr marL="177800" indent="-177800">
+              <a:lnSpc>
+                <a:spcPct val="125000"/>
+              </a:lnSpc>
+            </a:pPr>
+            <a:r>
+              <a:rPr sz="1400" b="0">
                 <a:solidFill>
                   <a:srgbClr val="20242C"/>
                 </a:solidFill>
                 <a:latin typeface="Yu Gothic"/>
                 <a:ea typeface="Yu Gothic"/>
                 <a:cs typeface="Yu Gothic"/>
-              </a:rPr>
-              <a:t>・毎日新聞「AIで『ニセ警察詐欺』か」2026年1月29日（AI台本＋警察官のニセ映像の摘発例）／KAB「被害1200億円超…ディープフェイク動画による詐欺広告」</a:t>
-            </a:r>
-          </a:p>
-          <a:p>
-            <a:pPr marL="228600" indent="-228600">
+                <a:hlinkClick r:id="rId7"/>
+              </a:rPr>
+              <a:t>・毎日新聞「AIで『ニセ警察詐欺』か」2026年1月29日（AI台本＋ニセ警察官映像の摘発例）</a:t>
+            </a:r>
+          </a:p>
+          <a:p>
+            <a:pPr marL="177800" indent="0">
               <a:lnSpc>
-                <a:spcPct val="130000"/>
+                <a:spcPct val="115000"/>
               </a:lnSpc>
               <a:spcAft>
-                <a:spcPts val="810"/>
+                <a:spcPts val="420"/>
               </a:spcAft>
             </a:pPr>
             <a:r>
-              <a:rPr sz="1800" b="0">
-                <a:solidFill>
-                  <a:srgbClr val="20242C"/>
-                </a:solidFill>
-                <a:latin typeface="Yu Gothic"/>
-                <a:ea typeface="Yu Gothic"/>
-                <a:cs typeface="Yu Gothic"/>
-              </a:rPr>
-              <a:t>・CNN「Finance worker pays out $25 million after video call with deepfake 'chief financial officer'」</a:t>
-            </a:r>
-          </a:p>
-          <a:p>
-            <a:pPr marL="228600" indent="-228600">
+              <a:rPr sz="1100" b="0">
+                <a:solidFill>
+                  <a:srgbClr val="5C6472"/>
+                </a:solidFill>
+                <a:latin typeface="Yu Gothic"/>
+                <a:ea typeface="Yu Gothic"/>
+                <a:cs typeface="Yu Gothic"/>
+                <a:hlinkClick r:id="rId7"/>
+              </a:rPr>
+              <a:t>https://news.infoseek.co.jp/article/mainichi_20260129k0000m040239000c/</a:t>
+            </a:r>
+          </a:p>
+          <a:p>
+            <a:pPr marL="177800" indent="-177800">
               <a:lnSpc>
-                <a:spcPct val="130000"/>
+                <a:spcPct val="125000"/>
               </a:lnSpc>
             </a:pPr>
             <a:r>
-              <a:rPr sz="1800" b="0">
+              <a:rPr sz="1400" b="0">
                 <a:solidFill>
                   <a:srgbClr val="20242C"/>
                 </a:solidFill>
                 <a:latin typeface="Yu Gothic"/>
                 <a:ea typeface="Yu Gothic"/>
                 <a:cs typeface="Yu Gothic"/>
-              </a:rPr>
-              <a:t>・警察庁 SOS47「ニセ警察詐欺に注意！」「ニセ警察官とのビデオ通話」／政府広報オンライン</a:t>
+                <a:hlinkClick r:id="rId8"/>
+              </a:rPr>
+              <a:t>・KAB熊本朝日放送「被害1200億円超…ディープフェイク動画による詐欺広告」</a:t>
+            </a:r>
+          </a:p>
+          <a:p>
+            <a:pPr marL="177800" indent="0">
+              <a:lnSpc>
+                <a:spcPct val="115000"/>
+              </a:lnSpc>
+              <a:spcAft>
+                <a:spcPts val="420"/>
+              </a:spcAft>
+            </a:pPr>
+            <a:r>
+              <a:rPr sz="1100" b="0">
+                <a:solidFill>
+                  <a:srgbClr val="5C6472"/>
+                </a:solidFill>
+                <a:latin typeface="Yu Gothic"/>
+                <a:ea typeface="Yu Gothic"/>
+                <a:cs typeface="Yu Gothic"/>
+                <a:hlinkClick r:id="rId8"/>
+              </a:rPr>
+              <a:t>https://www.kab.co.jp/news/article/16558364</a:t>
+            </a:r>
+          </a:p>
+          <a:p>
+            <a:pPr marL="177800" indent="-177800">
+              <a:lnSpc>
+                <a:spcPct val="125000"/>
+              </a:lnSpc>
+            </a:pPr>
+            <a:r>
+              <a:rPr sz="1400" b="0">
+                <a:solidFill>
+                  <a:srgbClr val="20242C"/>
+                </a:solidFill>
+                <a:latin typeface="Yu Gothic"/>
+                <a:ea typeface="Yu Gothic"/>
+                <a:cs typeface="Yu Gothic"/>
+                <a:hlinkClick r:id="rId9"/>
+              </a:rPr>
+              <a:t>・警察庁 SOS47「ニセ警察詐欺に注意！」</a:t>
+            </a:r>
+          </a:p>
+          <a:p>
+            <a:pPr marL="177800" indent="0">
+              <a:lnSpc>
+                <a:spcPct val="115000"/>
+              </a:lnSpc>
+              <a:spcAft>
+                <a:spcPts val="420"/>
+              </a:spcAft>
+            </a:pPr>
+            <a:r>
+              <a:rPr sz="1100" b="0">
+                <a:solidFill>
+                  <a:srgbClr val="5C6472"/>
+                </a:solidFill>
+                <a:latin typeface="Yu Gothic"/>
+                <a:ea typeface="Yu Gothic"/>
+                <a:cs typeface="Yu Gothic"/>
+                <a:hlinkClick r:id="rId9"/>
+              </a:rPr>
+              <a:t>https://www.npa.go.jp/bureau/safetylife/sos47/new-topics/241218/02.html</a:t>
+            </a:r>
+          </a:p>
+          <a:p>
+            <a:pPr marL="177800" indent="-177800">
+              <a:lnSpc>
+                <a:spcPct val="125000"/>
+              </a:lnSpc>
+            </a:pPr>
+            <a:r>
+              <a:rPr sz="1400" b="0">
+                <a:solidFill>
+                  <a:srgbClr val="20242C"/>
+                </a:solidFill>
+                <a:latin typeface="Yu Gothic"/>
+                <a:ea typeface="Yu Gothic"/>
+                <a:cs typeface="Yu Gothic"/>
+                <a:hlinkClick r:id="rId10"/>
+              </a:rPr>
+              <a:t>・警察庁 SOS47「ニセ警察官とのビデオ通話」</a:t>
+            </a:r>
+          </a:p>
+          <a:p>
+            <a:pPr marL="177800" indent="0">
+              <a:lnSpc>
+                <a:spcPct val="115000"/>
+              </a:lnSpc>
+              <a:spcAft>
+                <a:spcPts val="420"/>
+              </a:spcAft>
+            </a:pPr>
+            <a:r>
+              <a:rPr sz="1100" b="0">
+                <a:solidFill>
+                  <a:srgbClr val="5C6472"/>
+                </a:solidFill>
+                <a:latin typeface="Yu Gothic"/>
+                <a:ea typeface="Yu Gothic"/>
+                <a:cs typeface="Yu Gothic"/>
+                <a:hlinkClick r:id="rId10"/>
+              </a:rPr>
+              <a:t>https://www.npa.go.jp/bureau/safetylife/sos47/new-topics/241218/06.html</a:t>
+            </a:r>
+          </a:p>
+          <a:p>
+            <a:pPr marL="177800" indent="-177800">
+              <a:lnSpc>
+                <a:spcPct val="125000"/>
+              </a:lnSpc>
+            </a:pPr>
+            <a:r>
+              <a:rPr sz="1400" b="0">
+                <a:solidFill>
+                  <a:srgbClr val="20242C"/>
+                </a:solidFill>
+                <a:latin typeface="Yu Gothic"/>
+                <a:ea typeface="Yu Gothic"/>
+                <a:cs typeface="Yu Gothic"/>
+                <a:hlinkClick r:id="rId11"/>
+              </a:rPr>
+              <a:t>・米国FTC「Scammers use AI to enhance their family emergency schemes」</a:t>
+            </a:r>
+          </a:p>
+          <a:p>
+            <a:pPr marL="177800" indent="0">
+              <a:lnSpc>
+                <a:spcPct val="115000"/>
+              </a:lnSpc>
+            </a:pPr>
+            <a:r>
+              <a:rPr sz="1100" b="0">
+                <a:solidFill>
+                  <a:srgbClr val="5C6472"/>
+                </a:solidFill>
+                <a:latin typeface="Yu Gothic"/>
+                <a:ea typeface="Yu Gothic"/>
+                <a:cs typeface="Yu Gothic"/>
+                <a:hlinkClick r:id="rId11"/>
+              </a:rPr>
+              <a:t>https://consumer.ftc.gov/consumer-alerts/2023/03/scammers-use-ai-enhance-their-family-emergency-schemes</a:t>
             </a:r>
           </a:p>
         </p:txBody>
